--- a/assets/TAROS_Investor_Pitch_Revised.pptx
+++ b/assets/TAROS_Investor_Pitch_Revised.pptx
@@ -2434,6 +2434,10 @@
             <a:prstDash val="solid"/>
           </a:ln>
         </p:spPr>
+        <p:txBody>
+          <a:bodyPr/>
+          <a:p/>
+        </p:txBody>
       </p:sp>
       <p:sp>
         <p:nvSpPr>
@@ -2457,6 +2461,10 @@
             <a:prstDash val="solid"/>
           </a:ln>
         </p:spPr>
+        <p:txBody>
+          <a:bodyPr/>
+          <a:p/>
+        </p:txBody>
       </p:sp>
       <p:sp>
         <p:nvSpPr>
@@ -2480,6 +2488,10 @@
             <a:prstDash val="solid"/>
           </a:ln>
         </p:spPr>
+        <p:txBody>
+          <a:bodyPr/>
+          <a:p/>
+        </p:txBody>
       </p:sp>
       <p:sp>
         <p:nvSpPr>
@@ -2503,6 +2515,10 @@
             <a:prstDash val="solid"/>
           </a:ln>
         </p:spPr>
+        <p:txBody>
+          <a:bodyPr/>
+          <a:p/>
+        </p:txBody>
       </p:sp>
       <p:sp>
         <p:nvSpPr>
@@ -2526,6 +2542,10 @@
             <a:prstDash val="solid"/>
           </a:ln>
         </p:spPr>
+        <p:txBody>
+          <a:bodyPr/>
+          <a:p/>
+        </p:txBody>
       </p:sp>
       <p:sp>
         <p:nvSpPr>
@@ -2546,6 +2566,10 @@
           </a:solidFill>
           <a:ln/>
         </p:spPr>
+        <p:txBody>
+          <a:bodyPr/>
+          <a:p/>
+        </p:txBody>
       </p:sp>
       <p:sp>
         <p:nvSpPr>
@@ -2831,7 +2855,7 @@
                 <a:ea typeface="Arial" pitchFamily="34" charset="-122"/>
                 <a:cs typeface="Arial" pitchFamily="34" charset="-120"/>
               </a:rPr>
-              <a:t>Confidential  ·  v3.2</a:t>
+              <a:t>Confidential  ·  v3.4</a:t>
             </a:r>
             <a:endParaRPr lang="en-US" sz="1100" dirty="0"/>
           </a:p>
@@ -2927,6 +2951,10 @@
           </a:solidFill>
           <a:ln/>
         </p:spPr>
+        <p:txBody>
+          <a:bodyPr/>
+          <a:p/>
+        </p:txBody>
       </p:sp>
       <p:sp>
         <p:nvSpPr>
@@ -3069,6 +3097,10 @@
             <a:prstDash val="solid"/>
           </a:ln>
         </p:spPr>
+        <p:txBody>
+          <a:bodyPr/>
+          <a:p/>
+        </p:txBody>
       </p:sp>
       <p:sp>
         <p:nvSpPr>
@@ -3170,6 +3202,10 @@
             <a:prstDash val="solid"/>
           </a:ln>
         </p:spPr>
+        <p:txBody>
+          <a:bodyPr/>
+          <a:p/>
+        </p:txBody>
       </p:sp>
       <p:sp>
         <p:nvSpPr>
@@ -3273,6 +3309,10 @@
             <a:prstDash val="solid"/>
           </a:ln>
         </p:spPr>
+        <p:txBody>
+          <a:bodyPr/>
+          <a:p/>
+        </p:txBody>
       </p:sp>
       <p:sp>
         <p:nvSpPr>
@@ -3374,6 +3414,10 @@
             <a:prstDash val="solid"/>
           </a:ln>
         </p:spPr>
+        <p:txBody>
+          <a:bodyPr/>
+          <a:p/>
+        </p:txBody>
       </p:sp>
       <p:sp>
         <p:nvSpPr>
@@ -3477,6 +3521,10 @@
             <a:prstDash val="solid"/>
           </a:ln>
         </p:spPr>
+        <p:txBody>
+          <a:bodyPr/>
+          <a:p/>
+        </p:txBody>
       </p:sp>
       <p:sp>
         <p:nvSpPr>
@@ -3578,6 +3626,10 @@
             <a:prstDash val="solid"/>
           </a:ln>
         </p:spPr>
+        <p:txBody>
+          <a:bodyPr/>
+          <a:p/>
+        </p:txBody>
       </p:sp>
       <p:sp>
         <p:nvSpPr>
@@ -3681,6 +3733,10 @@
             <a:prstDash val="solid"/>
           </a:ln>
         </p:spPr>
+        <p:txBody>
+          <a:bodyPr/>
+          <a:p/>
+        </p:txBody>
       </p:sp>
       <p:sp>
         <p:nvSpPr>
@@ -3782,6 +3838,10 @@
             <a:prstDash val="solid"/>
           </a:ln>
         </p:spPr>
+        <p:txBody>
+          <a:bodyPr/>
+          <a:p/>
+        </p:txBody>
       </p:sp>
       <p:sp>
         <p:nvSpPr>
@@ -3990,6 +4050,10 @@
           </a:solidFill>
           <a:ln/>
         </p:spPr>
+        <p:txBody>
+          <a:bodyPr/>
+          <a:p/>
+        </p:txBody>
       </p:sp>
       <p:sp>
         <p:nvSpPr>
@@ -4166,6 +4230,10 @@
           </a:solidFill>
           <a:ln/>
         </p:spPr>
+        <p:txBody>
+          <a:bodyPr/>
+          <a:p/>
+        </p:txBody>
       </p:sp>
       <p:sp>
         <p:nvSpPr>
@@ -4381,6 +4449,10 @@
           </a:solidFill>
           <a:ln/>
         </p:spPr>
+        <p:txBody>
+          <a:bodyPr/>
+          <a:p/>
+        </p:txBody>
       </p:sp>
       <p:sp>
         <p:nvSpPr>
@@ -4596,6 +4668,10 @@
           </a:solidFill>
           <a:ln/>
         </p:spPr>
+        <p:txBody>
+          <a:bodyPr/>
+          <a:p/>
+        </p:txBody>
       </p:sp>
       <p:sp>
         <p:nvSpPr>
@@ -4811,6 +4887,10 @@
           </a:solidFill>
           <a:ln/>
         </p:spPr>
+        <p:txBody>
+          <a:bodyPr/>
+          <a:p/>
+        </p:txBody>
       </p:sp>
       <p:sp>
         <p:nvSpPr>
@@ -4987,6 +5067,10 @@
           </a:solidFill>
           <a:ln/>
         </p:spPr>
+        <p:txBody>
+          <a:bodyPr/>
+          <a:p/>
+        </p:txBody>
       </p:sp>
       <p:sp>
         <p:nvSpPr>
@@ -5085,6 +5169,10 @@
           </a:solidFill>
           <a:ln/>
         </p:spPr>
+        <p:txBody>
+          <a:bodyPr/>
+          <a:p/>
+        </p:txBody>
       </p:sp>
       <p:sp>
         <p:nvSpPr>
@@ -5183,6 +5271,10 @@
           </a:solidFill>
           <a:ln/>
         </p:spPr>
+        <p:txBody>
+          <a:bodyPr/>
+          <a:p/>
+        </p:txBody>
       </p:sp>
       <p:sp>
         <p:nvSpPr>
@@ -5281,6 +5373,10 @@
           </a:solidFill>
           <a:ln/>
         </p:spPr>
+        <p:txBody>
+          <a:bodyPr/>
+          <a:p/>
+        </p:txBody>
       </p:sp>
       <p:sp>
         <p:nvSpPr>
@@ -5379,6 +5475,10 @@
           </a:solidFill>
           <a:ln/>
         </p:spPr>
+        <p:txBody>
+          <a:bodyPr/>
+          <a:p/>
+        </p:txBody>
       </p:sp>
       <p:sp>
         <p:nvSpPr>
@@ -5438,6 +5538,10 @@
           </a:solidFill>
           <a:ln/>
         </p:spPr>
+        <p:txBody>
+          <a:bodyPr/>
+          <a:p/>
+        </p:txBody>
       </p:sp>
       <p:sp>
         <p:nvSpPr>
@@ -5458,6 +5562,10 @@
           </a:solidFill>
           <a:ln/>
         </p:spPr>
+        <p:txBody>
+          <a:bodyPr/>
+          <a:p/>
+        </p:txBody>
       </p:sp>
       <p:sp>
         <p:nvSpPr>
@@ -5900,6 +6008,10 @@
           </a:solidFill>
           <a:ln/>
         </p:spPr>
+        <p:txBody>
+          <a:bodyPr/>
+          <a:p/>
+        </p:txBody>
       </p:sp>
       <p:sp>
         <p:nvSpPr>
@@ -6053,6 +6165,10 @@
           </a:solidFill>
           <a:ln/>
         </p:spPr>
+        <p:txBody>
+          <a:bodyPr/>
+          <a:p/>
+        </p:txBody>
       </p:sp>
       <p:sp>
         <p:nvSpPr>
@@ -6073,6 +6189,10 @@
           </a:solidFill>
           <a:ln/>
         </p:spPr>
+        <p:txBody>
+          <a:bodyPr/>
+          <a:p/>
+        </p:txBody>
       </p:sp>
       <p:sp>
         <p:nvSpPr>
@@ -6210,6 +6330,10 @@
           </a:solidFill>
           <a:ln/>
         </p:spPr>
+        <p:txBody>
+          <a:bodyPr/>
+          <a:p/>
+        </p:txBody>
       </p:sp>
       <p:sp>
         <p:nvSpPr>
@@ -6230,6 +6354,10 @@
           </a:solidFill>
           <a:ln/>
         </p:spPr>
+        <p:txBody>
+          <a:bodyPr/>
+          <a:p/>
+        </p:txBody>
       </p:sp>
       <p:sp>
         <p:nvSpPr>
@@ -6367,6 +6495,10 @@
           </a:solidFill>
           <a:ln/>
         </p:spPr>
+        <p:txBody>
+          <a:bodyPr/>
+          <a:p/>
+        </p:txBody>
       </p:sp>
       <p:sp>
         <p:nvSpPr>
@@ -6387,6 +6519,10 @@
           </a:solidFill>
           <a:ln/>
         </p:spPr>
+        <p:txBody>
+          <a:bodyPr/>
+          <a:p/>
+        </p:txBody>
       </p:sp>
       <p:sp>
         <p:nvSpPr>
@@ -6524,6 +6660,10 @@
           </a:solidFill>
           <a:ln/>
         </p:spPr>
+        <p:txBody>
+          <a:bodyPr/>
+          <a:p/>
+        </p:txBody>
       </p:sp>
       <p:sp>
         <p:nvSpPr>
@@ -6544,6 +6684,10 @@
           </a:solidFill>
           <a:ln/>
         </p:spPr>
+        <p:txBody>
+          <a:bodyPr/>
+          <a:p/>
+        </p:txBody>
       </p:sp>
       <p:sp>
         <p:nvSpPr>
@@ -6681,6 +6825,10 @@
           </a:solidFill>
           <a:ln/>
         </p:spPr>
+        <p:txBody>
+          <a:bodyPr/>
+          <a:p/>
+        </p:txBody>
       </p:sp>
       <p:sp>
         <p:nvSpPr>
@@ -6878,6 +7026,10 @@
           </a:solidFill>
           <a:ln/>
         </p:spPr>
+        <p:txBody>
+          <a:bodyPr/>
+          <a:p/>
+        </p:txBody>
       </p:sp>
       <p:sp>
         <p:nvSpPr>
@@ -7029,7 +7181,7 @@
                 <a:ea typeface="Arial" pitchFamily="34" charset="-122"/>
                 <a:cs typeface="Arial" pitchFamily="34" charset="-120"/>
               </a:rPr>
-              <a:t>※ 為替前提: 1USD = 150円 で換算 ($3.04M)</a:t>
+              <a:t>※ 為替前提: 1USD = 150円 で換算 ($3.08M)</a:t>
             </a:r>
             <a:endParaRPr lang="en-US" sz="1000" dirty="0"/>
           </a:p>
@@ -7054,6 +7206,10 @@
           </a:solidFill>
           <a:ln/>
         </p:spPr>
+        <p:txBody>
+          <a:bodyPr/>
+          <a:p/>
+        </p:txBody>
       </p:sp>
       <p:sp>
         <p:nvSpPr>
@@ -7074,6 +7230,10 @@
           </a:solidFill>
           <a:ln/>
         </p:spPr>
+        <p:txBody>
+          <a:bodyPr/>
+          <a:p/>
+        </p:txBody>
       </p:sp>
       <p:sp>
         <p:nvSpPr>
@@ -7214,6 +7374,10 @@
             <a:prstDash val="solid"/>
           </a:ln>
         </p:spPr>
+        <p:txBody>
+          <a:bodyPr/>
+          <a:p/>
+        </p:txBody>
       </p:sp>
       <p:sp>
         <p:nvSpPr>
@@ -7390,6 +7554,10 @@
           </a:solidFill>
           <a:ln/>
         </p:spPr>
+        <p:txBody>
+          <a:bodyPr/>
+          <a:p/>
+        </p:txBody>
       </p:sp>
       <p:sp>
         <p:nvSpPr>
@@ -7527,6 +7695,10 @@
           </a:solidFill>
           <a:ln/>
         </p:spPr>
+        <p:txBody>
+          <a:bodyPr/>
+          <a:p/>
+        </p:txBody>
       </p:sp>
       <p:sp>
         <p:nvSpPr>
@@ -7664,6 +7836,10 @@
           </a:solidFill>
           <a:ln/>
         </p:spPr>
+        <p:txBody>
+          <a:bodyPr/>
+          <a:p/>
+        </p:txBody>
       </p:sp>
       <p:sp>
         <p:nvSpPr>
@@ -7836,6 +8012,10 @@
             <a:prstDash val="solid"/>
           </a:ln>
         </p:spPr>
+        <p:txBody>
+          <a:bodyPr/>
+          <a:p/>
+        </p:txBody>
       </p:sp>
       <p:sp>
         <p:nvSpPr>
@@ -7859,6 +8039,10 @@
             <a:prstDash val="solid"/>
           </a:ln>
         </p:spPr>
+        <p:txBody>
+          <a:bodyPr/>
+          <a:p/>
+        </p:txBody>
       </p:sp>
       <p:sp>
         <p:nvSpPr>
@@ -7882,6 +8066,10 @@
             <a:prstDash val="solid"/>
           </a:ln>
         </p:spPr>
+        <p:txBody>
+          <a:bodyPr/>
+          <a:p/>
+        </p:txBody>
       </p:sp>
       <p:sp>
         <p:nvSpPr>
@@ -7905,6 +8093,10 @@
             <a:prstDash val="solid"/>
           </a:ln>
         </p:spPr>
+        <p:txBody>
+          <a:bodyPr/>
+          <a:p/>
+        </p:txBody>
       </p:sp>
       <p:sp>
         <p:nvSpPr>
@@ -7928,6 +8120,10 @@
             <a:prstDash val="solid"/>
           </a:ln>
         </p:spPr>
+        <p:txBody>
+          <a:bodyPr/>
+          <a:p/>
+        </p:txBody>
       </p:sp>
       <p:sp>
         <p:nvSpPr>
@@ -8065,6 +8261,10 @@
           </a:solidFill>
           <a:ln/>
         </p:spPr>
+        <p:txBody>
+          <a:bodyPr/>
+          <a:p/>
+        </p:txBody>
       </p:sp>
       <p:sp>
         <p:nvSpPr>
@@ -8166,6 +8366,10 @@
             <a:prstDash val="solid"/>
           </a:ln>
         </p:spPr>
+        <p:txBody>
+          <a:bodyPr/>
+          <a:p/>
+        </p:txBody>
       </p:sp>
       <p:sp>
         <p:nvSpPr>
@@ -8200,7 +8404,7 @@
                 <a:ea typeface="Arial" pitchFamily="34" charset="-122"/>
                 <a:cs typeface="Arial" pitchFamily="34" charset="-120"/>
               </a:rPr>
-              <a:t>TAROS  ·  Tabletop · Room-temperature · Optical · System  ·  May 2026  ·  v3.2</a:t>
+              <a:t>TAROS  ·  Tabletop · Room-temperature · Optical · System  ·  May 2026  ·  v3.4</a:t>
             </a:r>
             <a:endParaRPr lang="en-US" sz="1100" dirty="0"/>
           </a:p>
@@ -8296,6 +8500,10 @@
           </a:solidFill>
           <a:ln/>
         </p:spPr>
+        <p:txBody>
+          <a:bodyPr/>
+          <a:p/>
+        </p:txBody>
       </p:sp>
       <p:sp>
         <p:nvSpPr>
@@ -8445,6 +8653,10 @@
             </a:outerShdw>
           </a:effectLst>
         </p:spPr>
+        <p:txBody>
+          <a:bodyPr/>
+          <a:p/>
+        </p:txBody>
       </p:sp>
       <p:sp>
         <p:nvSpPr>
@@ -8465,6 +8677,10 @@
           </a:solidFill>
           <a:ln/>
         </p:spPr>
+        <p:txBody>
+          <a:bodyPr/>
+          <a:p/>
+        </p:txBody>
       </p:sp>
       <p:pic>
         <p:nvPicPr>
@@ -8599,6 +8815,10 @@
             </a:outerShdw>
           </a:effectLst>
         </p:spPr>
+        <p:txBody>
+          <a:bodyPr/>
+          <a:p/>
+        </p:txBody>
       </p:sp>
       <p:sp>
         <p:nvSpPr>
@@ -8619,6 +8839,10 @@
           </a:solidFill>
           <a:ln/>
         </p:spPr>
+        <p:txBody>
+          <a:bodyPr/>
+          <a:p/>
+        </p:txBody>
       </p:sp>
       <p:pic>
         <p:nvPicPr>
@@ -8753,6 +8977,10 @@
             </a:outerShdw>
           </a:effectLst>
         </p:spPr>
+        <p:txBody>
+          <a:bodyPr/>
+          <a:p/>
+        </p:txBody>
       </p:sp>
       <p:sp>
         <p:nvSpPr>
@@ -8773,6 +9001,10 @@
           </a:solidFill>
           <a:ln/>
         </p:spPr>
+        <p:txBody>
+          <a:bodyPr/>
+          <a:p/>
+        </p:txBody>
       </p:sp>
       <p:pic>
         <p:nvPicPr>
@@ -8870,7 +9102,7 @@
                 <a:ea typeface="Arial" pitchFamily="34" charset="-122"/>
                 <a:cs typeface="Arial" pitchFamily="34" charset="-120"/>
               </a:rPr>
-              <a:t>p_L &lt; 10⁻⁵ (d=7, MWPM, 製品要件)。Phase 2+ PIC 統合で論理エラー率を物理エラー率以下へ。</a:t>
+              <a:t>p_L ≲ 10⁻⁴ (d=7, MWPM, 製品要件)。Phase 2+ PIC 統合で論理エラー率を物理エラー率以下へ。</a:t>
             </a:r>
             <a:endParaRPr lang="en-US" sz="1300" dirty="0"/>
           </a:p>
@@ -8966,6 +9198,10 @@
           </a:solidFill>
           <a:ln/>
         </p:spPr>
+        <p:txBody>
+          <a:bodyPr/>
+          <a:p/>
+        </p:txBody>
       </p:sp>
       <p:sp>
         <p:nvSpPr>
@@ -9142,6 +9378,10 @@
           </a:solidFill>
           <a:ln/>
         </p:spPr>
+        <p:txBody>
+          <a:bodyPr/>
+          <a:p/>
+        </p:txBody>
       </p:sp>
       <p:sp>
         <p:nvSpPr>
@@ -9162,6 +9402,10 @@
           </a:solidFill>
           <a:ln/>
         </p:spPr>
+        <p:txBody>
+          <a:bodyPr/>
+          <a:p/>
+        </p:txBody>
       </p:sp>
       <p:sp>
         <p:nvSpPr>
@@ -9299,6 +9543,10 @@
           </a:solidFill>
           <a:ln/>
         </p:spPr>
+        <p:txBody>
+          <a:bodyPr/>
+          <a:p/>
+        </p:txBody>
       </p:sp>
       <p:sp>
         <p:nvSpPr>
@@ -9319,6 +9567,10 @@
           </a:solidFill>
           <a:ln/>
         </p:spPr>
+        <p:txBody>
+          <a:bodyPr/>
+          <a:p/>
+        </p:txBody>
       </p:sp>
       <p:sp>
         <p:nvSpPr>
@@ -9456,6 +9708,10 @@
           </a:solidFill>
           <a:ln/>
         </p:spPr>
+        <p:txBody>
+          <a:bodyPr/>
+          <a:p/>
+        </p:txBody>
       </p:sp>
       <p:sp>
         <p:nvSpPr>
@@ -9476,6 +9732,10 @@
           </a:solidFill>
           <a:ln/>
         </p:spPr>
+        <p:txBody>
+          <a:bodyPr/>
+          <a:p/>
+        </p:txBody>
       </p:sp>
       <p:sp>
         <p:nvSpPr>
@@ -9613,6 +9873,10 @@
           </a:solidFill>
           <a:ln/>
         </p:spPr>
+        <p:txBody>
+          <a:bodyPr/>
+          <a:p/>
+        </p:txBody>
       </p:sp>
       <p:sp>
         <p:nvSpPr>
@@ -9633,6 +9897,10 @@
           </a:solidFill>
           <a:ln/>
         </p:spPr>
+        <p:txBody>
+          <a:bodyPr/>
+          <a:p/>
+        </p:txBody>
       </p:sp>
       <p:sp>
         <p:nvSpPr>
@@ -9880,6 +10148,10 @@
           </a:solidFill>
           <a:ln/>
         </p:spPr>
+        <p:txBody>
+          <a:bodyPr/>
+          <a:p/>
+        </p:txBody>
       </p:sp>
       <p:sp>
         <p:nvSpPr>
@@ -10017,6 +10289,10 @@
           </a:solidFill>
           <a:ln/>
         </p:spPr>
+        <p:txBody>
+          <a:bodyPr/>
+          <a:p/>
+        </p:txBody>
       </p:sp>
       <p:sp>
         <p:nvSpPr>
@@ -10154,6 +10430,10 @@
           </a:solidFill>
           <a:ln/>
         </p:spPr>
+        <p:txBody>
+          <a:bodyPr/>
+          <a:p/>
+        </p:txBody>
       </p:sp>
       <p:sp>
         <p:nvSpPr>
@@ -10291,6 +10571,10 @@
           </a:solidFill>
           <a:ln/>
         </p:spPr>
+        <p:txBody>
+          <a:bodyPr/>
+          <a:p/>
+        </p:txBody>
       </p:sp>
       <p:sp>
         <p:nvSpPr>
@@ -10428,6 +10712,10 @@
           </a:solidFill>
           <a:ln/>
         </p:spPr>
+        <p:txBody>
+          <a:bodyPr/>
+          <a:p/>
+        </p:txBody>
       </p:sp>
       <p:sp>
         <p:nvSpPr>
@@ -10604,6 +10892,10 @@
           </a:solidFill>
           <a:ln/>
         </p:spPr>
+        <p:txBody>
+          <a:bodyPr/>
+          <a:p/>
+        </p:txBody>
       </p:sp>
       <p:sp>
         <p:nvSpPr>
@@ -10702,6 +10994,10 @@
           </a:solidFill>
           <a:ln/>
         </p:spPr>
+        <p:txBody>
+          <a:bodyPr/>
+          <a:p/>
+        </p:txBody>
       </p:sp>
       <p:sp>
         <p:nvSpPr>
@@ -10800,6 +11096,10 @@
           </a:solidFill>
           <a:ln/>
         </p:spPr>
+        <p:txBody>
+          <a:bodyPr/>
+          <a:p/>
+        </p:txBody>
       </p:sp>
       <p:sp>
         <p:nvSpPr>
@@ -10937,6 +11237,10 @@
           </a:solidFill>
           <a:ln/>
         </p:spPr>
+        <p:txBody>
+          <a:bodyPr/>
+          <a:p/>
+        </p:txBody>
       </p:sp>
       <p:sp>
         <p:nvSpPr>
@@ -11035,6 +11339,10 @@
           </a:solidFill>
           <a:ln/>
         </p:spPr>
+        <p:txBody>
+          <a:bodyPr/>
+          <a:p/>
+        </p:txBody>
       </p:sp>
       <p:sp>
         <p:nvSpPr>
@@ -11133,6 +11441,10 @@
           </a:solidFill>
           <a:ln/>
         </p:spPr>
+        <p:txBody>
+          <a:bodyPr/>
+          <a:p/>
+        </p:txBody>
       </p:sp>
       <p:sp>
         <p:nvSpPr>
@@ -11302,6 +11614,10 @@
           </a:solidFill>
           <a:ln/>
         </p:spPr>
+        <p:txBody>
+          <a:bodyPr/>
+          <a:p/>
+        </p:txBody>
       </p:sp>
       <p:sp>
         <p:nvSpPr>
@@ -11439,6 +11755,10 @@
           </a:solidFill>
           <a:ln/>
         </p:spPr>
+        <p:txBody>
+          <a:bodyPr/>
+          <a:p/>
+        </p:txBody>
       </p:sp>
       <p:sp>
         <p:nvSpPr>
@@ -11615,6 +11935,10 @@
           </a:solidFill>
           <a:ln/>
         </p:spPr>
+        <p:txBody>
+          <a:bodyPr/>
+          <a:p/>
+        </p:txBody>
       </p:sp>
       <p:sp>
         <p:nvSpPr>
@@ -11791,6 +12115,10 @@
           </a:solidFill>
           <a:ln/>
         </p:spPr>
+        <p:txBody>
+          <a:bodyPr/>
+          <a:p/>
+        </p:txBody>
       </p:sp>
       <p:sp>
         <p:nvSpPr>
@@ -11825,7 +12153,7 @@
                 <a:ea typeface="Arial" pitchFamily="34" charset="-122"/>
                 <a:cs typeface="Arial" pitchFamily="34" charset="-120"/>
               </a:rPr>
-              <a:t>9.7dB</a:t>
+              <a:t>9.5dB</a:t>
             </a:r>
             <a:endParaRPr lang="en-US" sz="2400" dirty="0"/>
           </a:p>
@@ -11967,6 +12295,10 @@
           </a:solidFill>
           <a:ln/>
         </p:spPr>
+        <p:txBody>
+          <a:bodyPr/>
+          <a:p/>
+        </p:txBody>
       </p:sp>
       <p:sp>
         <p:nvSpPr>
@@ -12143,6 +12475,10 @@
           </a:solidFill>
           <a:ln/>
         </p:spPr>
+        <p:txBody>
+          <a:bodyPr/>
+          <a:p/>
+        </p:txBody>
       </p:sp>
       <p:sp>
         <p:nvSpPr>
@@ -12177,7 +12513,7 @@
                 <a:ea typeface="Arial" pitchFamily="34" charset="-122"/>
                 <a:cs typeface="Arial" pitchFamily="34" charset="-120"/>
               </a:rPr>
-              <a:t>&lt;10⁻⁵</a:t>
+              <a:t>~7×10⁻⁵</a:t>
             </a:r>
             <a:endParaRPr lang="en-US" sz="2400" dirty="0"/>
           </a:p>
@@ -12280,6 +12616,10 @@
           </a:solidFill>
           <a:ln/>
         </p:spPr>
+        <p:txBody>
+          <a:bodyPr/>
+          <a:p/>
+        </p:txBody>
       </p:sp>
       <p:pic>
         <p:nvPicPr>
@@ -12402,6 +12742,10 @@
           </a:solidFill>
           <a:ln/>
         </p:spPr>
+        <p:txBody>
+          <a:bodyPr/>
+          <a:p/>
+        </p:txBody>
       </p:sp>
       <p:sp>
         <p:nvSpPr>
@@ -12422,6 +12766,10 @@
           </a:solidFill>
           <a:ln/>
         </p:spPr>
+        <p:txBody>
+          <a:bodyPr/>
+          <a:p/>
+        </p:txBody>
       </p:sp>
       <p:sp>
         <p:nvSpPr>
@@ -12456,7 +12804,7 @@
                 <a:ea typeface="Arial" pitchFamily="34" charset="-122"/>
                 <a:cs typeface="Arial" pitchFamily="34" charset="-120"/>
               </a:rPr>
-              <a:t>9.7 dB</a:t>
+              <a:t>9.5 dB</a:t>
             </a:r>
             <a:endParaRPr lang="en-US" sz="1100" dirty="0"/>
           </a:p>
@@ -12520,6 +12868,10 @@
           </a:solidFill>
           <a:ln/>
         </p:spPr>
+        <p:txBody>
+          <a:bodyPr/>
+          <a:p/>
+        </p:txBody>
       </p:sp>
       <p:sp>
         <p:nvSpPr>
@@ -12540,6 +12892,10 @@
           </a:solidFill>
           <a:ln/>
         </p:spPr>
+        <p:txBody>
+          <a:bodyPr/>
+          <a:p/>
+        </p:txBody>
       </p:sp>
       <p:sp>
         <p:nvSpPr>
@@ -12638,6 +12994,10 @@
           </a:solidFill>
           <a:ln/>
         </p:spPr>
+        <p:txBody>
+          <a:bodyPr/>
+          <a:p/>
+        </p:txBody>
       </p:sp>
       <p:sp>
         <p:nvSpPr>
@@ -12658,6 +13018,10 @@
           </a:solidFill>
           <a:ln/>
         </p:spPr>
+        <p:txBody>
+          <a:bodyPr/>
+          <a:p/>
+        </p:txBody>
       </p:sp>
       <p:sp>
         <p:nvSpPr>
@@ -12731,7 +13095,7 @@
                 <a:ea typeface="Arial" pitchFamily="34" charset="-122"/>
                 <a:cs typeface="Arial" pitchFamily="34" charset="-120"/>
               </a:rPr>
-              <a:t>→ Phase 2+ PIC 余裕 +3.4dB (PS) / +0.9dB (全モード) — 製品要件 p_L &lt; 10⁻⁵ を達成</a:t>
+              <a:t>→ Phase 2+ PIC 余裕 +3.4dB (PS) / +0.9dB (全モード) — 製品要件 p_L ≲ 10⁻⁴ を達成</a:t>
             </a:r>
             <a:endParaRPr lang="en-US" sz="1200" dirty="0"/>
           </a:p>
@@ -12827,6 +13191,10 @@
           </a:solidFill>
           <a:ln/>
         </p:spPr>
+        <p:txBody>
+          <a:bodyPr/>
+          <a:p/>
+        </p:txBody>
       </p:sp>
       <p:sp>
         <p:nvSpPr>
@@ -12964,6 +13332,10 @@
           </a:solidFill>
           <a:ln/>
         </p:spPr>
+        <p:txBody>
+          <a:bodyPr/>
+          <a:p/>
+        </p:txBody>
       </p:sp>
       <p:sp>
         <p:nvSpPr>
@@ -12989,6 +13361,10 @@
             <a:prstDash val="solid"/>
           </a:ln>
         </p:spPr>
+        <p:txBody>
+          <a:bodyPr/>
+          <a:p/>
+        </p:txBody>
       </p:sp>
       <p:sp>
         <p:nvSpPr>
@@ -13441,6 +13817,10 @@
             <a:prstDash val="solid"/>
           </a:ln>
         </p:spPr>
+        <p:txBody>
+          <a:bodyPr/>
+          <a:p/>
+        </p:txBody>
       </p:sp>
       <p:pic>
         <p:nvPicPr>
@@ -13524,6 +13904,10 @@
           </a:solidFill>
           <a:ln/>
         </p:spPr>
+        <p:txBody>
+          <a:bodyPr/>
+          <a:p/>
+        </p:txBody>
       </p:sp>
       <p:sp>
         <p:nvSpPr>
@@ -13549,6 +13933,10 @@
             <a:prstDash val="solid"/>
           </a:ln>
         </p:spPr>
+        <p:txBody>
+          <a:bodyPr/>
+          <a:p/>
+        </p:txBody>
       </p:sp>
       <p:sp>
         <p:nvSpPr>
@@ -13569,6 +13957,10 @@
           </a:solidFill>
           <a:ln/>
         </p:spPr>
+        <p:txBody>
+          <a:bodyPr/>
+          <a:p/>
+        </p:txBody>
       </p:sp>
       <p:sp>
         <p:nvSpPr>
@@ -14060,6 +14452,10 @@
             <a:prstDash val="solid"/>
           </a:ln>
         </p:spPr>
+        <p:txBody>
+          <a:bodyPr/>
+          <a:p/>
+        </p:txBody>
       </p:sp>
       <p:pic>
         <p:nvPicPr>
@@ -14143,6 +14539,10 @@
           </a:solidFill>
           <a:ln/>
         </p:spPr>
+        <p:txBody>
+          <a:bodyPr/>
+          <a:p/>
+        </p:txBody>
       </p:sp>
       <p:sp>
         <p:nvSpPr>
@@ -14168,6 +14568,10 @@
             <a:prstDash val="solid"/>
           </a:ln>
         </p:spPr>
+        <p:txBody>
+          <a:bodyPr/>
+          <a:p/>
+        </p:txBody>
       </p:sp>
       <p:sp>
         <p:nvSpPr>
@@ -14620,6 +15024,10 @@
             <a:prstDash val="solid"/>
           </a:ln>
         </p:spPr>
+        <p:txBody>
+          <a:bodyPr/>
+          <a:p/>
+        </p:txBody>
       </p:sp>
       <p:pic>
         <p:nvPicPr>
@@ -14756,7 +15164,7 @@
                 <a:ea typeface="Arial" pitchFamily="34" charset="-122"/>
                 <a:cs typeface="Arial" pitchFamily="34" charset="-120"/>
               </a:rPr>
-              <a:t>† Max の p_L=5.7×10⁻⁷ は Phase 2+ PIC 全条件達成時の理論上限値。製品スペックは p_L &lt; 10⁻⁵ (MWPM, d=7)。</a:t>
+              <a:t>† Max の p_L=5.7×10⁻⁷ は Phase 2+ PIC 全条件達成時の理論上限値。製品スペックは p_L ~7×10⁻⁵ (MWPM, d=7, L=0.27dB)。</a:t>
             </a:r>
             <a:endParaRPr lang="en-US" sz="900" dirty="0"/>
           </a:p>
@@ -14852,6 +15260,10 @@
           </a:solidFill>
           <a:ln/>
         </p:spPr>
+        <p:txBody>
+          <a:bodyPr/>
+          <a:p/>
+        </p:txBody>
       </p:sp>
       <p:sp>
         <p:nvSpPr>
@@ -17390,6 +17802,10 @@
           </a:solidFill>
           <a:ln/>
         </p:spPr>
+        <p:txBody>
+          <a:bodyPr/>
+          <a:p/>
+        </p:txBody>
       </p:sp>
       <p:sp>
         <p:nvSpPr>
@@ -17527,6 +17943,10 @@
           </a:solidFill>
           <a:ln/>
         </p:spPr>
+        <p:txBody>
+          <a:bodyPr/>
+          <a:p/>
+        </p:txBody>
       </p:sp>
       <p:sp>
         <p:nvSpPr>
@@ -17664,6 +18084,10 @@
           </a:solidFill>
           <a:ln/>
         </p:spPr>
+        <p:txBody>
+          <a:bodyPr/>
+          <a:p/>
+        </p:txBody>
       </p:sp>
       <p:sp>
         <p:nvSpPr>
@@ -17872,6 +18296,10 @@
           </a:solidFill>
           <a:ln/>
         </p:spPr>
+        <p:txBody>
+          <a:bodyPr/>
+          <a:p/>
+        </p:txBody>
       </p:sp>
       <p:sp>
         <p:nvSpPr>
@@ -18012,6 +18440,10 @@
             <a:prstDash val="dash"/>
           </a:ln>
         </p:spPr>
+        <p:txBody>
+          <a:bodyPr/>
+          <a:p/>
+        </p:txBody>
       </p:sp>
       <p:sp>
         <p:nvSpPr>
@@ -18037,6 +18469,10 @@
             <a:prstDash val="solid"/>
           </a:ln>
         </p:spPr>
+        <p:txBody>
+          <a:bodyPr/>
+          <a:p/>
+        </p:txBody>
       </p:sp>
       <p:sp>
         <p:nvSpPr>
@@ -18257,6 +18693,10 @@
             <a:prstDash val="solid"/>
           </a:ln>
         </p:spPr>
+        <p:txBody>
+          <a:bodyPr/>
+          <a:p/>
+        </p:txBody>
       </p:sp>
       <p:sp>
         <p:nvSpPr>
@@ -18477,6 +18917,10 @@
             <a:prstDash val="solid"/>
           </a:ln>
         </p:spPr>
+        <p:txBody>
+          <a:bodyPr/>
+          <a:p/>
+        </p:txBody>
       </p:sp>
       <p:sp>
         <p:nvSpPr>
@@ -18697,6 +19141,10 @@
             <a:prstDash val="solid"/>
           </a:ln>
         </p:spPr>
+        <p:txBody>
+          <a:bodyPr/>
+          <a:p/>
+        </p:txBody>
       </p:sp>
       <p:sp>
         <p:nvSpPr>
@@ -18912,6 +19360,10 @@
           </a:solidFill>
           <a:ln/>
         </p:spPr>
+        <p:txBody>
+          <a:bodyPr/>
+          <a:p/>
+        </p:txBody>
       </p:sp>
       <p:sp>
         <p:nvSpPr>
@@ -18932,6 +19384,10 @@
           </a:solidFill>
           <a:ln/>
         </p:spPr>
+        <p:txBody>
+          <a:bodyPr/>
+          <a:p/>
+        </p:txBody>
       </p:sp>
       <p:sp>
         <p:nvSpPr>
@@ -19090,6 +19546,10 @@
           </a:solidFill>
           <a:ln/>
         </p:spPr>
+        <p:txBody>
+          <a:bodyPr/>
+          <a:p/>
+        </p:txBody>
       </p:sp>
       <p:sp>
         <p:nvSpPr>
@@ -19266,6 +19726,10 @@
           </a:solidFill>
           <a:ln/>
         </p:spPr>
+        <p:txBody>
+          <a:bodyPr/>
+          <a:p/>
+        </p:txBody>
       </p:sp>
       <p:sp>
         <p:nvSpPr>
@@ -19286,6 +19750,10 @@
           </a:solidFill>
           <a:ln/>
         </p:spPr>
+        <p:txBody>
+          <a:bodyPr/>
+          <a:p/>
+        </p:txBody>
       </p:sp>
       <p:sp>
         <p:nvSpPr>
@@ -19384,6 +19852,10 @@
           </a:solidFill>
           <a:ln/>
         </p:spPr>
+        <p:txBody>
+          <a:bodyPr/>
+          <a:p/>
+        </p:txBody>
       </p:sp>
       <p:sp>
         <p:nvSpPr>
@@ -19404,6 +19876,10 @@
           </a:solidFill>
           <a:ln/>
         </p:spPr>
+        <p:txBody>
+          <a:bodyPr/>
+          <a:p/>
+        </p:txBody>
       </p:sp>
       <p:sp>
         <p:nvSpPr>
@@ -19477,7 +19953,7 @@
                 <a:ea typeface="Arial" pitchFamily="34" charset="-122"/>
                 <a:cs typeface="Arial" pitchFamily="34" charset="-120"/>
               </a:rPr>
-              <a:t>Phase 0/1 は UF 350ns で実証 → Phase 2+ PIC で MWPM 510ns へ移行。製品要件 p_L&lt;10⁻⁵ には MWPM 必須。</a:t>
+              <a:t>Phase 0/1 は UF 350ns で実証 → Phase 2+ PIC で MWPM 510ns へ移行。製品要件 p_L~7×10⁻⁵ には MWPM 必須。</a:t>
             </a:r>
             <a:endParaRPr lang="en-US" sz="1100" dirty="0"/>
           </a:p>
@@ -19502,6 +19978,10 @@
           </a:solidFill>
           <a:ln/>
         </p:spPr>
+        <p:txBody>
+          <a:bodyPr/>
+          <a:p/>
+        </p:txBody>
       </p:sp>
       <p:sp>
         <p:nvSpPr>
@@ -19522,6 +20002,10 @@
           </a:solidFill>
           <a:ln/>
         </p:spPr>
+        <p:txBody>
+          <a:bodyPr/>
+          <a:p/>
+        </p:txBody>
       </p:sp>
       <p:sp>
         <p:nvSpPr>
@@ -19620,6 +20104,10 @@
           </a:solidFill>
           <a:ln/>
         </p:spPr>
+        <p:txBody>
+          <a:bodyPr/>
+          <a:p/>
+        </p:txBody>
       </p:sp>
       <p:sp>
         <p:nvSpPr>
@@ -19640,6 +20128,10 @@
           </a:solidFill>
           <a:ln/>
         </p:spPr>
+        <p:txBody>
+          <a:bodyPr/>
+          <a:p/>
+        </p:txBody>
       </p:sp>
       <p:sp>
         <p:nvSpPr>
@@ -19738,6 +20230,10 @@
           </a:solidFill>
           <a:ln/>
         </p:spPr>
+        <p:txBody>
+          <a:bodyPr/>
+          <a:p/>
+        </p:txBody>
       </p:sp>
       <p:pic>
         <p:nvPicPr>
@@ -19941,6 +20437,10 @@
             <a:prstDash val="solid"/>
           </a:ln>
         </p:spPr>
+        <p:txBody>
+          <a:bodyPr/>
+          <a:p/>
+        </p:txBody>
       </p:sp>
       <p:sp>
         <p:nvSpPr>

--- a/assets/TAROS_Investor_Pitch_Revised.pptx
+++ b/assets/TAROS_Investor_Pitch_Revised.pptx
@@ -2643,7 +2643,7 @@
                 <a:ea typeface="Arial" pitchFamily="34" charset="-122"/>
                 <a:cs typeface="Arial" pitchFamily="34" charset="-120"/>
               </a:rPr>
-              <a:t>Tabletop · Room-temperature · Optical · System</a:t>
+              <a:t>Desktop Photonic Quantum Computer</a:t>
             </a:r>
             <a:endParaRPr lang="en-US" sz="1600" dirty="0"/>
           </a:p>
@@ -8404,7 +8404,7 @@
                 <a:ea typeface="Arial" pitchFamily="34" charset="-122"/>
                 <a:cs typeface="Arial" pitchFamily="34" charset="-120"/>
               </a:rPr>
-              <a:t>TAROS  ·  Tabletop · Room-temperature · Optical · System  ·  May 2026  ·  v3.4</a:t>
+              <a:t>TAROS  ·  Desktop Photonic Quantum Computer  ·  May 2026  ·  v3.4</a:t>
             </a:r>
             <a:endParaRPr lang="en-US" sz="1100" dirty="0"/>
           </a:p>

--- a/assets/TAROS_Investor_Pitch_Revised.pptx
+++ b/assets/TAROS_Investor_Pitch_Revised.pptx
@@ -6137,8 +6137,8 @@
           <p:nvPr/>
         </p:nvGraphicFramePr>
         <p:xfrm>
-          <a:off x="457200" y="2103120"/>
-          <a:ext cx="6858000" cy="3657600"/>
+          <a:off x="-6766560" y="2103120"/>
+          <a:ext cx="5029200" cy="3657600"/>
         </p:xfrm>
         <a:graphic xmlns:a="http://schemas.openxmlformats.org/drawingml/2006/main">
           <a:graphicData uri="http://schemas.openxmlformats.org/drawingml/2006/chart">
@@ -6154,8 +6154,8 @@
         </p:nvSpPr>
         <p:spPr>
           <a:xfrm>
-            <a:off x="7680960" y="2103120"/>
-            <a:ext cx="4023360" cy="777240"/>
+            <a:off x="457200" y="2103120"/>
+            <a:ext cx="5029200" cy="777240"/>
           </a:xfrm>
           <a:prstGeom prst="rect">
             <a:avLst/>
@@ -6178,7 +6178,7 @@
         </p:nvSpPr>
         <p:spPr>
           <a:xfrm>
-            <a:off x="7680960" y="2103120"/>
+            <a:off x="457200" y="2103120"/>
             <a:ext cx="54864" cy="777240"/>
           </a:xfrm>
           <a:prstGeom prst="rect">
@@ -6202,8 +6202,8 @@
         </p:nvSpPr>
         <p:spPr>
           <a:xfrm>
-            <a:off x="7863840" y="2176272"/>
-            <a:ext cx="3657600" cy="256032"/>
+            <a:off x="640079" y="2176272"/>
+            <a:ext cx="5029200" cy="256032"/>
           </a:xfrm>
           <a:prstGeom prst="rect">
             <a:avLst/>
@@ -6241,8 +6241,8 @@
         </p:nvSpPr>
         <p:spPr>
           <a:xfrm>
-            <a:off x="7863840" y="2395728"/>
-            <a:ext cx="3657600" cy="329184"/>
+            <a:off x="640079" y="2395728"/>
+            <a:ext cx="5029200" cy="329184"/>
           </a:xfrm>
           <a:prstGeom prst="rect">
             <a:avLst/>
@@ -6280,8 +6280,8 @@
         </p:nvSpPr>
         <p:spPr>
           <a:xfrm>
-            <a:off x="7863840" y="2670048"/>
-            <a:ext cx="3657600" cy="256032"/>
+            <a:off x="640079" y="2670048"/>
+            <a:ext cx="5029200" cy="256032"/>
           </a:xfrm>
           <a:prstGeom prst="rect">
             <a:avLst/>
@@ -6319,8 +6319,8 @@
         </p:nvSpPr>
         <p:spPr>
           <a:xfrm>
-            <a:off x="7680960" y="2971800"/>
-            <a:ext cx="4023360" cy="777240"/>
+            <a:off x="5943600" y="2103120"/>
+            <a:ext cx="5029200" cy="777240"/>
           </a:xfrm>
           <a:prstGeom prst="rect">
             <a:avLst/>
@@ -6343,7 +6343,7 @@
         </p:nvSpPr>
         <p:spPr>
           <a:xfrm>
-            <a:off x="7680960" y="2971800"/>
+            <a:off x="5943600" y="2103120"/>
             <a:ext cx="54864" cy="777240"/>
           </a:xfrm>
           <a:prstGeom prst="rect">
@@ -6367,8 +6367,8 @@
         </p:nvSpPr>
         <p:spPr>
           <a:xfrm>
-            <a:off x="7863840" y="3044952"/>
-            <a:ext cx="3657600" cy="256032"/>
+            <a:off x="6126479" y="2176272"/>
+            <a:ext cx="5029200" cy="256032"/>
           </a:xfrm>
           <a:prstGeom prst="rect">
             <a:avLst/>
@@ -6406,8 +6406,8 @@
         </p:nvSpPr>
         <p:spPr>
           <a:xfrm>
-            <a:off x="7863840" y="3264408"/>
-            <a:ext cx="3657600" cy="329184"/>
+            <a:off x="6126479" y="2395727"/>
+            <a:ext cx="5029200" cy="329184"/>
           </a:xfrm>
           <a:prstGeom prst="rect">
             <a:avLst/>
@@ -6445,8 +6445,8 @@
         </p:nvSpPr>
         <p:spPr>
           <a:xfrm>
-            <a:off x="7863840" y="3538728"/>
-            <a:ext cx="3657600" cy="256032"/>
+            <a:off x="6126479" y="2670048"/>
+            <a:ext cx="5029200" cy="256032"/>
           </a:xfrm>
           <a:prstGeom prst="rect">
             <a:avLst/>
@@ -6484,8 +6484,8 @@
         </p:nvSpPr>
         <p:spPr>
           <a:xfrm>
-            <a:off x="7680960" y="3840480"/>
-            <a:ext cx="4023360" cy="777240"/>
+            <a:off x="457200" y="3840480"/>
+            <a:ext cx="5029200" cy="777240"/>
           </a:xfrm>
           <a:prstGeom prst="rect">
             <a:avLst/>
@@ -6508,7 +6508,7 @@
         </p:nvSpPr>
         <p:spPr>
           <a:xfrm>
-            <a:off x="7680960" y="3840480"/>
+            <a:off x="457200" y="3840480"/>
             <a:ext cx="54864" cy="777240"/>
           </a:xfrm>
           <a:prstGeom prst="rect">
@@ -6532,8 +6532,8 @@
         </p:nvSpPr>
         <p:spPr>
           <a:xfrm>
-            <a:off x="7863840" y="3913632"/>
-            <a:ext cx="3657600" cy="256032"/>
+            <a:off x="640079" y="3913632"/>
+            <a:ext cx="5029200" cy="256032"/>
           </a:xfrm>
           <a:prstGeom prst="rect">
             <a:avLst/>
@@ -6571,8 +6571,8 @@
         </p:nvSpPr>
         <p:spPr>
           <a:xfrm>
-            <a:off x="7863840" y="4133088"/>
-            <a:ext cx="3657600" cy="329184"/>
+            <a:off x="640079" y="4133087"/>
+            <a:ext cx="5029200" cy="329184"/>
           </a:xfrm>
           <a:prstGeom prst="rect">
             <a:avLst/>
@@ -6610,8 +6610,8 @@
         </p:nvSpPr>
         <p:spPr>
           <a:xfrm>
-            <a:off x="7863840" y="4407408"/>
-            <a:ext cx="3657600" cy="256032"/>
+            <a:off x="640079" y="4407408"/>
+            <a:ext cx="5029200" cy="256032"/>
           </a:xfrm>
           <a:prstGeom prst="rect">
             <a:avLst/>
@@ -6649,8 +6649,8 @@
         </p:nvSpPr>
         <p:spPr>
           <a:xfrm>
-            <a:off x="7680960" y="4709160"/>
-            <a:ext cx="4023360" cy="777240"/>
+            <a:off x="5943600" y="3840480"/>
+            <a:ext cx="5029200" cy="777240"/>
           </a:xfrm>
           <a:prstGeom prst="rect">
             <a:avLst/>
@@ -6673,7 +6673,7 @@
         </p:nvSpPr>
         <p:spPr>
           <a:xfrm>
-            <a:off x="7680960" y="4709160"/>
+            <a:off x="5943600" y="3840480"/>
             <a:ext cx="54864" cy="777240"/>
           </a:xfrm>
           <a:prstGeom prst="rect">
@@ -6697,8 +6697,8 @@
         </p:nvSpPr>
         <p:spPr>
           <a:xfrm>
-            <a:off x="7863840" y="4782312"/>
-            <a:ext cx="3657600" cy="256032"/>
+            <a:off x="6126479" y="3913632"/>
+            <a:ext cx="5029200" cy="256032"/>
           </a:xfrm>
           <a:prstGeom prst="rect">
             <a:avLst/>
@@ -6736,8 +6736,8 @@
         </p:nvSpPr>
         <p:spPr>
           <a:xfrm>
-            <a:off x="7863840" y="5001768"/>
-            <a:ext cx="3657600" cy="329184"/>
+            <a:off x="6126479" y="4133087"/>
+            <a:ext cx="5029200" cy="329184"/>
           </a:xfrm>
           <a:prstGeom prst="rect">
             <a:avLst/>
@@ -6775,8 +6775,8 @@
         </p:nvSpPr>
         <p:spPr>
           <a:xfrm>
-            <a:off x="7863840" y="5276088"/>
-            <a:ext cx="3657600" cy="256032"/>
+            <a:off x="6126479" y="4407407"/>
+            <a:ext cx="5029200" cy="256032"/>
           </a:xfrm>
           <a:prstGeom prst="rect">
             <a:avLst/>

--- a/assets/TAROS_Investor_Pitch_Revised.pptx
+++ b/assets/TAROS_Investor_Pitch_Revised.pptx
@@ -5105,7 +5105,7 @@
                 <a:ea typeface="Arial" pitchFamily="34" charset="-122"/>
                 <a:cs typeface="Arial" pitchFamily="34" charset="-120"/>
               </a:rPr>
-              <a:t>累計開発費 — 量産可能製品まで 約8.6億円 ($5.74M)</a:t>
+              <a:t>累計開発費 — 量産可能製品まで 約8.7億円 ($5.78M)</a:t>
             </a:r>
             <a:endParaRPr lang="en-US" sz="1300" dirty="0"/>
           </a:p>
@@ -5912,7 +5912,7 @@
                 <a:ea typeface="Arial" pitchFamily="34" charset="-122"/>
                 <a:cs typeface="Arial" pitchFamily="34" charset="-120"/>
               </a:rPr>
-              <a:t>約8.6億円</a:t>
+              <a:t>約8.7億円</a:t>
             </a:r>
             <a:endParaRPr lang="en-US" sz="1200" dirty="0"/>
           </a:p>
@@ -6431,7 +6431,7 @@
                 <a:ea typeface="Arial" pitchFamily="34" charset="-122"/>
                 <a:cs typeface="Arial" pitchFamily="34" charset="-120"/>
               </a:rPr>
-              <a:t>~40%</a:t>
+              <a:t>~33%</a:t>
             </a:r>
             <a:endParaRPr lang="en-US" sz="1700" dirty="0"/>
           </a:p>
@@ -6891,7 +6891,7 @@
                 <a:ea typeface="Arial" pitchFamily="34" charset="-122"/>
                 <a:cs typeface="Arial" pitchFamily="34" charset="-120"/>
               </a:rPr>
-              <a:t>(81-90% × 36億 ARR ≈ 30億 / 累計 8.6億)</a:t>
+              <a:t>(81-90% × 36億 ARR ≈ 30億 / 累計 8.7億)</a:t>
             </a:r>
             <a:endParaRPr lang="en-US" sz="1300" dirty="0"/>
           </a:p>
@@ -13633,7 +13633,7 @@
                 <a:ea typeface="Arial" pitchFamily="34" charset="-122"/>
                 <a:cs typeface="Arial" pitchFamily="34" charset="-120"/>
               </a:rPr>
-              <a:t>~100W</a:t>
+              <a:t>~104W</a:t>
             </a:r>
             <a:endParaRPr lang="en-US" sz="1200" dirty="0"/>
           </a:p>

--- a/assets/TAROS_Investor_Pitch_Revised.pptx
+++ b/assets/TAROS_Investor_Pitch_Revised.pptx
@@ -2816,7 +2816,7 @@
                 <a:ea typeface="Arial" pitchFamily="34" charset="-122"/>
                 <a:cs typeface="Arial" pitchFamily="34" charset="-120"/>
               </a:rPr>
-              <a:t>Investor Pitch  ·  May 2026</a:t>
+              <a:t>Investor Pitch</a:t>
             </a:r>
             <a:endParaRPr lang="en-US" sz="1100" dirty="0"/>
           </a:p>
@@ -2855,7 +2855,7 @@
                 <a:ea typeface="Arial" pitchFamily="34" charset="-122"/>
                 <a:cs typeface="Arial" pitchFamily="34" charset="-120"/>
               </a:rPr>
-              <a:t>Confidential  ·  v3.4</a:t>
+              <a:t>Confidential  ·  v3.6</a:t>
             </a:r>
             <a:endParaRPr lang="en-US" sz="1100" dirty="0"/>
           </a:p>
@@ -4604,7 +4604,7 @@
                 <a:ea typeface="Arial" pitchFamily="34" charset="-122"/>
                 <a:cs typeface="Arial" pitchFamily="34" charset="-120"/>
               </a:rPr>
-              <a:t>$58K 装置直接費</a:t>
+              <a:t>約870万円</a:t>
             </a:r>
             <a:endParaRPr lang="en-US" sz="1000" dirty="0"/>
           </a:p>
@@ -6124,7 +6124,7 @@
                 <a:ea typeface="Arial" pitchFamily="34" charset="-122"/>
                 <a:cs typeface="Arial" pitchFamily="34" charset="-120"/>
               </a:rPr>
-              <a:t>2031–2032 黒字化、2033 までに 36億円 ARR を視野</a:t>
+              <a:t>黒字化から36億円 ARR を視野</a:t>
             </a:r>
             <a:endParaRPr lang="en-US" sz="3200" dirty="0"/>
           </a:p>
@@ -6266,7 +6266,7 @@
                 <a:ea typeface="Arial" pitchFamily="34" charset="-122"/>
                 <a:cs typeface="Arial" pitchFamily="34" charset="-120"/>
               </a:rPr>
-              <a:t>2031–2032</a:t>
+              <a:t>Phase 2完了後1〜2年</a:t>
             </a:r>
             <a:endParaRPr lang="en-US" sz="1700" dirty="0"/>
           </a:p>
@@ -7181,7 +7181,7 @@
                 <a:ea typeface="Arial" pitchFamily="34" charset="-122"/>
                 <a:cs typeface="Arial" pitchFamily="34" charset="-120"/>
               </a:rPr>
-              <a:t>※ 為替前提: 1USD = 150円 で換算 ($3.08M)</a:t>
+              <a:t>※ 為替前提: 1USD = 150円 換算</a:t>
             </a:r>
             <a:endParaRPr lang="en-US" sz="1000" dirty="0"/>
           </a:p>
@@ -7451,7 +7451,7 @@
                 <a:ea typeface="Arial" pitchFamily="34" charset="-122"/>
                 <a:cs typeface="Arial" pitchFamily="34" charset="-120"/>
               </a:rPr>
-              <a:t>G-EXP1 (2026年7月)</a:t>
+              <a:t>G-EXP1 (開始後2ヶ月)</a:t>
             </a:r>
             <a:endParaRPr lang="en-US" sz="1800" dirty="0"/>
           </a:p>
@@ -8404,7 +8404,7 @@
                 <a:ea typeface="Arial" pitchFamily="34" charset="-122"/>
                 <a:cs typeface="Arial" pitchFamily="34" charset="-120"/>
               </a:rPr>
-              <a:t>TAROS  ·  Desktop Photonic Quantum Computer  ·  May 2026  ·  v3.4</a:t>
+              <a:t>TAROS  ·  Desktop Photonic Quantum Computer  ·  v3.6</a:t>
             </a:r>
             <a:endParaRPr lang="en-US" sz="1100" dirty="0"/>
           </a:p>
@@ -10828,7 +10828,7 @@
                 <a:ea typeface="Arial" pitchFamily="34" charset="-122"/>
                 <a:cs typeface="Arial" pitchFamily="34" charset="-120"/>
               </a:rPr>
-              <a:t>Pro モデル ($120K)</a:t>
+              <a:t>Pro モデル</a:t>
             </a:r>
             <a:endParaRPr lang="en-US" sz="1100" dirty="0"/>
           </a:p>
@@ -11212,7 +11212,7 @@
                 <a:ea typeface="Arial" pitchFamily="34" charset="-122"/>
                 <a:cs typeface="Arial" pitchFamily="34" charset="-120"/>
               </a:rPr>
-              <a:t>WHY NOW — 2026年に成立する理由</a:t>
+              <a:t>WHY NOW — 今、成立する理由</a:t>
             </a:r>
             <a:endParaRPr lang="en-US" sz="1400" dirty="0"/>
           </a:p>
@@ -17879,7 +17879,7 @@
                 <a:ea typeface="Arial" pitchFamily="34" charset="-122"/>
                 <a:cs typeface="Arial" pitchFamily="34" charset="-120"/>
               </a:rPr>
-              <a:t>1,250機関  ·  $150M</a:t>
+              <a:t>1,250機関  ·  225億円</a:t>
             </a:r>
             <a:endParaRPr lang="en-US" sz="1800" dirty="0"/>
           </a:p>
@@ -18020,7 +18020,7 @@
                 <a:ea typeface="Arial" pitchFamily="34" charset="-122"/>
                 <a:cs typeface="Arial" pitchFamily="34" charset="-120"/>
               </a:rPr>
-              <a:t>650機関  ·  $78M</a:t>
+              <a:t>650機関  ·  約117億円</a:t>
             </a:r>
             <a:endParaRPr lang="en-US" sz="1800" dirty="0"/>
           </a:p>
@@ -18161,7 +18161,7 @@
                 <a:ea typeface="Arial" pitchFamily="34" charset="-122"/>
                 <a:cs typeface="Arial" pitchFamily="34" charset="-120"/>
               </a:rPr>
-              <a:t>100機関  ·  $12M (18億円)</a:t>
+              <a:t>100機関  ·  18億円</a:t>
             </a:r>
             <a:endParaRPr lang="en-US" sz="1800" dirty="0"/>
           </a:p>
@@ -18546,7 +18546,7 @@
                 <a:ea typeface="Arial" pitchFamily="34" charset="-122"/>
                 <a:cs typeface="Arial" pitchFamily="34" charset="-120"/>
               </a:rPr>
-              <a:t>2026 H2 – 2027 H1</a:t>
+              <a:t>12ヶ月</a:t>
             </a:r>
             <a:endParaRPr lang="en-US" sz="1000" dirty="0"/>
           </a:p>
@@ -18770,7 +18770,7 @@
                 <a:ea typeface="Arial" pitchFamily="34" charset="-122"/>
                 <a:cs typeface="Arial" pitchFamily="34" charset="-120"/>
               </a:rPr>
-              <a:t>2027 H2 – 2028</a:t>
+              <a:t>12-18ヶ月</a:t>
             </a:r>
             <a:endParaRPr lang="en-US" sz="1000" dirty="0"/>
           </a:p>
@@ -18994,7 +18994,7 @@
                 <a:ea typeface="Arial" pitchFamily="34" charset="-122"/>
                 <a:cs typeface="Arial" pitchFamily="34" charset="-120"/>
               </a:rPr>
-              <a:t>2028 – 2029</a:t>
+              <a:t>12-18ヶ月</a:t>
             </a:r>
             <a:endParaRPr lang="en-US" sz="1000" dirty="0"/>
           </a:p>
@@ -19218,7 +19218,7 @@
                 <a:ea typeface="Arial" pitchFamily="34" charset="-122"/>
                 <a:cs typeface="Arial" pitchFamily="34" charset="-120"/>
               </a:rPr>
-              <a:t>2029 – 2030</a:t>
+              <a:t>6-12ヶ月</a:t>
             </a:r>
             <a:endParaRPr lang="en-US" sz="1000" dirty="0"/>
           </a:p>
@@ -19436,7 +19436,7 @@
                 <a:ea typeface="Arial" pitchFamily="34" charset="-122"/>
                 <a:cs typeface="Arial" pitchFamily="34" charset="-120"/>
               </a:rPr>
-              <a:t>G-EXP1 (2026年7月)</a:t>
+              <a:t>G-EXP1 (開始後2ヶ月)</a:t>
             </a:r>
             <a:pPr indent="0" marL="0">
               <a:buNone/>
@@ -19450,7 +19450,7 @@
                 <a:ea typeface="Arial" pitchFamily="34" charset="-122"/>
                 <a:cs typeface="Arial" pitchFamily="34" charset="-120"/>
               </a:rPr>
-              <a:t> — $58K装置直接費 (~870万円) で Level A 成功確率を 25-35% から 50%超へ引き上げ</a:t>
+              <a:t> — 約870万円の装置直接費で Level A 成功確率を 25-35% から 50%超へ引き上げ</a:t>
             </a:r>
             <a:endParaRPr lang="en-US" sz="1300" dirty="0"/>
           </a:p>
@@ -20079,7 +20079,7 @@
                 <a:ea typeface="Arial" pitchFamily="34" charset="-122"/>
                 <a:cs typeface="Arial" pitchFamily="34" charset="-120"/>
               </a:rPr>
-              <a:t>$58K装置直接費 / $198K完全コスト で 2026年7月実施予定。失敗時は DV-FBQC へフォールバック設計済み。</a:t>
+              <a:t>約870万円 / 約3,000万円 で Phase -1 開始後2ヶ月に実施。失敗時は DV-FBQC へフォールバック設計済み。</a:t>
             </a:r>
             <a:endParaRPr lang="en-US" sz="1100" dirty="0"/>
           </a:p>
@@ -20409,7 +20409,7 @@
                 <a:ea typeface="Arial" pitchFamily="34" charset="-122"/>
                 <a:cs typeface="Arial" pitchFamily="34" charset="-120"/>
               </a:rPr>
-              <a:t>(2030)</a:t>
+              <a:t>(開始後約4年)</a:t>
             </a:r>
             <a:endParaRPr lang="en-US" sz="1100" dirty="0"/>
           </a:p>
@@ -20514,7 +20514,7 @@
                 <a:ea typeface="Arial" pitchFamily="34" charset="-122"/>
                 <a:cs typeface="Arial" pitchFamily="34" charset="-120"/>
               </a:rPr>
-              <a:t>CV不成立時は DV-FBQC 方式 (本体28kg / 2.1kW / $432K) にフォールバック — 投資の下振れリスクを限定。</a:t>
+              <a:t>CV不成立時は DV-FBQC 方式 (本体28kg / 2.1kW / 約6,500万円) にフォールバック — 投資の下振れリスクを限定。</a:t>
             </a:r>
             <a:endParaRPr lang="en-US" sz="1100" dirty="0"/>
           </a:p>

--- a/assets/TAROS_Investor_Pitch_Revised.pptx
+++ b/assets/TAROS_Investor_Pitch_Revised.pptx
@@ -213,16 +213,16 @@
                 <c:ptCount val="4"/>
                 <c:lvl>
                   <c:pt idx="0">
-                    <c:v>2030 (20台)</c:v>
+                    <c:v>Y1 (20台)</c:v>
                   </c:pt>
                   <c:pt idx="1">
-                    <c:v>2031 (50台)</c:v>
+                    <c:v>Y2 (50台)</c:v>
                   </c:pt>
                   <c:pt idx="2">
-                    <c:v>2032 (100台)</c:v>
+                    <c:v>Y3 (100台)</c:v>
                   </c:pt>
                   <c:pt idx="3">
-                    <c:v>2033 (200台)</c:v>
+                    <c:v>Y4 (200台)</c:v>
                   </c:pt>
                 </c:lvl>
               </c:multiLvlStrCache>
@@ -302,16 +302,16 @@
                 <c:ptCount val="4"/>
                 <c:lvl>
                   <c:pt idx="0">
-                    <c:v>2030 (20台)</c:v>
+                    <c:v>Y1 (20台)</c:v>
                   </c:pt>
                   <c:pt idx="1">
-                    <c:v>2031 (50台)</c:v>
+                    <c:v>Y2 (50台)</c:v>
                   </c:pt>
                   <c:pt idx="2">
-                    <c:v>2032 (100台)</c:v>
+                    <c:v>Y3 (100台)</c:v>
                   </c:pt>
                   <c:pt idx="3">
-                    <c:v>2033 (200台)</c:v>
+                    <c:v>Y4 (200台)</c:v>
                   </c:pt>
                 </c:lvl>
               </c:multiLvlStrCache>
@@ -2855,7 +2855,7 @@
                 <a:ea typeface="Arial" pitchFamily="34" charset="-122"/>
                 <a:cs typeface="Arial" pitchFamily="34" charset="-120"/>
               </a:rPr>
-              <a:t>Confidential  ·  v3.6</a:t>
+              <a:t>Confidential</a:t>
             </a:r>
             <a:endParaRPr lang="en-US" sz="1100" dirty="0"/>
           </a:p>
@@ -6137,8 +6137,8 @@
           <p:nvPr/>
         </p:nvGraphicFramePr>
         <p:xfrm>
-          <a:off x="-6766560" y="2103120"/>
-          <a:ext cx="5029200" cy="3657600"/>
+          <a:off x="457200" y="4023360"/>
+          <a:ext cx="10332720" cy="1645920"/>
         </p:xfrm>
         <a:graphic xmlns:a="http://schemas.openxmlformats.org/drawingml/2006/main">
           <a:graphicData uri="http://schemas.openxmlformats.org/drawingml/2006/chart">
@@ -6484,7 +6484,7 @@
         </p:nvSpPr>
         <p:spPr>
           <a:xfrm>
-            <a:off x="457200" y="3840480"/>
+            <a:off x="457200" y="3017520"/>
             <a:ext cx="5029200" cy="777240"/>
           </a:xfrm>
           <a:prstGeom prst="rect">
@@ -6508,7 +6508,7 @@
         </p:nvSpPr>
         <p:spPr>
           <a:xfrm>
-            <a:off x="457200" y="3840480"/>
+            <a:off x="457200" y="3017520"/>
             <a:ext cx="54864" cy="777240"/>
           </a:xfrm>
           <a:prstGeom prst="rect">
@@ -6532,7 +6532,7 @@
         </p:nvSpPr>
         <p:spPr>
           <a:xfrm>
-            <a:off x="640079" y="3913632"/>
+            <a:off x="640079" y="3090672"/>
             <a:ext cx="5029200" cy="256032"/>
           </a:xfrm>
           <a:prstGeom prst="rect">
@@ -6571,7 +6571,7 @@
         </p:nvSpPr>
         <p:spPr>
           <a:xfrm>
-            <a:off x="640079" y="4133087"/>
+            <a:off x="640079" y="3310127"/>
             <a:ext cx="5029200" cy="329184"/>
           </a:xfrm>
           <a:prstGeom prst="rect">
@@ -6610,7 +6610,7 @@
         </p:nvSpPr>
         <p:spPr>
           <a:xfrm>
-            <a:off x="640079" y="4407408"/>
+            <a:off x="640079" y="3584448"/>
             <a:ext cx="5029200" cy="256032"/>
           </a:xfrm>
           <a:prstGeom prst="rect">
@@ -6649,7 +6649,7 @@
         </p:nvSpPr>
         <p:spPr>
           <a:xfrm>
-            <a:off x="5943600" y="3840480"/>
+            <a:off x="5943600" y="3017520"/>
             <a:ext cx="5029200" cy="777240"/>
           </a:xfrm>
           <a:prstGeom prst="rect">
@@ -6673,7 +6673,7 @@
         </p:nvSpPr>
         <p:spPr>
           <a:xfrm>
-            <a:off x="5943600" y="3840480"/>
+            <a:off x="5943600" y="3017520"/>
             <a:ext cx="54864" cy="777240"/>
           </a:xfrm>
           <a:prstGeom prst="rect">
@@ -6697,7 +6697,7 @@
         </p:nvSpPr>
         <p:spPr>
           <a:xfrm>
-            <a:off x="6126479" y="3913632"/>
+            <a:off x="6126479" y="3090672"/>
             <a:ext cx="5029200" cy="256032"/>
           </a:xfrm>
           <a:prstGeom prst="rect">
@@ -6736,7 +6736,7 @@
         </p:nvSpPr>
         <p:spPr>
           <a:xfrm>
-            <a:off x="6126479" y="4133087"/>
+            <a:off x="6126479" y="3310127"/>
             <a:ext cx="5029200" cy="329184"/>
           </a:xfrm>
           <a:prstGeom prst="rect">
@@ -6775,7 +6775,7 @@
         </p:nvSpPr>
         <p:spPr>
           <a:xfrm>
-            <a:off x="6126479" y="4407407"/>
+            <a:off x="6126479" y="3584447"/>
             <a:ext cx="5029200" cy="256032"/>
           </a:xfrm>
           <a:prstGeom prst="rect">
@@ -6814,7 +6814,7 @@
         </p:nvSpPr>
         <p:spPr>
           <a:xfrm>
-            <a:off x="457200" y="5897880"/>
+            <a:off x="457200" y="5806440"/>
             <a:ext cx="11247120" cy="640080"/>
           </a:xfrm>
           <a:prstGeom prst="rect">
@@ -6838,7 +6838,7 @@
         </p:nvSpPr>
         <p:spPr>
           <a:xfrm>
-            <a:off x="640080" y="5897880"/>
+            <a:off x="640080" y="5806440"/>
             <a:ext cx="10881360" cy="640080"/>
           </a:xfrm>
           <a:prstGeom prst="rect">
@@ -7346,7 +7346,7 @@
                 <a:ea typeface="Arial" pitchFamily="34" charset="-122"/>
                 <a:cs typeface="Arial" pitchFamily="34" charset="-120"/>
               </a:rPr>
-              <a:t>シード資金で全14タスクを実行し、Phase 0 移行判断材料を取得 [v3.1: 8→12ヶ月延長確定]</a:t>
+              <a:t>シード資金で全14タスクを実行し、Phase 0 移行判断材料を取得</a:t>
             </a:r>
             <a:endParaRPr lang="en-US" sz="1200" dirty="0"/>
           </a:p>
@@ -8404,7 +8404,7 @@
                 <a:ea typeface="Arial" pitchFamily="34" charset="-122"/>
                 <a:cs typeface="Arial" pitchFamily="34" charset="-120"/>
               </a:rPr>
-              <a:t>TAROS  ·  Desktop Photonic Quantum Computer  ·  v3.6</a:t>
+              <a:t>TAROS  ·  Desktop Photonic Quantum Computer</a:t>
             </a:r>
             <a:endParaRPr lang="en-US" sz="1100" dirty="0"/>
           </a:p>

--- a/assets/TAROS_Investor_Pitch_Revised.pptx
+++ b/assets/TAROS_Investor_Pitch_Revised.pptx
@@ -6130,22 +6130,6 @@
           </a:p>
         </p:txBody>
       </p:sp>
-      <p:graphicFrame>
-        <p:nvGraphicFramePr>
-          <p:cNvPr id="7" name="Chart 0" descr=""/>
-          <p:cNvGraphicFramePr/>
-          <p:nvPr/>
-        </p:nvGraphicFramePr>
-        <p:xfrm>
-          <a:off x="457200" y="4023360"/>
-          <a:ext cx="10332720" cy="1645920"/>
-        </p:xfrm>
-        <a:graphic xmlns:a="http://schemas.openxmlformats.org/drawingml/2006/main">
-          <a:graphicData uri="http://schemas.openxmlformats.org/drawingml/2006/chart">
-            <c:chart xmlns:c="http://schemas.openxmlformats.org/drawingml/2006/chart" r:id="rId1"/>
-          </a:graphicData>
-        </a:graphic>
-      </p:graphicFrame>
       <p:sp>
         <p:nvSpPr>
           <p:cNvPr id="8" name="Shape 5"/>
@@ -6154,7 +6138,7 @@
         </p:nvSpPr>
         <p:spPr>
           <a:xfrm>
-            <a:off x="457200" y="2103120"/>
+            <a:off x="457200" y="2788920"/>
             <a:ext cx="5029200" cy="777240"/>
           </a:xfrm>
           <a:prstGeom prst="rect">
@@ -6178,7 +6162,7 @@
         </p:nvSpPr>
         <p:spPr>
           <a:xfrm>
-            <a:off x="457200" y="2103120"/>
+            <a:off x="457200" y="2788920"/>
             <a:ext cx="54864" cy="777240"/>
           </a:xfrm>
           <a:prstGeom prst="rect">
@@ -6202,7 +6186,7 @@
         </p:nvSpPr>
         <p:spPr>
           <a:xfrm>
-            <a:off x="640079" y="2176272"/>
+            <a:off x="640079" y="2862072"/>
             <a:ext cx="5029200" cy="256032"/>
           </a:xfrm>
           <a:prstGeom prst="rect">
@@ -6241,7 +6225,7 @@
         </p:nvSpPr>
         <p:spPr>
           <a:xfrm>
-            <a:off x="640079" y="2395728"/>
+            <a:off x="640079" y="3081528"/>
             <a:ext cx="5029200" cy="329184"/>
           </a:xfrm>
           <a:prstGeom prst="rect">
@@ -6280,7 +6264,7 @@
         </p:nvSpPr>
         <p:spPr>
           <a:xfrm>
-            <a:off x="640079" y="2670048"/>
+            <a:off x="640079" y="3355848"/>
             <a:ext cx="5029200" cy="256032"/>
           </a:xfrm>
           <a:prstGeom prst="rect">
@@ -6319,7 +6303,7 @@
         </p:nvSpPr>
         <p:spPr>
           <a:xfrm>
-            <a:off x="5943600" y="2103120"/>
+            <a:off x="5943600" y="2788920"/>
             <a:ext cx="5029200" cy="777240"/>
           </a:xfrm>
           <a:prstGeom prst="rect">
@@ -6343,7 +6327,7 @@
         </p:nvSpPr>
         <p:spPr>
           <a:xfrm>
-            <a:off x="5943600" y="2103120"/>
+            <a:off x="5943600" y="2788920"/>
             <a:ext cx="54864" cy="777240"/>
           </a:xfrm>
           <a:prstGeom prst="rect">
@@ -6367,7 +6351,7 @@
         </p:nvSpPr>
         <p:spPr>
           <a:xfrm>
-            <a:off x="6126479" y="2176272"/>
+            <a:off x="6126479" y="2862072"/>
             <a:ext cx="5029200" cy="256032"/>
           </a:xfrm>
           <a:prstGeom prst="rect">
@@ -6406,7 +6390,7 @@
         </p:nvSpPr>
         <p:spPr>
           <a:xfrm>
-            <a:off x="6126479" y="2395727"/>
+            <a:off x="6126479" y="3081527"/>
             <a:ext cx="5029200" cy="329184"/>
           </a:xfrm>
           <a:prstGeom prst="rect">
@@ -6445,7 +6429,7 @@
         </p:nvSpPr>
         <p:spPr>
           <a:xfrm>
-            <a:off x="6126479" y="2670048"/>
+            <a:off x="6126479" y="3355848"/>
             <a:ext cx="5029200" cy="256032"/>
           </a:xfrm>
           <a:prstGeom prst="rect">
@@ -6484,7 +6468,7 @@
         </p:nvSpPr>
         <p:spPr>
           <a:xfrm>
-            <a:off x="457200" y="3017520"/>
+            <a:off x="457200" y="3749040"/>
             <a:ext cx="5029200" cy="777240"/>
           </a:xfrm>
           <a:prstGeom prst="rect">
@@ -6508,7 +6492,7 @@
         </p:nvSpPr>
         <p:spPr>
           <a:xfrm>
-            <a:off x="457200" y="3017520"/>
+            <a:off x="457200" y="3749040"/>
             <a:ext cx="54864" cy="777240"/>
           </a:xfrm>
           <a:prstGeom prst="rect">
@@ -6532,7 +6516,7 @@
         </p:nvSpPr>
         <p:spPr>
           <a:xfrm>
-            <a:off x="640079" y="3090672"/>
+            <a:off x="640079" y="3822192"/>
             <a:ext cx="5029200" cy="256032"/>
           </a:xfrm>
           <a:prstGeom prst="rect">
@@ -6571,7 +6555,7 @@
         </p:nvSpPr>
         <p:spPr>
           <a:xfrm>
-            <a:off x="640079" y="3310127"/>
+            <a:off x="640079" y="4041647"/>
             <a:ext cx="5029200" cy="329184"/>
           </a:xfrm>
           <a:prstGeom prst="rect">
@@ -6610,7 +6594,7 @@
         </p:nvSpPr>
         <p:spPr>
           <a:xfrm>
-            <a:off x="640079" y="3584448"/>
+            <a:off x="640079" y="4315968"/>
             <a:ext cx="5029200" cy="256032"/>
           </a:xfrm>
           <a:prstGeom prst="rect">
@@ -6649,7 +6633,7 @@
         </p:nvSpPr>
         <p:spPr>
           <a:xfrm>
-            <a:off x="5943600" y="3017520"/>
+            <a:off x="5943600" y="3749040"/>
             <a:ext cx="5029200" cy="777240"/>
           </a:xfrm>
           <a:prstGeom prst="rect">
@@ -6673,7 +6657,7 @@
         </p:nvSpPr>
         <p:spPr>
           <a:xfrm>
-            <a:off x="5943600" y="3017520"/>
+            <a:off x="5943600" y="3749040"/>
             <a:ext cx="54864" cy="777240"/>
           </a:xfrm>
           <a:prstGeom prst="rect">
@@ -6697,7 +6681,7 @@
         </p:nvSpPr>
         <p:spPr>
           <a:xfrm>
-            <a:off x="6126479" y="3090672"/>
+            <a:off x="6126479" y="3822192"/>
             <a:ext cx="5029200" cy="256032"/>
           </a:xfrm>
           <a:prstGeom prst="rect">
@@ -6736,7 +6720,7 @@
         </p:nvSpPr>
         <p:spPr>
           <a:xfrm>
-            <a:off x="6126479" y="3310127"/>
+            <a:off x="6126479" y="4041647"/>
             <a:ext cx="5029200" cy="329184"/>
           </a:xfrm>
           <a:prstGeom prst="rect">
@@ -6775,7 +6759,7 @@
         </p:nvSpPr>
         <p:spPr>
           <a:xfrm>
-            <a:off x="6126479" y="3584447"/>
+            <a:off x="6126479" y="4315967"/>
             <a:ext cx="5029200" cy="256032"/>
           </a:xfrm>
           <a:prstGeom prst="rect">
@@ -6814,7 +6798,7 @@
         </p:nvSpPr>
         <p:spPr>
           <a:xfrm>
-            <a:off x="457200" y="5806440"/>
+            <a:off x="457200" y="5303520"/>
             <a:ext cx="11247120" cy="640080"/>
           </a:xfrm>
           <a:prstGeom prst="rect">
@@ -6838,7 +6822,7 @@
         </p:nvSpPr>
         <p:spPr>
           <a:xfrm>
-            <a:off x="640080" y="5806440"/>
+            <a:off x="640080" y="5303520"/>
             <a:ext cx="10881360" cy="640080"/>
           </a:xfrm>
           <a:prstGeom prst="rect">
@@ -6905,7 +6889,7 @@
         </p:nvSpPr>
         <p:spPr>
           <a:xfrm>
-            <a:off x="457200" y="6583680"/>
+            <a:off x="457200" y="6035040"/>
             <a:ext cx="11247120" cy="228600"/>
           </a:xfrm>
           <a:prstGeom prst="rect">

--- a/assets/TAROS_Investor_Pitch_Revised.pptx
+++ b/assets/TAROS_Investor_Pitch_Revised.pptx
@@ -3876,7 +3876,7 @@
                 <a:ea typeface="Arial" pitchFamily="34" charset="-122"/>
                 <a:cs typeface="Arial" pitchFamily="34" charset="-120"/>
               </a:rPr>
-              <a:t>ノイズバジェット v3.1 (BSモデル)</a:t>
+              <a:t>ノイズバジェット (BSモデル)</a:t>
             </a:r>
             <a:endParaRPr lang="en-US" sz="1300" dirty="0"/>
           </a:p>
@@ -5105,7 +5105,7 @@
                 <a:ea typeface="Arial" pitchFamily="34" charset="-122"/>
                 <a:cs typeface="Arial" pitchFamily="34" charset="-120"/>
               </a:rPr>
-              <a:t>累計開発費 — 量産可能製品まで 約8.7億円 ($5.78M)</a:t>
+              <a:t>累計開発費 — 量産可能製品まで 約8.7億円</a:t>
             </a:r>
             <a:endParaRPr lang="en-US" sz="1300" dirty="0"/>
           </a:p>
@@ -5678,7 +5678,7 @@
                 <a:ea typeface="Arial" pitchFamily="34" charset="-122"/>
                 <a:cs typeface="Arial" pitchFamily="34" charset="-120"/>
               </a:rPr>
-              <a:t>1,000億円+</a:t>
+              <a:t>約1,500億円超</a:t>
             </a:r>
             <a:endParaRPr lang="en-US" sz="1200" dirty="0"/>
           </a:p>
@@ -5756,7 +5756,7 @@
                 <a:ea typeface="Arial" pitchFamily="34" charset="-122"/>
                 <a:cs typeface="Arial" pitchFamily="34" charset="-120"/>
               </a:rPr>
-              <a:t>900億円</a:t>
+              <a:t>約1,350億円</a:t>
             </a:r>
             <a:endParaRPr lang="en-US" sz="1200" dirty="0"/>
           </a:p>
@@ -5834,7 +5834,7 @@
                 <a:ea typeface="Arial" pitchFamily="34" charset="-122"/>
                 <a:cs typeface="Arial" pitchFamily="34" charset="-120"/>
               </a:rPr>
-              <a:t>375億円</a:t>
+              <a:t>約560億円</a:t>
             </a:r>
             <a:endParaRPr lang="en-US" sz="1200" dirty="0"/>
           </a:p>
@@ -9086,7 +9086,7 @@
                 <a:ea typeface="Arial" pitchFamily="34" charset="-122"/>
                 <a:cs typeface="Arial" pitchFamily="34" charset="-120"/>
               </a:rPr>
-              <a:t>p_L ≲ 10⁻⁴ (d=7, MWPM, 製品要件)。Phase 2+ PIC 統合で論理エラー率を物理エラー率以下へ。</a:t>
+              <a:t>p_L ≈ 3.3×10⁻⁴ (d=7, MWPM, L=0.27dB)。Phase 2+ PIC 統合で論理エラー率を物理エラー率以下へ。</a:t>
             </a:r>
             <a:endParaRPr lang="en-US" sz="1300" dirty="0"/>
           </a:p>
@@ -12137,7 +12137,7 @@
                 <a:ea typeface="Arial" pitchFamily="34" charset="-122"/>
                 <a:cs typeface="Arial" pitchFamily="34" charset="-120"/>
               </a:rPr>
-              <a:t>9.5dB</a:t>
+              <a:t>9.3dB</a:t>
             </a:r>
             <a:endParaRPr lang="en-US" sz="2400" dirty="0"/>
           </a:p>
@@ -12215,7 +12215,7 @@
                 <a:ea typeface="Arial" pitchFamily="34" charset="-122"/>
                 <a:cs typeface="Arial" pitchFamily="34" charset="-120"/>
               </a:rPr>
-              <a:t>v3.1 BS モデル (現実Δ=0.12)</a:t>
+              <a:t>BS モデル (現実Δ=0.12)</a:t>
             </a:r>
             <a:endParaRPr lang="en-US" sz="900" dirty="0"/>
           </a:p>
@@ -12497,7 +12497,7 @@
                 <a:ea typeface="Arial" pitchFamily="34" charset="-122"/>
                 <a:cs typeface="Arial" pitchFamily="34" charset="-120"/>
               </a:rPr>
-              <a:t>~7×10⁻⁵</a:t>
+              <a:t>~3.3×10⁻⁴</a:t>
             </a:r>
             <a:endParaRPr lang="en-US" sz="2400" dirty="0"/>
           </a:p>
@@ -12575,7 +12575,7 @@
                 <a:ea typeface="Arial" pitchFamily="34" charset="-122"/>
                 <a:cs typeface="Arial" pitchFamily="34" charset="-120"/>
               </a:rPr>
-              <a:t>製品要件 (理論限界 5.7×10⁻⁷)</a:t>
+              <a:t>製品要件 (理論限界 6.1×10⁻⁷)</a:t>
             </a:r>
             <a:endParaRPr lang="en-US" sz="900" dirty="0"/>
           </a:p>
@@ -12788,7 +12788,7 @@
                 <a:ea typeface="Arial" pitchFamily="34" charset="-122"/>
                 <a:cs typeface="Arial" pitchFamily="34" charset="-120"/>
               </a:rPr>
-              <a:t>9.5 dB</a:t>
+              <a:t>9.3 dB</a:t>
             </a:r>
             <a:endParaRPr lang="en-US" sz="1100" dirty="0"/>
           </a:p>
@@ -13079,7 +13079,7 @@
                 <a:ea typeface="Arial" pitchFamily="34" charset="-122"/>
                 <a:cs typeface="Arial" pitchFamily="34" charset="-120"/>
               </a:rPr>
-              <a:t>→ Phase 2+ PIC 余裕 +3.4dB (PS) / +0.9dB (全モード) — 製品要件 p_L ≲ 10⁻⁴ を達成</a:t>
+              <a:t>→ Phase 2+ PIC 余裕 +3.4dB (PS) / +0.9dB (全モード) — 製品要件 p_L ≈ 3.3×10⁻⁴ を達成</a:t>
             </a:r>
             <a:endParaRPr lang="en-US" sz="1200" dirty="0"/>
           </a:p>
@@ -14980,7 +14980,7 @@
                 <a:ea typeface="Arial" pitchFamily="34" charset="-122"/>
                 <a:cs typeface="Arial" pitchFamily="34" charset="-120"/>
               </a:rPr>
-              <a:t>5.7×10⁻⁷ (MWPM)†</a:t>
+              <a:t>6.1×10⁻⁷ (MWPM)†</a:t>
             </a:r>
             <a:endParaRPr lang="en-US" sz="1200" dirty="0"/>
           </a:p>
@@ -15148,7 +15148,7 @@
                 <a:ea typeface="Arial" pitchFamily="34" charset="-122"/>
                 <a:cs typeface="Arial" pitchFamily="34" charset="-120"/>
               </a:rPr>
-              <a:t>† Max の p_L=5.7×10⁻⁷ は Phase 2+ PIC 全条件達成時の理論上限値。製品スペックは p_L ~7×10⁻⁵ (MWPM, d=7, L=0.27dB)。</a:t>
+              <a:t>† Max の p_L=6.1×10⁻⁷ は Phase 2+ PIC 全条件達成時の理論上限値。製品スペックは p_L ~3.3×10⁻⁴ (MWPM, d=7, L=0.27dB)。</a:t>
             </a:r>
             <a:endParaRPr lang="en-US" sz="900" dirty="0"/>
           </a:p>
@@ -19937,7 +19937,7 @@
                 <a:ea typeface="Arial" pitchFamily="34" charset="-122"/>
                 <a:cs typeface="Arial" pitchFamily="34" charset="-120"/>
               </a:rPr>
-              <a:t>Phase 0/1 は UF 350ns で実証 → Phase 2+ PIC で MWPM 510ns へ移行。製品要件 p_L~7×10⁻⁵ には MWPM 必須。</a:t>
+              <a:t>Phase 0/1 は UF 350ns で実証 → Phase 2+ PIC で MWPM 510ns へ移行。製品要件 p_L~3.3×10⁻⁴ には MWPM 必須。</a:t>
             </a:r>
             <a:endParaRPr lang="en-US" sz="1100" dirty="0"/>
           </a:p>

--- a/assets/TAROS_Investor_Pitch_Revised.pptx
+++ b/assets/TAROS_Investor_Pitch_Revised.pptx
@@ -3771,7 +3771,7 @@
                 <a:ea typeface="Arial" pitchFamily="34" charset="-122"/>
                 <a:cs typeface="Arial" pitchFamily="34" charset="-120"/>
               </a:rPr>
-              <a:t>v3.1</a:t>
+              <a:t/>
             </a:r>
             <a:endParaRPr lang="en-US" sz="4400" dirty="0"/>
           </a:p>
@@ -12827,7 +12827,7 @@
                 <a:ea typeface="Arial" pitchFamily="34" charset="-122"/>
                 <a:cs typeface="Arial" pitchFamily="34" charset="-120"/>
               </a:rPr>
-              <a:t>閾値 (全モード重み)</a:t>
+              <a:t/>
             </a:r>
             <a:endParaRPr lang="en-US" sz="1100" dirty="0"/>
           </a:p>
@@ -12843,6 +12843,30 @@
           <a:xfrm>
             <a:off x="2926080" y="5394960"/>
             <a:ext cx="6858000" cy="256032"/>
+          </a:xfrm>
+          <a:prstGeom prst="rect">
+            <a:avLst/>
+          </a:prstGeom>
+          <a:solidFill>
+            <a:srgbClr val="FFFFFF"/>
+          </a:solidFill>
+          <a:ln/>
+        </p:spPr>
+        <p:txBody>
+          <a:bodyPr/>
+          <a:p/>
+        </p:txBody>
+      </p:sp>
+      <p:sp>
+        <p:nvSpPr>
+          <p:cNvPr id="40" name="Shape 37"/>
+          <p:cNvSpPr/>
+          <p:nvPr/>
+        </p:nvSpPr>
+        <p:spPr>
+          <a:xfrm>
+            <a:off x="2926080" y="5394960"/>
+            <a:ext cx="6035040" cy="256032"/>
           </a:xfrm>
           <a:prstGeom prst="rect">
             <a:avLst/>
@@ -12859,30 +12883,6 @@
       </p:sp>
       <p:sp>
         <p:nvSpPr>
-          <p:cNvPr id="40" name="Shape 37"/>
-          <p:cNvSpPr/>
-          <p:nvPr/>
-        </p:nvSpPr>
-        <p:spPr>
-          <a:xfrm>
-            <a:off x="2926080" y="5394960"/>
-            <a:ext cx="6035040" cy="256032"/>
-          </a:xfrm>
-          <a:prstGeom prst="rect">
-            <a:avLst/>
-          </a:prstGeom>
-          <a:solidFill>
-            <a:srgbClr val="F89A2B"/>
-          </a:solidFill>
-          <a:ln/>
-        </p:spPr>
-        <p:txBody>
-          <a:bodyPr/>
-          <a:p/>
-        </p:txBody>
-      </p:sp>
-      <p:sp>
-        <p:nvSpPr>
           <p:cNvPr id="41" name="Text 38"/>
           <p:cNvSpPr/>
           <p:nvPr/>
@@ -12914,7 +12914,7 @@
                 <a:ea typeface="Arial" pitchFamily="34" charset="-122"/>
                 <a:cs typeface="Arial" pitchFamily="34" charset="-120"/>
               </a:rPr>
-              <a:t>8.8 dB</a:t>
+              <a:t/>
             </a:r>
             <a:endParaRPr lang="en-US" sz="1100" dirty="0"/>
           </a:p>
@@ -12928,7 +12928,7 @@
         </p:nvSpPr>
         <p:spPr>
           <a:xfrm>
-            <a:off x="777240" y="5788152"/>
+            <a:off x="777240" y="5376672"/>
             <a:ext cx="2103120" cy="274320"/>
           </a:xfrm>
           <a:prstGeom prst="rect">
@@ -12967,7 +12967,7 @@
         </p:nvSpPr>
         <p:spPr>
           <a:xfrm>
-            <a:off x="2926080" y="5806440"/>
+            <a:off x="2926080" y="5394960"/>
             <a:ext cx="6858000" cy="256032"/>
           </a:xfrm>
           <a:prstGeom prst="rect">
@@ -12991,7 +12991,7 @@
         </p:nvSpPr>
         <p:spPr>
           <a:xfrm>
-            <a:off x="2926080" y="5806440"/>
+            <a:off x="2926080" y="5394960"/>
             <a:ext cx="4320540" cy="256032"/>
           </a:xfrm>
           <a:prstGeom prst="rect">
@@ -13015,7 +13015,7 @@
         </p:nvSpPr>
         <p:spPr>
           <a:xfrm>
-            <a:off x="7292340" y="5788152"/>
+            <a:off x="7292340" y="5376672"/>
             <a:ext cx="822960" cy="274320"/>
           </a:xfrm>
           <a:prstGeom prst="rect">
@@ -13040,7 +13040,7 @@
                 <a:ea typeface="Arial" pitchFamily="34" charset="-122"/>
                 <a:cs typeface="Arial" pitchFamily="34" charset="-120"/>
               </a:rPr>
-              <a:t>6.3 dB</a:t>
+              <a:t>7.5 dB</a:t>
             </a:r>
             <a:endParaRPr lang="en-US" sz="1100" dirty="0"/>
           </a:p>
@@ -13054,7 +13054,7 @@
         </p:nvSpPr>
         <p:spPr>
           <a:xfrm>
-            <a:off x="457200" y="6035040"/>
+            <a:off x="457200" y="5623560"/>
             <a:ext cx="11247120" cy="365760"/>
           </a:xfrm>
           <a:prstGeom prst="rect">
@@ -13079,7 +13079,7 @@
                 <a:ea typeface="Arial" pitchFamily="34" charset="-122"/>
                 <a:cs typeface="Arial" pitchFamily="34" charset="-120"/>
               </a:rPr>
-              <a:t>→ Phase 2+ PIC 余裕 +3.4dB (PS) / +0.9dB (全モード) — 製品要件 p_L ≈ 3.3×10⁻⁴ を達成</a:t>
+              <a:t>→ Phase 2+ PIC 余裕 +1.8dB (postselection) — 製品要件 p_L ≈ 3.3×10⁻⁴ を達成</a:t>
             </a:r>
             <a:endParaRPr lang="en-US" sz="1200" dirty="0"/>
           </a:p>

--- a/assets/TAROS_Investor_Pitch_Revised.pptx
+++ b/assets/TAROS_Investor_Pitch_Revised.pptx
@@ -11157,7 +11157,7 @@
                 <a:ea typeface="Arial" pitchFamily="34" charset="-122"/>
                 <a:cs typeface="Arial" pitchFamily="34" charset="-120"/>
               </a:rPr>
-              <a:t>Phase 2+ PIC 統合で +3.4dB マージンを確保</a:t>
+              <a:t>Phase 2+ PIC 統合で +1.8dB マージンを確保</a:t>
             </a:r>
             <a:endParaRPr lang="en-US" sz="1100" dirty="0"/>
           </a:p>
@@ -12317,7 +12317,7 @@
                 <a:ea typeface="Arial" pitchFamily="34" charset="-122"/>
                 <a:cs typeface="Arial" pitchFamily="34" charset="-120"/>
               </a:rPr>
-              <a:t>~3×10⁻³</a:t>
+              <a:t>~4.9×10⁻³</a:t>
             </a:r>
             <a:endParaRPr lang="en-US" sz="2400" dirty="0"/>
           </a:p>

--- a/assets/TAROS_Investor_Pitch_Revised.pptx
+++ b/assets/TAROS_Investor_Pitch_Revised.pptx
@@ -2682,7 +2682,7 @@
                 <a:ea typeface="Arial" pitchFamily="34" charset="-122"/>
                 <a:cs typeface="Arial" pitchFamily="34" charset="-120"/>
               </a:rPr>
-              <a:t>AC アダプタで動く デスクサイド誤り訂正型量子コンピュータ</a:t>
+              <a:t>AC アダプタで動く デスクトップ誤り訂正型光量子コンピュータ</a:t>
             </a:r>
             <a:endParaRPr lang="en-US" sz="2600" dirty="0"/>
           </a:p>
@@ -8885,7 +8885,7 @@
                 <a:ea typeface="Arial" pitchFamily="34" charset="-122"/>
                 <a:cs typeface="Arial" pitchFamily="34" charset="-120"/>
               </a:rPr>
-              <a:t>デスクサイド</a:t>
+              <a:t>デスクトップ</a:t>
             </a:r>
             <a:endParaRPr lang="en-US" sz="2200" dirty="0"/>
           </a:p>

--- a/assets/TAROS_Investor_Pitch_Revised.pptx
+++ b/assets/TAROS_Investor_Pitch_Revised.pptx
@@ -3236,21 +3236,21 @@
         <p:spPr>
           <a:xfrm>
             <a:off x="868680" y="2743200"/>
-            <a:ext cx="10058400" cy="731520"/>
-          </a:xfrm>
-          <a:prstGeom prst="rect">
-            <a:avLst/>
-          </a:prstGeom>
-          <a:noFill/>
-        </p:spPr>
-        <p:txBody>
-          <a:bodyPr wrap="square">
-            <a:spAutoFit/>
-          </a:bodyPr>
-          <a:lstStyle/>
-          <a:p>
-            <a:pPr algn="l">
-              <a:defRPr sz="3200" b="1">
+            <a:ext cx="10058400" cy="548640"/>
+          </a:xfrm>
+          <a:prstGeom prst="rect">
+            <a:avLst/>
+          </a:prstGeom>
+          <a:noFill/>
+        </p:spPr>
+        <p:txBody>
+          <a:bodyPr wrap="square">
+            <a:spAutoFit/>
+          </a:bodyPr>
+          <a:lstStyle/>
+          <a:p>
+            <a:pPr algn="l">
+              <a:defRPr sz="2800" b="1">
                 <a:solidFill>
                   <a:srgbClr val="FFFFFF"/>
                 </a:solidFill>
@@ -3258,7 +3258,7 @@
               </a:defRPr>
             </a:pPr>
             <a:r>
-              <a:t>AC アダプタで動く デスクトップ誤り訂正型光量子コンピュータ</a:t>
+              <a:t>AC アダプタで動く</a:t>
             </a:r>
           </a:p>
         </p:txBody>
@@ -3271,7 +3271,43 @@
         </p:nvSpPr>
         <p:spPr>
           <a:xfrm>
-            <a:off x="868680" y="3657600"/>
+            <a:off x="868680" y="3200400"/>
+            <a:ext cx="10058400" cy="548640"/>
+          </a:xfrm>
+          <a:prstGeom prst="rect">
+            <a:avLst/>
+          </a:prstGeom>
+          <a:noFill/>
+        </p:spPr>
+        <p:txBody>
+          <a:bodyPr wrap="square">
+            <a:spAutoFit/>
+          </a:bodyPr>
+          <a:lstStyle/>
+          <a:p>
+            <a:pPr algn="l">
+              <a:defRPr sz="2800" b="1">
+                <a:solidFill>
+                  <a:srgbClr val="FFFFFF"/>
+                </a:solidFill>
+                <a:latin typeface="Meiryo"/>
+              </a:defRPr>
+            </a:pPr>
+            <a:r>
+              <a:t>デスクトップ誤り訂正型光量子コンピュータ</a:t>
+            </a:r>
+          </a:p>
+        </p:txBody>
+      </p:sp>
+      <p:sp>
+        <p:nvSpPr>
+          <p:cNvPr id="7" name="TextBox 6"/>
+          <p:cNvSpPr txBox="1"/>
+          <p:nvPr/>
+        </p:nvSpPr>
+        <p:spPr>
+          <a:xfrm>
+            <a:off x="868680" y="3840480"/>
             <a:ext cx="10058400" cy="457200"/>
           </a:xfrm>
           <a:prstGeom prst="rect">
@@ -3301,13 +3337,13 @@
       </p:sp>
       <p:sp>
         <p:nvSpPr>
-          <p:cNvPr id="7" name="TextBox 6"/>
-          <p:cNvSpPr txBox="1"/>
-          <p:nvPr/>
-        </p:nvSpPr>
-        <p:spPr>
-          <a:xfrm>
-            <a:off x="868680" y="4206240"/>
+          <p:cNvPr id="8" name="TextBox 7"/>
+          <p:cNvSpPr txBox="1"/>
+          <p:nvPr/>
+        </p:nvSpPr>
+        <p:spPr>
+          <a:xfrm>
+            <a:off x="868680" y="4389120"/>
             <a:ext cx="10058400" cy="457200"/>
           </a:xfrm>
           <a:prstGeom prst="rect">
@@ -3337,7 +3373,7 @@
       </p:sp>
       <p:sp>
         <p:nvSpPr>
-          <p:cNvPr id="8" name="TextBox 7"/>
+          <p:cNvPr id="9" name="TextBox 8"/>
           <p:cNvSpPr txBox="1"/>
           <p:nvPr/>
         </p:nvSpPr>
@@ -3373,7 +3409,7 @@
       </p:sp>
       <p:sp>
         <p:nvSpPr>
-          <p:cNvPr id="9" name="TextBox 8"/>
+          <p:cNvPr id="10" name="TextBox 9"/>
           <p:cNvSpPr txBox="1"/>
           <p:nvPr/>
         </p:nvSpPr>
@@ -3402,7 +3438,7 @@
               </a:defRPr>
             </a:pPr>
             <a:r>
-              <a:t>C o n f i d e n t i a l   |   v 4 . 0</a:t>
+              <a:t>C o n f i d e n t i a l   |   v 4 . 1</a:t>
             </a:r>
           </a:p>
         </p:txBody>
@@ -3593,21 +3629,21 @@
         <p:spPr>
           <a:xfrm>
             <a:off x="548640" y="1005840"/>
-            <a:ext cx="10972800" cy="731520"/>
-          </a:xfrm>
-          <a:prstGeom prst="rect">
-            <a:avLst/>
-          </a:prstGeom>
-          <a:noFill/>
-        </p:spPr>
-        <p:txBody>
-          <a:bodyPr wrap="square">
-            <a:spAutoFit/>
-          </a:bodyPr>
-          <a:lstStyle/>
-          <a:p>
-            <a:pPr algn="l">
-              <a:defRPr sz="3400" b="1">
+            <a:ext cx="10972800" cy="548640"/>
+          </a:xfrm>
+          <a:prstGeom prst="rect">
+            <a:avLst/>
+          </a:prstGeom>
+          <a:noFill/>
+        </p:spPr>
+        <p:txBody>
+          <a:bodyPr wrap="square">
+            <a:spAutoFit/>
+          </a:bodyPr>
+          <a:lstStyle/>
+          <a:p>
+            <a:pPr algn="l">
+              <a:defRPr sz="2800" b="1">
                 <a:solidFill>
                   <a:srgbClr val="212121"/>
                 </a:solidFill>
@@ -3628,8 +3664,8 @@
         </p:nvSpPr>
         <p:spPr>
           <a:xfrm>
-            <a:off x="548640" y="2011680"/>
-            <a:ext cx="2606040" cy="3200400"/>
+            <a:off x="548640" y="1737360"/>
+            <a:ext cx="5440680" cy="1920240"/>
           </a:xfrm>
           <a:prstGeom prst="rect">
             <a:avLst/>
@@ -3671,8 +3707,8 @@
         </p:nvSpPr>
         <p:spPr>
           <a:xfrm>
-            <a:off x="685800" y="2148840"/>
-            <a:ext cx="2331720" cy="548640"/>
+            <a:off x="731520" y="1874519"/>
+            <a:ext cx="1828800" cy="548640"/>
           </a:xfrm>
           <a:prstGeom prst="rect">
             <a:avLst/>
@@ -3707,8 +3743,8 @@
         </p:nvSpPr>
         <p:spPr>
           <a:xfrm>
-            <a:off x="685800" y="2651760"/>
-            <a:ext cx="2331720" cy="274320"/>
+            <a:off x="731520" y="2377439"/>
+            <a:ext cx="1828800" cy="228600"/>
           </a:xfrm>
           <a:prstGeom prst="rect">
             <a:avLst/>
@@ -3743,22 +3779,22 @@
         </p:nvSpPr>
         <p:spPr>
           <a:xfrm>
-            <a:off x="685800" y="3017520"/>
-            <a:ext cx="2331720" cy="365760"/>
-          </a:xfrm>
-          <a:prstGeom prst="rect">
-            <a:avLst/>
-          </a:prstGeom>
-          <a:noFill/>
-        </p:spPr>
-        <p:txBody>
-          <a:bodyPr wrap="square">
-            <a:spAutoFit/>
-          </a:bodyPr>
-          <a:lstStyle/>
-          <a:p>
-            <a:pPr algn="l">
-              <a:defRPr sz="1300" b="1">
+            <a:off x="2651760" y="1874519"/>
+            <a:ext cx="3108960" cy="365760"/>
+          </a:xfrm>
+          <a:prstGeom prst="rect">
+            <a:avLst/>
+          </a:prstGeom>
+          <a:noFill/>
+        </p:spPr>
+        <p:txBody>
+          <a:bodyPr wrap="square">
+            <a:spAutoFit/>
+          </a:bodyPr>
+          <a:lstStyle/>
+          <a:p>
+            <a:pPr algn="l">
+              <a:defRPr sz="1400" b="1">
                 <a:solidFill>
                   <a:srgbClr val="212121"/>
                 </a:solidFill>
@@ -3779,22 +3815,22 @@
         </p:nvSpPr>
         <p:spPr>
           <a:xfrm>
-            <a:off x="685800" y="3474720"/>
-            <a:ext cx="2331720" cy="1371600"/>
-          </a:xfrm>
-          <a:prstGeom prst="rect">
-            <a:avLst/>
-          </a:prstGeom>
-          <a:noFill/>
-        </p:spPr>
-        <p:txBody>
-          <a:bodyPr wrap="square">
-            <a:spAutoFit/>
-          </a:bodyPr>
-          <a:lstStyle/>
-          <a:p>
-            <a:pPr algn="l">
-              <a:defRPr sz="1000" b="0">
+            <a:off x="2651760" y="2286000"/>
+            <a:ext cx="3108960" cy="1188720"/>
+          </a:xfrm>
+          <a:prstGeom prst="rect">
+            <a:avLst/>
+          </a:prstGeom>
+          <a:noFill/>
+        </p:spPr>
+        <p:txBody>
+          <a:bodyPr wrap="square">
+            <a:spAutoFit/>
+          </a:bodyPr>
+          <a:lstStyle/>
+          <a:p>
+            <a:pPr algn="l">
+              <a:defRPr sz="1100" b="0">
                 <a:solidFill>
                   <a:srgbClr val="757575"/>
                 </a:solidFill>
@@ -3815,8 +3851,8 @@
         </p:nvSpPr>
         <p:spPr>
           <a:xfrm>
-            <a:off x="3337560" y="2011680"/>
-            <a:ext cx="2606040" cy="3200400"/>
+            <a:off x="6172200" y="1737360"/>
+            <a:ext cx="5440680" cy="1920240"/>
           </a:xfrm>
           <a:prstGeom prst="rect">
             <a:avLst/>
@@ -3858,8 +3894,8 @@
         </p:nvSpPr>
         <p:spPr>
           <a:xfrm>
-            <a:off x="3474720" y="2148840"/>
-            <a:ext cx="2331720" cy="548640"/>
+            <a:off x="6355080" y="1874519"/>
+            <a:ext cx="1828800" cy="548640"/>
           </a:xfrm>
           <a:prstGeom prst="rect">
             <a:avLst/>
@@ -3894,8 +3930,8 @@
         </p:nvSpPr>
         <p:spPr>
           <a:xfrm>
-            <a:off x="3474720" y="2651760"/>
-            <a:ext cx="2331720" cy="274320"/>
+            <a:off x="6355080" y="2377439"/>
+            <a:ext cx="1828800" cy="228600"/>
           </a:xfrm>
           <a:prstGeom prst="rect">
             <a:avLst/>
@@ -3930,22 +3966,22 @@
         </p:nvSpPr>
         <p:spPr>
           <a:xfrm>
-            <a:off x="3474720" y="3017520"/>
-            <a:ext cx="2331720" cy="365760"/>
-          </a:xfrm>
-          <a:prstGeom prst="rect">
-            <a:avLst/>
-          </a:prstGeom>
-          <a:noFill/>
-        </p:spPr>
-        <p:txBody>
-          <a:bodyPr wrap="square">
-            <a:spAutoFit/>
-          </a:bodyPr>
-          <a:lstStyle/>
-          <a:p>
-            <a:pPr algn="l">
-              <a:defRPr sz="1300" b="1">
+            <a:off x="8275320" y="1874519"/>
+            <a:ext cx="3108960" cy="365760"/>
+          </a:xfrm>
+          <a:prstGeom prst="rect">
+            <a:avLst/>
+          </a:prstGeom>
+          <a:noFill/>
+        </p:spPr>
+        <p:txBody>
+          <a:bodyPr wrap="square">
+            <a:spAutoFit/>
+          </a:bodyPr>
+          <a:lstStyle/>
+          <a:p>
+            <a:pPr algn="l">
+              <a:defRPr sz="1400" b="1">
                 <a:solidFill>
                   <a:srgbClr val="212121"/>
                 </a:solidFill>
@@ -3966,22 +4002,22 @@
         </p:nvSpPr>
         <p:spPr>
           <a:xfrm>
-            <a:off x="3474720" y="3474720"/>
-            <a:ext cx="2331720" cy="1371600"/>
-          </a:xfrm>
-          <a:prstGeom prst="rect">
-            <a:avLst/>
-          </a:prstGeom>
-          <a:noFill/>
-        </p:spPr>
-        <p:txBody>
-          <a:bodyPr wrap="square">
-            <a:spAutoFit/>
-          </a:bodyPr>
-          <a:lstStyle/>
-          <a:p>
-            <a:pPr algn="l">
-              <a:defRPr sz="1000" b="0">
+            <a:off x="8275320" y="2286000"/>
+            <a:ext cx="3108960" cy="1188720"/>
+          </a:xfrm>
+          <a:prstGeom prst="rect">
+            <a:avLst/>
+          </a:prstGeom>
+          <a:noFill/>
+        </p:spPr>
+        <p:txBody>
+          <a:bodyPr wrap="square">
+            <a:spAutoFit/>
+          </a:bodyPr>
+          <a:lstStyle/>
+          <a:p>
+            <a:pPr algn="l">
+              <a:defRPr sz="1100" b="0">
                 <a:solidFill>
                   <a:srgbClr val="757575"/>
                 </a:solidFill>
@@ -4002,8 +4038,8 @@
         </p:nvSpPr>
         <p:spPr>
           <a:xfrm>
-            <a:off x="6126479" y="2011680"/>
-            <a:ext cx="2606040" cy="3200400"/>
+            <a:off x="548640" y="3840479"/>
+            <a:ext cx="5440680" cy="1920240"/>
           </a:xfrm>
           <a:prstGeom prst="rect">
             <a:avLst/>
@@ -4045,8 +4081,8 @@
         </p:nvSpPr>
         <p:spPr>
           <a:xfrm>
-            <a:off x="6263640" y="2148840"/>
-            <a:ext cx="2331720" cy="548640"/>
+            <a:off x="731520" y="3977639"/>
+            <a:ext cx="1828800" cy="548640"/>
           </a:xfrm>
           <a:prstGeom prst="rect">
             <a:avLst/>
@@ -4081,8 +4117,8 @@
         </p:nvSpPr>
         <p:spPr>
           <a:xfrm>
-            <a:off x="6263640" y="2651760"/>
-            <a:ext cx="2331720" cy="274320"/>
+            <a:off x="731520" y="4480559"/>
+            <a:ext cx="1828800" cy="228600"/>
           </a:xfrm>
           <a:prstGeom prst="rect">
             <a:avLst/>
@@ -4117,22 +4153,22 @@
         </p:nvSpPr>
         <p:spPr>
           <a:xfrm>
-            <a:off x="6263640" y="3017520"/>
-            <a:ext cx="2331720" cy="365760"/>
-          </a:xfrm>
-          <a:prstGeom prst="rect">
-            <a:avLst/>
-          </a:prstGeom>
-          <a:noFill/>
-        </p:spPr>
-        <p:txBody>
-          <a:bodyPr wrap="square">
-            <a:spAutoFit/>
-          </a:bodyPr>
-          <a:lstStyle/>
-          <a:p>
-            <a:pPr algn="l">
-              <a:defRPr sz="1300" b="1">
+            <a:off x="2651760" y="3977639"/>
+            <a:ext cx="3108960" cy="365760"/>
+          </a:xfrm>
+          <a:prstGeom prst="rect">
+            <a:avLst/>
+          </a:prstGeom>
+          <a:noFill/>
+        </p:spPr>
+        <p:txBody>
+          <a:bodyPr wrap="square">
+            <a:spAutoFit/>
+          </a:bodyPr>
+          <a:lstStyle/>
+          <a:p>
+            <a:pPr algn="l">
+              <a:defRPr sz="1400" b="1">
                 <a:solidFill>
                   <a:srgbClr val="212121"/>
                 </a:solidFill>
@@ -4153,22 +4189,22 @@
         </p:nvSpPr>
         <p:spPr>
           <a:xfrm>
-            <a:off x="6263640" y="3474720"/>
-            <a:ext cx="2331720" cy="1371600"/>
-          </a:xfrm>
-          <a:prstGeom prst="rect">
-            <a:avLst/>
-          </a:prstGeom>
-          <a:noFill/>
-        </p:spPr>
-        <p:txBody>
-          <a:bodyPr wrap="square">
-            <a:spAutoFit/>
-          </a:bodyPr>
-          <a:lstStyle/>
-          <a:p>
-            <a:pPr algn="l">
-              <a:defRPr sz="1000" b="0">
+            <a:off x="2651760" y="4389119"/>
+            <a:ext cx="3108960" cy="1188720"/>
+          </a:xfrm>
+          <a:prstGeom prst="rect">
+            <a:avLst/>
+          </a:prstGeom>
+          <a:noFill/>
+        </p:spPr>
+        <p:txBody>
+          <a:bodyPr wrap="square">
+            <a:spAutoFit/>
+          </a:bodyPr>
+          <a:lstStyle/>
+          <a:p>
+            <a:pPr algn="l">
+              <a:defRPr sz="1100" b="0">
                 <a:solidFill>
                   <a:srgbClr val="757575"/>
                 </a:solidFill>
@@ -4189,8 +4225,8 @@
         </p:nvSpPr>
         <p:spPr>
           <a:xfrm>
-            <a:off x="8915399" y="2011680"/>
-            <a:ext cx="2606040" cy="3200400"/>
+            <a:off x="6172200" y="3840479"/>
+            <a:ext cx="5440680" cy="1920240"/>
           </a:xfrm>
           <a:prstGeom prst="rect">
             <a:avLst/>
@@ -4232,8 +4268,8 @@
         </p:nvSpPr>
         <p:spPr>
           <a:xfrm>
-            <a:off x="9052559" y="2148840"/>
-            <a:ext cx="2331720" cy="548640"/>
+            <a:off x="6355080" y="3977639"/>
+            <a:ext cx="1828800" cy="548640"/>
           </a:xfrm>
           <a:prstGeom prst="rect">
             <a:avLst/>
@@ -4268,63 +4304,66 @@
         </p:nvSpPr>
         <p:spPr>
           <a:xfrm>
-            <a:off x="9052559" y="2651760"/>
-            <a:ext cx="2331720" cy="274320"/>
-          </a:xfrm>
-          <a:prstGeom prst="rect">
-            <a:avLst/>
-          </a:prstGeom>
-          <a:noFill/>
-        </p:spPr>
-        <p:txBody>
-          <a:bodyPr wrap="square">
-            <a:spAutoFit/>
-          </a:bodyPr>
-          <a:lstStyle/>
-          <a:p>
-            <a:pPr algn="l">
-              <a:defRPr sz="1000" b="0">
+            <a:off x="8275320" y="3977639"/>
+            <a:ext cx="3108960" cy="365760"/>
+          </a:xfrm>
+          <a:prstGeom prst="rect">
+            <a:avLst/>
+          </a:prstGeom>
+          <a:noFill/>
+        </p:spPr>
+        <p:txBody>
+          <a:bodyPr wrap="square">
+            <a:spAutoFit/>
+          </a:bodyPr>
+          <a:lstStyle/>
+          <a:p>
+            <a:pPr algn="l">
+              <a:defRPr sz="1400" b="1">
+                <a:solidFill>
+                  <a:srgbClr val="212121"/>
+                </a:solidFill>
+                <a:latin typeface="Meiryo"/>
+              </a:defRPr>
+            </a:pPr>
+            <a:r>
+              <a:t>ノイズバジェット (BSモデル)</a:t>
+            </a:r>
+          </a:p>
+        </p:txBody>
+      </p:sp>
+      <p:sp>
+        <p:nvSpPr>
+          <p:cNvPr id="25" name="TextBox 24"/>
+          <p:cNvSpPr txBox="1"/>
+          <p:nvPr/>
+        </p:nvSpPr>
+        <p:spPr>
+          <a:xfrm>
+            <a:off x="8275320" y="4389119"/>
+            <a:ext cx="3108960" cy="1188720"/>
+          </a:xfrm>
+          <a:prstGeom prst="rect">
+            <a:avLst/>
+          </a:prstGeom>
+          <a:noFill/>
+        </p:spPr>
+        <p:txBody>
+          <a:bodyPr wrap="square">
+            <a:spAutoFit/>
+          </a:bodyPr>
+          <a:lstStyle/>
+          <a:p>
+            <a:pPr algn="l">
+              <a:defRPr sz="1100" b="0">
                 <a:solidFill>
                   <a:srgbClr val="757575"/>
                 </a:solidFill>
                 <a:latin typeface="Meiryo"/>
               </a:defRPr>
             </a:pPr>
-          </a:p>
-        </p:txBody>
-      </p:sp>
-      <p:sp>
-        <p:nvSpPr>
-          <p:cNvPr id="25" name="TextBox 24"/>
-          <p:cNvSpPr txBox="1"/>
-          <p:nvPr/>
-        </p:nvSpPr>
-        <p:spPr>
-          <a:xfrm>
-            <a:off x="9052559" y="3017520"/>
-            <a:ext cx="2331720" cy="365760"/>
-          </a:xfrm>
-          <a:prstGeom prst="rect">
-            <a:avLst/>
-          </a:prstGeom>
-          <a:noFill/>
-        </p:spPr>
-        <p:txBody>
-          <a:bodyPr wrap="square">
-            <a:spAutoFit/>
-          </a:bodyPr>
-          <a:lstStyle/>
-          <a:p>
-            <a:pPr algn="l">
-              <a:defRPr sz="1300" b="1">
-                <a:solidFill>
-                  <a:srgbClr val="212121"/>
-                </a:solidFill>
-                <a:latin typeface="Meiryo"/>
-              </a:defRPr>
-            </a:pPr>
-            <a:r>
-              <a:t>ノイズバジェット (BSモデル)</a:t>
+            <a:r>
+              <a:t>GAWBS, EO消光比, AWG, PIC統合損失など13項目をBSモデルで個別計上。隠れた損失なし。</a:t>
             </a:r>
           </a:p>
         </p:txBody>
@@ -4337,44 +4376,8 @@
         </p:nvSpPr>
         <p:spPr>
           <a:xfrm>
-            <a:off x="9052559" y="3474720"/>
-            <a:ext cx="2331720" cy="1371600"/>
-          </a:xfrm>
-          <a:prstGeom prst="rect">
-            <a:avLst/>
-          </a:prstGeom>
-          <a:noFill/>
-        </p:spPr>
-        <p:txBody>
-          <a:bodyPr wrap="square">
-            <a:spAutoFit/>
-          </a:bodyPr>
-          <a:lstStyle/>
-          <a:p>
-            <a:pPr algn="l">
-              <a:defRPr sz="1000" b="0">
-                <a:solidFill>
-                  <a:srgbClr val="757575"/>
-                </a:solidFill>
-                <a:latin typeface="Meiryo"/>
-              </a:defRPr>
-            </a:pPr>
-            <a:r>
-              <a:t>GAWBS, EO消光比, AWG, PIC統合損失など13項目をBSモデルで個別計上。隠れた損失なし。</a:t>
-            </a:r>
-          </a:p>
-        </p:txBody>
-      </p:sp>
-      <p:sp>
-        <p:nvSpPr>
-          <p:cNvPr id="27" name="TextBox 26"/>
-          <p:cNvSpPr txBox="1"/>
-          <p:nvPr/>
-        </p:nvSpPr>
-        <p:spPr>
-          <a:xfrm>
-            <a:off x="548640" y="5486400"/>
-            <a:ext cx="10972800" cy="457200"/>
+            <a:off x="548640" y="5943600"/>
+            <a:ext cx="10972800" cy="365760"/>
           </a:xfrm>
           <a:prstGeom prst="rect">
             <a:avLst/>
@@ -4587,21 +4590,21 @@
         <p:spPr>
           <a:xfrm>
             <a:off x="548640" y="1005840"/>
-            <a:ext cx="10972800" cy="640080"/>
-          </a:xfrm>
-          <a:prstGeom prst="rect">
-            <a:avLst/>
-          </a:prstGeom>
-          <a:noFill/>
-        </p:spPr>
-        <p:txBody>
-          <a:bodyPr wrap="square">
-            <a:spAutoFit/>
-          </a:bodyPr>
-          <a:lstStyle/>
-          <a:p>
-            <a:pPr algn="l">
-              <a:defRPr sz="3400" b="1">
+            <a:ext cx="10972800" cy="548640"/>
+          </a:xfrm>
+          <a:prstGeom prst="rect">
+            <a:avLst/>
+          </a:prstGeom>
+          <a:noFill/>
+        </p:spPr>
+        <p:txBody>
+          <a:bodyPr wrap="square">
+            <a:spAutoFit/>
+          </a:bodyPr>
+          <a:lstStyle/>
+          <a:p>
+            <a:pPr algn="l">
+              <a:defRPr sz="3000" b="1">
                 <a:solidFill>
                   <a:srgbClr val="212121"/>
                 </a:solidFill>
@@ -4622,7 +4625,93 @@
         </p:nvSpPr>
         <p:spPr>
           <a:xfrm>
-            <a:off x="548640" y="1828800"/>
+            <a:off x="548640" y="2743200"/>
+            <a:ext cx="10972800" cy="36576"/>
+          </a:xfrm>
+          <a:prstGeom prst="rect">
+            <a:avLst/>
+          </a:prstGeom>
+          <a:solidFill>
+            <a:srgbClr val="00BCD4"/>
+          </a:solidFill>
+          <a:ln>
+            <a:noFill/>
+          </a:ln>
+        </p:spPr>
+        <p:style>
+          <a:lnRef idx="1">
+            <a:schemeClr val="accent1"/>
+          </a:lnRef>
+          <a:fillRef idx="3">
+            <a:schemeClr val="accent1"/>
+          </a:fillRef>
+          <a:effectRef idx="2">
+            <a:schemeClr val="accent1"/>
+          </a:effectRef>
+          <a:fontRef idx="minor">
+            <a:schemeClr val="lt1"/>
+          </a:fontRef>
+        </p:style>
+        <p:txBody>
+          <a:bodyPr rtlCol="0" anchor="ctr"/>
+          <a:lstStyle/>
+          <a:p>
+            <a:pPr algn="ctr"/>
+          </a:p>
+        </p:txBody>
+      </p:sp>
+      <p:sp>
+        <p:nvSpPr>
+          <p:cNvPr id="8" name="Rectangle 7"/>
+          <p:cNvSpPr/>
+          <p:nvPr/>
+        </p:nvSpPr>
+        <p:spPr>
+          <a:xfrm>
+            <a:off x="1645919" y="2606040"/>
+            <a:ext cx="320040" cy="320040"/>
+          </a:xfrm>
+          <a:prstGeom prst="rect">
+            <a:avLst/>
+          </a:prstGeom>
+          <a:solidFill>
+            <a:srgbClr val="00BCD4"/>
+          </a:solidFill>
+          <a:ln>
+            <a:noFill/>
+          </a:ln>
+        </p:spPr>
+        <p:style>
+          <a:lnRef idx="1">
+            <a:schemeClr val="accent1"/>
+          </a:lnRef>
+          <a:fillRef idx="3">
+            <a:schemeClr val="accent1"/>
+          </a:fillRef>
+          <a:effectRef idx="2">
+            <a:schemeClr val="accent1"/>
+          </a:effectRef>
+          <a:fontRef idx="minor">
+            <a:schemeClr val="lt1"/>
+          </a:fontRef>
+        </p:style>
+        <p:txBody>
+          <a:bodyPr rtlCol="0" anchor="ctr"/>
+          <a:lstStyle/>
+          <a:p>
+            <a:pPr algn="ctr"/>
+          </a:p>
+        </p:txBody>
+      </p:sp>
+      <p:sp>
+        <p:nvSpPr>
+          <p:cNvPr id="9" name="Rectangle 8"/>
+          <p:cNvSpPr/>
+          <p:nvPr/>
+        </p:nvSpPr>
+        <p:spPr>
+          <a:xfrm>
+            <a:off x="548640" y="1645920"/>
             <a:ext cx="2606040" cy="2286000"/>
           </a:xfrm>
           <a:prstGeom prst="rect">
@@ -4659,14 +4748,14 @@
       </p:sp>
       <p:sp>
         <p:nvSpPr>
-          <p:cNvPr id="8" name="TextBox 7"/>
-          <p:cNvSpPr txBox="1"/>
-          <p:nvPr/>
-        </p:nvSpPr>
-        <p:spPr>
-          <a:xfrm>
-            <a:off x="731520" y="1920240"/>
-            <a:ext cx="2240280" cy="274320"/>
+          <p:cNvPr id="10" name="TextBox 9"/>
+          <p:cNvSpPr txBox="1"/>
+          <p:nvPr/>
+        </p:nvSpPr>
+        <p:spPr>
+          <a:xfrm>
+            <a:off x="685800" y="1737360"/>
+            <a:ext cx="2331720" cy="228600"/>
           </a:xfrm>
           <a:prstGeom prst="rect">
             <a:avLst/>
@@ -4695,14 +4784,14 @@
       </p:sp>
       <p:sp>
         <p:nvSpPr>
-          <p:cNvPr id="9" name="TextBox 8"/>
-          <p:cNvSpPr txBox="1"/>
-          <p:nvPr/>
-        </p:nvSpPr>
-        <p:spPr>
-          <a:xfrm>
-            <a:off x="731520" y="2194560"/>
-            <a:ext cx="2240280" cy="228600"/>
+          <p:cNvPr id="11" name="TextBox 10"/>
+          <p:cNvSpPr txBox="1"/>
+          <p:nvPr/>
+        </p:nvSpPr>
+        <p:spPr>
+          <a:xfrm>
+            <a:off x="685800" y="1965960"/>
+            <a:ext cx="2331720" cy="182880"/>
           </a:xfrm>
           <a:prstGeom prst="rect">
             <a:avLst/>
@@ -4731,28 +4820,28 @@
       </p:sp>
       <p:sp>
         <p:nvSpPr>
-          <p:cNvPr id="10" name="TextBox 9"/>
-          <p:cNvSpPr txBox="1"/>
-          <p:nvPr/>
-        </p:nvSpPr>
-        <p:spPr>
-          <a:xfrm>
-            <a:off x="731520" y="2560320"/>
-            <a:ext cx="2240280" cy="457200"/>
-          </a:xfrm>
-          <a:prstGeom prst="rect">
-            <a:avLst/>
-          </a:prstGeom>
-          <a:noFill/>
-        </p:spPr>
-        <p:txBody>
-          <a:bodyPr wrap="square">
-            <a:spAutoFit/>
-          </a:bodyPr>
-          <a:lstStyle/>
-          <a:p>
-            <a:pPr algn="l">
-              <a:defRPr sz="1600" b="1">
+          <p:cNvPr id="12" name="TextBox 11"/>
+          <p:cNvSpPr txBox="1"/>
+          <p:nvPr/>
+        </p:nvSpPr>
+        <p:spPr>
+          <a:xfrm>
+            <a:off x="685800" y="2240280"/>
+            <a:ext cx="2331720" cy="457200"/>
+          </a:xfrm>
+          <a:prstGeom prst="rect">
+            <a:avLst/>
+          </a:prstGeom>
+          <a:noFill/>
+        </p:spPr>
+        <p:txBody>
+          <a:bodyPr wrap="square">
+            <a:spAutoFit/>
+          </a:bodyPr>
+          <a:lstStyle/>
+          <a:p>
+            <a:pPr algn="l">
+              <a:defRPr sz="1400" b="1">
                 <a:solidFill>
                   <a:srgbClr val="FFFFFF"/>
                 </a:solidFill>
@@ -4767,28 +4856,28 @@
       </p:sp>
       <p:sp>
         <p:nvSpPr>
-          <p:cNvPr id="11" name="TextBox 10"/>
-          <p:cNvSpPr txBox="1"/>
-          <p:nvPr/>
-        </p:nvSpPr>
-        <p:spPr>
-          <a:xfrm>
-            <a:off x="731520" y="3200400"/>
-            <a:ext cx="2240280" cy="457200"/>
-          </a:xfrm>
-          <a:prstGeom prst="rect">
-            <a:avLst/>
-          </a:prstGeom>
-          <a:noFill/>
-        </p:spPr>
-        <p:txBody>
-          <a:bodyPr wrap="square">
-            <a:spAutoFit/>
-          </a:bodyPr>
-          <a:lstStyle/>
-          <a:p>
-            <a:pPr algn="l">
-              <a:defRPr sz="2400" b="1">
+          <p:cNvPr id="13" name="TextBox 12"/>
+          <p:cNvSpPr txBox="1"/>
+          <p:nvPr/>
+        </p:nvSpPr>
+        <p:spPr>
+          <a:xfrm>
+            <a:off x="685800" y="2743200"/>
+            <a:ext cx="2331720" cy="457200"/>
+          </a:xfrm>
+          <a:prstGeom prst="rect">
+            <a:avLst/>
+          </a:prstGeom>
+          <a:noFill/>
+        </p:spPr>
+        <p:txBody>
+          <a:bodyPr wrap="square">
+            <a:spAutoFit/>
+          </a:bodyPr>
+          <a:lstStyle/>
+          <a:p>
+            <a:pPr algn="l">
+              <a:defRPr sz="2200" b="1">
                 <a:solidFill>
                   <a:srgbClr val="00BCD4"/>
                 </a:solidFill>
@@ -4803,13 +4892,56 @@
       </p:sp>
       <p:sp>
         <p:nvSpPr>
-          <p:cNvPr id="12" name="Rectangle 11"/>
+          <p:cNvPr id="14" name="Rectangle 13"/>
           <p:cNvSpPr/>
           <p:nvPr/>
         </p:nvSpPr>
         <p:spPr>
           <a:xfrm>
-            <a:off x="3337560" y="1828800"/>
+            <a:off x="4434840" y="2606040"/>
+            <a:ext cx="320040" cy="320040"/>
+          </a:xfrm>
+          <a:prstGeom prst="rect">
+            <a:avLst/>
+          </a:prstGeom>
+          <a:solidFill>
+            <a:srgbClr val="00BCD4"/>
+          </a:solidFill>
+          <a:ln>
+            <a:noFill/>
+          </a:ln>
+        </p:spPr>
+        <p:style>
+          <a:lnRef idx="1">
+            <a:schemeClr val="accent1"/>
+          </a:lnRef>
+          <a:fillRef idx="3">
+            <a:schemeClr val="accent1"/>
+          </a:fillRef>
+          <a:effectRef idx="2">
+            <a:schemeClr val="accent1"/>
+          </a:effectRef>
+          <a:fontRef idx="minor">
+            <a:schemeClr val="lt1"/>
+          </a:fontRef>
+        </p:style>
+        <p:txBody>
+          <a:bodyPr rtlCol="0" anchor="ctr"/>
+          <a:lstStyle/>
+          <a:p>
+            <a:pPr algn="ctr"/>
+          </a:p>
+        </p:txBody>
+      </p:sp>
+      <p:sp>
+        <p:nvSpPr>
+          <p:cNvPr id="15" name="Rectangle 14"/>
+          <p:cNvSpPr/>
+          <p:nvPr/>
+        </p:nvSpPr>
+        <p:spPr>
+          <a:xfrm>
+            <a:off x="3337560" y="3017520"/>
             <a:ext cx="2606040" cy="2286000"/>
           </a:xfrm>
           <a:prstGeom prst="rect">
@@ -4846,14 +4978,14 @@
       </p:sp>
       <p:sp>
         <p:nvSpPr>
-          <p:cNvPr id="13" name="TextBox 12"/>
-          <p:cNvSpPr txBox="1"/>
-          <p:nvPr/>
-        </p:nvSpPr>
-        <p:spPr>
-          <a:xfrm>
-            <a:off x="3520440" y="1920240"/>
-            <a:ext cx="2240280" cy="274320"/>
+          <p:cNvPr id="16" name="TextBox 15"/>
+          <p:cNvSpPr txBox="1"/>
+          <p:nvPr/>
+        </p:nvSpPr>
+        <p:spPr>
+          <a:xfrm>
+            <a:off x="3474720" y="3108960"/>
+            <a:ext cx="2331720" cy="228600"/>
           </a:xfrm>
           <a:prstGeom prst="rect">
             <a:avLst/>
@@ -4882,14 +5014,14 @@
       </p:sp>
       <p:sp>
         <p:nvSpPr>
-          <p:cNvPr id="14" name="TextBox 13"/>
-          <p:cNvSpPr txBox="1"/>
-          <p:nvPr/>
-        </p:nvSpPr>
-        <p:spPr>
-          <a:xfrm>
-            <a:off x="3520440" y="2194560"/>
-            <a:ext cx="2240280" cy="228600"/>
+          <p:cNvPr id="17" name="TextBox 16"/>
+          <p:cNvSpPr txBox="1"/>
+          <p:nvPr/>
+        </p:nvSpPr>
+        <p:spPr>
+          <a:xfrm>
+            <a:off x="3474720" y="3337560"/>
+            <a:ext cx="2331720" cy="182880"/>
           </a:xfrm>
           <a:prstGeom prst="rect">
             <a:avLst/>
@@ -4918,28 +5050,28 @@
       </p:sp>
       <p:sp>
         <p:nvSpPr>
-          <p:cNvPr id="15" name="TextBox 14"/>
-          <p:cNvSpPr txBox="1"/>
-          <p:nvPr/>
-        </p:nvSpPr>
-        <p:spPr>
-          <a:xfrm>
-            <a:off x="3520440" y="2560320"/>
-            <a:ext cx="2240280" cy="457200"/>
-          </a:xfrm>
-          <a:prstGeom prst="rect">
-            <a:avLst/>
-          </a:prstGeom>
-          <a:noFill/>
-        </p:spPr>
-        <p:txBody>
-          <a:bodyPr wrap="square">
-            <a:spAutoFit/>
-          </a:bodyPr>
-          <a:lstStyle/>
-          <a:p>
-            <a:pPr algn="l">
-              <a:defRPr sz="1600" b="1">
+          <p:cNvPr id="18" name="TextBox 17"/>
+          <p:cNvSpPr txBox="1"/>
+          <p:nvPr/>
+        </p:nvSpPr>
+        <p:spPr>
+          <a:xfrm>
+            <a:off x="3474720" y="3611879"/>
+            <a:ext cx="2331720" cy="457200"/>
+          </a:xfrm>
+          <a:prstGeom prst="rect">
+            <a:avLst/>
+          </a:prstGeom>
+          <a:noFill/>
+        </p:spPr>
+        <p:txBody>
+          <a:bodyPr wrap="square">
+            <a:spAutoFit/>
+          </a:bodyPr>
+          <a:lstStyle/>
+          <a:p>
+            <a:pPr algn="l">
+              <a:defRPr sz="1400" b="1">
                 <a:solidFill>
                   <a:srgbClr val="212121"/>
                 </a:solidFill>
@@ -4954,28 +5086,28 @@
       </p:sp>
       <p:sp>
         <p:nvSpPr>
-          <p:cNvPr id="16" name="TextBox 15"/>
-          <p:cNvSpPr txBox="1"/>
-          <p:nvPr/>
-        </p:nvSpPr>
-        <p:spPr>
-          <a:xfrm>
-            <a:off x="3520440" y="3200400"/>
-            <a:ext cx="2240280" cy="457200"/>
-          </a:xfrm>
-          <a:prstGeom prst="rect">
-            <a:avLst/>
-          </a:prstGeom>
-          <a:noFill/>
-        </p:spPr>
-        <p:txBody>
-          <a:bodyPr wrap="square">
-            <a:spAutoFit/>
-          </a:bodyPr>
-          <a:lstStyle/>
-          <a:p>
-            <a:pPr algn="l">
-              <a:defRPr sz="2400" b="1">
+          <p:cNvPr id="19" name="TextBox 18"/>
+          <p:cNvSpPr txBox="1"/>
+          <p:nvPr/>
+        </p:nvSpPr>
+        <p:spPr>
+          <a:xfrm>
+            <a:off x="3474720" y="4114800"/>
+            <a:ext cx="2331720" cy="457200"/>
+          </a:xfrm>
+          <a:prstGeom prst="rect">
+            <a:avLst/>
+          </a:prstGeom>
+          <a:noFill/>
+        </p:spPr>
+        <p:txBody>
+          <a:bodyPr wrap="square">
+            <a:spAutoFit/>
+          </a:bodyPr>
+          <a:lstStyle/>
+          <a:p>
+            <a:pPr algn="l">
+              <a:defRPr sz="2200" b="1">
                 <a:solidFill>
                   <a:srgbClr val="212121"/>
                 </a:solidFill>
@@ -4990,13 +5122,56 @@
       </p:sp>
       <p:sp>
         <p:nvSpPr>
-          <p:cNvPr id="17" name="Rectangle 16"/>
+          <p:cNvPr id="20" name="Rectangle 19"/>
           <p:cNvSpPr/>
           <p:nvPr/>
         </p:nvSpPr>
         <p:spPr>
           <a:xfrm>
-            <a:off x="6126479" y="1828800"/>
+            <a:off x="7223759" y="2606040"/>
+            <a:ext cx="320040" cy="320040"/>
+          </a:xfrm>
+          <a:prstGeom prst="rect">
+            <a:avLst/>
+          </a:prstGeom>
+          <a:solidFill>
+            <a:srgbClr val="00BCD4"/>
+          </a:solidFill>
+          <a:ln>
+            <a:noFill/>
+          </a:ln>
+        </p:spPr>
+        <p:style>
+          <a:lnRef idx="1">
+            <a:schemeClr val="accent1"/>
+          </a:lnRef>
+          <a:fillRef idx="3">
+            <a:schemeClr val="accent1"/>
+          </a:fillRef>
+          <a:effectRef idx="2">
+            <a:schemeClr val="accent1"/>
+          </a:effectRef>
+          <a:fontRef idx="minor">
+            <a:schemeClr val="lt1"/>
+          </a:fontRef>
+        </p:style>
+        <p:txBody>
+          <a:bodyPr rtlCol="0" anchor="ctr"/>
+          <a:lstStyle/>
+          <a:p>
+            <a:pPr algn="ctr"/>
+          </a:p>
+        </p:txBody>
+      </p:sp>
+      <p:sp>
+        <p:nvSpPr>
+          <p:cNvPr id="21" name="Rectangle 20"/>
+          <p:cNvSpPr/>
+          <p:nvPr/>
+        </p:nvSpPr>
+        <p:spPr>
+          <a:xfrm>
+            <a:off x="6126479" y="1645920"/>
             <a:ext cx="2606040" cy="2286000"/>
           </a:xfrm>
           <a:prstGeom prst="rect">
@@ -5033,14 +5208,14 @@
       </p:sp>
       <p:sp>
         <p:nvSpPr>
-          <p:cNvPr id="18" name="TextBox 17"/>
-          <p:cNvSpPr txBox="1"/>
-          <p:nvPr/>
-        </p:nvSpPr>
-        <p:spPr>
-          <a:xfrm>
-            <a:off x="6309359" y="1920240"/>
-            <a:ext cx="2240280" cy="274320"/>
+          <p:cNvPr id="22" name="TextBox 21"/>
+          <p:cNvSpPr txBox="1"/>
+          <p:nvPr/>
+        </p:nvSpPr>
+        <p:spPr>
+          <a:xfrm>
+            <a:off x="6263640" y="1737360"/>
+            <a:ext cx="2331720" cy="228600"/>
           </a:xfrm>
           <a:prstGeom prst="rect">
             <a:avLst/>
@@ -5069,14 +5244,14 @@
       </p:sp>
       <p:sp>
         <p:nvSpPr>
-          <p:cNvPr id="19" name="TextBox 18"/>
-          <p:cNvSpPr txBox="1"/>
-          <p:nvPr/>
-        </p:nvSpPr>
-        <p:spPr>
-          <a:xfrm>
-            <a:off x="6309359" y="2194560"/>
-            <a:ext cx="2240280" cy="228600"/>
+          <p:cNvPr id="23" name="TextBox 22"/>
+          <p:cNvSpPr txBox="1"/>
+          <p:nvPr/>
+        </p:nvSpPr>
+        <p:spPr>
+          <a:xfrm>
+            <a:off x="6263640" y="1965960"/>
+            <a:ext cx="2331720" cy="182880"/>
           </a:xfrm>
           <a:prstGeom prst="rect">
             <a:avLst/>
@@ -5105,28 +5280,28 @@
       </p:sp>
       <p:sp>
         <p:nvSpPr>
-          <p:cNvPr id="20" name="TextBox 19"/>
-          <p:cNvSpPr txBox="1"/>
-          <p:nvPr/>
-        </p:nvSpPr>
-        <p:spPr>
-          <a:xfrm>
-            <a:off x="6309359" y="2560320"/>
-            <a:ext cx="2240280" cy="457200"/>
-          </a:xfrm>
-          <a:prstGeom prst="rect">
-            <a:avLst/>
-          </a:prstGeom>
-          <a:noFill/>
-        </p:spPr>
-        <p:txBody>
-          <a:bodyPr wrap="square">
-            <a:spAutoFit/>
-          </a:bodyPr>
-          <a:lstStyle/>
-          <a:p>
-            <a:pPr algn="l">
-              <a:defRPr sz="1600" b="1">
+          <p:cNvPr id="24" name="TextBox 23"/>
+          <p:cNvSpPr txBox="1"/>
+          <p:nvPr/>
+        </p:nvSpPr>
+        <p:spPr>
+          <a:xfrm>
+            <a:off x="6263640" y="2240280"/>
+            <a:ext cx="2331720" cy="457200"/>
+          </a:xfrm>
+          <a:prstGeom prst="rect">
+            <a:avLst/>
+          </a:prstGeom>
+          <a:noFill/>
+        </p:spPr>
+        <p:txBody>
+          <a:bodyPr wrap="square">
+            <a:spAutoFit/>
+          </a:bodyPr>
+          <a:lstStyle/>
+          <a:p>
+            <a:pPr algn="l">
+              <a:defRPr sz="1400" b="1">
                 <a:solidFill>
                   <a:srgbClr val="212121"/>
                 </a:solidFill>
@@ -5141,28 +5316,28 @@
       </p:sp>
       <p:sp>
         <p:nvSpPr>
-          <p:cNvPr id="21" name="TextBox 20"/>
-          <p:cNvSpPr txBox="1"/>
-          <p:nvPr/>
-        </p:nvSpPr>
-        <p:spPr>
-          <a:xfrm>
-            <a:off x="6309359" y="3200400"/>
-            <a:ext cx="2240280" cy="457200"/>
-          </a:xfrm>
-          <a:prstGeom prst="rect">
-            <a:avLst/>
-          </a:prstGeom>
-          <a:noFill/>
-        </p:spPr>
-        <p:txBody>
-          <a:bodyPr wrap="square">
-            <a:spAutoFit/>
-          </a:bodyPr>
-          <a:lstStyle/>
-          <a:p>
-            <a:pPr algn="l">
-              <a:defRPr sz="2400" b="1">
+          <p:cNvPr id="25" name="TextBox 24"/>
+          <p:cNvSpPr txBox="1"/>
+          <p:nvPr/>
+        </p:nvSpPr>
+        <p:spPr>
+          <a:xfrm>
+            <a:off x="6263640" y="2743200"/>
+            <a:ext cx="2331720" cy="457200"/>
+          </a:xfrm>
+          <a:prstGeom prst="rect">
+            <a:avLst/>
+          </a:prstGeom>
+          <a:noFill/>
+        </p:spPr>
+        <p:txBody>
+          <a:bodyPr wrap="square">
+            <a:spAutoFit/>
+          </a:bodyPr>
+          <a:lstStyle/>
+          <a:p>
+            <a:pPr algn="l">
+              <a:defRPr sz="2200" b="1">
                 <a:solidFill>
                   <a:srgbClr val="212121"/>
                 </a:solidFill>
@@ -5177,13 +5352,56 @@
       </p:sp>
       <p:sp>
         <p:nvSpPr>
-          <p:cNvPr id="22" name="Rectangle 21"/>
+          <p:cNvPr id="26" name="Rectangle 25"/>
           <p:cNvSpPr/>
           <p:nvPr/>
         </p:nvSpPr>
         <p:spPr>
           <a:xfrm>
-            <a:off x="8915399" y="1828800"/>
+            <a:off x="10012679" y="2606040"/>
+            <a:ext cx="320040" cy="320040"/>
+          </a:xfrm>
+          <a:prstGeom prst="rect">
+            <a:avLst/>
+          </a:prstGeom>
+          <a:solidFill>
+            <a:srgbClr val="00BCD4"/>
+          </a:solidFill>
+          <a:ln>
+            <a:noFill/>
+          </a:ln>
+        </p:spPr>
+        <p:style>
+          <a:lnRef idx="1">
+            <a:schemeClr val="accent1"/>
+          </a:lnRef>
+          <a:fillRef idx="3">
+            <a:schemeClr val="accent1"/>
+          </a:fillRef>
+          <a:effectRef idx="2">
+            <a:schemeClr val="accent1"/>
+          </a:effectRef>
+          <a:fontRef idx="minor">
+            <a:schemeClr val="lt1"/>
+          </a:fontRef>
+        </p:style>
+        <p:txBody>
+          <a:bodyPr rtlCol="0" anchor="ctr"/>
+          <a:lstStyle/>
+          <a:p>
+            <a:pPr algn="ctr"/>
+          </a:p>
+        </p:txBody>
+      </p:sp>
+      <p:sp>
+        <p:nvSpPr>
+          <p:cNvPr id="27" name="Rectangle 26"/>
+          <p:cNvSpPr/>
+          <p:nvPr/>
+        </p:nvSpPr>
+        <p:spPr>
+          <a:xfrm>
+            <a:off x="8915399" y="3017520"/>
             <a:ext cx="2606040" cy="2286000"/>
           </a:xfrm>
           <a:prstGeom prst="rect">
@@ -5220,14 +5438,14 @@
       </p:sp>
       <p:sp>
         <p:nvSpPr>
-          <p:cNvPr id="23" name="TextBox 22"/>
-          <p:cNvSpPr txBox="1"/>
-          <p:nvPr/>
-        </p:nvSpPr>
-        <p:spPr>
-          <a:xfrm>
-            <a:off x="9098279" y="1920240"/>
-            <a:ext cx="2240280" cy="274320"/>
+          <p:cNvPr id="28" name="TextBox 27"/>
+          <p:cNvSpPr txBox="1"/>
+          <p:nvPr/>
+        </p:nvSpPr>
+        <p:spPr>
+          <a:xfrm>
+            <a:off x="9052559" y="3108960"/>
+            <a:ext cx="2331720" cy="228600"/>
           </a:xfrm>
           <a:prstGeom prst="rect">
             <a:avLst/>
@@ -5256,14 +5474,14 @@
       </p:sp>
       <p:sp>
         <p:nvSpPr>
-          <p:cNvPr id="24" name="TextBox 23"/>
-          <p:cNvSpPr txBox="1"/>
-          <p:nvPr/>
-        </p:nvSpPr>
-        <p:spPr>
-          <a:xfrm>
-            <a:off x="9098279" y="2194560"/>
-            <a:ext cx="2240280" cy="228600"/>
+          <p:cNvPr id="29" name="TextBox 28"/>
+          <p:cNvSpPr txBox="1"/>
+          <p:nvPr/>
+        </p:nvSpPr>
+        <p:spPr>
+          <a:xfrm>
+            <a:off x="9052559" y="3337560"/>
+            <a:ext cx="2331720" cy="182880"/>
           </a:xfrm>
           <a:prstGeom prst="rect">
             <a:avLst/>
@@ -5292,28 +5510,28 @@
       </p:sp>
       <p:sp>
         <p:nvSpPr>
-          <p:cNvPr id="25" name="TextBox 24"/>
-          <p:cNvSpPr txBox="1"/>
-          <p:nvPr/>
-        </p:nvSpPr>
-        <p:spPr>
-          <a:xfrm>
-            <a:off x="9098279" y="2560320"/>
-            <a:ext cx="2240280" cy="457200"/>
-          </a:xfrm>
-          <a:prstGeom prst="rect">
-            <a:avLst/>
-          </a:prstGeom>
-          <a:noFill/>
-        </p:spPr>
-        <p:txBody>
-          <a:bodyPr wrap="square">
-            <a:spAutoFit/>
-          </a:bodyPr>
-          <a:lstStyle/>
-          <a:p>
-            <a:pPr algn="l">
-              <a:defRPr sz="1600" b="1">
+          <p:cNvPr id="30" name="TextBox 29"/>
+          <p:cNvSpPr txBox="1"/>
+          <p:nvPr/>
+        </p:nvSpPr>
+        <p:spPr>
+          <a:xfrm>
+            <a:off x="9052559" y="3611879"/>
+            <a:ext cx="2331720" cy="457200"/>
+          </a:xfrm>
+          <a:prstGeom prst="rect">
+            <a:avLst/>
+          </a:prstGeom>
+          <a:noFill/>
+        </p:spPr>
+        <p:txBody>
+          <a:bodyPr wrap="square">
+            <a:spAutoFit/>
+          </a:bodyPr>
+          <a:lstStyle/>
+          <a:p>
+            <a:pPr algn="l">
+              <a:defRPr sz="1400" b="1">
                 <a:solidFill>
                   <a:srgbClr val="212121"/>
                 </a:solidFill>
@@ -5328,28 +5546,28 @@
       </p:sp>
       <p:sp>
         <p:nvSpPr>
-          <p:cNvPr id="26" name="TextBox 25"/>
-          <p:cNvSpPr txBox="1"/>
-          <p:nvPr/>
-        </p:nvSpPr>
-        <p:spPr>
-          <a:xfrm>
-            <a:off x="9098279" y="3200400"/>
-            <a:ext cx="2240280" cy="457200"/>
-          </a:xfrm>
-          <a:prstGeom prst="rect">
-            <a:avLst/>
-          </a:prstGeom>
-          <a:noFill/>
-        </p:spPr>
-        <p:txBody>
-          <a:bodyPr wrap="square">
-            <a:spAutoFit/>
-          </a:bodyPr>
-          <a:lstStyle/>
-          <a:p>
-            <a:pPr algn="l">
-              <a:defRPr sz="2400" b="1">
+          <p:cNvPr id="31" name="TextBox 30"/>
+          <p:cNvSpPr txBox="1"/>
+          <p:nvPr/>
+        </p:nvSpPr>
+        <p:spPr>
+          <a:xfrm>
+            <a:off x="9052559" y="4114800"/>
+            <a:ext cx="2331720" cy="457200"/>
+          </a:xfrm>
+          <a:prstGeom prst="rect">
+            <a:avLst/>
+          </a:prstGeom>
+          <a:noFill/>
+        </p:spPr>
+        <p:txBody>
+          <a:bodyPr wrap="square">
+            <a:spAutoFit/>
+          </a:bodyPr>
+          <a:lstStyle/>
+          <a:p>
+            <a:pPr algn="l">
+              <a:defRPr sz="2200" b="1">
                 <a:solidFill>
                   <a:srgbClr val="212121"/>
                 </a:solidFill>
@@ -5364,14 +5582,14 @@
       </p:sp>
       <p:sp>
         <p:nvSpPr>
-          <p:cNvPr id="27" name="Rectangle 26"/>
+          <p:cNvPr id="32" name="Rectangle 31"/>
           <p:cNvSpPr/>
           <p:nvPr/>
         </p:nvSpPr>
         <p:spPr>
           <a:xfrm>
-            <a:off x="548640" y="4572000"/>
-            <a:ext cx="10972800" cy="731520"/>
+            <a:off x="548640" y="5577840"/>
+            <a:ext cx="10972800" cy="640080"/>
           </a:xfrm>
           <a:prstGeom prst="rect">
             <a:avLst/>
@@ -5407,14 +5625,14 @@
       </p:sp>
       <p:sp>
         <p:nvSpPr>
-          <p:cNvPr id="28" name="TextBox 27"/>
-          <p:cNvSpPr txBox="1"/>
-          <p:nvPr/>
-        </p:nvSpPr>
-        <p:spPr>
-          <a:xfrm>
-            <a:off x="731520" y="4617720"/>
-            <a:ext cx="10607040" cy="640080"/>
+          <p:cNvPr id="33" name="TextBox 32"/>
+          <p:cNvSpPr txBox="1"/>
+          <p:nvPr/>
+        </p:nvSpPr>
+        <p:spPr>
+          <a:xfrm>
+            <a:off x="731520" y="5623560"/>
+            <a:ext cx="10607040" cy="548640"/>
           </a:xfrm>
           <a:prstGeom prst="rect">
             <a:avLst/>
@@ -5436,7 +5654,7 @@
               </a:defRPr>
             </a:pPr>
             <a:r>
-              <a:t>最重要マイルストーン: G-EXP1 (開始後2ヶ月) — 約800万円の装置直接費で Level A 成功確率を 25-35% から 50%超 へ引き上げ</a:t>
+              <a:t>最重要マイルストーン: G-EXP1 (開始後2ヶ月) — 約800万円で Level A 成功確率を 25-35% → 50%超</a:t>
             </a:r>
           </a:p>
         </p:txBody>
@@ -5627,21 +5845,21 @@
         <p:spPr>
           <a:xfrm>
             <a:off x="548640" y="1005840"/>
-            <a:ext cx="10972800" cy="640080"/>
-          </a:xfrm>
-          <a:prstGeom prst="rect">
-            <a:avLst/>
-          </a:prstGeom>
-          <a:noFill/>
-        </p:spPr>
-        <p:txBody>
-          <a:bodyPr wrap="square">
-            <a:spAutoFit/>
-          </a:bodyPr>
-          <a:lstStyle/>
-          <a:p>
-            <a:pPr algn="l">
-              <a:defRPr sz="3000" b="1">
+            <a:ext cx="10972800" cy="548640"/>
+          </a:xfrm>
+          <a:prstGeom prst="rect">
+            <a:avLst/>
+          </a:prstGeom>
+          <a:noFill/>
+        </p:spPr>
+        <p:txBody>
+          <a:bodyPr wrap="square">
+            <a:spAutoFit/>
+          </a:bodyPr>
+          <a:lstStyle/>
+          <a:p>
+            <a:pPr algn="l">
+              <a:defRPr sz="2600" b="1">
                 <a:solidFill>
                   <a:srgbClr val="212121"/>
                 </a:solidFill>
@@ -5663,7 +5881,7 @@
         <p:spPr>
           <a:xfrm>
             <a:off x="548640" y="1828800"/>
-            <a:ext cx="6400800" cy="777240"/>
+            <a:ext cx="6583680" cy="868680"/>
           </a:xfrm>
           <a:prstGeom prst="rect">
             <a:avLst/>
@@ -5748,8 +5966,8 @@
         </p:nvSpPr>
         <p:spPr>
           <a:xfrm>
-            <a:off x="731520" y="1874519"/>
-            <a:ext cx="6035040" cy="274320"/>
+            <a:off x="731520" y="1901952"/>
+            <a:ext cx="6217920" cy="274320"/>
           </a:xfrm>
           <a:prstGeom prst="rect">
             <a:avLst/>
@@ -5784,8 +6002,8 @@
         </p:nvSpPr>
         <p:spPr>
           <a:xfrm>
-            <a:off x="731520" y="2148840"/>
-            <a:ext cx="6035040" cy="411480"/>
+            <a:off x="731520" y="2194560"/>
+            <a:ext cx="6217920" cy="457200"/>
           </a:xfrm>
           <a:prstGeom prst="rect">
             <a:avLst/>
@@ -5820,8 +6038,8 @@
         </p:nvSpPr>
         <p:spPr>
           <a:xfrm>
-            <a:off x="548640" y="2697480"/>
-            <a:ext cx="6400800" cy="777240"/>
+            <a:off x="548640" y="2834640"/>
+            <a:ext cx="6583680" cy="868680"/>
           </a:xfrm>
           <a:prstGeom prst="rect">
             <a:avLst/>
@@ -5863,7 +6081,7 @@
         </p:nvSpPr>
         <p:spPr>
           <a:xfrm>
-            <a:off x="548640" y="2697480"/>
+            <a:off x="548640" y="2834640"/>
             <a:ext cx="54864" cy="50800"/>
           </a:xfrm>
           <a:prstGeom prst="rect">
@@ -5906,8 +6124,8 @@
         </p:nvSpPr>
         <p:spPr>
           <a:xfrm>
-            <a:off x="731520" y="2743200"/>
-            <a:ext cx="6035040" cy="274320"/>
+            <a:off x="731520" y="2907792"/>
+            <a:ext cx="6217920" cy="274320"/>
           </a:xfrm>
           <a:prstGeom prst="rect">
             <a:avLst/>
@@ -5942,8 +6160,8 @@
         </p:nvSpPr>
         <p:spPr>
           <a:xfrm>
-            <a:off x="731520" y="3017520"/>
-            <a:ext cx="6035040" cy="411480"/>
+            <a:off x="731520" y="3200400"/>
+            <a:ext cx="6217920" cy="457200"/>
           </a:xfrm>
           <a:prstGeom prst="rect">
             <a:avLst/>
@@ -5978,8 +6196,8 @@
         </p:nvSpPr>
         <p:spPr>
           <a:xfrm>
-            <a:off x="548640" y="3566160"/>
-            <a:ext cx="6400800" cy="777240"/>
+            <a:off x="548640" y="3840480"/>
+            <a:ext cx="6583680" cy="868680"/>
           </a:xfrm>
           <a:prstGeom prst="rect">
             <a:avLst/>
@@ -6021,7 +6239,7 @@
         </p:nvSpPr>
         <p:spPr>
           <a:xfrm>
-            <a:off x="548640" y="3566160"/>
+            <a:off x="548640" y="3840480"/>
             <a:ext cx="54864" cy="50800"/>
           </a:xfrm>
           <a:prstGeom prst="rect">
@@ -6064,8 +6282,8 @@
         </p:nvSpPr>
         <p:spPr>
           <a:xfrm>
-            <a:off x="731520" y="3611879"/>
-            <a:ext cx="6035040" cy="274320"/>
+            <a:off x="731520" y="3913632"/>
+            <a:ext cx="6217920" cy="274320"/>
           </a:xfrm>
           <a:prstGeom prst="rect">
             <a:avLst/>
@@ -6100,8 +6318,8 @@
         </p:nvSpPr>
         <p:spPr>
           <a:xfrm>
-            <a:off x="731520" y="3886200"/>
-            <a:ext cx="6035040" cy="411480"/>
+            <a:off x="731520" y="4206240"/>
+            <a:ext cx="6217920" cy="457200"/>
           </a:xfrm>
           <a:prstGeom prst="rect">
             <a:avLst/>
@@ -6137,7 +6355,7 @@
         <p:spPr>
           <a:xfrm>
             <a:off x="7498079" y="1828800"/>
-            <a:ext cx="4023360" cy="3474720"/>
+            <a:ext cx="4023360" cy="3931920"/>
           </a:xfrm>
           <a:prstGeom prst="rect">
             <a:avLst/>
@@ -6359,7 +6577,7 @@
         </p:nvSpPr>
         <p:spPr>
           <a:xfrm>
-            <a:off x="7680960" y="4023360"/>
+            <a:off x="7680960" y="4114800"/>
             <a:ext cx="3657600" cy="731520"/>
           </a:xfrm>
           <a:prstGeom prst="rect">
@@ -6581,21 +6799,21 @@
         <p:spPr>
           <a:xfrm>
             <a:off x="548640" y="1005840"/>
-            <a:ext cx="10972800" cy="640080"/>
-          </a:xfrm>
-          <a:prstGeom prst="rect">
-            <a:avLst/>
-          </a:prstGeom>
-          <a:noFill/>
-        </p:spPr>
-        <p:txBody>
-          <a:bodyPr wrap="square">
-            <a:spAutoFit/>
-          </a:bodyPr>
-          <a:lstStyle/>
-          <a:p>
-            <a:pPr algn="l">
-              <a:defRPr sz="3400" b="1">
+            <a:ext cx="10972800" cy="548640"/>
+          </a:xfrm>
+          <a:prstGeom prst="rect">
+            <a:avLst/>
+          </a:prstGeom>
+          <a:noFill/>
+        </p:spPr>
+        <p:txBody>
+          <a:bodyPr wrap="square">
+            <a:spAutoFit/>
+          </a:bodyPr>
+          <a:lstStyle/>
+          <a:p>
+            <a:pPr algn="l">
+              <a:defRPr sz="3000" b="1">
                 <a:solidFill>
                   <a:srgbClr val="212121"/>
                 </a:solidFill>
@@ -7472,8 +7690,8 @@
         </p:nvSpPr>
         <p:spPr>
           <a:xfrm>
-            <a:off x="6217920" y="3931920"/>
-            <a:ext cx="5029200" cy="274320"/>
+            <a:off x="548640" y="3931920"/>
+            <a:ext cx="10972800" cy="320040"/>
           </a:xfrm>
           <a:prstGeom prst="rect">
             <a:avLst/>
@@ -7502,14 +7720,57 @@
       </p:sp>
       <p:sp>
         <p:nvSpPr>
-          <p:cNvPr id="31" name="TextBox 30"/>
-          <p:cNvSpPr txBox="1"/>
-          <p:nvPr/>
-        </p:nvSpPr>
-        <p:spPr>
-          <a:xfrm>
-            <a:off x="6400800" y="4297680"/>
-            <a:ext cx="2286000" cy="365760"/>
+          <p:cNvPr id="31" name="Rectangle 30"/>
+          <p:cNvSpPr/>
+          <p:nvPr/>
+        </p:nvSpPr>
+        <p:spPr>
+          <a:xfrm>
+            <a:off x="2286000" y="4389120"/>
+            <a:ext cx="8229600" cy="365760"/>
+          </a:xfrm>
+          <a:prstGeom prst="rect">
+            <a:avLst/>
+          </a:prstGeom>
+          <a:solidFill>
+            <a:srgbClr val="F5F5F5"/>
+          </a:solidFill>
+          <a:ln>
+            <a:noFill/>
+          </a:ln>
+        </p:spPr>
+        <p:style>
+          <a:lnRef idx="1">
+            <a:schemeClr val="accent1"/>
+          </a:lnRef>
+          <a:fillRef idx="3">
+            <a:schemeClr val="accent1"/>
+          </a:fillRef>
+          <a:effectRef idx="2">
+            <a:schemeClr val="accent1"/>
+          </a:effectRef>
+          <a:fontRef idx="minor">
+            <a:schemeClr val="lt1"/>
+          </a:fontRef>
+        </p:style>
+        <p:txBody>
+          <a:bodyPr rtlCol="0" anchor="ctr"/>
+          <a:lstStyle/>
+          <a:p>
+            <a:pPr algn="ctr"/>
+          </a:p>
+        </p:txBody>
+      </p:sp>
+      <p:sp>
+        <p:nvSpPr>
+          <p:cNvPr id="32" name="TextBox 31"/>
+          <p:cNvSpPr txBox="1"/>
+          <p:nvPr/>
+        </p:nvSpPr>
+        <p:spPr>
+          <a:xfrm>
+            <a:off x="548640" y="4407407"/>
+            <a:ext cx="1645920" cy="320040"/>
           </a:xfrm>
           <a:prstGeom prst="rect">
             <a:avLst/>
@@ -7538,27 +7799,27 @@
       </p:sp>
       <p:sp>
         <p:nvSpPr>
-          <p:cNvPr id="32" name="TextBox 31"/>
-          <p:cNvSpPr txBox="1"/>
-          <p:nvPr/>
-        </p:nvSpPr>
-        <p:spPr>
-          <a:xfrm>
-            <a:off x="9144000" y="4297680"/>
-            <a:ext cx="2286000" cy="365760"/>
-          </a:xfrm>
-          <a:prstGeom prst="rect">
-            <a:avLst/>
-          </a:prstGeom>
-          <a:noFill/>
-        </p:spPr>
-        <p:txBody>
-          <a:bodyPr wrap="square">
-            <a:spAutoFit/>
-          </a:bodyPr>
-          <a:lstStyle/>
-          <a:p>
-            <a:pPr algn="r">
+          <p:cNvPr id="33" name="TextBox 32"/>
+          <p:cNvSpPr txBox="1"/>
+          <p:nvPr/>
+        </p:nvSpPr>
+        <p:spPr>
+          <a:xfrm>
+            <a:off x="10652760" y="4407407"/>
+            <a:ext cx="2286000" cy="320040"/>
+          </a:xfrm>
+          <a:prstGeom prst="rect">
+            <a:avLst/>
+          </a:prstGeom>
+          <a:noFill/>
+        </p:spPr>
+        <p:txBody>
+          <a:bodyPr wrap="square">
+            <a:spAutoFit/>
+          </a:bodyPr>
+          <a:lstStyle/>
+          <a:p>
+            <a:pPr algn="l">
               <a:defRPr sz="1100" b="1">
                 <a:solidFill>
                   <a:srgbClr val="212121"/>
@@ -7574,14 +7835,57 @@
       </p:sp>
       <p:sp>
         <p:nvSpPr>
-          <p:cNvPr id="33" name="TextBox 32"/>
-          <p:cNvSpPr txBox="1"/>
-          <p:nvPr/>
-        </p:nvSpPr>
-        <p:spPr>
-          <a:xfrm>
-            <a:off x="6400800" y="4709160"/>
-            <a:ext cx="2286000" cy="365760"/>
+          <p:cNvPr id="34" name="Rectangle 33"/>
+          <p:cNvSpPr/>
+          <p:nvPr/>
+        </p:nvSpPr>
+        <p:spPr>
+          <a:xfrm>
+            <a:off x="2286000" y="4892040"/>
+            <a:ext cx="7406640" cy="365760"/>
+          </a:xfrm>
+          <a:prstGeom prst="rect">
+            <a:avLst/>
+          </a:prstGeom>
+          <a:solidFill>
+            <a:srgbClr val="F5F5F5"/>
+          </a:solidFill>
+          <a:ln>
+            <a:noFill/>
+          </a:ln>
+        </p:spPr>
+        <p:style>
+          <a:lnRef idx="1">
+            <a:schemeClr val="accent1"/>
+          </a:lnRef>
+          <a:fillRef idx="3">
+            <a:schemeClr val="accent1"/>
+          </a:fillRef>
+          <a:effectRef idx="2">
+            <a:schemeClr val="accent1"/>
+          </a:effectRef>
+          <a:fontRef idx="minor">
+            <a:schemeClr val="lt1"/>
+          </a:fontRef>
+        </p:style>
+        <p:txBody>
+          <a:bodyPr rtlCol="0" anchor="ctr"/>
+          <a:lstStyle/>
+          <a:p>
+            <a:pPr algn="ctr"/>
+          </a:p>
+        </p:txBody>
+      </p:sp>
+      <p:sp>
+        <p:nvSpPr>
+          <p:cNvPr id="35" name="TextBox 34"/>
+          <p:cNvSpPr txBox="1"/>
+          <p:nvPr/>
+        </p:nvSpPr>
+        <p:spPr>
+          <a:xfrm>
+            <a:off x="548640" y="4910327"/>
+            <a:ext cx="1645920" cy="320040"/>
           </a:xfrm>
           <a:prstGeom prst="rect">
             <a:avLst/>
@@ -7610,27 +7914,27 @@
       </p:sp>
       <p:sp>
         <p:nvSpPr>
-          <p:cNvPr id="34" name="TextBox 33"/>
-          <p:cNvSpPr txBox="1"/>
-          <p:nvPr/>
-        </p:nvSpPr>
-        <p:spPr>
-          <a:xfrm>
-            <a:off x="9144000" y="4709160"/>
-            <a:ext cx="2286000" cy="365760"/>
-          </a:xfrm>
-          <a:prstGeom prst="rect">
-            <a:avLst/>
-          </a:prstGeom>
-          <a:noFill/>
-        </p:spPr>
-        <p:txBody>
-          <a:bodyPr wrap="square">
-            <a:spAutoFit/>
-          </a:bodyPr>
-          <a:lstStyle/>
-          <a:p>
-            <a:pPr algn="r">
+          <p:cNvPr id="36" name="TextBox 35"/>
+          <p:cNvSpPr txBox="1"/>
+          <p:nvPr/>
+        </p:nvSpPr>
+        <p:spPr>
+          <a:xfrm>
+            <a:off x="9829800" y="4910327"/>
+            <a:ext cx="2286000" cy="320040"/>
+          </a:xfrm>
+          <a:prstGeom prst="rect">
+            <a:avLst/>
+          </a:prstGeom>
+          <a:noFill/>
+        </p:spPr>
+        <p:txBody>
+          <a:bodyPr wrap="square">
+            <a:spAutoFit/>
+          </a:bodyPr>
+          <a:lstStyle/>
+          <a:p>
+            <a:pPr algn="l">
               <a:defRPr sz="1100" b="1">
                 <a:solidFill>
                   <a:srgbClr val="212121"/>
@@ -7646,14 +7950,57 @@
       </p:sp>
       <p:sp>
         <p:nvSpPr>
-          <p:cNvPr id="35" name="TextBox 34"/>
-          <p:cNvSpPr txBox="1"/>
-          <p:nvPr/>
-        </p:nvSpPr>
-        <p:spPr>
-          <a:xfrm>
-            <a:off x="6400800" y="5120640"/>
-            <a:ext cx="2286000" cy="365760"/>
+          <p:cNvPr id="37" name="Rectangle 36"/>
+          <p:cNvSpPr/>
+          <p:nvPr/>
+        </p:nvSpPr>
+        <p:spPr>
+          <a:xfrm>
+            <a:off x="2286000" y="5394960"/>
+            <a:ext cx="3108960" cy="365760"/>
+          </a:xfrm>
+          <a:prstGeom prst="rect">
+            <a:avLst/>
+          </a:prstGeom>
+          <a:solidFill>
+            <a:srgbClr val="F5F5F5"/>
+          </a:solidFill>
+          <a:ln>
+            <a:noFill/>
+          </a:ln>
+        </p:spPr>
+        <p:style>
+          <a:lnRef idx="1">
+            <a:schemeClr val="accent1"/>
+          </a:lnRef>
+          <a:fillRef idx="3">
+            <a:schemeClr val="accent1"/>
+          </a:fillRef>
+          <a:effectRef idx="2">
+            <a:schemeClr val="accent1"/>
+          </a:effectRef>
+          <a:fontRef idx="minor">
+            <a:schemeClr val="lt1"/>
+          </a:fontRef>
+        </p:style>
+        <p:txBody>
+          <a:bodyPr rtlCol="0" anchor="ctr"/>
+          <a:lstStyle/>
+          <a:p>
+            <a:pPr algn="ctr"/>
+          </a:p>
+        </p:txBody>
+      </p:sp>
+      <p:sp>
+        <p:nvSpPr>
+          <p:cNvPr id="38" name="TextBox 37"/>
+          <p:cNvSpPr txBox="1"/>
+          <p:nvPr/>
+        </p:nvSpPr>
+        <p:spPr>
+          <a:xfrm>
+            <a:off x="548640" y="5413248"/>
+            <a:ext cx="1645920" cy="320040"/>
           </a:xfrm>
           <a:prstGeom prst="rect">
             <a:avLst/>
@@ -7682,27 +8029,27 @@
       </p:sp>
       <p:sp>
         <p:nvSpPr>
-          <p:cNvPr id="36" name="TextBox 35"/>
-          <p:cNvSpPr txBox="1"/>
-          <p:nvPr/>
-        </p:nvSpPr>
-        <p:spPr>
-          <a:xfrm>
-            <a:off x="9144000" y="5120640"/>
-            <a:ext cx="2286000" cy="365760"/>
-          </a:xfrm>
-          <a:prstGeom prst="rect">
-            <a:avLst/>
-          </a:prstGeom>
-          <a:noFill/>
-        </p:spPr>
-        <p:txBody>
-          <a:bodyPr wrap="square">
-            <a:spAutoFit/>
-          </a:bodyPr>
-          <a:lstStyle/>
-          <a:p>
-            <a:pPr algn="r">
+          <p:cNvPr id="39" name="TextBox 38"/>
+          <p:cNvSpPr txBox="1"/>
+          <p:nvPr/>
+        </p:nvSpPr>
+        <p:spPr>
+          <a:xfrm>
+            <a:off x="5532120" y="5413248"/>
+            <a:ext cx="2286000" cy="320040"/>
+          </a:xfrm>
+          <a:prstGeom prst="rect">
+            <a:avLst/>
+          </a:prstGeom>
+          <a:noFill/>
+        </p:spPr>
+        <p:txBody>
+          <a:bodyPr wrap="square">
+            <a:spAutoFit/>
+          </a:bodyPr>
+          <a:lstStyle/>
+          <a:p>
+            <a:pPr algn="l">
               <a:defRPr sz="1100" b="1">
                 <a:solidFill>
                   <a:srgbClr val="212121"/>
@@ -7718,14 +8065,57 @@
       </p:sp>
       <p:sp>
         <p:nvSpPr>
-          <p:cNvPr id="37" name="TextBox 36"/>
-          <p:cNvSpPr txBox="1"/>
-          <p:nvPr/>
-        </p:nvSpPr>
-        <p:spPr>
-          <a:xfrm>
-            <a:off x="6400800" y="5532120"/>
-            <a:ext cx="2286000" cy="365760"/>
+          <p:cNvPr id="40" name="Rectangle 39"/>
+          <p:cNvSpPr/>
+          <p:nvPr/>
+        </p:nvSpPr>
+        <p:spPr>
+          <a:xfrm>
+            <a:off x="2286000" y="5897880"/>
+            <a:ext cx="365760" cy="365760"/>
+          </a:xfrm>
+          <a:prstGeom prst="rect">
+            <a:avLst/>
+          </a:prstGeom>
+          <a:solidFill>
+            <a:srgbClr val="00BCD4"/>
+          </a:solidFill>
+          <a:ln>
+            <a:noFill/>
+          </a:ln>
+        </p:spPr>
+        <p:style>
+          <a:lnRef idx="1">
+            <a:schemeClr val="accent1"/>
+          </a:lnRef>
+          <a:fillRef idx="3">
+            <a:schemeClr val="accent1"/>
+          </a:fillRef>
+          <a:effectRef idx="2">
+            <a:schemeClr val="accent1"/>
+          </a:effectRef>
+          <a:fontRef idx="minor">
+            <a:schemeClr val="lt1"/>
+          </a:fontRef>
+        </p:style>
+        <p:txBody>
+          <a:bodyPr rtlCol="0" anchor="ctr"/>
+          <a:lstStyle/>
+          <a:p>
+            <a:pPr algn="ctr"/>
+          </a:p>
+        </p:txBody>
+      </p:sp>
+      <p:sp>
+        <p:nvSpPr>
+          <p:cNvPr id="41" name="TextBox 40"/>
+          <p:cNvSpPr txBox="1"/>
+          <p:nvPr/>
+        </p:nvSpPr>
+        <p:spPr>
+          <a:xfrm>
+            <a:off x="548640" y="5916168"/>
+            <a:ext cx="1645920" cy="320040"/>
           </a:xfrm>
           <a:prstGeom prst="rect">
             <a:avLst/>
@@ -7754,27 +8144,27 @@
       </p:sp>
       <p:sp>
         <p:nvSpPr>
-          <p:cNvPr id="38" name="TextBox 37"/>
-          <p:cNvSpPr txBox="1"/>
-          <p:nvPr/>
-        </p:nvSpPr>
-        <p:spPr>
-          <a:xfrm>
-            <a:off x="9144000" y="5532120"/>
-            <a:ext cx="2286000" cy="365760"/>
-          </a:xfrm>
-          <a:prstGeom prst="rect">
-            <a:avLst/>
-          </a:prstGeom>
-          <a:noFill/>
-        </p:spPr>
-        <p:txBody>
-          <a:bodyPr wrap="square">
-            <a:spAutoFit/>
-          </a:bodyPr>
-          <a:lstStyle/>
-          <a:p>
-            <a:pPr algn="r">
+          <p:cNvPr id="42" name="TextBox 41"/>
+          <p:cNvSpPr txBox="1"/>
+          <p:nvPr/>
+        </p:nvSpPr>
+        <p:spPr>
+          <a:xfrm>
+            <a:off x="2788920" y="5916168"/>
+            <a:ext cx="2286000" cy="320040"/>
+          </a:xfrm>
+          <a:prstGeom prst="rect">
+            <a:avLst/>
+          </a:prstGeom>
+          <a:noFill/>
+        </p:spPr>
+        <p:txBody>
+          <a:bodyPr wrap="square">
+            <a:spAutoFit/>
+          </a:bodyPr>
+          <a:lstStyle/>
+          <a:p>
+            <a:pPr algn="l">
               <a:defRPr sz="1100" b="1">
                 <a:solidFill>
                   <a:srgbClr val="00BCD4"/>
@@ -7974,21 +8364,21 @@
         <p:spPr>
           <a:xfrm>
             <a:off x="548640" y="1005840"/>
-            <a:ext cx="10972800" cy="640080"/>
-          </a:xfrm>
-          <a:prstGeom prst="rect">
-            <a:avLst/>
-          </a:prstGeom>
-          <a:noFill/>
-        </p:spPr>
-        <p:txBody>
-          <a:bodyPr wrap="square">
-            <a:spAutoFit/>
-          </a:bodyPr>
-          <a:lstStyle/>
-          <a:p>
-            <a:pPr algn="l">
-              <a:defRPr sz="3400" b="1">
+            <a:ext cx="10972800" cy="548640"/>
+          </a:xfrm>
+          <a:prstGeom prst="rect">
+            <a:avLst/>
+          </a:prstGeom>
+          <a:noFill/>
+        </p:spPr>
+        <p:txBody>
+          <a:bodyPr wrap="square">
+            <a:spAutoFit/>
+          </a:bodyPr>
+          <a:lstStyle/>
+          <a:p>
+            <a:pPr algn="l">
+              <a:defRPr sz="3000" b="1">
                 <a:solidFill>
                   <a:srgbClr val="212121"/>
                 </a:solidFill>
@@ -8009,8 +8399,8 @@
         </p:nvSpPr>
         <p:spPr>
           <a:xfrm>
-            <a:off x="548640" y="1828800"/>
-            <a:ext cx="2606040" cy="1645920"/>
+            <a:off x="548640" y="1737360"/>
+            <a:ext cx="5303520" cy="1097280"/>
           </a:xfrm>
           <a:prstGeom prst="rect">
             <a:avLst/>
@@ -8052,8 +8442,8 @@
         </p:nvSpPr>
         <p:spPr>
           <a:xfrm>
-            <a:off x="548640" y="1828800"/>
-            <a:ext cx="2606040" cy="50800"/>
+            <a:off x="548640" y="1737360"/>
+            <a:ext cx="5303520" cy="50800"/>
           </a:xfrm>
           <a:prstGeom prst="rect">
             <a:avLst/>
@@ -8095,8 +8485,80 @@
         </p:nvSpPr>
         <p:spPr>
           <a:xfrm>
-            <a:off x="685800" y="1965960"/>
-            <a:ext cx="2331720" cy="228600"/>
+            <a:off x="731520" y="1828800"/>
+            <a:ext cx="1828800" cy="274320"/>
+          </a:xfrm>
+          <a:prstGeom prst="rect">
+            <a:avLst/>
+          </a:prstGeom>
+          <a:noFill/>
+        </p:spPr>
+        <p:txBody>
+          <a:bodyPr wrap="square">
+            <a:spAutoFit/>
+          </a:bodyPr>
+          <a:lstStyle/>
+          <a:p>
+            <a:pPr algn="l">
+              <a:defRPr sz="1100" b="0">
+                <a:solidFill>
+                  <a:srgbClr val="757575"/>
+                </a:solidFill>
+                <a:latin typeface="Meiryo"/>
+              </a:defRPr>
+            </a:pPr>
+            <a:r>
+              <a:t>黒字化</a:t>
+            </a:r>
+          </a:p>
+        </p:txBody>
+      </p:sp>
+      <p:sp>
+        <p:nvSpPr>
+          <p:cNvPr id="10" name="TextBox 9"/>
+          <p:cNvSpPr txBox="1"/>
+          <p:nvPr/>
+        </p:nvSpPr>
+        <p:spPr>
+          <a:xfrm>
+            <a:off x="731520" y="2103120"/>
+            <a:ext cx="3200400" cy="411480"/>
+          </a:xfrm>
+          <a:prstGeom prst="rect">
+            <a:avLst/>
+          </a:prstGeom>
+          <a:noFill/>
+        </p:spPr>
+        <p:txBody>
+          <a:bodyPr wrap="square">
+            <a:spAutoFit/>
+          </a:bodyPr>
+          <a:lstStyle/>
+          <a:p>
+            <a:pPr algn="l">
+              <a:defRPr sz="2200" b="1">
+                <a:solidFill>
+                  <a:srgbClr val="212121"/>
+                </a:solidFill>
+                <a:latin typeface="Meiryo"/>
+              </a:defRPr>
+            </a:pPr>
+            <a:r>
+              <a:t>Phase 2完了後 1〜2年</a:t>
+            </a:r>
+          </a:p>
+        </p:txBody>
+      </p:sp>
+      <p:sp>
+        <p:nvSpPr>
+          <p:cNvPr id="11" name="TextBox 10"/>
+          <p:cNvSpPr txBox="1"/>
+          <p:nvPr/>
+        </p:nvSpPr>
+        <p:spPr>
+          <a:xfrm>
+            <a:off x="4114800" y="2148840"/>
+            <a:ext cx="1645920" cy="320040"/>
           </a:xfrm>
           <a:prstGeom prst="rect">
             <a:avLst/>
@@ -8118,79 +8580,7 @@
               </a:defRPr>
             </a:pPr>
             <a:r>
-              <a:t>黒 字 化</a:t>
-            </a:r>
-          </a:p>
-        </p:txBody>
-      </p:sp>
-      <p:sp>
-        <p:nvSpPr>
-          <p:cNvPr id="10" name="TextBox 9"/>
-          <p:cNvSpPr txBox="1"/>
-          <p:nvPr/>
-        </p:nvSpPr>
-        <p:spPr>
-          <a:xfrm>
-            <a:off x="685800" y="2240280"/>
-            <a:ext cx="2331720" cy="457200"/>
-          </a:xfrm>
-          <a:prstGeom prst="rect">
-            <a:avLst/>
-          </a:prstGeom>
-          <a:noFill/>
-        </p:spPr>
-        <p:txBody>
-          <a:bodyPr wrap="square">
-            <a:spAutoFit/>
-          </a:bodyPr>
-          <a:lstStyle/>
-          <a:p>
-            <a:pPr algn="l">
-              <a:defRPr sz="2200" b="1">
-                <a:solidFill>
-                  <a:srgbClr val="212121"/>
-                </a:solidFill>
-                <a:latin typeface="Meiryo"/>
-              </a:defRPr>
-            </a:pPr>
-            <a:r>
-              <a:t>Phase 2完了後1〜2年</a:t>
-            </a:r>
-          </a:p>
-        </p:txBody>
-      </p:sp>
-      <p:sp>
-        <p:nvSpPr>
-          <p:cNvPr id="11" name="TextBox 10"/>
-          <p:cNvSpPr txBox="1"/>
-          <p:nvPr/>
-        </p:nvSpPr>
-        <p:spPr>
-          <a:xfrm>
-            <a:off x="685800" y="2743200"/>
-            <a:ext cx="2331720" cy="365760"/>
-          </a:xfrm>
-          <a:prstGeom prst="rect">
-            <a:avLst/>
-          </a:prstGeom>
-          <a:noFill/>
-        </p:spPr>
-        <p:txBody>
-          <a:bodyPr wrap="square">
-            <a:spAutoFit/>
-          </a:bodyPr>
-          <a:lstStyle/>
-          <a:p>
-            <a:pPr algn="l">
-              <a:defRPr sz="1000" b="0">
-                <a:solidFill>
-                  <a:srgbClr val="757575"/>
-                </a:solidFill>
-                <a:latin typeface="Meiryo"/>
-              </a:defRPr>
-            </a:pPr>
-            <a:r>
-              <a:t>量産30–50台で達成</a:t>
+              <a:t>量産30-50台で達成</a:t>
             </a:r>
           </a:p>
         </p:txBody>
@@ -8203,8 +8593,8 @@
         </p:nvSpPr>
         <p:spPr>
           <a:xfrm>
-            <a:off x="3337560" y="1828800"/>
-            <a:ext cx="2606040" cy="1645920"/>
+            <a:off x="548640" y="3017520"/>
+            <a:ext cx="5303520" cy="1097280"/>
           </a:xfrm>
           <a:prstGeom prst="rect">
             <a:avLst/>
@@ -8246,8 +8636,8 @@
         </p:nvSpPr>
         <p:spPr>
           <a:xfrm>
-            <a:off x="3337560" y="1828800"/>
-            <a:ext cx="2606040" cy="50800"/>
+            <a:off x="548640" y="3017520"/>
+            <a:ext cx="5303520" cy="50800"/>
           </a:xfrm>
           <a:prstGeom prst="rect">
             <a:avLst/>
@@ -8289,22 +8679,22 @@
         </p:nvSpPr>
         <p:spPr>
           <a:xfrm>
-            <a:off x="3474720" y="1965960"/>
-            <a:ext cx="2331720" cy="228600"/>
-          </a:xfrm>
-          <a:prstGeom prst="rect">
-            <a:avLst/>
-          </a:prstGeom>
-          <a:noFill/>
-        </p:spPr>
-        <p:txBody>
-          <a:bodyPr wrap="square">
-            <a:spAutoFit/>
-          </a:bodyPr>
-          <a:lstStyle/>
-          <a:p>
-            <a:pPr algn="l">
-              <a:defRPr sz="1000" b="0">
+            <a:off x="731520" y="3108960"/>
+            <a:ext cx="1828800" cy="274320"/>
+          </a:xfrm>
+          <a:prstGeom prst="rect">
+            <a:avLst/>
+          </a:prstGeom>
+          <a:noFill/>
+        </p:spPr>
+        <p:txBody>
+          <a:bodyPr wrap="square">
+            <a:spAutoFit/>
+          </a:bodyPr>
+          <a:lstStyle/>
+          <a:p>
+            <a:pPr algn="l">
+              <a:defRPr sz="1100" b="0">
                 <a:solidFill>
                   <a:srgbClr val="757575"/>
                 </a:solidFill>
@@ -8312,7 +8702,7 @@
               </a:defRPr>
             </a:pPr>
             <a:r>
-              <a:t>粗 利 率</a:t>
+              <a:t>粗利率</a:t>
             </a:r>
           </a:p>
         </p:txBody>
@@ -8325,8 +8715,8 @@
         </p:nvSpPr>
         <p:spPr>
           <a:xfrm>
-            <a:off x="3474720" y="2240280"/>
-            <a:ext cx="2331720" cy="457200"/>
+            <a:off x="731520" y="3383279"/>
+            <a:ext cx="3200400" cy="411480"/>
           </a:xfrm>
           <a:prstGeom prst="rect">
             <a:avLst/>
@@ -8361,8 +8751,8 @@
         </p:nvSpPr>
         <p:spPr>
           <a:xfrm>
-            <a:off x="3474720" y="2743200"/>
-            <a:ext cx="2331720" cy="365760"/>
+            <a:off x="4114800" y="3429000"/>
+            <a:ext cx="1645920" cy="320040"/>
           </a:xfrm>
           <a:prstGeom prst="rect">
             <a:avLst/>
@@ -8397,396 +8787,8 @@
         </p:nvSpPr>
         <p:spPr>
           <a:xfrm>
-            <a:off x="6126479" y="1828800"/>
-            <a:ext cx="2606040" cy="1645920"/>
-          </a:xfrm>
-          <a:prstGeom prst="rect">
-            <a:avLst/>
-          </a:prstGeom>
-          <a:solidFill>
-            <a:srgbClr val="F5F5F5"/>
-          </a:solidFill>
-          <a:ln>
-            <a:noFill/>
-          </a:ln>
-        </p:spPr>
-        <p:style>
-          <a:lnRef idx="1">
-            <a:schemeClr val="accent1"/>
-          </a:lnRef>
-          <a:fillRef idx="3">
-            <a:schemeClr val="accent1"/>
-          </a:fillRef>
-          <a:effectRef idx="2">
-            <a:schemeClr val="accent1"/>
-          </a:effectRef>
-          <a:fontRef idx="minor">
-            <a:schemeClr val="lt1"/>
-          </a:fontRef>
-        </p:style>
-        <p:txBody>
-          <a:bodyPr rtlCol="0" anchor="ctr"/>
-          <a:lstStyle/>
-          <a:p>
-            <a:pPr algn="ctr"/>
-          </a:p>
-        </p:txBody>
-      </p:sp>
-      <p:sp>
-        <p:nvSpPr>
-          <p:cNvPr id="18" name="Rectangle 17"/>
-          <p:cNvSpPr/>
-          <p:nvPr/>
-        </p:nvSpPr>
-        <p:spPr>
-          <a:xfrm>
-            <a:off x="6126479" y="1828800"/>
-            <a:ext cx="2606040" cy="50800"/>
-          </a:xfrm>
-          <a:prstGeom prst="rect">
-            <a:avLst/>
-          </a:prstGeom>
-          <a:solidFill>
-            <a:srgbClr val="00BCD4"/>
-          </a:solidFill>
-          <a:ln>
-            <a:noFill/>
-          </a:ln>
-        </p:spPr>
-        <p:style>
-          <a:lnRef idx="1">
-            <a:schemeClr val="accent1"/>
-          </a:lnRef>
-          <a:fillRef idx="3">
-            <a:schemeClr val="accent1"/>
-          </a:fillRef>
-          <a:effectRef idx="2">
-            <a:schemeClr val="accent1"/>
-          </a:effectRef>
-          <a:fontRef idx="minor">
-            <a:schemeClr val="lt1"/>
-          </a:fontRef>
-        </p:style>
-        <p:txBody>
-          <a:bodyPr rtlCol="0" anchor="ctr"/>
-          <a:lstStyle/>
-          <a:p>
-            <a:pPr algn="ctr"/>
-          </a:p>
-        </p:txBody>
-      </p:sp>
-      <p:sp>
-        <p:nvSpPr>
-          <p:cNvPr id="19" name="TextBox 18"/>
-          <p:cNvSpPr txBox="1"/>
-          <p:nvPr/>
-        </p:nvSpPr>
-        <p:spPr>
-          <a:xfrm>
-            <a:off x="6263640" y="1965960"/>
-            <a:ext cx="2331720" cy="228600"/>
-          </a:xfrm>
-          <a:prstGeom prst="rect">
-            <a:avLst/>
-          </a:prstGeom>
-          <a:noFill/>
-        </p:spPr>
-        <p:txBody>
-          <a:bodyPr wrap="square">
-            <a:spAutoFit/>
-          </a:bodyPr>
-          <a:lstStyle/>
-          <a:p>
-            <a:pPr algn="l">
-              <a:defRPr sz="1000" b="0">
-                <a:solidFill>
-                  <a:srgbClr val="757575"/>
-                </a:solidFill>
-                <a:latin typeface="Meiryo"/>
-              </a:defRPr>
-            </a:pPr>
-            <a:r>
-              <a:t>Y 3   A R R</a:t>
-            </a:r>
-          </a:p>
-        </p:txBody>
-      </p:sp>
-      <p:sp>
-        <p:nvSpPr>
-          <p:cNvPr id="20" name="TextBox 19"/>
-          <p:cNvSpPr txBox="1"/>
-          <p:nvPr/>
-        </p:nvSpPr>
-        <p:spPr>
-          <a:xfrm>
-            <a:off x="6263640" y="2240280"/>
-            <a:ext cx="2331720" cy="457200"/>
-          </a:xfrm>
-          <a:prstGeom prst="rect">
-            <a:avLst/>
-          </a:prstGeom>
-          <a:noFill/>
-        </p:spPr>
-        <p:txBody>
-          <a:bodyPr wrap="square">
-            <a:spAutoFit/>
-          </a:bodyPr>
-          <a:lstStyle/>
-          <a:p>
-            <a:pPr algn="l">
-              <a:defRPr sz="2200" b="1">
-                <a:solidFill>
-                  <a:srgbClr val="212121"/>
-                </a:solidFill>
-                <a:latin typeface="Meiryo"/>
-              </a:defRPr>
-            </a:pPr>
-            <a:r>
-              <a:t>18億円</a:t>
-            </a:r>
-          </a:p>
-        </p:txBody>
-      </p:sp>
-      <p:sp>
-        <p:nvSpPr>
-          <p:cNvPr id="21" name="TextBox 20"/>
-          <p:cNvSpPr txBox="1"/>
-          <p:nvPr/>
-        </p:nvSpPr>
-        <p:spPr>
-          <a:xfrm>
-            <a:off x="6263640" y="2743200"/>
-            <a:ext cx="2331720" cy="365760"/>
-          </a:xfrm>
-          <a:prstGeom prst="rect">
-            <a:avLst/>
-          </a:prstGeom>
-          <a:noFill/>
-        </p:spPr>
-        <p:txBody>
-          <a:bodyPr wrap="square">
-            <a:spAutoFit/>
-          </a:bodyPr>
-          <a:lstStyle/>
-          <a:p>
-            <a:pPr algn="l">
-              <a:defRPr sz="1000" b="0">
-                <a:solidFill>
-                  <a:srgbClr val="757575"/>
-                </a:solidFill>
-                <a:latin typeface="Meiryo"/>
-              </a:defRPr>
-            </a:pPr>
-            <a:r>
-              <a:t>100台 × 1,800万円</a:t>
-            </a:r>
-          </a:p>
-        </p:txBody>
-      </p:sp>
-      <p:sp>
-        <p:nvSpPr>
-          <p:cNvPr id="22" name="Rectangle 21"/>
-          <p:cNvSpPr/>
-          <p:nvPr/>
-        </p:nvSpPr>
-        <p:spPr>
-          <a:xfrm>
-            <a:off x="8915399" y="1828800"/>
-            <a:ext cx="2606040" cy="1645920"/>
-          </a:xfrm>
-          <a:prstGeom prst="rect">
-            <a:avLst/>
-          </a:prstGeom>
-          <a:solidFill>
-            <a:srgbClr val="F5F5F5"/>
-          </a:solidFill>
-          <a:ln>
-            <a:noFill/>
-          </a:ln>
-        </p:spPr>
-        <p:style>
-          <a:lnRef idx="1">
-            <a:schemeClr val="accent1"/>
-          </a:lnRef>
-          <a:fillRef idx="3">
-            <a:schemeClr val="accent1"/>
-          </a:fillRef>
-          <a:effectRef idx="2">
-            <a:schemeClr val="accent1"/>
-          </a:effectRef>
-          <a:fontRef idx="minor">
-            <a:schemeClr val="lt1"/>
-          </a:fontRef>
-        </p:style>
-        <p:txBody>
-          <a:bodyPr rtlCol="0" anchor="ctr"/>
-          <a:lstStyle/>
-          <a:p>
-            <a:pPr algn="ctr"/>
-          </a:p>
-        </p:txBody>
-      </p:sp>
-      <p:sp>
-        <p:nvSpPr>
-          <p:cNvPr id="23" name="Rectangle 22"/>
-          <p:cNvSpPr/>
-          <p:nvPr/>
-        </p:nvSpPr>
-        <p:spPr>
-          <a:xfrm>
-            <a:off x="8915399" y="1828800"/>
-            <a:ext cx="2606040" cy="50800"/>
-          </a:xfrm>
-          <a:prstGeom prst="rect">
-            <a:avLst/>
-          </a:prstGeom>
-          <a:solidFill>
-            <a:srgbClr val="00BCD4"/>
-          </a:solidFill>
-          <a:ln>
-            <a:noFill/>
-          </a:ln>
-        </p:spPr>
-        <p:style>
-          <a:lnRef idx="1">
-            <a:schemeClr val="accent1"/>
-          </a:lnRef>
-          <a:fillRef idx="3">
-            <a:schemeClr val="accent1"/>
-          </a:fillRef>
-          <a:effectRef idx="2">
-            <a:schemeClr val="accent1"/>
-          </a:effectRef>
-          <a:fontRef idx="minor">
-            <a:schemeClr val="lt1"/>
-          </a:fontRef>
-        </p:style>
-        <p:txBody>
-          <a:bodyPr rtlCol="0" anchor="ctr"/>
-          <a:lstStyle/>
-          <a:p>
-            <a:pPr algn="ctr"/>
-          </a:p>
-        </p:txBody>
-      </p:sp>
-      <p:sp>
-        <p:nvSpPr>
-          <p:cNvPr id="24" name="TextBox 23"/>
-          <p:cNvSpPr txBox="1"/>
-          <p:nvPr/>
-        </p:nvSpPr>
-        <p:spPr>
-          <a:xfrm>
-            <a:off x="9052559" y="1965960"/>
-            <a:ext cx="2331720" cy="228600"/>
-          </a:xfrm>
-          <a:prstGeom prst="rect">
-            <a:avLst/>
-          </a:prstGeom>
-          <a:noFill/>
-        </p:spPr>
-        <p:txBody>
-          <a:bodyPr wrap="square">
-            <a:spAutoFit/>
-          </a:bodyPr>
-          <a:lstStyle/>
-          <a:p>
-            <a:pPr algn="l">
-              <a:defRPr sz="1000" b="0">
-                <a:solidFill>
-                  <a:srgbClr val="757575"/>
-                </a:solidFill>
-                <a:latin typeface="Meiryo"/>
-              </a:defRPr>
-            </a:pPr>
-            <a:r>
-              <a:t>Y 4   A R R</a:t>
-            </a:r>
-          </a:p>
-        </p:txBody>
-      </p:sp>
-      <p:sp>
-        <p:nvSpPr>
-          <p:cNvPr id="25" name="TextBox 24"/>
-          <p:cNvSpPr txBox="1"/>
-          <p:nvPr/>
-        </p:nvSpPr>
-        <p:spPr>
-          <a:xfrm>
-            <a:off x="9052559" y="2240280"/>
-            <a:ext cx="2331720" cy="457200"/>
-          </a:xfrm>
-          <a:prstGeom prst="rect">
-            <a:avLst/>
-          </a:prstGeom>
-          <a:noFill/>
-        </p:spPr>
-        <p:txBody>
-          <a:bodyPr wrap="square">
-            <a:spAutoFit/>
-          </a:bodyPr>
-          <a:lstStyle/>
-          <a:p>
-            <a:pPr algn="l">
-              <a:defRPr sz="2200" b="1">
-                <a:solidFill>
-                  <a:srgbClr val="212121"/>
-                </a:solidFill>
-                <a:latin typeface="Meiryo"/>
-              </a:defRPr>
-            </a:pPr>
-            <a:r>
-              <a:t>36億円</a:t>
-            </a:r>
-          </a:p>
-        </p:txBody>
-      </p:sp>
-      <p:sp>
-        <p:nvSpPr>
-          <p:cNvPr id="26" name="TextBox 25"/>
-          <p:cNvSpPr txBox="1"/>
-          <p:nvPr/>
-        </p:nvSpPr>
-        <p:spPr>
-          <a:xfrm>
-            <a:off x="9052559" y="2743200"/>
-            <a:ext cx="2331720" cy="365760"/>
-          </a:xfrm>
-          <a:prstGeom prst="rect">
-            <a:avLst/>
-          </a:prstGeom>
-          <a:noFill/>
-        </p:spPr>
-        <p:txBody>
-          <a:bodyPr wrap="square">
-            <a:spAutoFit/>
-          </a:bodyPr>
-          <a:lstStyle/>
-          <a:p>
-            <a:pPr algn="l">
-              <a:defRPr sz="1000" b="0">
-                <a:solidFill>
-                  <a:srgbClr val="757575"/>
-                </a:solidFill>
-                <a:latin typeface="Meiryo"/>
-              </a:defRPr>
-            </a:pPr>
-            <a:r>
-              <a:t>200台 (SAM 30%超)</a:t>
-            </a:r>
-          </a:p>
-        </p:txBody>
-      </p:sp>
-      <p:sp>
-        <p:nvSpPr>
-          <p:cNvPr id="27" name="Rectangle 26"/>
-          <p:cNvSpPr/>
-          <p:nvPr/>
-        </p:nvSpPr>
-        <p:spPr>
-          <a:xfrm>
-            <a:off x="548640" y="3840480"/>
-            <a:ext cx="10972800" cy="640080"/>
+            <a:off x="6217920" y="1737360"/>
+            <a:ext cx="5303520" cy="2560320"/>
           </a:xfrm>
           <a:prstGeom prst="rect">
             <a:avLst/>
@@ -8822,14 +8824,309 @@
       </p:sp>
       <p:sp>
         <p:nvSpPr>
-          <p:cNvPr id="28" name="TextBox 27"/>
-          <p:cNvSpPr txBox="1"/>
-          <p:nvPr/>
-        </p:nvSpPr>
-        <p:spPr>
-          <a:xfrm>
-            <a:off x="731520" y="3886200"/>
-            <a:ext cx="10607040" cy="548640"/>
+          <p:cNvPr id="18" name="TextBox 17"/>
+          <p:cNvSpPr txBox="1"/>
+          <p:nvPr/>
+        </p:nvSpPr>
+        <p:spPr>
+          <a:xfrm>
+            <a:off x="6400800" y="1828800"/>
+            <a:ext cx="4937760" cy="274320"/>
+          </a:xfrm>
+          <a:prstGeom prst="rect">
+            <a:avLst/>
+          </a:prstGeom>
+          <a:noFill/>
+        </p:spPr>
+        <p:txBody>
+          <a:bodyPr wrap="square">
+            <a:spAutoFit/>
+          </a:bodyPr>
+          <a:lstStyle/>
+          <a:p>
+            <a:pPr algn="l">
+              <a:defRPr sz="1000" b="1">
+                <a:solidFill>
+                  <a:srgbClr val="00BCD4"/>
+                </a:solidFill>
+                <a:latin typeface="Meiryo"/>
+              </a:defRPr>
+            </a:pPr>
+            <a:r>
+              <a:t>A R R   P R O J E C T I O N</a:t>
+            </a:r>
+          </a:p>
+        </p:txBody>
+      </p:sp>
+      <p:sp>
+        <p:nvSpPr>
+          <p:cNvPr id="19" name="TextBox 18"/>
+          <p:cNvSpPr txBox="1"/>
+          <p:nvPr/>
+        </p:nvSpPr>
+        <p:spPr>
+          <a:xfrm>
+            <a:off x="6400800" y="2286000"/>
+            <a:ext cx="2286000" cy="274320"/>
+          </a:xfrm>
+          <a:prstGeom prst="rect">
+            <a:avLst/>
+          </a:prstGeom>
+          <a:noFill/>
+        </p:spPr>
+        <p:txBody>
+          <a:bodyPr wrap="square">
+            <a:spAutoFit/>
+          </a:bodyPr>
+          <a:lstStyle/>
+          <a:p>
+            <a:pPr algn="l">
+              <a:defRPr sz="1000" b="0">
+                <a:solidFill>
+                  <a:srgbClr val="B0BEC5"/>
+                </a:solidFill>
+                <a:latin typeface="Meiryo"/>
+              </a:defRPr>
+            </a:pPr>
+            <a:r>
+              <a:t>Y 3   A R R</a:t>
+            </a:r>
+          </a:p>
+        </p:txBody>
+      </p:sp>
+      <p:sp>
+        <p:nvSpPr>
+          <p:cNvPr id="20" name="TextBox 19"/>
+          <p:cNvSpPr txBox="1"/>
+          <p:nvPr/>
+        </p:nvSpPr>
+        <p:spPr>
+          <a:xfrm>
+            <a:off x="6400800" y="2560320"/>
+            <a:ext cx="2286000" cy="548640"/>
+          </a:xfrm>
+          <a:prstGeom prst="rect">
+            <a:avLst/>
+          </a:prstGeom>
+          <a:noFill/>
+        </p:spPr>
+        <p:txBody>
+          <a:bodyPr wrap="square">
+            <a:spAutoFit/>
+          </a:bodyPr>
+          <a:lstStyle/>
+          <a:p>
+            <a:pPr algn="l">
+              <a:defRPr sz="3200" b="1">
+                <a:solidFill>
+                  <a:srgbClr val="FFFFFF"/>
+                </a:solidFill>
+                <a:latin typeface="Meiryo"/>
+              </a:defRPr>
+            </a:pPr>
+            <a:r>
+              <a:t>18億円</a:t>
+            </a:r>
+          </a:p>
+        </p:txBody>
+      </p:sp>
+      <p:sp>
+        <p:nvSpPr>
+          <p:cNvPr id="21" name="TextBox 20"/>
+          <p:cNvSpPr txBox="1"/>
+          <p:nvPr/>
+        </p:nvSpPr>
+        <p:spPr>
+          <a:xfrm>
+            <a:off x="6400800" y="3108960"/>
+            <a:ext cx="2286000" cy="274320"/>
+          </a:xfrm>
+          <a:prstGeom prst="rect">
+            <a:avLst/>
+          </a:prstGeom>
+          <a:noFill/>
+        </p:spPr>
+        <p:txBody>
+          <a:bodyPr wrap="square">
+            <a:spAutoFit/>
+          </a:bodyPr>
+          <a:lstStyle/>
+          <a:p>
+            <a:pPr algn="l">
+              <a:defRPr sz="1000" b="0">
+                <a:solidFill>
+                  <a:srgbClr val="B0BEC5"/>
+                </a:solidFill>
+                <a:latin typeface="Meiryo"/>
+              </a:defRPr>
+            </a:pPr>
+            <a:r>
+              <a:t>100台 × 1,800万円</a:t>
+            </a:r>
+          </a:p>
+        </p:txBody>
+      </p:sp>
+      <p:sp>
+        <p:nvSpPr>
+          <p:cNvPr id="22" name="TextBox 21"/>
+          <p:cNvSpPr txBox="1"/>
+          <p:nvPr/>
+        </p:nvSpPr>
+        <p:spPr>
+          <a:xfrm>
+            <a:off x="8961120" y="2286000"/>
+            <a:ext cx="2286000" cy="274320"/>
+          </a:xfrm>
+          <a:prstGeom prst="rect">
+            <a:avLst/>
+          </a:prstGeom>
+          <a:noFill/>
+        </p:spPr>
+        <p:txBody>
+          <a:bodyPr wrap="square">
+            <a:spAutoFit/>
+          </a:bodyPr>
+          <a:lstStyle/>
+          <a:p>
+            <a:pPr algn="l">
+              <a:defRPr sz="1000" b="0">
+                <a:solidFill>
+                  <a:srgbClr val="B0BEC5"/>
+                </a:solidFill>
+                <a:latin typeface="Meiryo"/>
+              </a:defRPr>
+            </a:pPr>
+            <a:r>
+              <a:t>Y 4   A R R</a:t>
+            </a:r>
+          </a:p>
+        </p:txBody>
+      </p:sp>
+      <p:sp>
+        <p:nvSpPr>
+          <p:cNvPr id="23" name="TextBox 22"/>
+          <p:cNvSpPr txBox="1"/>
+          <p:nvPr/>
+        </p:nvSpPr>
+        <p:spPr>
+          <a:xfrm>
+            <a:off x="8961120" y="2560320"/>
+            <a:ext cx="2286000" cy="548640"/>
+          </a:xfrm>
+          <a:prstGeom prst="rect">
+            <a:avLst/>
+          </a:prstGeom>
+          <a:noFill/>
+        </p:spPr>
+        <p:txBody>
+          <a:bodyPr wrap="square">
+            <a:spAutoFit/>
+          </a:bodyPr>
+          <a:lstStyle/>
+          <a:p>
+            <a:pPr algn="l">
+              <a:defRPr sz="3200" b="1">
+                <a:solidFill>
+                  <a:srgbClr val="00BCD4"/>
+                </a:solidFill>
+                <a:latin typeface="Meiryo"/>
+              </a:defRPr>
+            </a:pPr>
+            <a:r>
+              <a:t>36億円</a:t>
+            </a:r>
+          </a:p>
+        </p:txBody>
+      </p:sp>
+      <p:sp>
+        <p:nvSpPr>
+          <p:cNvPr id="24" name="TextBox 23"/>
+          <p:cNvSpPr txBox="1"/>
+          <p:nvPr/>
+        </p:nvSpPr>
+        <p:spPr>
+          <a:xfrm>
+            <a:off x="8961120" y="3108960"/>
+            <a:ext cx="2286000" cy="274320"/>
+          </a:xfrm>
+          <a:prstGeom prst="rect">
+            <a:avLst/>
+          </a:prstGeom>
+          <a:noFill/>
+        </p:spPr>
+        <p:txBody>
+          <a:bodyPr wrap="square">
+            <a:spAutoFit/>
+          </a:bodyPr>
+          <a:lstStyle/>
+          <a:p>
+            <a:pPr algn="l">
+              <a:defRPr sz="1000" b="0">
+                <a:solidFill>
+                  <a:srgbClr val="B0BEC5"/>
+                </a:solidFill>
+                <a:latin typeface="Meiryo"/>
+              </a:defRPr>
+            </a:pPr>
+            <a:r>
+              <a:t>200台 (SAM 30%超)</a:t>
+            </a:r>
+          </a:p>
+        </p:txBody>
+      </p:sp>
+      <p:sp>
+        <p:nvSpPr>
+          <p:cNvPr id="25" name="Rectangle 24"/>
+          <p:cNvSpPr/>
+          <p:nvPr/>
+        </p:nvSpPr>
+        <p:spPr>
+          <a:xfrm>
+            <a:off x="548640" y="4572000"/>
+            <a:ext cx="10972800" cy="548640"/>
+          </a:xfrm>
+          <a:prstGeom prst="rect">
+            <a:avLst/>
+          </a:prstGeom>
+          <a:solidFill>
+            <a:srgbClr val="1A2332"/>
+          </a:solidFill>
+          <a:ln>
+            <a:noFill/>
+          </a:ln>
+        </p:spPr>
+        <p:style>
+          <a:lnRef idx="1">
+            <a:schemeClr val="accent1"/>
+          </a:lnRef>
+          <a:fillRef idx="3">
+            <a:schemeClr val="accent1"/>
+          </a:fillRef>
+          <a:effectRef idx="2">
+            <a:schemeClr val="accent1"/>
+          </a:effectRef>
+          <a:fontRef idx="minor">
+            <a:schemeClr val="lt1"/>
+          </a:fontRef>
+        </p:style>
+        <p:txBody>
+          <a:bodyPr rtlCol="0" anchor="ctr"/>
+          <a:lstStyle/>
+          <a:p>
+            <a:pPr algn="ctr"/>
+          </a:p>
+        </p:txBody>
+      </p:sp>
+      <p:sp>
+        <p:nvSpPr>
+          <p:cNvPr id="26" name="TextBox 25"/>
+          <p:cNvSpPr txBox="1"/>
+          <p:nvPr/>
+        </p:nvSpPr>
+        <p:spPr>
+          <a:xfrm>
+            <a:off x="731520" y="4617720"/>
+            <a:ext cx="10607040" cy="457200"/>
           </a:xfrm>
           <a:prstGeom prst="rect">
             <a:avLst/>
@@ -8843,7 +9140,7 @@
           <a:lstStyle/>
           <a:p>
             <a:pPr algn="ctr">
-              <a:defRPr sz="1400" b="1">
+              <a:defRPr sz="1300" b="1">
                 <a:solidFill>
                   <a:srgbClr val="00BCD4"/>
                 </a:solidFill>
@@ -9042,21 +9339,21 @@
         <p:spPr>
           <a:xfrm>
             <a:off x="548640" y="1005840"/>
-            <a:ext cx="10972800" cy="640080"/>
-          </a:xfrm>
-          <a:prstGeom prst="rect">
-            <a:avLst/>
-          </a:prstGeom>
-          <a:noFill/>
-        </p:spPr>
-        <p:txBody>
-          <a:bodyPr wrap="square">
-            <a:spAutoFit/>
-          </a:bodyPr>
-          <a:lstStyle/>
-          <a:p>
-            <a:pPr algn="l">
-              <a:defRPr sz="3400" b="1">
+            <a:ext cx="10972800" cy="548640"/>
+          </a:xfrm>
+          <a:prstGeom prst="rect">
+            <a:avLst/>
+          </a:prstGeom>
+          <a:noFill/>
+        </p:spPr>
+        <p:txBody>
+          <a:bodyPr wrap="square">
+            <a:spAutoFit/>
+          </a:bodyPr>
+          <a:lstStyle/>
+          <a:p>
+            <a:pPr algn="l">
+              <a:defRPr sz="3000" b="1">
                 <a:solidFill>
                   <a:srgbClr val="212121"/>
                 </a:solidFill>
@@ -9998,21 +10295,21 @@
         <p:spPr>
           <a:xfrm>
             <a:off x="548640" y="1005840"/>
-            <a:ext cx="10972800" cy="640080"/>
-          </a:xfrm>
-          <a:prstGeom prst="rect">
-            <a:avLst/>
-          </a:prstGeom>
-          <a:noFill/>
-        </p:spPr>
-        <p:txBody>
-          <a:bodyPr wrap="square">
-            <a:spAutoFit/>
-          </a:bodyPr>
-          <a:lstStyle/>
-          <a:p>
-            <a:pPr algn="l">
-              <a:defRPr sz="3400" b="1">
+            <a:ext cx="10972800" cy="548640"/>
+          </a:xfrm>
+          <a:prstGeom prst="rect">
+            <a:avLst/>
+          </a:prstGeom>
+          <a:noFill/>
+        </p:spPr>
+        <p:txBody>
+          <a:bodyPr wrap="square">
+            <a:spAutoFit/>
+          </a:bodyPr>
+          <a:lstStyle/>
+          <a:p>
+            <a:pPr algn="l">
+              <a:defRPr sz="3000" b="1">
                 <a:solidFill>
                   <a:srgbClr val="212121"/>
                 </a:solidFill>
@@ -11061,7 +11358,7 @@
               </a:defRPr>
             </a:pPr>
             <a:r>
-              <a:t>T A R O S  ·  D e s k t o p   P h o t o n i c   Q u a n t u m   C o m p u t e r  ·  v 4 . 0</a:t>
+              <a:t>T A R O S  ·  D e s k t o p   P h o t o n i c   Q u a n t u m   C o m p u t e r  ·  v 4 . 1</a:t>
             </a:r>
           </a:p>
         </p:txBody>
@@ -11741,7 +12038,11 @@
               </a:defRPr>
             </a:pPr>
             <a:r>
-              <a:t>組合せ最適化 ~2,000スピン</a:t>
+              <a:t>組合せ最適化</a:t>
+            </a:r>
+            <a:br/>
+            <a:r>
+              <a:t>~2,000スピン</a:t>
             </a:r>
           </a:p>
         </p:txBody>
@@ -12014,7 +12315,11 @@
               </a:defRPr>
             </a:pPr>
             <a:r>
-              <a:t>時系列予測・異常検知</a:t>
+              <a:t>時系列予測</a:t>
+            </a:r>
+            <a:br/>
+            <a:r>
+              <a:t>異常検知</a:t>
             </a:r>
           </a:p>
         </p:txBody>
@@ -12287,7 +12592,11 @@
               </a:defRPr>
             </a:pPr>
             <a:r>
-              <a:t>量子乱数 ~200Mbps</a:t>
+              <a:t>量子乱数</a:t>
+            </a:r>
+            <a:br/>
+            <a:r>
+              <a:t>~200Mbps</a:t>
             </a:r>
           </a:p>
         </p:txBody>
@@ -12560,7 +12869,11 @@
               </a:defRPr>
             </a:pPr>
             <a:r>
-              <a:t>SQL以下精密測定</a:t>
+              <a:t>SQL以下</a:t>
+            </a:r>
+            <a:br/>
+            <a:r>
+              <a:t>精密測定</a:t>
             </a:r>
           </a:p>
         </p:txBody>
@@ -12833,7 +13146,11 @@
               </a:defRPr>
             </a:pPr>
             <a:r>
-              <a:t>サブショットノイズ顕微鏡</a:t>
+              <a:t>サブショットノイズ</a:t>
+            </a:r>
+            <a:br/>
+            <a:r>
+              <a:t>顕微鏡</a:t>
             </a:r>
           </a:p>
         </p:txBody>
@@ -13448,21 +13765,21 @@
         <p:spPr>
           <a:xfrm>
             <a:off x="548640" y="1005840"/>
-            <a:ext cx="10972800" cy="822960"/>
-          </a:xfrm>
-          <a:prstGeom prst="rect">
-            <a:avLst/>
-          </a:prstGeom>
-          <a:noFill/>
-        </p:spPr>
-        <p:txBody>
-          <a:bodyPr wrap="square">
-            <a:spAutoFit/>
-          </a:bodyPr>
-          <a:lstStyle/>
-          <a:p>
-            <a:pPr algn="l">
-              <a:defRPr sz="3400" b="1">
+            <a:ext cx="5029200" cy="640080"/>
+          </a:xfrm>
+          <a:prstGeom prst="rect">
+            <a:avLst/>
+          </a:prstGeom>
+          <a:noFill/>
+        </p:spPr>
+        <p:txBody>
+          <a:bodyPr wrap="square">
+            <a:spAutoFit/>
+          </a:bodyPr>
+          <a:lstStyle/>
+          <a:p>
+            <a:pPr algn="l">
+              <a:defRPr sz="2800" b="1">
                 <a:solidFill>
                   <a:srgbClr val="212121"/>
                 </a:solidFill>
@@ -13470,7 +13787,7 @@
               </a:defRPr>
             </a:pPr>
             <a:r>
-              <a:t>量子コンピュータは「データセンター専用」で止まっている</a:t>
+              <a:t>量子コンピュータは</a:t>
             </a:r>
           </a:p>
         </p:txBody>
@@ -13483,22 +13800,94 @@
         </p:nvSpPr>
         <p:spPr>
           <a:xfrm>
-            <a:off x="548640" y="1737360"/>
-            <a:ext cx="10972800" cy="457200"/>
-          </a:xfrm>
-          <a:prstGeom prst="rect">
-            <a:avLst/>
-          </a:prstGeom>
-          <a:noFill/>
-        </p:spPr>
-        <p:txBody>
-          <a:bodyPr wrap="square">
-            <a:spAutoFit/>
-          </a:bodyPr>
-          <a:lstStyle/>
-          <a:p>
-            <a:pPr algn="l">
-              <a:defRPr sz="1300" b="0">
+            <a:off x="548640" y="1554480"/>
+            <a:ext cx="5029200" cy="640080"/>
+          </a:xfrm>
+          <a:prstGeom prst="rect">
+            <a:avLst/>
+          </a:prstGeom>
+          <a:noFill/>
+        </p:spPr>
+        <p:txBody>
+          <a:bodyPr wrap="square">
+            <a:spAutoFit/>
+          </a:bodyPr>
+          <a:lstStyle/>
+          <a:p>
+            <a:pPr algn="l">
+              <a:defRPr sz="2800" b="1">
+                <a:solidFill>
+                  <a:srgbClr val="212121"/>
+                </a:solidFill>
+                <a:latin typeface="Meiryo"/>
+              </a:defRPr>
+            </a:pPr>
+            <a:r>
+              <a:t>「データセンター専用」で</a:t>
+            </a:r>
+          </a:p>
+        </p:txBody>
+      </p:sp>
+      <p:sp>
+        <p:nvSpPr>
+          <p:cNvPr id="8" name="TextBox 7"/>
+          <p:cNvSpPr txBox="1"/>
+          <p:nvPr/>
+        </p:nvSpPr>
+        <p:spPr>
+          <a:xfrm>
+            <a:off x="548640" y="2103120"/>
+            <a:ext cx="5029200" cy="640080"/>
+          </a:xfrm>
+          <a:prstGeom prst="rect">
+            <a:avLst/>
+          </a:prstGeom>
+          <a:noFill/>
+        </p:spPr>
+        <p:txBody>
+          <a:bodyPr wrap="square">
+            <a:spAutoFit/>
+          </a:bodyPr>
+          <a:lstStyle/>
+          <a:p>
+            <a:pPr algn="l">
+              <a:defRPr sz="2800" b="1">
+                <a:solidFill>
+                  <a:srgbClr val="212121"/>
+                </a:solidFill>
+                <a:latin typeface="Meiryo"/>
+              </a:defRPr>
+            </a:pPr>
+            <a:r>
+              <a:t>止まっている</a:t>
+            </a:r>
+          </a:p>
+        </p:txBody>
+      </p:sp>
+      <p:sp>
+        <p:nvSpPr>
+          <p:cNvPr id="9" name="TextBox 8"/>
+          <p:cNvSpPr txBox="1"/>
+          <p:nvPr/>
+        </p:nvSpPr>
+        <p:spPr>
+          <a:xfrm>
+            <a:off x="548640" y="2834640"/>
+            <a:ext cx="5029200" cy="731520"/>
+          </a:xfrm>
+          <a:prstGeom prst="rect">
+            <a:avLst/>
+          </a:prstGeom>
+          <a:noFill/>
+        </p:spPr>
+        <p:txBody>
+          <a:bodyPr wrap="square">
+            <a:spAutoFit/>
+          </a:bodyPr>
+          <a:lstStyle/>
+          <a:p>
+            <a:pPr algn="l">
+              <a:defRPr sz="1200" b="0">
                 <a:solidFill>
                   <a:srgbClr val="757575"/>
                 </a:solidFill>
@@ -13506,21 +13895,29 @@
               </a:defRPr>
             </a:pPr>
             <a:r>
-              <a:t>超伝導・イオン方式は希釈冷凍機 (15mK) または高真空イオントラップを必須とし、原理的に小型化が不可能。</a:t>
-            </a:r>
-          </a:p>
-        </p:txBody>
-      </p:sp>
-      <p:sp>
-        <p:nvSpPr>
-          <p:cNvPr id="8" name="Rectangle 7"/>
+              <a:t>超伝導・イオン方式は希釈冷凍機 (15mK)</a:t>
+            </a:r>
+            <a:br/>
+            <a:r>
+              <a:t>または高真空イオントラップを必須とし、</a:t>
+            </a:r>
+            <a:br/>
+            <a:r>
+              <a:t>原理的に小型化が不可能。</a:t>
+            </a:r>
+          </a:p>
+        </p:txBody>
+      </p:sp>
+      <p:sp>
+        <p:nvSpPr>
+          <p:cNvPr id="10" name="Rectangle 9"/>
           <p:cNvSpPr/>
           <p:nvPr/>
         </p:nvSpPr>
         <p:spPr>
           <a:xfrm>
-            <a:off x="548640" y="2560320"/>
-            <a:ext cx="2606040" cy="2011680"/>
+            <a:off x="6217920" y="1097280"/>
+            <a:ext cx="2651760" cy="1737360"/>
           </a:xfrm>
           <a:prstGeom prst="rect">
             <a:avLst/>
@@ -13556,14 +13953,14 @@
       </p:sp>
       <p:sp>
         <p:nvSpPr>
-          <p:cNvPr id="9" name="Rectangle 8"/>
+          <p:cNvPr id="11" name="Rectangle 10"/>
           <p:cNvSpPr/>
           <p:nvPr/>
         </p:nvSpPr>
         <p:spPr>
           <a:xfrm>
-            <a:off x="548640" y="2560320"/>
-            <a:ext cx="2606040" cy="36576"/>
+            <a:off x="6217920" y="1097280"/>
+            <a:ext cx="2651760" cy="36576"/>
           </a:xfrm>
           <a:prstGeom prst="rect">
             <a:avLst/>
@@ -13599,14 +13996,14 @@
       </p:sp>
       <p:sp>
         <p:nvSpPr>
-          <p:cNvPr id="10" name="TextBox 9"/>
-          <p:cNvSpPr txBox="1"/>
-          <p:nvPr/>
-        </p:nvSpPr>
-        <p:spPr>
-          <a:xfrm>
-            <a:off x="685800" y="2697480"/>
-            <a:ext cx="2331720" cy="274320"/>
+          <p:cNvPr id="12" name="TextBox 11"/>
+          <p:cNvSpPr txBox="1"/>
+          <p:nvPr/>
+        </p:nvSpPr>
+        <p:spPr>
+          <a:xfrm>
+            <a:off x="6355080" y="1234439"/>
+            <a:ext cx="2377440" cy="274320"/>
           </a:xfrm>
           <a:prstGeom prst="rect">
             <a:avLst/>
@@ -13635,28 +14032,28 @@
       </p:sp>
       <p:sp>
         <p:nvSpPr>
-          <p:cNvPr id="11" name="TextBox 10"/>
-          <p:cNvSpPr txBox="1"/>
-          <p:nvPr/>
-        </p:nvSpPr>
-        <p:spPr>
-          <a:xfrm>
-            <a:off x="685800" y="3017520"/>
-            <a:ext cx="2331720" cy="457200"/>
-          </a:xfrm>
-          <a:prstGeom prst="rect">
-            <a:avLst/>
-          </a:prstGeom>
-          <a:noFill/>
-        </p:spPr>
-        <p:txBody>
-          <a:bodyPr wrap="square">
-            <a:spAutoFit/>
-          </a:bodyPr>
-          <a:lstStyle/>
-          <a:p>
-            <a:pPr algn="l">
-              <a:defRPr sz="2600" b="1">
+          <p:cNvPr id="13" name="TextBox 12"/>
+          <p:cNvSpPr txBox="1"/>
+          <p:nvPr/>
+        </p:nvSpPr>
+        <p:spPr>
+          <a:xfrm>
+            <a:off x="6355080" y="1554480"/>
+            <a:ext cx="2377440" cy="457200"/>
+          </a:xfrm>
+          <a:prstGeom prst="rect">
+            <a:avLst/>
+          </a:prstGeom>
+          <a:noFill/>
+        </p:spPr>
+        <p:txBody>
+          <a:bodyPr wrap="square">
+            <a:spAutoFit/>
+          </a:bodyPr>
+          <a:lstStyle/>
+          <a:p>
+            <a:pPr algn="l">
+              <a:defRPr sz="2200" b="1">
                 <a:solidFill>
                   <a:srgbClr val="212121"/>
                 </a:solidFill>
@@ -13671,14 +14068,14 @@
       </p:sp>
       <p:sp>
         <p:nvSpPr>
-          <p:cNvPr id="12" name="TextBox 11"/>
-          <p:cNvSpPr txBox="1"/>
-          <p:nvPr/>
-        </p:nvSpPr>
-        <p:spPr>
-          <a:xfrm>
-            <a:off x="685800" y="3657600"/>
-            <a:ext cx="2331720" cy="548640"/>
+          <p:cNvPr id="14" name="TextBox 13"/>
+          <p:cNvSpPr txBox="1"/>
+          <p:nvPr/>
+        </p:nvSpPr>
+        <p:spPr>
+          <a:xfrm>
+            <a:off x="6355080" y="2103120"/>
+            <a:ext cx="2377440" cy="457200"/>
           </a:xfrm>
           <a:prstGeom prst="rect">
             <a:avLst/>
@@ -13700,21 +14097,21 @@
               </a:defRPr>
             </a:pPr>
             <a:r>
-              <a:t>希釈冷凍機 / He冷凍機が必須</a:t>
-            </a:r>
-          </a:p>
-        </p:txBody>
-      </p:sp>
-      <p:sp>
-        <p:nvSpPr>
-          <p:cNvPr id="13" name="Rectangle 12"/>
+              <a:t>希釈冷凍機 / He冷凍機</a:t>
+            </a:r>
+          </a:p>
+        </p:txBody>
+      </p:sp>
+      <p:sp>
+        <p:nvSpPr>
+          <p:cNvPr id="15" name="Rectangle 14"/>
           <p:cNvSpPr/>
           <p:nvPr/>
         </p:nvSpPr>
         <p:spPr>
           <a:xfrm>
-            <a:off x="3337560" y="2560320"/>
-            <a:ext cx="2606040" cy="2011680"/>
+            <a:off x="9052560" y="1097280"/>
+            <a:ext cx="2651760" cy="1737360"/>
           </a:xfrm>
           <a:prstGeom prst="rect">
             <a:avLst/>
@@ -13750,14 +14147,14 @@
       </p:sp>
       <p:sp>
         <p:nvSpPr>
-          <p:cNvPr id="14" name="Rectangle 13"/>
+          <p:cNvPr id="16" name="Rectangle 15"/>
           <p:cNvSpPr/>
           <p:nvPr/>
         </p:nvSpPr>
         <p:spPr>
           <a:xfrm>
-            <a:off x="3337560" y="2560320"/>
-            <a:ext cx="2606040" cy="36576"/>
+            <a:off x="9052560" y="1097280"/>
+            <a:ext cx="2651760" cy="36576"/>
           </a:xfrm>
           <a:prstGeom prst="rect">
             <a:avLst/>
@@ -13793,14 +14190,14 @@
       </p:sp>
       <p:sp>
         <p:nvSpPr>
-          <p:cNvPr id="15" name="TextBox 14"/>
-          <p:cNvSpPr txBox="1"/>
-          <p:nvPr/>
-        </p:nvSpPr>
-        <p:spPr>
-          <a:xfrm>
-            <a:off x="3474720" y="2697480"/>
-            <a:ext cx="2331720" cy="274320"/>
+          <p:cNvPr id="17" name="TextBox 16"/>
+          <p:cNvSpPr txBox="1"/>
+          <p:nvPr/>
+        </p:nvSpPr>
+        <p:spPr>
+          <a:xfrm>
+            <a:off x="9189720" y="1234439"/>
+            <a:ext cx="2377440" cy="274320"/>
           </a:xfrm>
           <a:prstGeom prst="rect">
             <a:avLst/>
@@ -13829,28 +14226,28 @@
       </p:sp>
       <p:sp>
         <p:nvSpPr>
-          <p:cNvPr id="16" name="TextBox 15"/>
-          <p:cNvSpPr txBox="1"/>
-          <p:nvPr/>
-        </p:nvSpPr>
-        <p:spPr>
-          <a:xfrm>
-            <a:off x="3474720" y="3017520"/>
-            <a:ext cx="2331720" cy="457200"/>
-          </a:xfrm>
-          <a:prstGeom prst="rect">
-            <a:avLst/>
-          </a:prstGeom>
-          <a:noFill/>
-        </p:spPr>
-        <p:txBody>
-          <a:bodyPr wrap="square">
-            <a:spAutoFit/>
-          </a:bodyPr>
-          <a:lstStyle/>
-          <a:p>
-            <a:pPr algn="l">
-              <a:defRPr sz="2600" b="1">
+          <p:cNvPr id="18" name="TextBox 17"/>
+          <p:cNvSpPr txBox="1"/>
+          <p:nvPr/>
+        </p:nvSpPr>
+        <p:spPr>
+          <a:xfrm>
+            <a:off x="9189720" y="1554480"/>
+            <a:ext cx="2377440" cy="457200"/>
+          </a:xfrm>
+          <a:prstGeom prst="rect">
+            <a:avLst/>
+          </a:prstGeom>
+          <a:noFill/>
+        </p:spPr>
+        <p:txBody>
+          <a:bodyPr wrap="square">
+            <a:spAutoFit/>
+          </a:bodyPr>
+          <a:lstStyle/>
+          <a:p>
+            <a:pPr algn="l">
+              <a:defRPr sz="2200" b="1">
                 <a:solidFill>
                   <a:srgbClr val="212121"/>
                 </a:solidFill>
@@ -13858,21 +14255,21 @@
               </a:defRPr>
             </a:pPr>
             <a:r>
-              <a:t>30 ~ 200kW</a:t>
-            </a:r>
-          </a:p>
-        </p:txBody>
-      </p:sp>
-      <p:sp>
-        <p:nvSpPr>
-          <p:cNvPr id="17" name="TextBox 16"/>
-          <p:cNvSpPr txBox="1"/>
-          <p:nvPr/>
-        </p:nvSpPr>
-        <p:spPr>
-          <a:xfrm>
-            <a:off x="3474720" y="3657600"/>
-            <a:ext cx="2331720" cy="548640"/>
+              <a:t>30~200kW</a:t>
+            </a:r>
+          </a:p>
+        </p:txBody>
+      </p:sp>
+      <p:sp>
+        <p:nvSpPr>
+          <p:cNvPr id="19" name="TextBox 18"/>
+          <p:cNvSpPr txBox="1"/>
+          <p:nvPr/>
+        </p:nvSpPr>
+        <p:spPr>
+          <a:xfrm>
+            <a:off x="9189720" y="2103120"/>
+            <a:ext cx="2377440" cy="457200"/>
           </a:xfrm>
           <a:prstGeom prst="rect">
             <a:avLst/>
@@ -13901,14 +14298,14 @@
       </p:sp>
       <p:sp>
         <p:nvSpPr>
-          <p:cNvPr id="18" name="Rectangle 17"/>
+          <p:cNvPr id="20" name="Rectangle 19"/>
           <p:cNvSpPr/>
           <p:nvPr/>
         </p:nvSpPr>
         <p:spPr>
           <a:xfrm>
-            <a:off x="6126479" y="2560320"/>
-            <a:ext cx="2606040" cy="2011680"/>
+            <a:off x="6217920" y="3017520"/>
+            <a:ext cx="2651760" cy="1737360"/>
           </a:xfrm>
           <a:prstGeom prst="rect">
             <a:avLst/>
@@ -13944,14 +14341,14 @@
       </p:sp>
       <p:sp>
         <p:nvSpPr>
-          <p:cNvPr id="19" name="Rectangle 18"/>
+          <p:cNvPr id="21" name="Rectangle 20"/>
           <p:cNvSpPr/>
           <p:nvPr/>
         </p:nvSpPr>
         <p:spPr>
           <a:xfrm>
-            <a:off x="6126479" y="2560320"/>
-            <a:ext cx="2606040" cy="36576"/>
+            <a:off x="6217920" y="3017520"/>
+            <a:ext cx="2651760" cy="36576"/>
           </a:xfrm>
           <a:prstGeom prst="rect">
             <a:avLst/>
@@ -13987,14 +14384,14 @@
       </p:sp>
       <p:sp>
         <p:nvSpPr>
-          <p:cNvPr id="20" name="TextBox 19"/>
-          <p:cNvSpPr txBox="1"/>
-          <p:nvPr/>
-        </p:nvSpPr>
-        <p:spPr>
-          <a:xfrm>
-            <a:off x="6263640" y="2697480"/>
-            <a:ext cx="2331720" cy="274320"/>
+          <p:cNvPr id="22" name="TextBox 21"/>
+          <p:cNvSpPr txBox="1"/>
+          <p:nvPr/>
+        </p:nvSpPr>
+        <p:spPr>
+          <a:xfrm>
+            <a:off x="6355080" y="3154679"/>
+            <a:ext cx="2377440" cy="274320"/>
           </a:xfrm>
           <a:prstGeom prst="rect">
             <a:avLst/>
@@ -14023,28 +14420,28 @@
       </p:sp>
       <p:sp>
         <p:nvSpPr>
-          <p:cNvPr id="21" name="TextBox 20"/>
-          <p:cNvSpPr txBox="1"/>
-          <p:nvPr/>
-        </p:nvSpPr>
-        <p:spPr>
-          <a:xfrm>
-            <a:off x="6263640" y="3017520"/>
-            <a:ext cx="2331720" cy="457200"/>
-          </a:xfrm>
-          <a:prstGeom prst="rect">
-            <a:avLst/>
-          </a:prstGeom>
-          <a:noFill/>
-        </p:spPr>
-        <p:txBody>
-          <a:bodyPr wrap="square">
-            <a:spAutoFit/>
-          </a:bodyPr>
-          <a:lstStyle/>
-          <a:p>
-            <a:pPr algn="l">
-              <a:defRPr sz="2600" b="1">
+          <p:cNvPr id="23" name="TextBox 22"/>
+          <p:cNvSpPr txBox="1"/>
+          <p:nvPr/>
+        </p:nvSpPr>
+        <p:spPr>
+          <a:xfrm>
+            <a:off x="6355080" y="3474720"/>
+            <a:ext cx="2377440" cy="457200"/>
+          </a:xfrm>
+          <a:prstGeom prst="rect">
+            <a:avLst/>
+          </a:prstGeom>
+          <a:noFill/>
+        </p:spPr>
+        <p:txBody>
+          <a:bodyPr wrap="square">
+            <a:spAutoFit/>
+          </a:bodyPr>
+          <a:lstStyle/>
+          <a:p>
+            <a:pPr algn="l">
+              <a:defRPr sz="2200" b="1">
                 <a:solidFill>
                   <a:srgbClr val="212121"/>
                 </a:solidFill>
@@ -14059,14 +14456,14 @@
       </p:sp>
       <p:sp>
         <p:nvSpPr>
-          <p:cNvPr id="22" name="TextBox 21"/>
-          <p:cNvSpPr txBox="1"/>
-          <p:nvPr/>
-        </p:nvSpPr>
-        <p:spPr>
-          <a:xfrm>
-            <a:off x="6263640" y="3657600"/>
-            <a:ext cx="2331720" cy="548640"/>
+          <p:cNvPr id="24" name="TextBox 23"/>
+          <p:cNvSpPr txBox="1"/>
+          <p:nvPr/>
+        </p:nvSpPr>
+        <p:spPr>
+          <a:xfrm>
+            <a:off x="6355080" y="4023360"/>
+            <a:ext cx="2377440" cy="457200"/>
           </a:xfrm>
           <a:prstGeom prst="rect">
             <a:avLst/>
@@ -14095,14 +14492,14 @@
       </p:sp>
       <p:sp>
         <p:nvSpPr>
-          <p:cNvPr id="23" name="Rectangle 22"/>
+          <p:cNvPr id="25" name="Rectangle 24"/>
           <p:cNvSpPr/>
           <p:nvPr/>
         </p:nvSpPr>
         <p:spPr>
           <a:xfrm>
-            <a:off x="8915399" y="2560320"/>
-            <a:ext cx="2606040" cy="2011680"/>
+            <a:off x="9052560" y="3017520"/>
+            <a:ext cx="2651760" cy="1737360"/>
           </a:xfrm>
           <a:prstGeom prst="rect">
             <a:avLst/>
@@ -14138,14 +14535,14 @@
       </p:sp>
       <p:sp>
         <p:nvSpPr>
-          <p:cNvPr id="24" name="Rectangle 23"/>
+          <p:cNvPr id="26" name="Rectangle 25"/>
           <p:cNvSpPr/>
           <p:nvPr/>
         </p:nvSpPr>
         <p:spPr>
           <a:xfrm>
-            <a:off x="8915399" y="2560320"/>
-            <a:ext cx="2606040" cy="36576"/>
+            <a:off x="9052560" y="3017520"/>
+            <a:ext cx="2651760" cy="36576"/>
           </a:xfrm>
           <a:prstGeom prst="rect">
             <a:avLst/>
@@ -14181,14 +14578,14 @@
       </p:sp>
       <p:sp>
         <p:nvSpPr>
-          <p:cNvPr id="25" name="TextBox 24"/>
-          <p:cNvSpPr txBox="1"/>
-          <p:nvPr/>
-        </p:nvSpPr>
-        <p:spPr>
-          <a:xfrm>
-            <a:off x="9052559" y="2697480"/>
-            <a:ext cx="2331720" cy="274320"/>
+          <p:cNvPr id="27" name="TextBox 26"/>
+          <p:cNvSpPr txBox="1"/>
+          <p:nvPr/>
+        </p:nvSpPr>
+        <p:spPr>
+          <a:xfrm>
+            <a:off x="9189720" y="3154679"/>
+            <a:ext cx="2377440" cy="274320"/>
           </a:xfrm>
           <a:prstGeom prst="rect">
             <a:avLst/>
@@ -14217,28 +14614,28 @@
       </p:sp>
       <p:sp>
         <p:nvSpPr>
-          <p:cNvPr id="26" name="TextBox 25"/>
-          <p:cNvSpPr txBox="1"/>
-          <p:nvPr/>
-        </p:nvSpPr>
-        <p:spPr>
-          <a:xfrm>
-            <a:off x="9052559" y="3017520"/>
-            <a:ext cx="2331720" cy="457200"/>
-          </a:xfrm>
-          <a:prstGeom prst="rect">
-            <a:avLst/>
-          </a:prstGeom>
-          <a:noFill/>
-        </p:spPr>
-        <p:txBody>
-          <a:bodyPr wrap="square">
-            <a:spAutoFit/>
-          </a:bodyPr>
-          <a:lstStyle/>
-          <a:p>
-            <a:pPr algn="l">
-              <a:defRPr sz="2600" b="1">
+          <p:cNvPr id="28" name="TextBox 27"/>
+          <p:cNvSpPr txBox="1"/>
+          <p:nvPr/>
+        </p:nvSpPr>
+        <p:spPr>
+          <a:xfrm>
+            <a:off x="9189720" y="3474720"/>
+            <a:ext cx="2377440" cy="457200"/>
+          </a:xfrm>
+          <a:prstGeom prst="rect">
+            <a:avLst/>
+          </a:prstGeom>
+          <a:noFill/>
+        </p:spPr>
+        <p:txBody>
+          <a:bodyPr wrap="square">
+            <a:spAutoFit/>
+          </a:bodyPr>
+          <a:lstStyle/>
+          <a:p>
+            <a:pPr algn="l">
+              <a:defRPr sz="2200" b="1">
                 <a:solidFill>
                   <a:srgbClr val="212121"/>
                 </a:solidFill>
@@ -14253,14 +14650,14 @@
       </p:sp>
       <p:sp>
         <p:nvSpPr>
-          <p:cNvPr id="27" name="TextBox 26"/>
-          <p:cNvSpPr txBox="1"/>
-          <p:nvPr/>
-        </p:nvSpPr>
-        <p:spPr>
-          <a:xfrm>
-            <a:off x="9052559" y="3657600"/>
-            <a:ext cx="2331720" cy="548640"/>
+          <p:cNvPr id="29" name="TextBox 28"/>
+          <p:cNvSpPr txBox="1"/>
+          <p:nvPr/>
+        </p:nvSpPr>
+        <p:spPr>
+          <a:xfrm>
+            <a:off x="9189720" y="4023360"/>
+            <a:ext cx="2377440" cy="457200"/>
           </a:xfrm>
           <a:prstGeom prst="rect">
             <a:avLst/>
@@ -14282,21 +14679,64 @@
               </a:defRPr>
             </a:pPr>
             <a:r>
-              <a:t>数台単位、購入は政府・大企業のみ</a:t>
-            </a:r>
-          </a:p>
-        </p:txBody>
-      </p:sp>
-      <p:sp>
-        <p:nvSpPr>
-          <p:cNvPr id="28" name="TextBox 27"/>
-          <p:cNvSpPr txBox="1"/>
-          <p:nvPr/>
-        </p:nvSpPr>
-        <p:spPr>
-          <a:xfrm>
-            <a:off x="548640" y="4937760"/>
-            <a:ext cx="10972800" cy="457200"/>
+              <a:t>購入は政府・大企業のみ</a:t>
+            </a:r>
+          </a:p>
+        </p:txBody>
+      </p:sp>
+      <p:sp>
+        <p:nvSpPr>
+          <p:cNvPr id="30" name="Rectangle 29"/>
+          <p:cNvSpPr/>
+          <p:nvPr/>
+        </p:nvSpPr>
+        <p:spPr>
+          <a:xfrm>
+            <a:off x="548640" y="5303520"/>
+            <a:ext cx="10972800" cy="548640"/>
+          </a:xfrm>
+          <a:prstGeom prst="rect">
+            <a:avLst/>
+          </a:prstGeom>
+          <a:solidFill>
+            <a:srgbClr val="F5F5F5"/>
+          </a:solidFill>
+          <a:ln>
+            <a:noFill/>
+          </a:ln>
+        </p:spPr>
+        <p:style>
+          <a:lnRef idx="1">
+            <a:schemeClr val="accent1"/>
+          </a:lnRef>
+          <a:fillRef idx="3">
+            <a:schemeClr val="accent1"/>
+          </a:fillRef>
+          <a:effectRef idx="2">
+            <a:schemeClr val="accent1"/>
+          </a:effectRef>
+          <a:fontRef idx="minor">
+            <a:schemeClr val="lt1"/>
+          </a:fontRef>
+        </p:style>
+        <p:txBody>
+          <a:bodyPr rtlCol="0" anchor="ctr"/>
+          <a:lstStyle/>
+          <a:p>
+            <a:pPr algn="ctr"/>
+          </a:p>
+        </p:txBody>
+      </p:sp>
+      <p:sp>
+        <p:nvSpPr>
+          <p:cNvPr id="31" name="TextBox 30"/>
+          <p:cNvSpPr txBox="1"/>
+          <p:nvPr/>
+        </p:nvSpPr>
+        <p:spPr>
+          <a:xfrm>
+            <a:off x="731520" y="5349240"/>
+            <a:ext cx="10607040" cy="457200"/>
           </a:xfrm>
           <a:prstGeom prst="rect">
             <a:avLst/>
@@ -14310,7 +14750,7 @@
           <a:lstStyle/>
           <a:p>
             <a:pPr algn="ctr">
-              <a:defRPr sz="1300" b="0">
+              <a:defRPr sz="1200" b="0">
                 <a:solidFill>
                   <a:srgbClr val="212121"/>
                 </a:solidFill>
@@ -14318,7 +14758,7 @@
               </a:defRPr>
             </a:pPr>
             <a:r>
-              <a:t>結果として、量子コンピュータを「実機で触れる」研究者は世界で1万人未満。教育・研究のボトルネックに。</a:t>
+              <a:t>結果: 量子コンピュータを「実機で触れる」研究者は世界で1万人未満。教育・研究のボトルネック。</a:t>
             </a:r>
           </a:p>
         </p:txBody>
@@ -14509,21 +14949,21 @@
         <p:spPr>
           <a:xfrm>
             <a:off x="548640" y="1005840"/>
-            <a:ext cx="10972800" cy="731520"/>
-          </a:xfrm>
-          <a:prstGeom prst="rect">
-            <a:avLst/>
-          </a:prstGeom>
-          <a:noFill/>
-        </p:spPr>
-        <p:txBody>
-          <a:bodyPr wrap="square">
-            <a:spAutoFit/>
-          </a:bodyPr>
-          <a:lstStyle/>
-          <a:p>
-            <a:pPr algn="l">
-              <a:defRPr sz="3400" b="1">
+            <a:ext cx="10972800" cy="548640"/>
+          </a:xfrm>
+          <a:prstGeom prst="rect">
+            <a:avLst/>
+          </a:prstGeom>
+          <a:noFill/>
+        </p:spPr>
+        <p:txBody>
+          <a:bodyPr wrap="square">
+            <a:spAutoFit/>
+          </a:bodyPr>
+          <a:lstStyle/>
+          <a:p>
+            <a:pPr algn="l">
+              <a:defRPr sz="3000" b="1">
                 <a:solidFill>
                   <a:srgbClr val="212121"/>
                 </a:solidFill>
@@ -14544,8 +14984,8 @@
         </p:nvSpPr>
         <p:spPr>
           <a:xfrm>
-            <a:off x="548640" y="1828800"/>
-            <a:ext cx="2606040" cy="1645920"/>
+            <a:off x="548640" y="1737360"/>
+            <a:ext cx="2606040" cy="1463040"/>
           </a:xfrm>
           <a:prstGeom prst="rect">
             <a:avLst/>
@@ -14587,8 +15027,8 @@
         </p:nvSpPr>
         <p:spPr>
           <a:xfrm>
-            <a:off x="685800" y="1965960"/>
-            <a:ext cx="2331720" cy="274320"/>
+            <a:off x="685800" y="1828800"/>
+            <a:ext cx="2331720" cy="228600"/>
           </a:xfrm>
           <a:prstGeom prst="rect">
             <a:avLst/>
@@ -14623,7 +15063,7 @@
         </p:nvSpPr>
         <p:spPr>
           <a:xfrm>
-            <a:off x="685800" y="2240280"/>
+            <a:off x="685800" y="2057400"/>
             <a:ext cx="2331720" cy="457200"/>
           </a:xfrm>
           <a:prstGeom prst="rect">
@@ -14638,7 +15078,7 @@
           <a:lstStyle/>
           <a:p>
             <a:pPr algn="l">
-              <a:defRPr sz="3000" b="1">
+              <a:defRPr sz="2800" b="1">
                 <a:solidFill>
                   <a:srgbClr val="00BCD4"/>
                 </a:solidFill>
@@ -14659,8 +15099,8 @@
         </p:nvSpPr>
         <p:spPr>
           <a:xfrm>
-            <a:off x="685800" y="2788920"/>
-            <a:ext cx="2331720" cy="365760"/>
+            <a:off x="685800" y="2560320"/>
+            <a:ext cx="2331720" cy="320040"/>
           </a:xfrm>
           <a:prstGeom prst="rect">
             <a:avLst/>
@@ -14695,8 +15135,8 @@
         </p:nvSpPr>
         <p:spPr>
           <a:xfrm>
-            <a:off x="3337560" y="1828800"/>
-            <a:ext cx="2606040" cy="1645920"/>
+            <a:off x="3337560" y="1737360"/>
+            <a:ext cx="2606040" cy="1463040"/>
           </a:xfrm>
           <a:prstGeom prst="rect">
             <a:avLst/>
@@ -14738,8 +15178,8 @@
         </p:nvSpPr>
         <p:spPr>
           <a:xfrm>
-            <a:off x="3474720" y="1965960"/>
-            <a:ext cx="2331720" cy="274320"/>
+            <a:off x="3474720" y="1828800"/>
+            <a:ext cx="2331720" cy="228600"/>
           </a:xfrm>
           <a:prstGeom prst="rect">
             <a:avLst/>
@@ -14774,7 +15214,7 @@
         </p:nvSpPr>
         <p:spPr>
           <a:xfrm>
-            <a:off x="3474720" y="2240280"/>
+            <a:off x="3474720" y="2057400"/>
             <a:ext cx="2331720" cy="457200"/>
           </a:xfrm>
           <a:prstGeom prst="rect">
@@ -14789,7 +15229,7 @@
           <a:lstStyle/>
           <a:p>
             <a:pPr algn="l">
-              <a:defRPr sz="3000" b="1">
+              <a:defRPr sz="2800" b="1">
                 <a:solidFill>
                   <a:srgbClr val="00BCD4"/>
                 </a:solidFill>
@@ -14810,8 +15250,8 @@
         </p:nvSpPr>
         <p:spPr>
           <a:xfrm>
-            <a:off x="3474720" y="2788920"/>
-            <a:ext cx="2331720" cy="365760"/>
+            <a:off x="3474720" y="2560320"/>
+            <a:ext cx="2331720" cy="320040"/>
           </a:xfrm>
           <a:prstGeom prst="rect">
             <a:avLst/>
@@ -14846,8 +15286,8 @@
         </p:nvSpPr>
         <p:spPr>
           <a:xfrm>
-            <a:off x="6126479" y="1828800"/>
-            <a:ext cx="2606040" cy="1645920"/>
+            <a:off x="6126479" y="1737360"/>
+            <a:ext cx="2606040" cy="1463040"/>
           </a:xfrm>
           <a:prstGeom prst="rect">
             <a:avLst/>
@@ -14889,8 +15329,8 @@
         </p:nvSpPr>
         <p:spPr>
           <a:xfrm>
-            <a:off x="6263640" y="1965960"/>
-            <a:ext cx="2331720" cy="274320"/>
+            <a:off x="6263640" y="1828800"/>
+            <a:ext cx="2331720" cy="228600"/>
           </a:xfrm>
           <a:prstGeom prst="rect">
             <a:avLst/>
@@ -14925,7 +15365,7 @@
         </p:nvSpPr>
         <p:spPr>
           <a:xfrm>
-            <a:off x="6263640" y="2240280"/>
+            <a:off x="6263640" y="2057400"/>
             <a:ext cx="2331720" cy="457200"/>
           </a:xfrm>
           <a:prstGeom prst="rect">
@@ -14940,7 +15380,7 @@
           <a:lstStyle/>
           <a:p>
             <a:pPr algn="l">
-              <a:defRPr sz="3000" b="1">
+              <a:defRPr sz="2800" b="1">
                 <a:solidFill>
                   <a:srgbClr val="00BCD4"/>
                 </a:solidFill>
@@ -14961,8 +15401,8 @@
         </p:nvSpPr>
         <p:spPr>
           <a:xfrm>
-            <a:off x="6263640" y="2788920"/>
-            <a:ext cx="2331720" cy="365760"/>
+            <a:off x="6263640" y="2560320"/>
+            <a:ext cx="2331720" cy="320040"/>
           </a:xfrm>
           <a:prstGeom prst="rect">
             <a:avLst/>
@@ -14997,8 +15437,8 @@
         </p:nvSpPr>
         <p:spPr>
           <a:xfrm>
-            <a:off x="8915399" y="1828800"/>
-            <a:ext cx="2606040" cy="1645920"/>
+            <a:off x="8915399" y="1737360"/>
+            <a:ext cx="2606040" cy="1463040"/>
           </a:xfrm>
           <a:prstGeom prst="rect">
             <a:avLst/>
@@ -15040,8 +15480,8 @@
         </p:nvSpPr>
         <p:spPr>
           <a:xfrm>
-            <a:off x="9052559" y="1965960"/>
-            <a:ext cx="2331720" cy="274320"/>
+            <a:off x="9052559" y="1828800"/>
+            <a:ext cx="2331720" cy="228600"/>
           </a:xfrm>
           <a:prstGeom prst="rect">
             <a:avLst/>
@@ -15076,7 +15516,7 @@
         </p:nvSpPr>
         <p:spPr>
           <a:xfrm>
-            <a:off x="9052559" y="2240280"/>
+            <a:off x="9052559" y="2057400"/>
             <a:ext cx="2331720" cy="457200"/>
           </a:xfrm>
           <a:prstGeom prst="rect">
@@ -15091,7 +15531,7 @@
           <a:lstStyle/>
           <a:p>
             <a:pPr algn="l">
-              <a:defRPr sz="3000" b="1">
+              <a:defRPr sz="2800" b="1">
                 <a:solidFill>
                   <a:srgbClr val="00BCD4"/>
                 </a:solidFill>
@@ -15112,8 +15552,8 @@
         </p:nvSpPr>
         <p:spPr>
           <a:xfrm>
-            <a:off x="9052559" y="2788920"/>
-            <a:ext cx="2331720" cy="365760"/>
+            <a:off x="9052559" y="2560320"/>
+            <a:ext cx="2331720" cy="320040"/>
           </a:xfrm>
           <a:prstGeom prst="rect">
             <a:avLst/>
@@ -15142,14 +15582,57 @@
       </p:sp>
       <p:sp>
         <p:nvSpPr>
-          <p:cNvPr id="23" name="TextBox 22"/>
-          <p:cNvSpPr txBox="1"/>
-          <p:nvPr/>
-        </p:nvSpPr>
-        <p:spPr>
-          <a:xfrm>
-            <a:off x="548640" y="3840480"/>
-            <a:ext cx="5029200" cy="320040"/>
+          <p:cNvPr id="23" name="Rectangle 22"/>
+          <p:cNvSpPr/>
+          <p:nvPr/>
+        </p:nvSpPr>
+        <p:spPr>
+          <a:xfrm>
+            <a:off x="548640" y="3474720"/>
+            <a:ext cx="5303520" cy="2926080"/>
+          </a:xfrm>
+          <a:prstGeom prst="rect">
+            <a:avLst/>
+          </a:prstGeom>
+          <a:solidFill>
+            <a:srgbClr val="F5F5F5"/>
+          </a:solidFill>
+          <a:ln>
+            <a:noFill/>
+          </a:ln>
+        </p:spPr>
+        <p:style>
+          <a:lnRef idx="1">
+            <a:schemeClr val="accent1"/>
+          </a:lnRef>
+          <a:fillRef idx="3">
+            <a:schemeClr val="accent1"/>
+          </a:fillRef>
+          <a:effectRef idx="2">
+            <a:schemeClr val="accent1"/>
+          </a:effectRef>
+          <a:fontRef idx="minor">
+            <a:schemeClr val="lt1"/>
+          </a:fontRef>
+        </p:style>
+        <p:txBody>
+          <a:bodyPr rtlCol="0" anchor="ctr"/>
+          <a:lstStyle/>
+          <a:p>
+            <a:pPr algn="ctr"/>
+          </a:p>
+        </p:txBody>
+      </p:sp>
+      <p:sp>
+        <p:nvSpPr>
+          <p:cNvPr id="24" name="TextBox 23"/>
+          <p:cNvSpPr txBox="1"/>
+          <p:nvPr/>
+        </p:nvSpPr>
+        <p:spPr>
+          <a:xfrm>
+            <a:off x="731520" y="3566160"/>
+            <a:ext cx="4937760" cy="274320"/>
           </a:xfrm>
           <a:prstGeom prst="rect">
             <a:avLst/>
@@ -15178,14 +15661,57 @@
       </p:sp>
       <p:sp>
         <p:nvSpPr>
-          <p:cNvPr id="24" name="TextBox 23"/>
-          <p:cNvSpPr txBox="1"/>
-          <p:nvPr/>
-        </p:nvSpPr>
-        <p:spPr>
-          <a:xfrm>
-            <a:off x="731520" y="4160520"/>
-            <a:ext cx="4754880" cy="457200"/>
+          <p:cNvPr id="25" name="Rectangle 24"/>
+          <p:cNvSpPr/>
+          <p:nvPr/>
+        </p:nvSpPr>
+        <p:spPr>
+          <a:xfrm>
+            <a:off x="731520" y="3977639"/>
+            <a:ext cx="54864" cy="50800"/>
+          </a:xfrm>
+          <a:prstGeom prst="rect">
+            <a:avLst/>
+          </a:prstGeom>
+          <a:solidFill>
+            <a:srgbClr val="00BCD4"/>
+          </a:solidFill>
+          <a:ln>
+            <a:noFill/>
+          </a:ln>
+        </p:spPr>
+        <p:style>
+          <a:lnRef idx="1">
+            <a:schemeClr val="accent1"/>
+          </a:lnRef>
+          <a:fillRef idx="3">
+            <a:schemeClr val="accent1"/>
+          </a:fillRef>
+          <a:effectRef idx="2">
+            <a:schemeClr val="accent1"/>
+          </a:effectRef>
+          <a:fontRef idx="minor">
+            <a:schemeClr val="lt1"/>
+          </a:fontRef>
+        </p:style>
+        <p:txBody>
+          <a:bodyPr rtlCol="0" anchor="ctr"/>
+          <a:lstStyle/>
+          <a:p>
+            <a:pPr algn="ctr"/>
+          </a:p>
+        </p:txBody>
+      </p:sp>
+      <p:sp>
+        <p:nvSpPr>
+          <p:cNvPr id="26" name="TextBox 25"/>
+          <p:cNvSpPr txBox="1"/>
+          <p:nvPr/>
+        </p:nvSpPr>
+        <p:spPr>
+          <a:xfrm>
+            <a:off x="914400" y="3995927"/>
+            <a:ext cx="4754880" cy="274320"/>
           </a:xfrm>
           <a:prstGeom prst="rect">
             <a:avLst/>
@@ -15207,9 +15733,32 @@
               </a:defRPr>
             </a:pPr>
             <a:r>
-              <a:t>  PPLN導波路OPA</a:t>
-            </a:r>
-          </a:p>
+              <a:t>PPLN導波路OPA</a:t>
+            </a:r>
+          </a:p>
+        </p:txBody>
+      </p:sp>
+      <p:sp>
+        <p:nvSpPr>
+          <p:cNvPr id="27" name="TextBox 26"/>
+          <p:cNvSpPr txBox="1"/>
+          <p:nvPr/>
+        </p:nvSpPr>
+        <p:spPr>
+          <a:xfrm>
+            <a:off x="914400" y="4251959"/>
+            <a:ext cx="4754880" cy="274320"/>
+          </a:xfrm>
+          <a:prstGeom prst="rect">
+            <a:avLst/>
+          </a:prstGeom>
+          <a:noFill/>
+        </p:spPr>
+        <p:txBody>
+          <a:bodyPr wrap="square">
+            <a:spAutoFit/>
+          </a:bodyPr>
+          <a:lstStyle/>
           <a:p>
             <a:pPr algn="l">
               <a:defRPr sz="1000" b="0">
@@ -15220,21 +15769,64 @@
               </a:defRPr>
             </a:pPr>
             <a:r>
-              <a:t>    13dB スクイーズド光 (NTT 12.1dB CW実証)</a:t>
-            </a:r>
-          </a:p>
-        </p:txBody>
-      </p:sp>
-      <p:sp>
-        <p:nvSpPr>
-          <p:cNvPr id="25" name="TextBox 24"/>
-          <p:cNvSpPr txBox="1"/>
+              <a:t>13dB スクイーズド光 (NTT 12.1dB CW実証)</a:t>
+            </a:r>
+          </a:p>
+        </p:txBody>
+      </p:sp>
+      <p:sp>
+        <p:nvSpPr>
+          <p:cNvPr id="28" name="Rectangle 27"/>
+          <p:cNvSpPr/>
           <p:nvPr/>
         </p:nvSpPr>
         <p:spPr>
           <a:xfrm>
             <a:off x="731520" y="4617720"/>
-            <a:ext cx="4754880" cy="457200"/>
+            <a:ext cx="54864" cy="50800"/>
+          </a:xfrm>
+          <a:prstGeom prst="rect">
+            <a:avLst/>
+          </a:prstGeom>
+          <a:solidFill>
+            <a:srgbClr val="00BCD4"/>
+          </a:solidFill>
+          <a:ln>
+            <a:noFill/>
+          </a:ln>
+        </p:spPr>
+        <p:style>
+          <a:lnRef idx="1">
+            <a:schemeClr val="accent1"/>
+          </a:lnRef>
+          <a:fillRef idx="3">
+            <a:schemeClr val="accent1"/>
+          </a:fillRef>
+          <a:effectRef idx="2">
+            <a:schemeClr val="accent1"/>
+          </a:effectRef>
+          <a:fontRef idx="minor">
+            <a:schemeClr val="lt1"/>
+          </a:fontRef>
+        </p:style>
+        <p:txBody>
+          <a:bodyPr rtlCol="0" anchor="ctr"/>
+          <a:lstStyle/>
+          <a:p>
+            <a:pPr algn="ctr"/>
+          </a:p>
+        </p:txBody>
+      </p:sp>
+      <p:sp>
+        <p:nvSpPr>
+          <p:cNvPr id="29" name="TextBox 28"/>
+          <p:cNvSpPr txBox="1"/>
+          <p:nvPr/>
+        </p:nvSpPr>
+        <p:spPr>
+          <a:xfrm>
+            <a:off x="914400" y="4636007"/>
+            <a:ext cx="4754880" cy="274320"/>
           </a:xfrm>
           <a:prstGeom prst="rect">
             <a:avLst/>
@@ -15256,9 +15848,32 @@
               </a:defRPr>
             </a:pPr>
             <a:r>
-              <a:t>  macronode TDM クラスタ</a:t>
-            </a:r>
-          </a:p>
+              <a:t>macronode TDM クラスタ</a:t>
+            </a:r>
+          </a:p>
+        </p:txBody>
+      </p:sp>
+      <p:sp>
+        <p:nvSpPr>
+          <p:cNvPr id="30" name="TextBox 29"/>
+          <p:cNvSpPr txBox="1"/>
+          <p:nvPr/>
+        </p:nvSpPr>
+        <p:spPr>
+          <a:xfrm>
+            <a:off x="914400" y="4892040"/>
+            <a:ext cx="4754880" cy="274320"/>
+          </a:xfrm>
+          <a:prstGeom prst="rect">
+            <a:avLst/>
+          </a:prstGeom>
+          <a:noFill/>
+        </p:spPr>
+        <p:txBody>
+          <a:bodyPr wrap="square">
+            <a:spAutoFit/>
+          </a:bodyPr>
+          <a:lstStyle/>
           <a:p>
             <a:pPr algn="l">
               <a:defRPr sz="1000" b="0">
@@ -15269,21 +15884,64 @@
               </a:defRPr>
             </a:pPr>
             <a:r>
-              <a:t>    光ファイバ遅延線で時分割に論理qubitを量産</a:t>
-            </a:r>
-          </a:p>
-        </p:txBody>
-      </p:sp>
-      <p:sp>
-        <p:nvSpPr>
-          <p:cNvPr id="26" name="TextBox 25"/>
-          <p:cNvSpPr txBox="1"/>
-          <p:nvPr/>
-        </p:nvSpPr>
-        <p:spPr>
-          <a:xfrm>
-            <a:off x="731520" y="5074920"/>
-            <a:ext cx="4754880" cy="457200"/>
+              <a:t>光ファイバ遅延線で時分割に論理qubitを量産</a:t>
+            </a:r>
+          </a:p>
+        </p:txBody>
+      </p:sp>
+      <p:sp>
+        <p:nvSpPr>
+          <p:cNvPr id="31" name="Rectangle 30"/>
+          <p:cNvSpPr/>
+          <p:nvPr/>
+        </p:nvSpPr>
+        <p:spPr>
+          <a:xfrm>
+            <a:off x="731520" y="5257800"/>
+            <a:ext cx="54864" cy="50800"/>
+          </a:xfrm>
+          <a:prstGeom prst="rect">
+            <a:avLst/>
+          </a:prstGeom>
+          <a:solidFill>
+            <a:srgbClr val="00BCD4"/>
+          </a:solidFill>
+          <a:ln>
+            <a:noFill/>
+          </a:ln>
+        </p:spPr>
+        <p:style>
+          <a:lnRef idx="1">
+            <a:schemeClr val="accent1"/>
+          </a:lnRef>
+          <a:fillRef idx="3">
+            <a:schemeClr val="accent1"/>
+          </a:fillRef>
+          <a:effectRef idx="2">
+            <a:schemeClr val="accent1"/>
+          </a:effectRef>
+          <a:fontRef idx="minor">
+            <a:schemeClr val="lt1"/>
+          </a:fontRef>
+        </p:style>
+        <p:txBody>
+          <a:bodyPr rtlCol="0" anchor="ctr"/>
+          <a:lstStyle/>
+          <a:p>
+            <a:pPr algn="ctr"/>
+          </a:p>
+        </p:txBody>
+      </p:sp>
+      <p:sp>
+        <p:nvSpPr>
+          <p:cNvPr id="32" name="TextBox 31"/>
+          <p:cNvSpPr txBox="1"/>
+          <p:nvPr/>
+        </p:nvSpPr>
+        <p:spPr>
+          <a:xfrm>
+            <a:off x="914400" y="5276088"/>
+            <a:ext cx="4754880" cy="274320"/>
           </a:xfrm>
           <a:prstGeom prst="rect">
             <a:avLst/>
@@ -15305,9 +15963,32 @@
               </a:defRPr>
             </a:pPr>
             <a:r>
-              <a:t>  GKP + 表面符号 (d=3/5/7)</a:t>
-            </a:r>
-          </a:p>
+              <a:t>GKP + 表面符号 (d=3/5/7)</a:t>
+            </a:r>
+          </a:p>
+        </p:txBody>
+      </p:sp>
+      <p:sp>
+        <p:nvSpPr>
+          <p:cNvPr id="33" name="TextBox 32"/>
+          <p:cNvSpPr txBox="1"/>
+          <p:nvPr/>
+        </p:nvSpPr>
+        <p:spPr>
+          <a:xfrm>
+            <a:off x="914400" y="5532120"/>
+            <a:ext cx="4754880" cy="274320"/>
+          </a:xfrm>
+          <a:prstGeom prst="rect">
+            <a:avLst/>
+          </a:prstGeom>
+          <a:noFill/>
+        </p:spPr>
+        <p:txBody>
+          <a:bodyPr wrap="square">
+            <a:spAutoFit/>
+          </a:bodyPr>
+          <a:lstStyle/>
           <a:p>
             <a:pPr algn="l">
               <a:defRPr sz="1000" b="0">
@@ -15318,21 +15999,64 @@
               </a:defRPr>
             </a:pPr>
             <a:r>
-              <a:t>    Phase 2+ PIC 統合で +1.8dB マージン確保</a:t>
-            </a:r>
-          </a:p>
-        </p:txBody>
-      </p:sp>
-      <p:sp>
-        <p:nvSpPr>
-          <p:cNvPr id="27" name="TextBox 26"/>
-          <p:cNvSpPr txBox="1"/>
-          <p:nvPr/>
-        </p:nvSpPr>
-        <p:spPr>
-          <a:xfrm>
-            <a:off x="6217920" y="3840480"/>
-            <a:ext cx="5486400" cy="320040"/>
+              <a:t>Phase 2+ PIC 統合で +1.8dB マージン確保</a:t>
+            </a:r>
+          </a:p>
+        </p:txBody>
+      </p:sp>
+      <p:sp>
+        <p:nvSpPr>
+          <p:cNvPr id="34" name="Rectangle 33"/>
+          <p:cNvSpPr/>
+          <p:nvPr/>
+        </p:nvSpPr>
+        <p:spPr>
+          <a:xfrm>
+            <a:off x="6035040" y="3474720"/>
+            <a:ext cx="5486400" cy="2926080"/>
+          </a:xfrm>
+          <a:prstGeom prst="rect">
+            <a:avLst/>
+          </a:prstGeom>
+          <a:solidFill>
+            <a:srgbClr val="F5F5F5"/>
+          </a:solidFill>
+          <a:ln>
+            <a:noFill/>
+          </a:ln>
+        </p:spPr>
+        <p:style>
+          <a:lnRef idx="1">
+            <a:schemeClr val="accent1"/>
+          </a:lnRef>
+          <a:fillRef idx="3">
+            <a:schemeClr val="accent1"/>
+          </a:fillRef>
+          <a:effectRef idx="2">
+            <a:schemeClr val="accent1"/>
+          </a:effectRef>
+          <a:fontRef idx="minor">
+            <a:schemeClr val="lt1"/>
+          </a:fontRef>
+        </p:style>
+        <p:txBody>
+          <a:bodyPr rtlCol="0" anchor="ctr"/>
+          <a:lstStyle/>
+          <a:p>
+            <a:pPr algn="ctr"/>
+          </a:p>
+        </p:txBody>
+      </p:sp>
+      <p:sp>
+        <p:nvSpPr>
+          <p:cNvPr id="35" name="TextBox 34"/>
+          <p:cNvSpPr txBox="1"/>
+          <p:nvPr/>
+        </p:nvSpPr>
+        <p:spPr>
+          <a:xfrm>
+            <a:off x="6217920" y="3566160"/>
+            <a:ext cx="5120640" cy="274320"/>
           </a:xfrm>
           <a:prstGeom prst="rect">
             <a:avLst/>
@@ -15361,14 +16085,57 @@
       </p:sp>
       <p:sp>
         <p:nvSpPr>
-          <p:cNvPr id="28" name="TextBox 27"/>
-          <p:cNvSpPr txBox="1"/>
-          <p:nvPr/>
-        </p:nvSpPr>
-        <p:spPr>
-          <a:xfrm>
-            <a:off x="6400800" y="4160520"/>
-            <a:ext cx="5303520" cy="457200"/>
+          <p:cNvPr id="36" name="Rectangle 35"/>
+          <p:cNvSpPr/>
+          <p:nvPr/>
+        </p:nvSpPr>
+        <p:spPr>
+          <a:xfrm>
+            <a:off x="6217920" y="3977639"/>
+            <a:ext cx="54864" cy="50800"/>
+          </a:xfrm>
+          <a:prstGeom prst="rect">
+            <a:avLst/>
+          </a:prstGeom>
+          <a:solidFill>
+            <a:srgbClr val="00BCD4"/>
+          </a:solidFill>
+          <a:ln>
+            <a:noFill/>
+          </a:ln>
+        </p:spPr>
+        <p:style>
+          <a:lnRef idx="1">
+            <a:schemeClr val="accent1"/>
+          </a:lnRef>
+          <a:fillRef idx="3">
+            <a:schemeClr val="accent1"/>
+          </a:fillRef>
+          <a:effectRef idx="2">
+            <a:schemeClr val="accent1"/>
+          </a:effectRef>
+          <a:fontRef idx="minor">
+            <a:schemeClr val="lt1"/>
+          </a:fontRef>
+        </p:style>
+        <p:txBody>
+          <a:bodyPr rtlCol="0" anchor="ctr"/>
+          <a:lstStyle/>
+          <a:p>
+            <a:pPr algn="ctr"/>
+          </a:p>
+        </p:txBody>
+      </p:sp>
+      <p:sp>
+        <p:nvSpPr>
+          <p:cNvPr id="37" name="TextBox 36"/>
+          <p:cNvSpPr txBox="1"/>
+          <p:nvPr/>
+        </p:nvSpPr>
+        <p:spPr>
+          <a:xfrm>
+            <a:off x="6400800" y="3995927"/>
+            <a:ext cx="4937760" cy="274320"/>
           </a:xfrm>
           <a:prstGeom prst="rect">
             <a:avLst/>
@@ -15390,9 +16157,32 @@
               </a:defRPr>
             </a:pPr>
             <a:r>
-              <a:t>  PPLN導波路の量産化</a:t>
-            </a:r>
-          </a:p>
+              <a:t>PPLN導波路の量産化</a:t>
+            </a:r>
+          </a:p>
+        </p:txBody>
+      </p:sp>
+      <p:sp>
+        <p:nvSpPr>
+          <p:cNvPr id="38" name="TextBox 37"/>
+          <p:cNvSpPr txBox="1"/>
+          <p:nvPr/>
+        </p:nvSpPr>
+        <p:spPr>
+          <a:xfrm>
+            <a:off x="6400800" y="4233672"/>
+            <a:ext cx="4937760" cy="274320"/>
+          </a:xfrm>
+          <a:prstGeom prst="rect">
+            <a:avLst/>
+          </a:prstGeom>
+          <a:noFill/>
+        </p:spPr>
+        <p:txBody>
+          <a:bodyPr wrap="square">
+            <a:spAutoFit/>
+          </a:bodyPr>
+          <a:lstStyle/>
           <a:p>
             <a:pPr algn="l">
               <a:defRPr sz="1000" b="0">
@@ -15403,21 +16193,64 @@
               </a:defRPr>
             </a:pPr>
             <a:r>
-              <a:t>    NTT・住友・nLight 商用ライン稼働</a:t>
-            </a:r>
-          </a:p>
-        </p:txBody>
-      </p:sp>
-      <p:sp>
-        <p:nvSpPr>
-          <p:cNvPr id="29" name="TextBox 28"/>
-          <p:cNvSpPr txBox="1"/>
-          <p:nvPr/>
-        </p:nvSpPr>
-        <p:spPr>
-          <a:xfrm>
-            <a:off x="6400800" y="4617720"/>
-            <a:ext cx="5303520" cy="457200"/>
+              <a:t>NTT・住友・nLight 商用ライン稼働</a:t>
+            </a:r>
+          </a:p>
+        </p:txBody>
+      </p:sp>
+      <p:sp>
+        <p:nvSpPr>
+          <p:cNvPr id="39" name="Rectangle 38"/>
+          <p:cNvSpPr/>
+          <p:nvPr/>
+        </p:nvSpPr>
+        <p:spPr>
+          <a:xfrm>
+            <a:off x="6217920" y="4526279"/>
+            <a:ext cx="54864" cy="50800"/>
+          </a:xfrm>
+          <a:prstGeom prst="rect">
+            <a:avLst/>
+          </a:prstGeom>
+          <a:solidFill>
+            <a:srgbClr val="00BCD4"/>
+          </a:solidFill>
+          <a:ln>
+            <a:noFill/>
+          </a:ln>
+        </p:spPr>
+        <p:style>
+          <a:lnRef idx="1">
+            <a:schemeClr val="accent1"/>
+          </a:lnRef>
+          <a:fillRef idx="3">
+            <a:schemeClr val="accent1"/>
+          </a:fillRef>
+          <a:effectRef idx="2">
+            <a:schemeClr val="accent1"/>
+          </a:effectRef>
+          <a:fontRef idx="minor">
+            <a:schemeClr val="lt1"/>
+          </a:fontRef>
+        </p:style>
+        <p:txBody>
+          <a:bodyPr rtlCol="0" anchor="ctr"/>
+          <a:lstStyle/>
+          <a:p>
+            <a:pPr algn="ctr"/>
+          </a:p>
+        </p:txBody>
+      </p:sp>
+      <p:sp>
+        <p:nvSpPr>
+          <p:cNvPr id="40" name="TextBox 39"/>
+          <p:cNvSpPr txBox="1"/>
+          <p:nvPr/>
+        </p:nvSpPr>
+        <p:spPr>
+          <a:xfrm>
+            <a:off x="6400800" y="4544567"/>
+            <a:ext cx="4937760" cy="274320"/>
           </a:xfrm>
           <a:prstGeom prst="rect">
             <a:avLst/>
@@ -15439,9 +16272,32 @@
               </a:defRPr>
             </a:pPr>
             <a:r>
-              <a:t>  Soft-info MWPM 閾値確立</a:t>
-            </a:r>
-          </a:p>
+              <a:t>Soft-info MWPM 閾値確立</a:t>
+            </a:r>
+          </a:p>
+        </p:txBody>
+      </p:sp>
+      <p:sp>
+        <p:nvSpPr>
+          <p:cNvPr id="41" name="TextBox 40"/>
+          <p:cNvSpPr txBox="1"/>
+          <p:nvPr/>
+        </p:nvSpPr>
+        <p:spPr>
+          <a:xfrm>
+            <a:off x="6400800" y="4782312"/>
+            <a:ext cx="4937760" cy="274320"/>
+          </a:xfrm>
+          <a:prstGeom prst="rect">
+            <a:avLst/>
+          </a:prstGeom>
+          <a:noFill/>
+        </p:spPr>
+        <p:txBody>
+          <a:bodyPr wrap="square">
+            <a:spAutoFit/>
+          </a:bodyPr>
+          <a:lstStyle/>
           <a:p>
             <a:pPr algn="l">
               <a:defRPr sz="1000" b="0">
@@ -15452,21 +16308,64 @@
               </a:defRPr>
             </a:pPr>
             <a:r>
-              <a:t>    Noh-Chamberland 2022 で1.5%確定</a:t>
-            </a:r>
-          </a:p>
-        </p:txBody>
-      </p:sp>
-      <p:sp>
-        <p:nvSpPr>
-          <p:cNvPr id="30" name="TextBox 29"/>
-          <p:cNvSpPr txBox="1"/>
-          <p:nvPr/>
-        </p:nvSpPr>
-        <p:spPr>
-          <a:xfrm>
-            <a:off x="6400800" y="5074920"/>
-            <a:ext cx="5303520" cy="457200"/>
+              <a:t>Noh-Chamberland 2022 で1.5%確定</a:t>
+            </a:r>
+          </a:p>
+        </p:txBody>
+      </p:sp>
+      <p:sp>
+        <p:nvSpPr>
+          <p:cNvPr id="42" name="Rectangle 41"/>
+          <p:cNvSpPr/>
+          <p:nvPr/>
+        </p:nvSpPr>
+        <p:spPr>
+          <a:xfrm>
+            <a:off x="6217920" y="5074920"/>
+            <a:ext cx="54864" cy="50800"/>
+          </a:xfrm>
+          <a:prstGeom prst="rect">
+            <a:avLst/>
+          </a:prstGeom>
+          <a:solidFill>
+            <a:srgbClr val="00BCD4"/>
+          </a:solidFill>
+          <a:ln>
+            <a:noFill/>
+          </a:ln>
+        </p:spPr>
+        <p:style>
+          <a:lnRef idx="1">
+            <a:schemeClr val="accent1"/>
+          </a:lnRef>
+          <a:fillRef idx="3">
+            <a:schemeClr val="accent1"/>
+          </a:fillRef>
+          <a:effectRef idx="2">
+            <a:schemeClr val="accent1"/>
+          </a:effectRef>
+          <a:fontRef idx="minor">
+            <a:schemeClr val="lt1"/>
+          </a:fontRef>
+        </p:style>
+        <p:txBody>
+          <a:bodyPr rtlCol="0" anchor="ctr"/>
+          <a:lstStyle/>
+          <a:p>
+            <a:pPr algn="ctr"/>
+          </a:p>
+        </p:txBody>
+      </p:sp>
+      <p:sp>
+        <p:nvSpPr>
+          <p:cNvPr id="43" name="TextBox 42"/>
+          <p:cNvSpPr txBox="1"/>
+          <p:nvPr/>
+        </p:nvSpPr>
+        <p:spPr>
+          <a:xfrm>
+            <a:off x="6400800" y="5093207"/>
+            <a:ext cx="4937760" cy="274320"/>
           </a:xfrm>
           <a:prstGeom prst="rect">
             <a:avLst/>
@@ -15488,9 +16387,32 @@
               </a:defRPr>
             </a:pPr>
             <a:r>
-              <a:t>  Versal FPGA 27ns FF</a:t>
-            </a:r>
-          </a:p>
+              <a:t>Versal FPGA 27ns FF</a:t>
+            </a:r>
+          </a:p>
+        </p:txBody>
+      </p:sp>
+      <p:sp>
+        <p:nvSpPr>
+          <p:cNvPr id="44" name="TextBox 43"/>
+          <p:cNvSpPr txBox="1"/>
+          <p:nvPr/>
+        </p:nvSpPr>
+        <p:spPr>
+          <a:xfrm>
+            <a:off x="6400800" y="5330952"/>
+            <a:ext cx="4937760" cy="274320"/>
+          </a:xfrm>
+          <a:prstGeom prst="rect">
+            <a:avLst/>
+          </a:prstGeom>
+          <a:noFill/>
+        </p:spPr>
+        <p:txBody>
+          <a:bodyPr wrap="square">
+            <a:spAutoFit/>
+          </a:bodyPr>
+          <a:lstStyle/>
           <a:p>
             <a:pPr algn="l">
               <a:defRPr sz="1000" b="0">
@@ -15501,21 +16423,64 @@
               </a:defRPr>
             </a:pPr>
             <a:r>
-              <a:t>    光-電気-光ループが ns級で閉じる時代</a:t>
-            </a:r>
-          </a:p>
-        </p:txBody>
-      </p:sp>
-      <p:sp>
-        <p:nvSpPr>
-          <p:cNvPr id="31" name="TextBox 30"/>
-          <p:cNvSpPr txBox="1"/>
-          <p:nvPr/>
-        </p:nvSpPr>
-        <p:spPr>
-          <a:xfrm>
-            <a:off x="6400800" y="5532120"/>
-            <a:ext cx="5303520" cy="457200"/>
+              <a:t>光-電気-光ループが ns級で閉じる時代</a:t>
+            </a:r>
+          </a:p>
+        </p:txBody>
+      </p:sp>
+      <p:sp>
+        <p:nvSpPr>
+          <p:cNvPr id="45" name="Rectangle 44"/>
+          <p:cNvSpPr/>
+          <p:nvPr/>
+        </p:nvSpPr>
+        <p:spPr>
+          <a:xfrm>
+            <a:off x="6217920" y="5623559"/>
+            <a:ext cx="54864" cy="50800"/>
+          </a:xfrm>
+          <a:prstGeom prst="rect">
+            <a:avLst/>
+          </a:prstGeom>
+          <a:solidFill>
+            <a:srgbClr val="00BCD4"/>
+          </a:solidFill>
+          <a:ln>
+            <a:noFill/>
+          </a:ln>
+        </p:spPr>
+        <p:style>
+          <a:lnRef idx="1">
+            <a:schemeClr val="accent1"/>
+          </a:lnRef>
+          <a:fillRef idx="3">
+            <a:schemeClr val="accent1"/>
+          </a:fillRef>
+          <a:effectRef idx="2">
+            <a:schemeClr val="accent1"/>
+          </a:effectRef>
+          <a:fontRef idx="minor">
+            <a:schemeClr val="lt1"/>
+          </a:fontRef>
+        </p:style>
+        <p:txBody>
+          <a:bodyPr rtlCol="0" anchor="ctr"/>
+          <a:lstStyle/>
+          <a:p>
+            <a:pPr algn="ctr"/>
+          </a:p>
+        </p:txBody>
+      </p:sp>
+      <p:sp>
+        <p:nvSpPr>
+          <p:cNvPr id="46" name="TextBox 45"/>
+          <p:cNvSpPr txBox="1"/>
+          <p:nvPr/>
+        </p:nvSpPr>
+        <p:spPr>
+          <a:xfrm>
+            <a:off x="6400800" y="5641847"/>
+            <a:ext cx="4937760" cy="274320"/>
           </a:xfrm>
           <a:prstGeom prst="rect">
             <a:avLst/>
@@ -15537,9 +16502,32 @@
               </a:defRPr>
             </a:pPr>
             <a:r>
-              <a:t>  CVBQP ⊇ BQP 証明</a:t>
-            </a:r>
-          </a:p>
+              <a:t>CVBQP ⊇ BQP 証明</a:t>
+            </a:r>
+          </a:p>
+        </p:txBody>
+      </p:sp>
+      <p:sp>
+        <p:nvSpPr>
+          <p:cNvPr id="47" name="TextBox 46"/>
+          <p:cNvSpPr txBox="1"/>
+          <p:nvPr/>
+        </p:nvSpPr>
+        <p:spPr>
+          <a:xfrm>
+            <a:off x="6400800" y="5879592"/>
+            <a:ext cx="4937760" cy="274320"/>
+          </a:xfrm>
+          <a:prstGeom prst="rect">
+            <a:avLst/>
+          </a:prstGeom>
+          <a:noFill/>
+        </p:spPr>
+        <p:txBody>
+          <a:bodyPr wrap="square">
+            <a:spAutoFit/>
+          </a:bodyPr>
+          <a:lstStyle/>
           <a:p>
             <a:pPr algn="l">
               <a:defRPr sz="1000" b="0">
@@ -15550,7 +16538,7 @@
               </a:defRPr>
             </a:pPr>
             <a:r>
-              <a:t>    ITCS 2025: CV量子計算≧標準QC</a:t>
+              <a:t>ITCS 2025: CV量子計算≧標準QC</a:t>
             </a:r>
           </a:p>
         </p:txBody>
@@ -15741,21 +16729,21 @@
         <p:spPr>
           <a:xfrm>
             <a:off x="548640" y="1005840"/>
-            <a:ext cx="10972800" cy="731520"/>
-          </a:xfrm>
-          <a:prstGeom prst="rect">
-            <a:avLst/>
-          </a:prstGeom>
-          <a:noFill/>
-        </p:spPr>
-        <p:txBody>
-          <a:bodyPr wrap="square">
-            <a:spAutoFit/>
-          </a:bodyPr>
-          <a:lstStyle/>
-          <a:p>
-            <a:pPr algn="l">
-              <a:defRPr sz="3400" b="1">
+            <a:ext cx="10972800" cy="548640"/>
+          </a:xfrm>
+          <a:prstGeom prst="rect">
+            <a:avLst/>
+          </a:prstGeom>
+          <a:noFill/>
+        </p:spPr>
+        <p:txBody>
+          <a:bodyPr wrap="square">
+            <a:spAutoFit/>
+          </a:bodyPr>
+          <a:lstStyle/>
+          <a:p>
+            <a:pPr algn="l">
+              <a:defRPr sz="3000" b="1">
                 <a:solidFill>
                   <a:srgbClr val="212121"/>
                 </a:solidFill>
@@ -15776,22 +16764,22 @@
         </p:nvSpPr>
         <p:spPr>
           <a:xfrm>
-            <a:off x="548640" y="1645920"/>
-            <a:ext cx="10972800" cy="457200"/>
-          </a:xfrm>
-          <a:prstGeom prst="rect">
-            <a:avLst/>
-          </a:prstGeom>
-          <a:noFill/>
-        </p:spPr>
-        <p:txBody>
-          <a:bodyPr wrap="square">
-            <a:spAutoFit/>
-          </a:bodyPr>
-          <a:lstStyle/>
-          <a:p>
-            <a:pPr algn="l">
-              <a:defRPr sz="1400" b="0">
+            <a:off x="548640" y="1554480"/>
+            <a:ext cx="10972800" cy="365760"/>
+          </a:xfrm>
+          <a:prstGeom prst="rect">
+            <a:avLst/>
+          </a:prstGeom>
+          <a:noFill/>
+        </p:spPr>
+        <p:txBody>
+          <a:bodyPr wrap="square">
+            <a:spAutoFit/>
+          </a:bodyPr>
+          <a:lstStyle/>
+          <a:p>
+            <a:pPr algn="l">
+              <a:defRPr sz="1300" b="0">
                 <a:solidFill>
                   <a:srgbClr val="757575"/>
                 </a:solidFill>
@@ -15799,7 +16787,7 @@
               </a:defRPr>
             </a:pPr>
             <a:r>
-              <a:t>量子コンピュータ業界最大の問題 ——「いつ役に立つのか?」—— に対する回答</a:t>
+              <a:t>量子コンピュータ業界最大の問題 —「いつ役に立つのか?」— に対する回答</a:t>
             </a:r>
           </a:p>
         </p:txBody>
@@ -15812,8 +16800,8 @@
         </p:nvSpPr>
         <p:spPr>
           <a:xfrm>
-            <a:off x="548640" y="2194560"/>
-            <a:ext cx="2606040" cy="2926080"/>
+            <a:off x="548640" y="2103120"/>
+            <a:ext cx="5440680" cy="1371600"/>
           </a:xfrm>
           <a:prstGeom prst="rect">
             <a:avLst/>
@@ -15855,8 +16843,8 @@
         </p:nvSpPr>
         <p:spPr>
           <a:xfrm>
-            <a:off x="548640" y="2194560"/>
-            <a:ext cx="2606040" cy="50800"/>
+            <a:off x="548640" y="2103120"/>
+            <a:ext cx="5440680" cy="50800"/>
           </a:xfrm>
           <a:prstGeom prst="rect">
             <a:avLst/>
@@ -15898,8 +16886,8 @@
         </p:nvSpPr>
         <p:spPr>
           <a:xfrm>
-            <a:off x="685800" y="2331720"/>
-            <a:ext cx="2331720" cy="274320"/>
+            <a:off x="731520" y="2240279"/>
+            <a:ext cx="2011680" cy="274320"/>
           </a:xfrm>
           <a:prstGeom prst="rect">
             <a:avLst/>
@@ -15934,8 +16922,44 @@
         </p:nvSpPr>
         <p:spPr>
           <a:xfrm>
-            <a:off x="685800" y="2651760"/>
-            <a:ext cx="2331720" cy="274320"/>
+            <a:off x="2834640" y="2240279"/>
+            <a:ext cx="2926080" cy="274320"/>
+          </a:xfrm>
+          <a:prstGeom prst="rect">
+            <a:avLst/>
+          </a:prstGeom>
+          <a:noFill/>
+        </p:spPr>
+        <p:txBody>
+          <a:bodyPr wrap="square">
+            <a:spAutoFit/>
+          </a:bodyPr>
+          <a:lstStyle/>
+          <a:p>
+            <a:pPr algn="l">
+              <a:defRPr sz="1200" b="0">
+                <a:solidFill>
+                  <a:srgbClr val="00BCD4"/>
+                </a:solidFill>
+                <a:latin typeface="Meiryo"/>
+              </a:defRPr>
+            </a:pPr>
+            <a:r>
+              <a:t>組合せ最適化</a:t>
+            </a:r>
+          </a:p>
+        </p:txBody>
+      </p:sp>
+      <p:sp>
+        <p:nvSpPr>
+          <p:cNvPr id="12" name="TextBox 11"/>
+          <p:cNvSpPr txBox="1"/>
+          <p:nvPr/>
+        </p:nvSpPr>
+        <p:spPr>
+          <a:xfrm>
+            <a:off x="731520" y="2606039"/>
+            <a:ext cx="5074920" cy="731520"/>
           </a:xfrm>
           <a:prstGeom prst="rect">
             <a:avLst/>
@@ -15951,57 +16975,13 @@
             <a:pPr algn="l">
               <a:defRPr sz="1100" b="0">
                 <a:solidFill>
-                  <a:srgbClr val="00BCD4"/>
-                </a:solidFill>
-                <a:latin typeface="Meiryo"/>
-              </a:defRPr>
-            </a:pPr>
-            <a:r>
-              <a:t>組合せ最適化</a:t>
-            </a:r>
-          </a:p>
-        </p:txBody>
-      </p:sp>
-      <p:sp>
-        <p:nvSpPr>
-          <p:cNvPr id="12" name="TextBox 11"/>
-          <p:cNvSpPr txBox="1"/>
-          <p:nvPr/>
-        </p:nvSpPr>
-        <p:spPr>
-          <a:xfrm>
-            <a:off x="685800" y="3017520"/>
-            <a:ext cx="2331720" cy="1645920"/>
-          </a:xfrm>
-          <a:prstGeom prst="rect">
-            <a:avLst/>
-          </a:prstGeom>
-          <a:noFill/>
-        </p:spPr>
-        <p:txBody>
-          <a:bodyPr wrap="square">
-            <a:spAutoFit/>
-          </a:bodyPr>
-          <a:lstStyle/>
-          <a:p>
-            <a:pPr algn="l">
-              <a:defRPr sz="1000" b="0">
-                <a:solidFill>
                   <a:srgbClr val="757575"/>
                 </a:solidFill>
                 <a:latin typeface="Meiryo"/>
               </a:defRPr>
             </a:pPr>
             <a:r>
-              <a:t>OPA閾値以下動作→最大~2,000スピン</a:t>
-            </a:r>
-            <a:br/>
-            <a:r>
-              <a:t>車両ルーティング・スケジューリング</a:t>
-            </a:r>
-            <a:br/>
-            <a:r>
-              <a:t>競合CIM製品($5K-50K)を内蔵</a:t>
+              <a:t>OPA閾値以下動作で最大~2,000スピン。車両ルーティング・スケジューリング。競合CIM製品($5K-50K)を内蔵。</a:t>
             </a:r>
           </a:p>
         </p:txBody>
@@ -16014,8 +16994,8 @@
         </p:nvSpPr>
         <p:spPr>
           <a:xfrm>
-            <a:off x="3337560" y="2194560"/>
-            <a:ext cx="2606040" cy="2926080"/>
+            <a:off x="6172200" y="2103120"/>
+            <a:ext cx="5440680" cy="1371600"/>
           </a:xfrm>
           <a:prstGeom prst="rect">
             <a:avLst/>
@@ -16057,8 +17037,8 @@
         </p:nvSpPr>
         <p:spPr>
           <a:xfrm>
-            <a:off x="3337560" y="2194560"/>
-            <a:ext cx="2606040" cy="50800"/>
+            <a:off x="6172200" y="2103120"/>
+            <a:ext cx="5440680" cy="50800"/>
           </a:xfrm>
           <a:prstGeom prst="rect">
             <a:avLst/>
@@ -16100,8 +17080,8 @@
         </p:nvSpPr>
         <p:spPr>
           <a:xfrm>
-            <a:off x="3474720" y="2331720"/>
-            <a:ext cx="2331720" cy="274320"/>
+            <a:off x="6355080" y="2240279"/>
+            <a:ext cx="2011680" cy="274320"/>
           </a:xfrm>
           <a:prstGeom prst="rect">
             <a:avLst/>
@@ -16136,8 +17116,44 @@
         </p:nvSpPr>
         <p:spPr>
           <a:xfrm>
-            <a:off x="3474720" y="2651760"/>
-            <a:ext cx="2331720" cy="274320"/>
+            <a:off x="8458200" y="2240279"/>
+            <a:ext cx="2926080" cy="274320"/>
+          </a:xfrm>
+          <a:prstGeom prst="rect">
+            <a:avLst/>
+          </a:prstGeom>
+          <a:noFill/>
+        </p:spPr>
+        <p:txBody>
+          <a:bodyPr wrap="square">
+            <a:spAutoFit/>
+          </a:bodyPr>
+          <a:lstStyle/>
+          <a:p>
+            <a:pPr algn="l">
+              <a:defRPr sz="1200" b="0">
+                <a:solidFill>
+                  <a:srgbClr val="00BCD4"/>
+                </a:solidFill>
+                <a:latin typeface="Meiryo"/>
+              </a:defRPr>
+            </a:pPr>
+            <a:r>
+              <a:t>量子リザーバ計算</a:t>
+            </a:r>
+          </a:p>
+        </p:txBody>
+      </p:sp>
+      <p:sp>
+        <p:nvSpPr>
+          <p:cNvPr id="17" name="TextBox 16"/>
+          <p:cNvSpPr txBox="1"/>
+          <p:nvPr/>
+        </p:nvSpPr>
+        <p:spPr>
+          <a:xfrm>
+            <a:off x="6355080" y="2606039"/>
+            <a:ext cx="5074920" cy="731520"/>
           </a:xfrm>
           <a:prstGeom prst="rect">
             <a:avLst/>
@@ -16153,57 +17169,13 @@
             <a:pPr algn="l">
               <a:defRPr sz="1100" b="0">
                 <a:solidFill>
-                  <a:srgbClr val="00BCD4"/>
-                </a:solidFill>
-                <a:latin typeface="Meiryo"/>
-              </a:defRPr>
-            </a:pPr>
-            <a:r>
-              <a:t>量子リザーバ計算</a:t>
-            </a:r>
-          </a:p>
-        </p:txBody>
-      </p:sp>
-      <p:sp>
-        <p:nvSpPr>
-          <p:cNvPr id="17" name="TextBox 16"/>
-          <p:cNvSpPr txBox="1"/>
-          <p:nvPr/>
-        </p:nvSpPr>
-        <p:spPr>
-          <a:xfrm>
-            <a:off x="3474720" y="3017520"/>
-            <a:ext cx="2331720" cy="1645920"/>
-          </a:xfrm>
-          <a:prstGeom prst="rect">
-            <a:avLst/>
-          </a:prstGeom>
-          <a:noFill/>
-        </p:spPr>
-        <p:txBody>
-          <a:bodyPr wrap="square">
-            <a:spAutoFit/>
-          </a:bodyPr>
-          <a:lstStyle/>
-          <a:p>
-            <a:pPr algn="l">
-              <a:defRPr sz="1000" b="0">
-                <a:solidFill>
                   <a:srgbClr val="757575"/>
                 </a:solidFill>
                 <a:latin typeface="Meiryo"/>
               </a:defRPr>
             </a:pPr>
             <a:r>
-              <a:t>TDMループ=量子リザーバ</a:t>
-            </a:r>
-            <a:br/>
-            <a:r>
-              <a:t>時系列予測・異常検知</a:t>
-            </a:r>
-            <a:br/>
-            <a:r>
-              <a:t>14bit soft-infoで高精度</a:t>
+              <a:t>TDMループ=量子リザーバ。時系列予測・異常検知。14bit soft-infoで高精度。</a:t>
             </a:r>
           </a:p>
         </p:txBody>
@@ -16216,8 +17188,8 @@
         </p:nvSpPr>
         <p:spPr>
           <a:xfrm>
-            <a:off x="6126479" y="2194560"/>
-            <a:ext cx="2606040" cy="2926080"/>
+            <a:off x="548640" y="3657600"/>
+            <a:ext cx="5440680" cy="1371600"/>
           </a:xfrm>
           <a:prstGeom prst="rect">
             <a:avLst/>
@@ -16259,8 +17231,8 @@
         </p:nvSpPr>
         <p:spPr>
           <a:xfrm>
-            <a:off x="6126479" y="2194560"/>
-            <a:ext cx="2606040" cy="50800"/>
+            <a:off x="548640" y="3657600"/>
+            <a:ext cx="5440680" cy="50800"/>
           </a:xfrm>
           <a:prstGeom prst="rect">
             <a:avLst/>
@@ -16302,8 +17274,8 @@
         </p:nvSpPr>
         <p:spPr>
           <a:xfrm>
-            <a:off x="6263640" y="2331720"/>
-            <a:ext cx="2331720" cy="274320"/>
+            <a:off x="731520" y="3794760"/>
+            <a:ext cx="2011680" cy="274320"/>
           </a:xfrm>
           <a:prstGeom prst="rect">
             <a:avLst/>
@@ -16338,8 +17310,44 @@
         </p:nvSpPr>
         <p:spPr>
           <a:xfrm>
-            <a:off x="6263640" y="2651760"/>
-            <a:ext cx="2331720" cy="274320"/>
+            <a:off x="2834640" y="3794760"/>
+            <a:ext cx="2926080" cy="274320"/>
+          </a:xfrm>
+          <a:prstGeom prst="rect">
+            <a:avLst/>
+          </a:prstGeom>
+          <a:noFill/>
+        </p:spPr>
+        <p:txBody>
+          <a:bodyPr wrap="square">
+            <a:spAutoFit/>
+          </a:bodyPr>
+          <a:lstStyle/>
+          <a:p>
+            <a:pPr algn="l">
+              <a:defRPr sz="1200" b="0">
+                <a:solidFill>
+                  <a:srgbClr val="00BCD4"/>
+                </a:solidFill>
+                <a:latin typeface="Meiryo"/>
+              </a:defRPr>
+            </a:pPr>
+            <a:r>
+              <a:t>量子乱数 ~200Mbps</a:t>
+            </a:r>
+          </a:p>
+        </p:txBody>
+      </p:sp>
+      <p:sp>
+        <p:nvSpPr>
+          <p:cNvPr id="22" name="TextBox 21"/>
+          <p:cNvSpPr txBox="1"/>
+          <p:nvPr/>
+        </p:nvSpPr>
+        <p:spPr>
+          <a:xfrm>
+            <a:off x="731520" y="4160520"/>
+            <a:ext cx="5074920" cy="731520"/>
           </a:xfrm>
           <a:prstGeom prst="rect">
             <a:avLst/>
@@ -16355,57 +17363,13 @@
             <a:pPr algn="l">
               <a:defRPr sz="1100" b="0">
                 <a:solidFill>
-                  <a:srgbClr val="00BCD4"/>
-                </a:solidFill>
-                <a:latin typeface="Meiryo"/>
-              </a:defRPr>
-            </a:pPr>
-            <a:r>
-              <a:t>量子乱数 ~200Mbps</a:t>
-            </a:r>
-          </a:p>
-        </p:txBody>
-      </p:sp>
-      <p:sp>
-        <p:nvSpPr>
-          <p:cNvPr id="22" name="TextBox 21"/>
-          <p:cNvSpPr txBox="1"/>
-          <p:nvPr/>
-        </p:nvSpPr>
-        <p:spPr>
-          <a:xfrm>
-            <a:off x="6263640" y="3017520"/>
-            <a:ext cx="2331720" cy="1645920"/>
-          </a:xfrm>
-          <a:prstGeom prst="rect">
-            <a:avLst/>
-          </a:prstGeom>
-          <a:noFill/>
-        </p:spPr>
-        <p:txBody>
-          <a:bodyPr wrap="square">
-            <a:spAutoFit/>
-          </a:bodyPr>
-          <a:lstStyle/>
-          <a:p>
-            <a:pPr algn="l">
-              <a:defRPr sz="1000" b="0">
-                <a:solidFill>
                   <a:srgbClr val="757575"/>
                 </a:solidFill>
                 <a:latin typeface="Meiryo"/>
               </a:defRPr>
             </a:pPr>
             <a:r>
-              <a:t>ホモダインで真空ゆらぎ測定</a:t>
-            </a:r>
-            <a:br/>
-            <a:r>
-              <a:t>認証済み量子乱数生成</a:t>
-            </a:r>
-            <a:br/>
-            <a:r>
-              <a:t>$5K-50K製品のサイドプロダクト</a:t>
+              <a:t>ホモダインで真空ゆらぎ測定。認証済み量子乱数生成。$5K-50K製品のサイドプロダクト。</a:t>
             </a:r>
           </a:p>
         </p:txBody>
@@ -16418,8 +17382,8 @@
         </p:nvSpPr>
         <p:spPr>
           <a:xfrm>
-            <a:off x="8915399" y="2194560"/>
-            <a:ext cx="2606040" cy="2926080"/>
+            <a:off x="6172200" y="3657600"/>
+            <a:ext cx="5440680" cy="1371600"/>
           </a:xfrm>
           <a:prstGeom prst="rect">
             <a:avLst/>
@@ -16461,8 +17425,8 @@
         </p:nvSpPr>
         <p:spPr>
           <a:xfrm>
-            <a:off x="8915399" y="2194560"/>
-            <a:ext cx="2606040" cy="50800"/>
+            <a:off x="6172200" y="3657600"/>
+            <a:ext cx="5440680" cy="50800"/>
           </a:xfrm>
           <a:prstGeom prst="rect">
             <a:avLst/>
@@ -16504,8 +17468,8 @@
         </p:nvSpPr>
         <p:spPr>
           <a:xfrm>
-            <a:off x="9052559" y="2331720"/>
-            <a:ext cx="2331720" cy="274320"/>
+            <a:off x="6355080" y="3794760"/>
+            <a:ext cx="2011680" cy="274320"/>
           </a:xfrm>
           <a:prstGeom prst="rect">
             <a:avLst/>
@@ -16540,8 +17504,44 @@
         </p:nvSpPr>
         <p:spPr>
           <a:xfrm>
-            <a:off x="9052559" y="2651760"/>
-            <a:ext cx="2331720" cy="274320"/>
+            <a:off x="8458200" y="3794760"/>
+            <a:ext cx="2926080" cy="274320"/>
+          </a:xfrm>
+          <a:prstGeom prst="rect">
+            <a:avLst/>
+          </a:prstGeom>
+          <a:noFill/>
+        </p:spPr>
+        <p:txBody>
+          <a:bodyPr wrap="square">
+            <a:spAutoFit/>
+          </a:bodyPr>
+          <a:lstStyle/>
+          <a:p>
+            <a:pPr algn="l">
+              <a:defRPr sz="1200" b="0">
+                <a:solidFill>
+                  <a:srgbClr val="00BCD4"/>
+                </a:solidFill>
+                <a:latin typeface="Meiryo"/>
+              </a:defRPr>
+            </a:pPr>
+            <a:r>
+              <a:t>Sensing / Imaging / Tensor</a:t>
+            </a:r>
+          </a:p>
+        </p:txBody>
+      </p:sp>
+      <p:sp>
+        <p:nvSpPr>
+          <p:cNvPr id="27" name="TextBox 26"/>
+          <p:cNvSpPr txBox="1"/>
+          <p:nvPr/>
+        </p:nvSpPr>
+        <p:spPr>
+          <a:xfrm>
+            <a:off x="6355080" y="4160520"/>
+            <a:ext cx="5074920" cy="731520"/>
           </a:xfrm>
           <a:prstGeom prst="rect">
             <a:avLst/>
@@ -16557,57 +17557,13 @@
             <a:pPr algn="l">
               <a:defRPr sz="1100" b="0">
                 <a:solidFill>
-                  <a:srgbClr val="00BCD4"/>
-                </a:solidFill>
-                <a:latin typeface="Meiryo"/>
-              </a:defRPr>
-            </a:pPr>
-            <a:r>
-              <a:t>Sensing / Imaging / Tensor</a:t>
-            </a:r>
-          </a:p>
-        </p:txBody>
-      </p:sp>
-      <p:sp>
-        <p:nvSpPr>
-          <p:cNvPr id="27" name="TextBox 26"/>
-          <p:cNvSpPr txBox="1"/>
-          <p:nvPr/>
-        </p:nvSpPr>
-        <p:spPr>
-          <a:xfrm>
-            <a:off x="9052559" y="3017520"/>
-            <a:ext cx="2331720" cy="1645920"/>
-          </a:xfrm>
-          <a:prstGeom prst="rect">
-            <a:avLst/>
-          </a:prstGeom>
-          <a:noFill/>
-        </p:spPr>
-        <p:txBody>
-          <a:bodyPr wrap="square">
-            <a:spAutoFit/>
-          </a:bodyPr>
-          <a:lstStyle/>
-          <a:p>
-            <a:pPr algn="l">
-              <a:defRPr sz="1000" b="0">
-                <a:solidFill>
                   <a:srgbClr val="757575"/>
                 </a:solidFill>
                 <a:latin typeface="Meiryo"/>
               </a:defRPr>
             </a:pPr>
             <a:r>
-              <a:t>SQL以下精密測定</a:t>
-            </a:r>
-            <a:br/>
-            <a:r>
-              <a:t>サブショットノイズ顕微鏡</a:t>
-            </a:r>
-            <a:br/>
-            <a:r>
-              <a:t>フォトニック行列演算でAI推論</a:t>
+              <a:t>SQL以下精密測定 / サブショットノイズ顕微鏡 / フォトニック行列演算でAI推論加速。</a:t>
             </a:r>
           </a:p>
         </p:txBody>
@@ -16621,7 +17577,7 @@
         <p:spPr>
           <a:xfrm>
             <a:off x="548640" y="5394960"/>
-            <a:ext cx="10972800" cy="640080"/>
+            <a:ext cx="10972800" cy="548640"/>
           </a:xfrm>
           <a:prstGeom prst="rect">
             <a:avLst/>
@@ -16664,7 +17620,7 @@
         <p:spPr>
           <a:xfrm>
             <a:off x="731520" y="5440680"/>
-            <a:ext cx="10607040" cy="548640"/>
+            <a:ext cx="10607040" cy="457200"/>
           </a:xfrm>
           <a:prstGeom prst="rect">
             <a:avLst/>
@@ -16678,7 +17634,7 @@
           <a:lstStyle/>
           <a:p>
             <a:pPr algn="ctr">
-              <a:defRPr sz="1400" b="1">
+              <a:defRPr sz="1300" b="1">
                 <a:solidFill>
                   <a:srgbClr val="00BCD4"/>
                 </a:solidFill>
@@ -16877,21 +17833,21 @@
         <p:spPr>
           <a:xfrm>
             <a:off x="548640" y="1005840"/>
-            <a:ext cx="10972800" cy="731520"/>
-          </a:xfrm>
-          <a:prstGeom prst="rect">
-            <a:avLst/>
-          </a:prstGeom>
-          <a:noFill/>
-        </p:spPr>
-        <p:txBody>
-          <a:bodyPr wrap="square">
-            <a:spAutoFit/>
-          </a:bodyPr>
-          <a:lstStyle/>
-          <a:p>
-            <a:pPr algn="l">
-              <a:defRPr sz="3400" b="1">
+            <a:ext cx="10972800" cy="548640"/>
+          </a:xfrm>
+          <a:prstGeom prst="rect">
+            <a:avLst/>
+          </a:prstGeom>
+          <a:noFill/>
+        </p:spPr>
+        <p:txBody>
+          <a:bodyPr wrap="square">
+            <a:spAutoFit/>
+          </a:bodyPr>
+          <a:lstStyle/>
+          <a:p>
+            <a:pPr algn="l">
+              <a:defRPr sz="2800" b="1">
                 <a:solidFill>
                   <a:srgbClr val="212121"/>
                 </a:solidFill>
@@ -16912,7 +17868,7 @@
         </p:nvSpPr>
         <p:spPr>
           <a:xfrm>
-            <a:off x="365760" y="2011680"/>
+            <a:off x="365760" y="1828800"/>
             <a:ext cx="2103120" cy="1645920"/>
           </a:xfrm>
           <a:prstGeom prst="rect">
@@ -16955,7 +17911,7 @@
         </p:nvSpPr>
         <p:spPr>
           <a:xfrm>
-            <a:off x="457200" y="2103120"/>
+            <a:off x="457200" y="1920240"/>
             <a:ext cx="1920240" cy="457200"/>
           </a:xfrm>
           <a:prstGeom prst="rect">
@@ -16970,7 +17926,7 @@
           <a:lstStyle/>
           <a:p>
             <a:pPr algn="ctr">
-              <a:defRPr sz="2200" b="1">
+              <a:defRPr sz="2000" b="1">
                 <a:solidFill>
                   <a:srgbClr val="212121"/>
                 </a:solidFill>
@@ -16991,7 +17947,7 @@
         </p:nvSpPr>
         <p:spPr>
           <a:xfrm>
-            <a:off x="457200" y="2606040"/>
+            <a:off x="457200" y="2423160"/>
             <a:ext cx="1920240" cy="731520"/>
           </a:xfrm>
           <a:prstGeom prst="rect">
@@ -17031,7 +17987,7 @@
         </p:nvSpPr>
         <p:spPr>
           <a:xfrm>
-            <a:off x="2331720" y="2377440"/>
+            <a:off x="2331720" y="2194560"/>
             <a:ext cx="365760" cy="365760"/>
           </a:xfrm>
           <a:prstGeom prst="rect">
@@ -17067,7 +18023,7 @@
         </p:nvSpPr>
         <p:spPr>
           <a:xfrm>
-            <a:off x="2651760" y="2011680"/>
+            <a:off x="2651760" y="1828800"/>
             <a:ext cx="2103120" cy="1645920"/>
           </a:xfrm>
           <a:prstGeom prst="rect">
@@ -17110,7 +18066,7 @@
         </p:nvSpPr>
         <p:spPr>
           <a:xfrm>
-            <a:off x="2743200" y="2103120"/>
+            <a:off x="2743200" y="1920240"/>
             <a:ext cx="1920240" cy="457200"/>
           </a:xfrm>
           <a:prstGeom prst="rect">
@@ -17125,7 +18081,7 @@
           <a:lstStyle/>
           <a:p>
             <a:pPr algn="ctr">
-              <a:defRPr sz="2200" b="1">
+              <a:defRPr sz="2000" b="1">
                 <a:solidFill>
                   <a:srgbClr val="212121"/>
                 </a:solidFill>
@@ -17146,7 +18102,7 @@
         </p:nvSpPr>
         <p:spPr>
           <a:xfrm>
-            <a:off x="2743200" y="2606040"/>
+            <a:off x="2743200" y="2423160"/>
             <a:ext cx="1920240" cy="731520"/>
           </a:xfrm>
           <a:prstGeom prst="rect">
@@ -17186,7 +18142,7 @@
         </p:nvSpPr>
         <p:spPr>
           <a:xfrm>
-            <a:off x="4617720" y="2377440"/>
+            <a:off x="4617720" y="2194560"/>
             <a:ext cx="365760" cy="365760"/>
           </a:xfrm>
           <a:prstGeom prst="rect">
@@ -17222,7 +18178,7 @@
         </p:nvSpPr>
         <p:spPr>
           <a:xfrm>
-            <a:off x="4937760" y="2011680"/>
+            <a:off x="4937760" y="1828800"/>
             <a:ext cx="2103120" cy="1645920"/>
           </a:xfrm>
           <a:prstGeom prst="rect">
@@ -17265,7 +18221,7 @@
         </p:nvSpPr>
         <p:spPr>
           <a:xfrm>
-            <a:off x="5029200" y="2103120"/>
+            <a:off x="5029200" y="1920240"/>
             <a:ext cx="1920240" cy="457200"/>
           </a:xfrm>
           <a:prstGeom prst="rect">
@@ -17280,7 +18236,7 @@
           <a:lstStyle/>
           <a:p>
             <a:pPr algn="ctr">
-              <a:defRPr sz="2200" b="1">
+              <a:defRPr sz="2000" b="1">
                 <a:solidFill>
                   <a:srgbClr val="212121"/>
                 </a:solidFill>
@@ -17301,7 +18257,7 @@
         </p:nvSpPr>
         <p:spPr>
           <a:xfrm>
-            <a:off x="5029200" y="2606040"/>
+            <a:off x="5029200" y="2423160"/>
             <a:ext cx="1920240" cy="731520"/>
           </a:xfrm>
           <a:prstGeom prst="rect">
@@ -17341,7 +18297,7 @@
         </p:nvSpPr>
         <p:spPr>
           <a:xfrm>
-            <a:off x="6903720" y="2377440"/>
+            <a:off x="6903720" y="2194560"/>
             <a:ext cx="365760" cy="365760"/>
           </a:xfrm>
           <a:prstGeom prst="rect">
@@ -17377,7 +18333,7 @@
         </p:nvSpPr>
         <p:spPr>
           <a:xfrm>
-            <a:off x="7223760" y="2011680"/>
+            <a:off x="7223760" y="1828800"/>
             <a:ext cx="2103120" cy="1645920"/>
           </a:xfrm>
           <a:prstGeom prst="rect">
@@ -17420,7 +18376,7 @@
         </p:nvSpPr>
         <p:spPr>
           <a:xfrm>
-            <a:off x="7315200" y="2103120"/>
+            <a:off x="7315200" y="1920240"/>
             <a:ext cx="1920240" cy="457200"/>
           </a:xfrm>
           <a:prstGeom prst="rect">
@@ -17435,7 +18391,7 @@
           <a:lstStyle/>
           <a:p>
             <a:pPr algn="ctr">
-              <a:defRPr sz="2200" b="1">
+              <a:defRPr sz="2000" b="1">
                 <a:solidFill>
                   <a:srgbClr val="212121"/>
                 </a:solidFill>
@@ -17456,7 +18412,7 @@
         </p:nvSpPr>
         <p:spPr>
           <a:xfrm>
-            <a:off x="7315200" y="2606040"/>
+            <a:off x="7315200" y="2423160"/>
             <a:ext cx="1920240" cy="731520"/>
           </a:xfrm>
           <a:prstGeom prst="rect">
@@ -17496,7 +18452,7 @@
         </p:nvSpPr>
         <p:spPr>
           <a:xfrm>
-            <a:off x="9189720" y="2377440"/>
+            <a:off x="9189720" y="2194560"/>
             <a:ext cx="365760" cy="365760"/>
           </a:xfrm>
           <a:prstGeom prst="rect">
@@ -17532,7 +18488,7 @@
         </p:nvSpPr>
         <p:spPr>
           <a:xfrm>
-            <a:off x="9509760" y="2011680"/>
+            <a:off x="9509760" y="1828800"/>
             <a:ext cx="2103120" cy="1645920"/>
           </a:xfrm>
           <a:prstGeom prst="rect">
@@ -17575,7 +18531,7 @@
         </p:nvSpPr>
         <p:spPr>
           <a:xfrm>
-            <a:off x="9601200" y="2103120"/>
+            <a:off x="9601200" y="1920240"/>
             <a:ext cx="1920240" cy="457200"/>
           </a:xfrm>
           <a:prstGeom prst="rect">
@@ -17590,7 +18546,7 @@
           <a:lstStyle/>
           <a:p>
             <a:pPr algn="ctr">
-              <a:defRPr sz="2200" b="1">
+              <a:defRPr sz="2000" b="1">
                 <a:solidFill>
                   <a:srgbClr val="FFFFFF"/>
                 </a:solidFill>
@@ -17611,7 +18567,7 @@
         </p:nvSpPr>
         <p:spPr>
           <a:xfrm>
-            <a:off x="9601200" y="2606040"/>
+            <a:off x="9601200" y="2423160"/>
             <a:ext cx="1920240" cy="731520"/>
           </a:xfrm>
           <a:prstGeom prst="rect">
@@ -17651,7 +18607,7 @@
         </p:nvSpPr>
         <p:spPr>
           <a:xfrm>
-            <a:off x="548640" y="4023360"/>
+            <a:off x="548640" y="3840480"/>
             <a:ext cx="10972800" cy="365760"/>
           </a:xfrm>
           <a:prstGeom prst="rect">
@@ -17666,7 +18622,7 @@
           <a:lstStyle/>
           <a:p>
             <a:pPr algn="l">
-              <a:defRPr sz="1400" b="1">
+              <a:defRPr sz="1300" b="1">
                 <a:solidFill>
                   <a:srgbClr val="212121"/>
                 </a:solidFill>
@@ -17687,7 +18643,7 @@
         </p:nvSpPr>
         <p:spPr>
           <a:xfrm>
-            <a:off x="548640" y="4572000"/>
+            <a:off x="548640" y="4297680"/>
             <a:ext cx="8686800" cy="411480"/>
           </a:xfrm>
           <a:prstGeom prst="rect">
@@ -17730,8 +18686,8 @@
         </p:nvSpPr>
         <p:spPr>
           <a:xfrm>
-            <a:off x="731520" y="4590288"/>
-            <a:ext cx="2743200" cy="365760"/>
+            <a:off x="731520" y="4315968"/>
+            <a:ext cx="3657600" cy="365760"/>
           </a:xfrm>
           <a:prstGeom prst="rect">
             <a:avLst/>
@@ -17766,7 +18722,7 @@
         </p:nvSpPr>
         <p:spPr>
           <a:xfrm>
-            <a:off x="8412480" y="4590288"/>
+            <a:off x="8412480" y="4315968"/>
             <a:ext cx="1371600" cy="365760"/>
           </a:xfrm>
           <a:prstGeom prst="rect">
@@ -17802,7 +18758,7 @@
         </p:nvSpPr>
         <p:spPr>
           <a:xfrm>
-            <a:off x="548640" y="5074920"/>
+            <a:off x="548640" y="4800600"/>
             <a:ext cx="6583680" cy="411480"/>
           </a:xfrm>
           <a:prstGeom prst="rect">
@@ -17845,7 +18801,7 @@
         </p:nvSpPr>
         <p:spPr>
           <a:xfrm>
-            <a:off x="731520" y="5093208"/>
+            <a:off x="731520" y="4818888"/>
             <a:ext cx="2743200" cy="365760"/>
           </a:xfrm>
           <a:prstGeom prst="rect">
@@ -17881,7 +18837,7 @@
         </p:nvSpPr>
         <p:spPr>
           <a:xfrm>
-            <a:off x="6217920" y="5093208"/>
+            <a:off x="6217920" y="4818888"/>
             <a:ext cx="1371600" cy="365760"/>
           </a:xfrm>
           <a:prstGeom prst="rect">
@@ -17917,7 +18873,7 @@
         </p:nvSpPr>
         <p:spPr>
           <a:xfrm>
-            <a:off x="548640" y="5577840"/>
+            <a:off x="548640" y="5349240"/>
             <a:ext cx="10972800" cy="365760"/>
           </a:xfrm>
           <a:prstGeom prst="rect">
@@ -18131,21 +19087,21 @@
         <p:spPr>
           <a:xfrm>
             <a:off x="548640" y="1005840"/>
-            <a:ext cx="10972800" cy="731520"/>
-          </a:xfrm>
-          <a:prstGeom prst="rect">
-            <a:avLst/>
-          </a:prstGeom>
-          <a:noFill/>
-        </p:spPr>
-        <p:txBody>
-          <a:bodyPr wrap="square">
-            <a:spAutoFit/>
-          </a:bodyPr>
-          <a:lstStyle/>
-          <a:p>
-            <a:pPr algn="l">
-              <a:defRPr sz="3400" b="1">
+            <a:ext cx="10972800" cy="548640"/>
+          </a:xfrm>
+          <a:prstGeom prst="rect">
+            <a:avLst/>
+          </a:prstGeom>
+          <a:noFill/>
+        </p:spPr>
+        <p:txBody>
+          <a:bodyPr wrap="square">
+            <a:spAutoFit/>
+          </a:bodyPr>
+          <a:lstStyle/>
+          <a:p>
+            <a:pPr algn="l">
+              <a:defRPr sz="3000" b="1">
                 <a:solidFill>
                   <a:srgbClr val="212121"/>
                 </a:solidFill>
@@ -18166,8 +19122,87 @@
         </p:nvSpPr>
         <p:spPr>
           <a:xfrm>
-            <a:off x="548640" y="2011680"/>
-            <a:ext cx="3520440" cy="3657600"/>
+            <a:off x="548640" y="1737360"/>
+            <a:ext cx="548640" cy="548640"/>
+          </a:xfrm>
+          <a:prstGeom prst="rect">
+            <a:avLst/>
+          </a:prstGeom>
+          <a:solidFill>
+            <a:srgbClr val="00BCD4"/>
+          </a:solidFill>
+          <a:ln>
+            <a:noFill/>
+          </a:ln>
+        </p:spPr>
+        <p:style>
+          <a:lnRef idx="1">
+            <a:schemeClr val="accent1"/>
+          </a:lnRef>
+          <a:fillRef idx="3">
+            <a:schemeClr val="accent1"/>
+          </a:fillRef>
+          <a:effectRef idx="2">
+            <a:schemeClr val="accent1"/>
+          </a:effectRef>
+          <a:fontRef idx="minor">
+            <a:schemeClr val="lt1"/>
+          </a:fontRef>
+        </p:style>
+        <p:txBody>
+          <a:bodyPr rtlCol="0" anchor="ctr"/>
+          <a:lstStyle/>
+          <a:p>
+            <a:pPr algn="ctr"/>
+          </a:p>
+        </p:txBody>
+      </p:sp>
+      <p:sp>
+        <p:nvSpPr>
+          <p:cNvPr id="8" name="TextBox 7"/>
+          <p:cNvSpPr txBox="1"/>
+          <p:nvPr/>
+        </p:nvSpPr>
+        <p:spPr>
+          <a:xfrm>
+            <a:off x="548640" y="1810512"/>
+            <a:ext cx="548640" cy="457200"/>
+          </a:xfrm>
+          <a:prstGeom prst="rect">
+            <a:avLst/>
+          </a:prstGeom>
+          <a:noFill/>
+        </p:spPr>
+        <p:txBody>
+          <a:bodyPr wrap="square">
+            <a:spAutoFit/>
+          </a:bodyPr>
+          <a:lstStyle/>
+          <a:p>
+            <a:pPr algn="ctr">
+              <a:defRPr sz="2200" b="1">
+                <a:solidFill>
+                  <a:srgbClr val="FFFFFF"/>
+                </a:solidFill>
+                <a:latin typeface="Meiryo"/>
+              </a:defRPr>
+            </a:pPr>
+            <a:r>
+              <a:t>1</a:t>
+            </a:r>
+          </a:p>
+        </p:txBody>
+      </p:sp>
+      <p:sp>
+        <p:nvSpPr>
+          <p:cNvPr id="9" name="Rectangle 8"/>
+          <p:cNvSpPr/>
+          <p:nvPr/>
+        </p:nvSpPr>
+        <p:spPr>
+          <a:xfrm>
+            <a:off x="1280160" y="1737360"/>
+            <a:ext cx="10241280" cy="1371600"/>
           </a:xfrm>
           <a:prstGeom prst="rect">
             <a:avLst/>
@@ -18203,14 +19238,86 @@
       </p:sp>
       <p:sp>
         <p:nvSpPr>
-          <p:cNvPr id="8" name="Rectangle 7"/>
+          <p:cNvPr id="10" name="TextBox 9"/>
+          <p:cNvSpPr txBox="1"/>
+          <p:nvPr/>
+        </p:nvSpPr>
+        <p:spPr>
+          <a:xfrm>
+            <a:off x="1463040" y="1828800"/>
+            <a:ext cx="9875520" cy="365760"/>
+          </a:xfrm>
+          <a:prstGeom prst="rect">
+            <a:avLst/>
+          </a:prstGeom>
+          <a:noFill/>
+        </p:spPr>
+        <p:txBody>
+          <a:bodyPr wrap="square">
+            <a:spAutoFit/>
+          </a:bodyPr>
+          <a:lstStyle/>
+          <a:p>
+            <a:pPr algn="l">
+              <a:defRPr sz="1800" b="1">
+                <a:solidFill>
+                  <a:srgbClr val="212121"/>
+                </a:solidFill>
+                <a:latin typeface="Meiryo"/>
+              </a:defRPr>
+            </a:pPr>
+            <a:r>
+              <a:t>14bit soft-info</a:t>
+            </a:r>
+          </a:p>
+        </p:txBody>
+      </p:sp>
+      <p:sp>
+        <p:nvSpPr>
+          <p:cNvPr id="11" name="TextBox 10"/>
+          <p:cNvSpPr txBox="1"/>
+          <p:nvPr/>
+        </p:nvSpPr>
+        <p:spPr>
+          <a:xfrm>
+            <a:off x="1463040" y="2240280"/>
+            <a:ext cx="9875520" cy="777240"/>
+          </a:xfrm>
+          <a:prstGeom prst="rect">
+            <a:avLst/>
+          </a:prstGeom>
+          <a:noFill/>
+        </p:spPr>
+        <p:txBody>
+          <a:bodyPr wrap="square">
+            <a:spAutoFit/>
+          </a:bodyPr>
+          <a:lstStyle/>
+          <a:p>
+            <a:pPr algn="l">
+              <a:defRPr sz="1100" b="0">
+                <a:solidFill>
+                  <a:srgbClr val="757575"/>
+                </a:solidFill>
+                <a:latin typeface="Meiryo"/>
+              </a:defRPr>
+            </a:pPr>
+            <a:r>
+              <a:t>全競合方式(超伝導/イオン/中性原子)は binary シンドローム。CV方式は14bitアナログ情報をデコーダに供給。MWPM閾値 1.5% は soft-info によって達成。同一物理エラー率で論理エラー率を桁違いに低減。</a:t>
+            </a:r>
+          </a:p>
+        </p:txBody>
+      </p:sp>
+      <p:sp>
+        <p:nvSpPr>
+          <p:cNvPr id="12" name="Rectangle 11"/>
           <p:cNvSpPr/>
           <p:nvPr/>
         </p:nvSpPr>
         <p:spPr>
           <a:xfrm>
-            <a:off x="548640" y="2011680"/>
-            <a:ext cx="3520440" cy="50800"/>
+            <a:off x="548640" y="3337560"/>
+            <a:ext cx="548640" cy="548640"/>
           </a:xfrm>
           <a:prstGeom prst="rect">
             <a:avLst/>
@@ -18246,98 +19353,50 @@
       </p:sp>
       <p:sp>
         <p:nvSpPr>
-          <p:cNvPr id="9" name="TextBox 8"/>
-          <p:cNvSpPr txBox="1"/>
-          <p:nvPr/>
-        </p:nvSpPr>
-        <p:spPr>
-          <a:xfrm>
-            <a:off x="731520" y="2240280"/>
-            <a:ext cx="3154680" cy="457200"/>
-          </a:xfrm>
-          <a:prstGeom prst="rect">
-            <a:avLst/>
-          </a:prstGeom>
-          <a:noFill/>
-        </p:spPr>
-        <p:txBody>
-          <a:bodyPr wrap="square">
-            <a:spAutoFit/>
-          </a:bodyPr>
-          <a:lstStyle/>
-          <a:p>
-            <a:pPr algn="l">
-              <a:defRPr sz="2000" b="1">
-                <a:solidFill>
-                  <a:srgbClr val="212121"/>
-                </a:solidFill>
-                <a:latin typeface="Meiryo"/>
-              </a:defRPr>
-            </a:pPr>
-            <a:r>
-              <a:t>14bit soft-info</a:t>
-            </a:r>
-          </a:p>
-        </p:txBody>
-      </p:sp>
-      <p:sp>
-        <p:nvSpPr>
-          <p:cNvPr id="10" name="TextBox 9"/>
-          <p:cNvSpPr txBox="1"/>
-          <p:nvPr/>
-        </p:nvSpPr>
-        <p:spPr>
-          <a:xfrm>
-            <a:off x="731520" y="2834640"/>
-            <a:ext cx="3154680" cy="2286000"/>
-          </a:xfrm>
-          <a:prstGeom prst="rect">
-            <a:avLst/>
-          </a:prstGeom>
-          <a:noFill/>
-        </p:spPr>
-        <p:txBody>
-          <a:bodyPr wrap="square">
-            <a:spAutoFit/>
-          </a:bodyPr>
-          <a:lstStyle/>
-          <a:p>
-            <a:pPr algn="l">
-              <a:defRPr sz="1200" b="0">
-                <a:solidFill>
-                  <a:srgbClr val="757575"/>
-                </a:solidFill>
-                <a:latin typeface="Meiryo"/>
-              </a:defRPr>
-            </a:pPr>
-            <a:r>
-              <a:t>全競合方式（超伝導/イオン/中性原子）は binary シンドローム。</a:t>
-            </a:r>
-            <a:br/>
-            <a:r>
-              <a:t>CV方式は14bitアナログ情報をデコーダに供給。</a:t>
-            </a:r>
-            <a:br/>
-            <a:r>
-              <a:t>MWPM閾値 1.5% は soft-info によって達成。</a:t>
-            </a:r>
-            <a:br/>
-            <a:r>
-              <a:t>同一物理エラー率で論理エラー率を桁違いに低減。</a:t>
-            </a:r>
-          </a:p>
-        </p:txBody>
-      </p:sp>
-      <p:sp>
-        <p:nvSpPr>
-          <p:cNvPr id="11" name="Rectangle 10"/>
+          <p:cNvPr id="13" name="TextBox 12"/>
+          <p:cNvSpPr txBox="1"/>
+          <p:nvPr/>
+        </p:nvSpPr>
+        <p:spPr>
+          <a:xfrm>
+            <a:off x="548640" y="3410712"/>
+            <a:ext cx="548640" cy="457200"/>
+          </a:xfrm>
+          <a:prstGeom prst="rect">
+            <a:avLst/>
+          </a:prstGeom>
+          <a:noFill/>
+        </p:spPr>
+        <p:txBody>
+          <a:bodyPr wrap="square">
+            <a:spAutoFit/>
+          </a:bodyPr>
+          <a:lstStyle/>
+          <a:p>
+            <a:pPr algn="ctr">
+              <a:defRPr sz="2200" b="1">
+                <a:solidFill>
+                  <a:srgbClr val="FFFFFF"/>
+                </a:solidFill>
+                <a:latin typeface="Meiryo"/>
+              </a:defRPr>
+            </a:pPr>
+            <a:r>
+              <a:t>2</a:t>
+            </a:r>
+          </a:p>
+        </p:txBody>
+      </p:sp>
+      <p:sp>
+        <p:nvSpPr>
+          <p:cNvPr id="14" name="Rectangle 13"/>
           <p:cNvSpPr/>
           <p:nvPr/>
         </p:nvSpPr>
         <p:spPr>
           <a:xfrm>
-            <a:off x="4251959" y="2011680"/>
-            <a:ext cx="3520440" cy="3657600"/>
+            <a:off x="1280160" y="3337560"/>
+            <a:ext cx="10241280" cy="1371600"/>
           </a:xfrm>
           <a:prstGeom prst="rect">
             <a:avLst/>
@@ -18373,14 +19432,86 @@
       </p:sp>
       <p:sp>
         <p:nvSpPr>
-          <p:cNvPr id="12" name="Rectangle 11"/>
+          <p:cNvPr id="15" name="TextBox 14"/>
+          <p:cNvSpPr txBox="1"/>
+          <p:nvPr/>
+        </p:nvSpPr>
+        <p:spPr>
+          <a:xfrm>
+            <a:off x="1463040" y="3429000"/>
+            <a:ext cx="9875520" cy="365760"/>
+          </a:xfrm>
+          <a:prstGeom prst="rect">
+            <a:avLst/>
+          </a:prstGeom>
+          <a:noFill/>
+        </p:spPr>
+        <p:txBody>
+          <a:bodyPr wrap="square">
+            <a:spAutoFit/>
+          </a:bodyPr>
+          <a:lstStyle/>
+          <a:p>
+            <a:pPr algn="l">
+              <a:defRPr sz="1800" b="1">
+                <a:solidFill>
+                  <a:srgbClr val="212121"/>
+                </a:solidFill>
+                <a:latin typeface="Meiryo"/>
+              </a:defRPr>
+            </a:pPr>
+            <a:r>
+              <a:t>qumode = 無限次元ヒルベルト空間</a:t>
+            </a:r>
+          </a:p>
+        </p:txBody>
+      </p:sp>
+      <p:sp>
+        <p:nvSpPr>
+          <p:cNvPr id="16" name="TextBox 15"/>
+          <p:cNvSpPr txBox="1"/>
+          <p:nvPr/>
+        </p:nvSpPr>
+        <p:spPr>
+          <a:xfrm>
+            <a:off x="1463040" y="3840480"/>
+            <a:ext cx="9875520" cy="777240"/>
+          </a:xfrm>
+          <a:prstGeom prst="rect">
+            <a:avLst/>
+          </a:prstGeom>
+          <a:noFill/>
+        </p:spPr>
+        <p:txBody>
+          <a:bodyPr wrap="square">
+            <a:spAutoFit/>
+          </a:bodyPr>
+          <a:lstStyle/>
+          <a:p>
+            <a:pPr algn="l">
+              <a:defRPr sz="1100" b="0">
+                <a:solidFill>
+                  <a:srgbClr val="757575"/>
+                </a:solidFill>
+                <a:latin typeface="Meiryo"/>
+              </a:defRPr>
+            </a:pPr>
+            <a:r>
+              <a:t>ボソニック場理論をネイティブにシミュレーション。格子ゲージ理論、Bose-Hubbard、分子振動 — DV方式では原理的に到達できない計算空間。CVBQP ⊇ BQP が理論的に証明済み (ITCS 2025)。</a:t>
+            </a:r>
+          </a:p>
+        </p:txBody>
+      </p:sp>
+      <p:sp>
+        <p:nvSpPr>
+          <p:cNvPr id="17" name="Rectangle 16"/>
           <p:cNvSpPr/>
           <p:nvPr/>
         </p:nvSpPr>
         <p:spPr>
           <a:xfrm>
-            <a:off x="4251959" y="2011680"/>
-            <a:ext cx="3520440" cy="50800"/>
+            <a:off x="548640" y="4937760"/>
+            <a:ext cx="548640" cy="548640"/>
           </a:xfrm>
           <a:prstGeom prst="rect">
             <a:avLst/>
@@ -18416,98 +19547,50 @@
       </p:sp>
       <p:sp>
         <p:nvSpPr>
-          <p:cNvPr id="13" name="TextBox 12"/>
-          <p:cNvSpPr txBox="1"/>
-          <p:nvPr/>
-        </p:nvSpPr>
-        <p:spPr>
-          <a:xfrm>
-            <a:off x="4434840" y="2240280"/>
-            <a:ext cx="3154680" cy="457200"/>
-          </a:xfrm>
-          <a:prstGeom prst="rect">
-            <a:avLst/>
-          </a:prstGeom>
-          <a:noFill/>
-        </p:spPr>
-        <p:txBody>
-          <a:bodyPr wrap="square">
-            <a:spAutoFit/>
-          </a:bodyPr>
-          <a:lstStyle/>
-          <a:p>
-            <a:pPr algn="l">
-              <a:defRPr sz="2000" b="1">
-                <a:solidFill>
-                  <a:srgbClr val="212121"/>
-                </a:solidFill>
-                <a:latin typeface="Meiryo"/>
-              </a:defRPr>
-            </a:pPr>
-            <a:r>
-              <a:t>qumode = 無限次元ヒルベルト空間</a:t>
-            </a:r>
-          </a:p>
-        </p:txBody>
-      </p:sp>
-      <p:sp>
-        <p:nvSpPr>
-          <p:cNvPr id="14" name="TextBox 13"/>
-          <p:cNvSpPr txBox="1"/>
-          <p:nvPr/>
-        </p:nvSpPr>
-        <p:spPr>
-          <a:xfrm>
-            <a:off x="4434840" y="2834640"/>
-            <a:ext cx="3154680" cy="2286000"/>
-          </a:xfrm>
-          <a:prstGeom prst="rect">
-            <a:avLst/>
-          </a:prstGeom>
-          <a:noFill/>
-        </p:spPr>
-        <p:txBody>
-          <a:bodyPr wrap="square">
-            <a:spAutoFit/>
-          </a:bodyPr>
-          <a:lstStyle/>
-          <a:p>
-            <a:pPr algn="l">
-              <a:defRPr sz="1200" b="0">
-                <a:solidFill>
-                  <a:srgbClr val="757575"/>
-                </a:solidFill>
-                <a:latin typeface="Meiryo"/>
-              </a:defRPr>
-            </a:pPr>
-            <a:r>
-              <a:t>ボソニック場理論をネイティブにシミュレーション。</a:t>
-            </a:r>
-            <a:br/>
-            <a:r>
-              <a:t>格子ゲージ理論、Bose-Hubbard、分子振動 —</a:t>
-            </a:r>
-            <a:br/>
-            <a:r>
-              <a:t>DV方式では原理的に到達できない計算空間。</a:t>
-            </a:r>
-            <a:br/>
-            <a:r>
-              <a:t>CVBQP ⊇ BQP が理論的に証明済み (ITCS 2025)。</a:t>
-            </a:r>
-          </a:p>
-        </p:txBody>
-      </p:sp>
-      <p:sp>
-        <p:nvSpPr>
-          <p:cNvPr id="15" name="Rectangle 14"/>
+          <p:cNvPr id="18" name="TextBox 17"/>
+          <p:cNvSpPr txBox="1"/>
+          <p:nvPr/>
+        </p:nvSpPr>
+        <p:spPr>
+          <a:xfrm>
+            <a:off x="548640" y="5010912"/>
+            <a:ext cx="548640" cy="457200"/>
+          </a:xfrm>
+          <a:prstGeom prst="rect">
+            <a:avLst/>
+          </a:prstGeom>
+          <a:noFill/>
+        </p:spPr>
+        <p:txBody>
+          <a:bodyPr wrap="square">
+            <a:spAutoFit/>
+          </a:bodyPr>
+          <a:lstStyle/>
+          <a:p>
+            <a:pPr algn="ctr">
+              <a:defRPr sz="2200" b="1">
+                <a:solidFill>
+                  <a:srgbClr val="FFFFFF"/>
+                </a:solidFill>
+                <a:latin typeface="Meiryo"/>
+              </a:defRPr>
+            </a:pPr>
+            <a:r>
+              <a:t>3</a:t>
+            </a:r>
+          </a:p>
+        </p:txBody>
+      </p:sp>
+      <p:sp>
+        <p:nvSpPr>
+          <p:cNvPr id="19" name="Rectangle 18"/>
           <p:cNvSpPr/>
           <p:nvPr/>
         </p:nvSpPr>
         <p:spPr>
           <a:xfrm>
-            <a:off x="7955279" y="2011680"/>
-            <a:ext cx="3520440" cy="3657600"/>
+            <a:off x="1280160" y="4937760"/>
+            <a:ext cx="10241280" cy="1371600"/>
           </a:xfrm>
           <a:prstGeom prst="rect">
             <a:avLst/>
@@ -18543,71 +19626,28 @@
       </p:sp>
       <p:sp>
         <p:nvSpPr>
-          <p:cNvPr id="16" name="Rectangle 15"/>
-          <p:cNvSpPr/>
-          <p:nvPr/>
-        </p:nvSpPr>
-        <p:spPr>
-          <a:xfrm>
-            <a:off x="7955279" y="2011680"/>
-            <a:ext cx="3520440" cy="50800"/>
-          </a:xfrm>
-          <a:prstGeom prst="rect">
-            <a:avLst/>
-          </a:prstGeom>
-          <a:solidFill>
-            <a:srgbClr val="00BCD4"/>
-          </a:solidFill>
-          <a:ln>
-            <a:noFill/>
-          </a:ln>
-        </p:spPr>
-        <p:style>
-          <a:lnRef idx="1">
-            <a:schemeClr val="accent1"/>
-          </a:lnRef>
-          <a:fillRef idx="3">
-            <a:schemeClr val="accent1"/>
-          </a:fillRef>
-          <a:effectRef idx="2">
-            <a:schemeClr val="accent1"/>
-          </a:effectRef>
-          <a:fontRef idx="minor">
-            <a:schemeClr val="lt1"/>
-          </a:fontRef>
-        </p:style>
-        <p:txBody>
-          <a:bodyPr rtlCol="0" anchor="ctr"/>
-          <a:lstStyle/>
-          <a:p>
-            <a:pPr algn="ctr"/>
-          </a:p>
-        </p:txBody>
-      </p:sp>
-      <p:sp>
-        <p:nvSpPr>
-          <p:cNvPr id="17" name="TextBox 16"/>
-          <p:cNvSpPr txBox="1"/>
-          <p:nvPr/>
-        </p:nvSpPr>
-        <p:spPr>
-          <a:xfrm>
-            <a:off x="8138159" y="2240280"/>
-            <a:ext cx="3154680" cy="457200"/>
-          </a:xfrm>
-          <a:prstGeom prst="rect">
-            <a:avLst/>
-          </a:prstGeom>
-          <a:noFill/>
-        </p:spPr>
-        <p:txBody>
-          <a:bodyPr wrap="square">
-            <a:spAutoFit/>
-          </a:bodyPr>
-          <a:lstStyle/>
-          <a:p>
-            <a:pPr algn="l">
-              <a:defRPr sz="2000" b="1">
+          <p:cNvPr id="20" name="TextBox 19"/>
+          <p:cNvSpPr txBox="1"/>
+          <p:nvPr/>
+        </p:nvSpPr>
+        <p:spPr>
+          <a:xfrm>
+            <a:off x="1463040" y="5029200"/>
+            <a:ext cx="9875520" cy="365760"/>
+          </a:xfrm>
+          <a:prstGeom prst="rect">
+            <a:avLst/>
+          </a:prstGeom>
+          <a:noFill/>
+        </p:spPr>
+        <p:txBody>
+          <a:bodyPr wrap="square">
+            <a:spAutoFit/>
+          </a:bodyPr>
+          <a:lstStyle/>
+          <a:p>
+            <a:pPr algn="l">
+              <a:defRPr sz="1800" b="1">
                 <a:solidFill>
                   <a:srgbClr val="212121"/>
                 </a:solidFill>
@@ -18622,28 +19662,28 @@
       </p:sp>
       <p:sp>
         <p:nvSpPr>
-          <p:cNvPr id="18" name="TextBox 17"/>
-          <p:cNvSpPr txBox="1"/>
-          <p:nvPr/>
-        </p:nvSpPr>
-        <p:spPr>
-          <a:xfrm>
-            <a:off x="8138159" y="2834640"/>
-            <a:ext cx="3154680" cy="2286000"/>
-          </a:xfrm>
-          <a:prstGeom prst="rect">
-            <a:avLst/>
-          </a:prstGeom>
-          <a:noFill/>
-        </p:spPr>
-        <p:txBody>
-          <a:bodyPr wrap="square">
-            <a:spAutoFit/>
-          </a:bodyPr>
-          <a:lstStyle/>
-          <a:p>
-            <a:pPr algn="l">
-              <a:defRPr sz="1200" b="0">
+          <p:cNvPr id="21" name="TextBox 20"/>
+          <p:cNvSpPr txBox="1"/>
+          <p:nvPr/>
+        </p:nvSpPr>
+        <p:spPr>
+          <a:xfrm>
+            <a:off x="1463040" y="5440680"/>
+            <a:ext cx="9875520" cy="777240"/>
+          </a:xfrm>
+          <a:prstGeom prst="rect">
+            <a:avLst/>
+          </a:prstGeom>
+          <a:noFill/>
+        </p:spPr>
+        <p:txBody>
+          <a:bodyPr wrap="square">
+            <a:spAutoFit/>
+          </a:bodyPr>
+          <a:lstStyle/>
+          <a:p>
+            <a:pPr algn="l">
+              <a:defRPr sz="1100" b="0">
                 <a:solidFill>
                   <a:srgbClr val="757575"/>
                 </a:solidFill>
@@ -18651,19 +19691,7 @@
               </a:defRPr>
             </a:pPr>
             <a:r>
-              <a:t>同一HWで7つの動作モード。</a:t>
-            </a:r>
-            <a:br/>
-            <a:r>
-              <a:t>量子優位証明前から6モードで商用価値を提供。</a:t>
-            </a:r>
-            <a:br/>
-            <a:r>
-              <a:t>競合のどの方式でも実現不可能な多用途性。</a:t>
-            </a:r>
-            <a:br/>
-            <a:r>
-              <a:t>投資リスクを本質的に低減。</a:t>
+              <a:t>同一HWで7つの動作モード。量子優位証明前から6モードで商用価値を提供。競合のどの方式でも実現不可能な多用途性。投資リスクを本質的に低減。</a:t>
             </a:r>
           </a:p>
         </p:txBody>
@@ -18854,21 +19882,21 @@
         <p:spPr>
           <a:xfrm>
             <a:off x="548640" y="1005840"/>
-            <a:ext cx="10972800" cy="731520"/>
-          </a:xfrm>
-          <a:prstGeom prst="rect">
-            <a:avLst/>
-          </a:prstGeom>
-          <a:noFill/>
-        </p:spPr>
-        <p:txBody>
-          <a:bodyPr wrap="square">
-            <a:spAutoFit/>
-          </a:bodyPr>
-          <a:lstStyle/>
-          <a:p>
-            <a:pPr algn="l">
-              <a:defRPr sz="3000" b="1">
+            <a:ext cx="10972800" cy="548640"/>
+          </a:xfrm>
+          <a:prstGeom prst="rect">
+            <a:avLst/>
+          </a:prstGeom>
+          <a:noFill/>
+        </p:spPr>
+        <p:txBody>
+          <a:bodyPr wrap="square">
+            <a:spAutoFit/>
+          </a:bodyPr>
+          <a:lstStyle/>
+          <a:p>
+            <a:pPr algn="l">
+              <a:defRPr sz="2800" b="1">
                 <a:solidFill>
                   <a:srgbClr val="212121"/>
                 </a:solidFill>
@@ -18876,7 +19904,7 @@
               </a:defRPr>
             </a:pPr>
             <a:r>
-              <a:t>単一プラットフォームで 3 製品 — d=3/5/7 スケーリング戦略</a:t>
+              <a:t>単一プラットフォームで 3 製品 — d=3/5/7 スケーリング</a:t>
             </a:r>
           </a:p>
         </p:txBody>
@@ -18889,8 +19917,8 @@
         </p:nvSpPr>
         <p:spPr>
           <a:xfrm>
-            <a:off x="548640" y="1920240"/>
-            <a:ext cx="3520440" cy="3840480"/>
+            <a:off x="548640" y="1737360"/>
+            <a:ext cx="3520440" cy="4023360"/>
           </a:xfrm>
           <a:prstGeom prst="rect">
             <a:avLst/>
@@ -18934,7 +19962,7 @@
         </p:nvSpPr>
         <p:spPr>
           <a:xfrm>
-            <a:off x="731520" y="2011680"/>
+            <a:off x="731520" y="1828800"/>
             <a:ext cx="2286000" cy="365760"/>
           </a:xfrm>
           <a:prstGeom prst="rect">
@@ -18970,8 +19998,8 @@
         </p:nvSpPr>
         <p:spPr>
           <a:xfrm>
-            <a:off x="731520" y="2331720"/>
-            <a:ext cx="2286000" cy="274320"/>
+            <a:off x="731520" y="2148840"/>
+            <a:ext cx="2286000" cy="228600"/>
           </a:xfrm>
           <a:prstGeom prst="rect">
             <a:avLst/>
@@ -19006,7 +20034,7 @@
         </p:nvSpPr>
         <p:spPr>
           <a:xfrm>
-            <a:off x="731520" y="2743200"/>
+            <a:off x="731520" y="2468880"/>
             <a:ext cx="3154680" cy="457200"/>
           </a:xfrm>
           <a:prstGeom prst="rect">
@@ -19021,7 +20049,7 @@
           <a:lstStyle/>
           <a:p>
             <a:pPr algn="l">
-              <a:defRPr sz="2800" b="1">
+              <a:defRPr sz="2600" b="1">
                 <a:solidFill>
                   <a:srgbClr val="212121"/>
                 </a:solidFill>
@@ -19042,7 +20070,7 @@
         </p:nvSpPr>
         <p:spPr>
           <a:xfrm>
-            <a:off x="731520" y="3337560"/>
+            <a:off x="731520" y="3017520"/>
             <a:ext cx="1554480" cy="320040"/>
           </a:xfrm>
           <a:prstGeom prst="rect">
@@ -19078,7 +20106,7 @@
         </p:nvSpPr>
         <p:spPr>
           <a:xfrm>
-            <a:off x="2286000" y="3337560"/>
+            <a:off x="2286000" y="3017520"/>
             <a:ext cx="1600200" cy="320040"/>
           </a:xfrm>
           <a:prstGeom prst="rect">
@@ -19114,7 +20142,7 @@
         </p:nvSpPr>
         <p:spPr>
           <a:xfrm>
-            <a:off x="731520" y="3703320"/>
+            <a:off x="731520" y="3383279"/>
             <a:ext cx="1554480" cy="320040"/>
           </a:xfrm>
           <a:prstGeom prst="rect">
@@ -19150,7 +20178,7 @@
         </p:nvSpPr>
         <p:spPr>
           <a:xfrm>
-            <a:off x="2286000" y="3703320"/>
+            <a:off x="2286000" y="3383279"/>
             <a:ext cx="1600200" cy="320040"/>
           </a:xfrm>
           <a:prstGeom prst="rect">
@@ -19186,7 +20214,7 @@
         </p:nvSpPr>
         <p:spPr>
           <a:xfrm>
-            <a:off x="731520" y="4069080"/>
+            <a:off x="731520" y="3749039"/>
             <a:ext cx="1554480" cy="320040"/>
           </a:xfrm>
           <a:prstGeom prst="rect">
@@ -19222,7 +20250,7 @@
         </p:nvSpPr>
         <p:spPr>
           <a:xfrm>
-            <a:off x="2286000" y="4069080"/>
+            <a:off x="2286000" y="3749039"/>
             <a:ext cx="1600200" cy="320040"/>
           </a:xfrm>
           <a:prstGeom prst="rect">
@@ -19245,7 +20273,7 @@
               </a:defRPr>
             </a:pPr>
             <a:r>
-              <a:t>1–10</a:t>
+              <a:t>1-10</a:t>
             </a:r>
           </a:p>
         </p:txBody>
@@ -19258,7 +20286,7 @@
         </p:nvSpPr>
         <p:spPr>
           <a:xfrm>
-            <a:off x="731520" y="4434840"/>
+            <a:off x="731520" y="4114800"/>
             <a:ext cx="1554480" cy="320040"/>
           </a:xfrm>
           <a:prstGeom prst="rect">
@@ -19294,7 +20322,7 @@
         </p:nvSpPr>
         <p:spPr>
           <a:xfrm>
-            <a:off x="2286000" y="4434840"/>
+            <a:off x="2286000" y="4114800"/>
             <a:ext cx="1600200" cy="320040"/>
           </a:xfrm>
           <a:prstGeom prst="rect">
@@ -19324,13 +20352,56 @@
       </p:sp>
       <p:sp>
         <p:nvSpPr>
-          <p:cNvPr id="19" name="TextBox 18"/>
-          <p:cNvSpPr txBox="1"/>
-          <p:nvPr/>
-        </p:nvSpPr>
-        <p:spPr>
-          <a:xfrm>
-            <a:off x="731520" y="5029200"/>
+          <p:cNvPr id="19" name="Rectangle 18"/>
+          <p:cNvSpPr/>
+          <p:nvPr/>
+        </p:nvSpPr>
+        <p:spPr>
+          <a:xfrm>
+            <a:off x="731520" y="4754880"/>
+            <a:ext cx="3154680" cy="9144"/>
+          </a:xfrm>
+          <a:prstGeom prst="rect">
+            <a:avLst/>
+          </a:prstGeom>
+          <a:solidFill>
+            <a:srgbClr val="E0E0E0"/>
+          </a:solidFill>
+          <a:ln>
+            <a:noFill/>
+          </a:ln>
+        </p:spPr>
+        <p:style>
+          <a:lnRef idx="1">
+            <a:schemeClr val="accent1"/>
+          </a:lnRef>
+          <a:fillRef idx="3">
+            <a:schemeClr val="accent1"/>
+          </a:fillRef>
+          <a:effectRef idx="2">
+            <a:schemeClr val="accent1"/>
+          </a:effectRef>
+          <a:fontRef idx="minor">
+            <a:schemeClr val="lt1"/>
+          </a:fontRef>
+        </p:style>
+        <p:txBody>
+          <a:bodyPr rtlCol="0" anchor="ctr"/>
+          <a:lstStyle/>
+          <a:p>
+            <a:pPr algn="ctr"/>
+          </a:p>
+        </p:txBody>
+      </p:sp>
+      <p:sp>
+        <p:nvSpPr>
+          <p:cNvPr id="20" name="TextBox 19"/>
+          <p:cNvSpPr txBox="1"/>
+          <p:nvPr/>
+        </p:nvSpPr>
+        <p:spPr>
+          <a:xfrm>
+            <a:off x="731520" y="4846320"/>
             <a:ext cx="3154680" cy="365760"/>
           </a:xfrm>
           <a:prstGeom prst="rect">
@@ -19360,14 +20431,14 @@
       </p:sp>
       <p:sp>
         <p:nvSpPr>
-          <p:cNvPr id="20" name="Rectangle 19"/>
+          <p:cNvPr id="21" name="Rectangle 20"/>
           <p:cNvSpPr/>
           <p:nvPr/>
         </p:nvSpPr>
         <p:spPr>
           <a:xfrm>
-            <a:off x="4251959" y="1920240"/>
-            <a:ext cx="3520440" cy="3840480"/>
+            <a:off x="4251959" y="1737360"/>
+            <a:ext cx="3520440" cy="4023360"/>
           </a:xfrm>
           <a:prstGeom prst="rect">
             <a:avLst/>
@@ -19405,13 +20476,13 @@
       </p:sp>
       <p:sp>
         <p:nvSpPr>
-          <p:cNvPr id="21" name="TextBox 20"/>
-          <p:cNvSpPr txBox="1"/>
-          <p:nvPr/>
-        </p:nvSpPr>
-        <p:spPr>
-          <a:xfrm>
-            <a:off x="4434840" y="2011680"/>
+          <p:cNvPr id="22" name="TextBox 21"/>
+          <p:cNvSpPr txBox="1"/>
+          <p:nvPr/>
+        </p:nvSpPr>
+        <p:spPr>
+          <a:xfrm>
+            <a:off x="4434840" y="1828800"/>
             <a:ext cx="2286000" cy="365760"/>
           </a:xfrm>
           <a:prstGeom prst="rect">
@@ -19441,14 +20512,14 @@
       </p:sp>
       <p:sp>
         <p:nvSpPr>
-          <p:cNvPr id="22" name="TextBox 21"/>
-          <p:cNvSpPr txBox="1"/>
-          <p:nvPr/>
-        </p:nvSpPr>
-        <p:spPr>
-          <a:xfrm>
-            <a:off x="4434840" y="2331720"/>
-            <a:ext cx="2286000" cy="274320"/>
+          <p:cNvPr id="23" name="TextBox 22"/>
+          <p:cNvSpPr txBox="1"/>
+          <p:nvPr/>
+        </p:nvSpPr>
+        <p:spPr>
+          <a:xfrm>
+            <a:off x="4434840" y="2148840"/>
+            <a:ext cx="2286000" cy="228600"/>
           </a:xfrm>
           <a:prstGeom prst="rect">
             <a:avLst/>
@@ -19477,13 +20548,13 @@
       </p:sp>
       <p:sp>
         <p:nvSpPr>
-          <p:cNvPr id="23" name="Rectangle 22"/>
+          <p:cNvPr id="24" name="Rectangle 23"/>
           <p:cNvSpPr/>
           <p:nvPr/>
         </p:nvSpPr>
         <p:spPr>
           <a:xfrm>
-            <a:off x="6629400" y="2011680"/>
+            <a:off x="6629400" y="1828800"/>
             <a:ext cx="960120" cy="274320"/>
           </a:xfrm>
           <a:prstGeom prst="rect">
@@ -19520,13 +20591,13 @@
       </p:sp>
       <p:sp>
         <p:nvSpPr>
-          <p:cNvPr id="24" name="TextBox 23"/>
-          <p:cNvSpPr txBox="1"/>
-          <p:nvPr/>
-        </p:nvSpPr>
-        <p:spPr>
-          <a:xfrm>
-            <a:off x="6629400" y="2011680"/>
+          <p:cNvPr id="25" name="TextBox 24"/>
+          <p:cNvSpPr txBox="1"/>
+          <p:nvPr/>
+        </p:nvSpPr>
+        <p:spPr>
+          <a:xfrm>
+            <a:off x="6629400" y="1828800"/>
             <a:ext cx="960120" cy="274320"/>
           </a:xfrm>
           <a:prstGeom prst="rect">
@@ -19556,13 +20627,13 @@
       </p:sp>
       <p:sp>
         <p:nvSpPr>
-          <p:cNvPr id="25" name="TextBox 24"/>
-          <p:cNvSpPr txBox="1"/>
-          <p:nvPr/>
-        </p:nvSpPr>
-        <p:spPr>
-          <a:xfrm>
-            <a:off x="4434840" y="2743200"/>
+          <p:cNvPr id="26" name="TextBox 25"/>
+          <p:cNvSpPr txBox="1"/>
+          <p:nvPr/>
+        </p:nvSpPr>
+        <p:spPr>
+          <a:xfrm>
+            <a:off x="4434840" y="2468880"/>
             <a:ext cx="3154680" cy="457200"/>
           </a:xfrm>
           <a:prstGeom prst="rect">
@@ -19577,7 +20648,7 @@
           <a:lstStyle/>
           <a:p>
             <a:pPr algn="l">
-              <a:defRPr sz="2800" b="1">
+              <a:defRPr sz="2600" b="1">
                 <a:solidFill>
                   <a:srgbClr val="212121"/>
                 </a:solidFill>
@@ -19592,13 +20663,13 @@
       </p:sp>
       <p:sp>
         <p:nvSpPr>
-          <p:cNvPr id="26" name="TextBox 25"/>
-          <p:cNvSpPr txBox="1"/>
-          <p:nvPr/>
-        </p:nvSpPr>
-        <p:spPr>
-          <a:xfrm>
-            <a:off x="4434840" y="3337560"/>
+          <p:cNvPr id="27" name="TextBox 26"/>
+          <p:cNvSpPr txBox="1"/>
+          <p:nvPr/>
+        </p:nvSpPr>
+        <p:spPr>
+          <a:xfrm>
+            <a:off x="4434840" y="3017520"/>
             <a:ext cx="1554480" cy="320040"/>
           </a:xfrm>
           <a:prstGeom prst="rect">
@@ -19628,13 +20699,13 @@
       </p:sp>
       <p:sp>
         <p:nvSpPr>
-          <p:cNvPr id="27" name="TextBox 26"/>
-          <p:cNvSpPr txBox="1"/>
-          <p:nvPr/>
-        </p:nvSpPr>
-        <p:spPr>
-          <a:xfrm>
-            <a:off x="5989319" y="3337560"/>
+          <p:cNvPr id="28" name="TextBox 27"/>
+          <p:cNvSpPr txBox="1"/>
+          <p:nvPr/>
+        </p:nvSpPr>
+        <p:spPr>
+          <a:xfrm>
+            <a:off x="5989319" y="3017520"/>
             <a:ext cx="1600200" cy="320040"/>
           </a:xfrm>
           <a:prstGeom prst="rect">
@@ -19664,13 +20735,13 @@
       </p:sp>
       <p:sp>
         <p:nvSpPr>
-          <p:cNvPr id="28" name="TextBox 27"/>
-          <p:cNvSpPr txBox="1"/>
-          <p:nvPr/>
-        </p:nvSpPr>
-        <p:spPr>
-          <a:xfrm>
-            <a:off x="4434840" y="3703320"/>
+          <p:cNvPr id="29" name="TextBox 28"/>
+          <p:cNvSpPr txBox="1"/>
+          <p:nvPr/>
+        </p:nvSpPr>
+        <p:spPr>
+          <a:xfrm>
+            <a:off x="4434840" y="3383279"/>
             <a:ext cx="1554480" cy="320040"/>
           </a:xfrm>
           <a:prstGeom prst="rect">
@@ -19700,13 +20771,13 @@
       </p:sp>
       <p:sp>
         <p:nvSpPr>
-          <p:cNvPr id="29" name="TextBox 28"/>
-          <p:cNvSpPr txBox="1"/>
-          <p:nvPr/>
-        </p:nvSpPr>
-        <p:spPr>
-          <a:xfrm>
-            <a:off x="5989319" y="3703320"/>
+          <p:cNvPr id="30" name="TextBox 29"/>
+          <p:cNvSpPr txBox="1"/>
+          <p:nvPr/>
+        </p:nvSpPr>
+        <p:spPr>
+          <a:xfrm>
+            <a:off x="5989319" y="3383279"/>
             <a:ext cx="1600200" cy="320040"/>
           </a:xfrm>
           <a:prstGeom prst="rect">
@@ -19736,13 +20807,13 @@
       </p:sp>
       <p:sp>
         <p:nvSpPr>
-          <p:cNvPr id="30" name="TextBox 29"/>
-          <p:cNvSpPr txBox="1"/>
-          <p:nvPr/>
-        </p:nvSpPr>
-        <p:spPr>
-          <a:xfrm>
-            <a:off x="4434840" y="4069080"/>
+          <p:cNvPr id="31" name="TextBox 30"/>
+          <p:cNvSpPr txBox="1"/>
+          <p:nvPr/>
+        </p:nvSpPr>
+        <p:spPr>
+          <a:xfrm>
+            <a:off x="4434840" y="3749039"/>
             <a:ext cx="1554480" cy="320040"/>
           </a:xfrm>
           <a:prstGeom prst="rect">
@@ -19772,13 +20843,13 @@
       </p:sp>
       <p:sp>
         <p:nvSpPr>
-          <p:cNvPr id="31" name="TextBox 30"/>
-          <p:cNvSpPr txBox="1"/>
-          <p:nvPr/>
-        </p:nvSpPr>
-        <p:spPr>
-          <a:xfrm>
-            <a:off x="5989319" y="4069080"/>
+          <p:cNvPr id="32" name="TextBox 31"/>
+          <p:cNvSpPr txBox="1"/>
+          <p:nvPr/>
+        </p:nvSpPr>
+        <p:spPr>
+          <a:xfrm>
+            <a:off x="5989319" y="3749039"/>
             <a:ext cx="1600200" cy="320040"/>
           </a:xfrm>
           <a:prstGeom prst="rect">
@@ -19801,20 +20872,20 @@
               </a:defRPr>
             </a:pPr>
             <a:r>
-              <a:t>10–100</a:t>
-            </a:r>
-          </a:p>
-        </p:txBody>
-      </p:sp>
-      <p:sp>
-        <p:nvSpPr>
-          <p:cNvPr id="32" name="TextBox 31"/>
-          <p:cNvSpPr txBox="1"/>
-          <p:nvPr/>
-        </p:nvSpPr>
-        <p:spPr>
-          <a:xfrm>
-            <a:off x="4434840" y="4434840"/>
+              <a:t>10-100</a:t>
+            </a:r>
+          </a:p>
+        </p:txBody>
+      </p:sp>
+      <p:sp>
+        <p:nvSpPr>
+          <p:cNvPr id="33" name="TextBox 32"/>
+          <p:cNvSpPr txBox="1"/>
+          <p:nvPr/>
+        </p:nvSpPr>
+        <p:spPr>
+          <a:xfrm>
+            <a:off x="4434840" y="4114800"/>
             <a:ext cx="1554480" cy="320040"/>
           </a:xfrm>
           <a:prstGeom prst="rect">
@@ -19844,13 +20915,13 @@
       </p:sp>
       <p:sp>
         <p:nvSpPr>
-          <p:cNvPr id="33" name="TextBox 32"/>
-          <p:cNvSpPr txBox="1"/>
-          <p:nvPr/>
-        </p:nvSpPr>
-        <p:spPr>
-          <a:xfrm>
-            <a:off x="5989319" y="4434840"/>
+          <p:cNvPr id="34" name="TextBox 33"/>
+          <p:cNvSpPr txBox="1"/>
+          <p:nvPr/>
+        </p:nvSpPr>
+        <p:spPr>
+          <a:xfrm>
+            <a:off x="5989319" y="4114800"/>
             <a:ext cx="1600200" cy="320040"/>
           </a:xfrm>
           <a:prstGeom prst="rect">
@@ -19880,50 +20951,93 @@
       </p:sp>
       <p:sp>
         <p:nvSpPr>
-          <p:cNvPr id="34" name="TextBox 33"/>
-          <p:cNvSpPr txBox="1"/>
-          <p:nvPr/>
-        </p:nvSpPr>
-        <p:spPr>
-          <a:xfrm>
-            <a:off x="4434840" y="5029200"/>
-            <a:ext cx="3154680" cy="365760"/>
-          </a:xfrm>
-          <a:prstGeom prst="rect">
-            <a:avLst/>
-          </a:prstGeom>
-          <a:noFill/>
-        </p:spPr>
-        <p:txBody>
-          <a:bodyPr wrap="square">
-            <a:spAutoFit/>
-          </a:bodyPr>
-          <a:lstStyle/>
-          <a:p>
-            <a:pPr algn="l">
-              <a:defRPr sz="1200" b="1">
-                <a:solidFill>
-                  <a:srgbClr val="212121"/>
-                </a:solidFill>
-                <a:latin typeface="Meiryo"/>
-              </a:defRPr>
-            </a:pPr>
-            <a:r>
-              <a:t>研究・VQE / QAOA</a:t>
-            </a:r>
-          </a:p>
-        </p:txBody>
-      </p:sp>
-      <p:sp>
-        <p:nvSpPr>
           <p:cNvPr id="35" name="Rectangle 34"/>
           <p:cNvSpPr/>
           <p:nvPr/>
         </p:nvSpPr>
         <p:spPr>
           <a:xfrm>
-            <a:off x="7955279" y="1920240"/>
-            <a:ext cx="3520440" cy="3840480"/>
+            <a:off x="4434840" y="4754880"/>
+            <a:ext cx="3154680" cy="9144"/>
+          </a:xfrm>
+          <a:prstGeom prst="rect">
+            <a:avLst/>
+          </a:prstGeom>
+          <a:solidFill>
+            <a:srgbClr val="E0E0E0"/>
+          </a:solidFill>
+          <a:ln>
+            <a:noFill/>
+          </a:ln>
+        </p:spPr>
+        <p:style>
+          <a:lnRef idx="1">
+            <a:schemeClr val="accent1"/>
+          </a:lnRef>
+          <a:fillRef idx="3">
+            <a:schemeClr val="accent1"/>
+          </a:fillRef>
+          <a:effectRef idx="2">
+            <a:schemeClr val="accent1"/>
+          </a:effectRef>
+          <a:fontRef idx="minor">
+            <a:schemeClr val="lt1"/>
+          </a:fontRef>
+        </p:style>
+        <p:txBody>
+          <a:bodyPr rtlCol="0" anchor="ctr"/>
+          <a:lstStyle/>
+          <a:p>
+            <a:pPr algn="ctr"/>
+          </a:p>
+        </p:txBody>
+      </p:sp>
+      <p:sp>
+        <p:nvSpPr>
+          <p:cNvPr id="36" name="TextBox 35"/>
+          <p:cNvSpPr txBox="1"/>
+          <p:nvPr/>
+        </p:nvSpPr>
+        <p:spPr>
+          <a:xfrm>
+            <a:off x="4434840" y="4846320"/>
+            <a:ext cx="3154680" cy="365760"/>
+          </a:xfrm>
+          <a:prstGeom prst="rect">
+            <a:avLst/>
+          </a:prstGeom>
+          <a:noFill/>
+        </p:spPr>
+        <p:txBody>
+          <a:bodyPr wrap="square">
+            <a:spAutoFit/>
+          </a:bodyPr>
+          <a:lstStyle/>
+          <a:p>
+            <a:pPr algn="l">
+              <a:defRPr sz="1200" b="1">
+                <a:solidFill>
+                  <a:srgbClr val="212121"/>
+                </a:solidFill>
+                <a:latin typeface="Meiryo"/>
+              </a:defRPr>
+            </a:pPr>
+            <a:r>
+              <a:t>研究・VQE / QAOA</a:t>
+            </a:r>
+          </a:p>
+        </p:txBody>
+      </p:sp>
+      <p:sp>
+        <p:nvSpPr>
+          <p:cNvPr id="37" name="Rectangle 36"/>
+          <p:cNvSpPr/>
+          <p:nvPr/>
+        </p:nvSpPr>
+        <p:spPr>
+          <a:xfrm>
+            <a:off x="7955279" y="1737360"/>
+            <a:ext cx="3520440" cy="4023360"/>
           </a:xfrm>
           <a:prstGeom prst="rect">
             <a:avLst/>
@@ -19961,13 +21075,13 @@
       </p:sp>
       <p:sp>
         <p:nvSpPr>
-          <p:cNvPr id="36" name="TextBox 35"/>
-          <p:cNvSpPr txBox="1"/>
-          <p:nvPr/>
-        </p:nvSpPr>
-        <p:spPr>
-          <a:xfrm>
-            <a:off x="8138159" y="2011680"/>
+          <p:cNvPr id="38" name="TextBox 37"/>
+          <p:cNvSpPr txBox="1"/>
+          <p:nvPr/>
+        </p:nvSpPr>
+        <p:spPr>
+          <a:xfrm>
+            <a:off x="8138159" y="1828800"/>
             <a:ext cx="2286000" cy="365760"/>
           </a:xfrm>
           <a:prstGeom prst="rect">
@@ -19997,14 +21111,14 @@
       </p:sp>
       <p:sp>
         <p:nvSpPr>
-          <p:cNvPr id="37" name="TextBox 36"/>
-          <p:cNvSpPr txBox="1"/>
-          <p:nvPr/>
-        </p:nvSpPr>
-        <p:spPr>
-          <a:xfrm>
-            <a:off x="8138159" y="2331720"/>
-            <a:ext cx="2286000" cy="274320"/>
+          <p:cNvPr id="39" name="TextBox 38"/>
+          <p:cNvSpPr txBox="1"/>
+          <p:nvPr/>
+        </p:nvSpPr>
+        <p:spPr>
+          <a:xfrm>
+            <a:off x="8138159" y="2148840"/>
+            <a:ext cx="2286000" cy="228600"/>
           </a:xfrm>
           <a:prstGeom prst="rect">
             <a:avLst/>
@@ -20033,13 +21147,13 @@
       </p:sp>
       <p:sp>
         <p:nvSpPr>
-          <p:cNvPr id="38" name="TextBox 37"/>
-          <p:cNvSpPr txBox="1"/>
-          <p:nvPr/>
-        </p:nvSpPr>
-        <p:spPr>
-          <a:xfrm>
-            <a:off x="8138159" y="2743200"/>
+          <p:cNvPr id="40" name="TextBox 39"/>
+          <p:cNvSpPr txBox="1"/>
+          <p:nvPr/>
+        </p:nvSpPr>
+        <p:spPr>
+          <a:xfrm>
+            <a:off x="8138159" y="2468880"/>
             <a:ext cx="3154680" cy="457200"/>
           </a:xfrm>
           <a:prstGeom prst="rect">
@@ -20054,7 +21168,7 @@
           <a:lstStyle/>
           <a:p>
             <a:pPr algn="l">
-              <a:defRPr sz="2800" b="1">
+              <a:defRPr sz="2600" b="1">
                 <a:solidFill>
                   <a:srgbClr val="212121"/>
                 </a:solidFill>
@@ -20069,13 +21183,13 @@
       </p:sp>
       <p:sp>
         <p:nvSpPr>
-          <p:cNvPr id="39" name="TextBox 38"/>
-          <p:cNvSpPr txBox="1"/>
-          <p:nvPr/>
-        </p:nvSpPr>
-        <p:spPr>
-          <a:xfrm>
-            <a:off x="8138159" y="3337560"/>
+          <p:cNvPr id="41" name="TextBox 40"/>
+          <p:cNvSpPr txBox="1"/>
+          <p:nvPr/>
+        </p:nvSpPr>
+        <p:spPr>
+          <a:xfrm>
+            <a:off x="8138159" y="3017520"/>
             <a:ext cx="1554480" cy="320040"/>
           </a:xfrm>
           <a:prstGeom prst="rect">
@@ -20105,13 +21219,13 @@
       </p:sp>
       <p:sp>
         <p:nvSpPr>
-          <p:cNvPr id="40" name="TextBox 39"/>
-          <p:cNvSpPr txBox="1"/>
-          <p:nvPr/>
-        </p:nvSpPr>
-        <p:spPr>
-          <a:xfrm>
-            <a:off x="9692640" y="3337560"/>
+          <p:cNvPr id="42" name="TextBox 41"/>
+          <p:cNvSpPr txBox="1"/>
+          <p:nvPr/>
+        </p:nvSpPr>
+        <p:spPr>
+          <a:xfrm>
+            <a:off x="9692640" y="3017520"/>
             <a:ext cx="1600200" cy="320040"/>
           </a:xfrm>
           <a:prstGeom prst="rect">
@@ -20141,13 +21255,13 @@
       </p:sp>
       <p:sp>
         <p:nvSpPr>
-          <p:cNvPr id="41" name="TextBox 40"/>
-          <p:cNvSpPr txBox="1"/>
-          <p:nvPr/>
-        </p:nvSpPr>
-        <p:spPr>
-          <a:xfrm>
-            <a:off x="8138159" y="3703320"/>
+          <p:cNvPr id="43" name="TextBox 42"/>
+          <p:cNvSpPr txBox="1"/>
+          <p:nvPr/>
+        </p:nvSpPr>
+        <p:spPr>
+          <a:xfrm>
+            <a:off x="8138159" y="3383279"/>
             <a:ext cx="1554480" cy="320040"/>
           </a:xfrm>
           <a:prstGeom prst="rect">
@@ -20177,13 +21291,13 @@
       </p:sp>
       <p:sp>
         <p:nvSpPr>
-          <p:cNvPr id="42" name="TextBox 41"/>
-          <p:cNvSpPr txBox="1"/>
-          <p:nvPr/>
-        </p:nvSpPr>
-        <p:spPr>
-          <a:xfrm>
-            <a:off x="9692640" y="3703320"/>
+          <p:cNvPr id="44" name="TextBox 43"/>
+          <p:cNvSpPr txBox="1"/>
+          <p:nvPr/>
+        </p:nvSpPr>
+        <p:spPr>
+          <a:xfrm>
+            <a:off x="9692640" y="3383279"/>
             <a:ext cx="1600200" cy="320040"/>
           </a:xfrm>
           <a:prstGeom prst="rect">
@@ -20213,13 +21327,13 @@
       </p:sp>
       <p:sp>
         <p:nvSpPr>
-          <p:cNvPr id="43" name="TextBox 42"/>
-          <p:cNvSpPr txBox="1"/>
-          <p:nvPr/>
-        </p:nvSpPr>
-        <p:spPr>
-          <a:xfrm>
-            <a:off x="8138159" y="4069080"/>
+          <p:cNvPr id="45" name="TextBox 44"/>
+          <p:cNvSpPr txBox="1"/>
+          <p:nvPr/>
+        </p:nvSpPr>
+        <p:spPr>
+          <a:xfrm>
+            <a:off x="8138159" y="3749039"/>
             <a:ext cx="1554480" cy="320040"/>
           </a:xfrm>
           <a:prstGeom prst="rect">
@@ -20249,13 +21363,13 @@
       </p:sp>
       <p:sp>
         <p:nvSpPr>
-          <p:cNvPr id="44" name="TextBox 43"/>
-          <p:cNvSpPr txBox="1"/>
-          <p:nvPr/>
-        </p:nvSpPr>
-        <p:spPr>
-          <a:xfrm>
-            <a:off x="9692640" y="4069080"/>
+          <p:cNvPr id="46" name="TextBox 45"/>
+          <p:cNvSpPr txBox="1"/>
+          <p:nvPr/>
+        </p:nvSpPr>
+        <p:spPr>
+          <a:xfrm>
+            <a:off x="9692640" y="3749039"/>
             <a:ext cx="1600200" cy="320040"/>
           </a:xfrm>
           <a:prstGeom prst="rect">
@@ -20278,20 +21392,20 @@
               </a:defRPr>
             </a:pPr>
             <a:r>
-              <a:t>10–1,000+</a:t>
-            </a:r>
-          </a:p>
-        </p:txBody>
-      </p:sp>
-      <p:sp>
-        <p:nvSpPr>
-          <p:cNvPr id="45" name="TextBox 44"/>
-          <p:cNvSpPr txBox="1"/>
-          <p:nvPr/>
-        </p:nvSpPr>
-        <p:spPr>
-          <a:xfrm>
-            <a:off x="8138159" y="4434840"/>
+              <a:t>10-1,000+</a:t>
+            </a:r>
+          </a:p>
+        </p:txBody>
+      </p:sp>
+      <p:sp>
+        <p:nvSpPr>
+          <p:cNvPr id="47" name="TextBox 46"/>
+          <p:cNvSpPr txBox="1"/>
+          <p:nvPr/>
+        </p:nvSpPr>
+        <p:spPr>
+          <a:xfrm>
+            <a:off x="8138159" y="4114800"/>
             <a:ext cx="1554480" cy="320040"/>
           </a:xfrm>
           <a:prstGeom prst="rect">
@@ -20321,13 +21435,13 @@
       </p:sp>
       <p:sp>
         <p:nvSpPr>
-          <p:cNvPr id="46" name="TextBox 45"/>
-          <p:cNvSpPr txBox="1"/>
-          <p:nvPr/>
-        </p:nvSpPr>
-        <p:spPr>
-          <a:xfrm>
-            <a:off x="9692640" y="4434840"/>
+          <p:cNvPr id="48" name="TextBox 47"/>
+          <p:cNvSpPr txBox="1"/>
+          <p:nvPr/>
+        </p:nvSpPr>
+        <p:spPr>
+          <a:xfrm>
+            <a:off x="9692640" y="4114800"/>
             <a:ext cx="1600200" cy="320040"/>
           </a:xfrm>
           <a:prstGeom prst="rect">
@@ -20357,13 +21471,56 @@
       </p:sp>
       <p:sp>
         <p:nvSpPr>
-          <p:cNvPr id="47" name="TextBox 46"/>
-          <p:cNvSpPr txBox="1"/>
-          <p:nvPr/>
-        </p:nvSpPr>
-        <p:spPr>
-          <a:xfrm>
-            <a:off x="8138159" y="5029200"/>
+          <p:cNvPr id="49" name="Rectangle 48"/>
+          <p:cNvSpPr/>
+          <p:nvPr/>
+        </p:nvSpPr>
+        <p:spPr>
+          <a:xfrm>
+            <a:off x="8138159" y="4754880"/>
+            <a:ext cx="3154680" cy="9144"/>
+          </a:xfrm>
+          <a:prstGeom prst="rect">
+            <a:avLst/>
+          </a:prstGeom>
+          <a:solidFill>
+            <a:srgbClr val="E0E0E0"/>
+          </a:solidFill>
+          <a:ln>
+            <a:noFill/>
+          </a:ln>
+        </p:spPr>
+        <p:style>
+          <a:lnRef idx="1">
+            <a:schemeClr val="accent1"/>
+          </a:lnRef>
+          <a:fillRef idx="3">
+            <a:schemeClr val="accent1"/>
+          </a:fillRef>
+          <a:effectRef idx="2">
+            <a:schemeClr val="accent1"/>
+          </a:effectRef>
+          <a:fontRef idx="minor">
+            <a:schemeClr val="lt1"/>
+          </a:fontRef>
+        </p:style>
+        <p:txBody>
+          <a:bodyPr rtlCol="0" anchor="ctr"/>
+          <a:lstStyle/>
+          <a:p>
+            <a:pPr algn="ctr"/>
+          </a:p>
+        </p:txBody>
+      </p:sp>
+      <p:sp>
+        <p:nvSpPr>
+          <p:cNvPr id="50" name="TextBox 49"/>
+          <p:cNvSpPr txBox="1"/>
+          <p:nvPr/>
+        </p:nvSpPr>
+        <p:spPr>
+          <a:xfrm>
+            <a:off x="8138159" y="4846320"/>
             <a:ext cx="3154680" cy="365760"/>
           </a:xfrm>
           <a:prstGeom prst="rect">
@@ -20393,7 +21550,7 @@
       </p:sp>
       <p:sp>
         <p:nvSpPr>
-          <p:cNvPr id="48" name="TextBox 47"/>
+          <p:cNvPr id="51" name="TextBox 50"/>
           <p:cNvSpPr txBox="1"/>
           <p:nvPr/>
         </p:nvSpPr>
@@ -20613,21 +21770,21 @@
         <p:spPr>
           <a:xfrm>
             <a:off x="548640" y="1005840"/>
-            <a:ext cx="10972800" cy="640080"/>
-          </a:xfrm>
-          <a:prstGeom prst="rect">
-            <a:avLst/>
-          </a:prstGeom>
-          <a:noFill/>
-        </p:spPr>
-        <p:txBody>
-          <a:bodyPr wrap="square">
-            <a:spAutoFit/>
-          </a:bodyPr>
-          <a:lstStyle/>
-          <a:p>
-            <a:pPr algn="l">
-              <a:defRPr sz="3000" b="1">
+            <a:ext cx="10972800" cy="548640"/>
+          </a:xfrm>
+          <a:prstGeom prst="rect">
+            <a:avLst/>
+          </a:prstGeom>
+          <a:noFill/>
+        </p:spPr>
+        <p:txBody>
+          <a:bodyPr wrap="square">
+            <a:spAutoFit/>
+          </a:bodyPr>
+          <a:lstStyle/>
+          <a:p>
+            <a:pPr algn="l">
+              <a:defRPr sz="2600" b="1">
                 <a:solidFill>
                   <a:srgbClr val="212121"/>
                 </a:solidFill>
@@ -20635,7 +21792,7 @@
               </a:defRPr>
             </a:pPr>
             <a:r>
-              <a:t>「量子コンピュータの Raspberry Pi」— ブルーオーシャン市場</a:t>
+              <a:t>「量子コンピュータの Raspberry Pi」— ブルーオーシャン</a:t>
             </a:r>
           </a:p>
         </p:txBody>
@@ -20648,7 +21805,7 @@
         </p:nvSpPr>
         <p:spPr>
           <a:xfrm>
-            <a:off x="548640" y="1783080"/>
+            <a:off x="548640" y="1691640"/>
             <a:ext cx="1783080" cy="320040"/>
           </a:xfrm>
           <a:prstGeom prst="rect">
@@ -20691,7 +21848,7 @@
         </p:nvSpPr>
         <p:spPr>
           <a:xfrm>
-            <a:off x="621792" y="1801368"/>
+            <a:off x="621792" y="1709928"/>
             <a:ext cx="1645920" cy="274320"/>
           </a:xfrm>
           <a:prstGeom prst="rect">
@@ -20727,7 +21884,7 @@
         </p:nvSpPr>
         <p:spPr>
           <a:xfrm>
-            <a:off x="2377440" y="1783080"/>
+            <a:off x="2377440" y="1691640"/>
             <a:ext cx="1783080" cy="320040"/>
           </a:xfrm>
           <a:prstGeom prst="rect">
@@ -20770,7 +21927,7 @@
         </p:nvSpPr>
         <p:spPr>
           <a:xfrm>
-            <a:off x="2450592" y="1801368"/>
+            <a:off x="2450592" y="1709928"/>
             <a:ext cx="1645920" cy="274320"/>
           </a:xfrm>
           <a:prstGeom prst="rect">
@@ -20806,7 +21963,7 @@
         </p:nvSpPr>
         <p:spPr>
           <a:xfrm>
-            <a:off x="4206240" y="1783080"/>
+            <a:off x="4206240" y="1691640"/>
             <a:ext cx="1783080" cy="320040"/>
           </a:xfrm>
           <a:prstGeom prst="rect">
@@ -20849,7 +22006,7 @@
         </p:nvSpPr>
         <p:spPr>
           <a:xfrm>
-            <a:off x="4279392" y="1801368"/>
+            <a:off x="4279392" y="1709928"/>
             <a:ext cx="1645920" cy="274320"/>
           </a:xfrm>
           <a:prstGeom prst="rect">
@@ -20885,7 +22042,7 @@
         </p:nvSpPr>
         <p:spPr>
           <a:xfrm>
-            <a:off x="6035040" y="1783080"/>
+            <a:off x="6035040" y="1691640"/>
             <a:ext cx="1783080" cy="320040"/>
           </a:xfrm>
           <a:prstGeom prst="rect">
@@ -20928,7 +22085,7 @@
         </p:nvSpPr>
         <p:spPr>
           <a:xfrm>
-            <a:off x="6108192" y="1801368"/>
+            <a:off x="6108192" y="1709928"/>
             <a:ext cx="1645920" cy="274320"/>
           </a:xfrm>
           <a:prstGeom prst="rect">
@@ -20964,7 +22121,7 @@
         </p:nvSpPr>
         <p:spPr>
           <a:xfrm>
-            <a:off x="7863840" y="1783080"/>
+            <a:off x="7863840" y="1691640"/>
             <a:ext cx="1783080" cy="320040"/>
           </a:xfrm>
           <a:prstGeom prst="rect">
@@ -21007,7 +22164,7 @@
         </p:nvSpPr>
         <p:spPr>
           <a:xfrm>
-            <a:off x="7936992" y="1801368"/>
+            <a:off x="7936992" y="1709928"/>
             <a:ext cx="1645920" cy="274320"/>
           </a:xfrm>
           <a:prstGeom prst="rect">
@@ -21043,7 +22200,7 @@
         </p:nvSpPr>
         <p:spPr>
           <a:xfrm>
-            <a:off x="9692640" y="1783080"/>
+            <a:off x="9692640" y="1691640"/>
             <a:ext cx="1783080" cy="320040"/>
           </a:xfrm>
           <a:prstGeom prst="rect">
@@ -21086,7 +22243,7 @@
         </p:nvSpPr>
         <p:spPr>
           <a:xfrm>
-            <a:off x="9765792" y="1801368"/>
+            <a:off x="9765792" y="1709928"/>
             <a:ext cx="1645920" cy="274320"/>
           </a:xfrm>
           <a:prstGeom prst="rect">
@@ -21122,7 +22279,7 @@
         </p:nvSpPr>
         <p:spPr>
           <a:xfrm>
-            <a:off x="548640" y="2148840"/>
+            <a:off x="548640" y="2057400"/>
             <a:ext cx="1783080" cy="347472"/>
           </a:xfrm>
           <a:prstGeom prst="rect">
@@ -21165,7 +22322,7 @@
         </p:nvSpPr>
         <p:spPr>
           <a:xfrm>
-            <a:off x="621792" y="2167128"/>
+            <a:off x="621792" y="2075688"/>
             <a:ext cx="1645920" cy="301752"/>
           </a:xfrm>
           <a:prstGeom prst="rect">
@@ -21201,7 +22358,7 @@
         </p:nvSpPr>
         <p:spPr>
           <a:xfrm>
-            <a:off x="2377440" y="2148840"/>
+            <a:off x="2377440" y="2057400"/>
             <a:ext cx="1783080" cy="347472"/>
           </a:xfrm>
           <a:prstGeom prst="rect">
@@ -21244,7 +22401,7 @@
         </p:nvSpPr>
         <p:spPr>
           <a:xfrm>
-            <a:off x="2450592" y="2167128"/>
+            <a:off x="2450592" y="2075688"/>
             <a:ext cx="1645920" cy="301752"/>
           </a:xfrm>
           <a:prstGeom prst="rect">
@@ -21280,7 +22437,7 @@
         </p:nvSpPr>
         <p:spPr>
           <a:xfrm>
-            <a:off x="4206240" y="2148840"/>
+            <a:off x="4206240" y="2057400"/>
             <a:ext cx="1783080" cy="347472"/>
           </a:xfrm>
           <a:prstGeom prst="rect">
@@ -21323,7 +22480,7 @@
         </p:nvSpPr>
         <p:spPr>
           <a:xfrm>
-            <a:off x="4279392" y="2167128"/>
+            <a:off x="4279392" y="2075688"/>
             <a:ext cx="1645920" cy="301752"/>
           </a:xfrm>
           <a:prstGeom prst="rect">
@@ -21359,7 +22516,7 @@
         </p:nvSpPr>
         <p:spPr>
           <a:xfrm>
-            <a:off x="6035040" y="2148840"/>
+            <a:off x="6035040" y="2057400"/>
             <a:ext cx="1783080" cy="347472"/>
           </a:xfrm>
           <a:prstGeom prst="rect">
@@ -21402,7 +22559,7 @@
         </p:nvSpPr>
         <p:spPr>
           <a:xfrm>
-            <a:off x="6108192" y="2167128"/>
+            <a:off x="6108192" y="2075688"/>
             <a:ext cx="1645920" cy="301752"/>
           </a:xfrm>
           <a:prstGeom prst="rect">
@@ -21438,7 +22595,7 @@
         </p:nvSpPr>
         <p:spPr>
           <a:xfrm>
-            <a:off x="7863840" y="2148840"/>
+            <a:off x="7863840" y="2057400"/>
             <a:ext cx="1783080" cy="347472"/>
           </a:xfrm>
           <a:prstGeom prst="rect">
@@ -21481,7 +22638,7 @@
         </p:nvSpPr>
         <p:spPr>
           <a:xfrm>
-            <a:off x="7936992" y="2167128"/>
+            <a:off x="7936992" y="2075688"/>
             <a:ext cx="1645920" cy="301752"/>
           </a:xfrm>
           <a:prstGeom prst="rect">
@@ -21517,7 +22674,7 @@
         </p:nvSpPr>
         <p:spPr>
           <a:xfrm>
-            <a:off x="9692640" y="2148840"/>
+            <a:off x="9692640" y="2057400"/>
             <a:ext cx="1783080" cy="347472"/>
           </a:xfrm>
           <a:prstGeom prst="rect">
@@ -21560,7 +22717,7 @@
         </p:nvSpPr>
         <p:spPr>
           <a:xfrm>
-            <a:off x="9765792" y="2167128"/>
+            <a:off x="9765792" y="2075688"/>
             <a:ext cx="1645920" cy="301752"/>
           </a:xfrm>
           <a:prstGeom prst="rect">
@@ -21596,7 +22753,7 @@
         </p:nvSpPr>
         <p:spPr>
           <a:xfrm>
-            <a:off x="548640" y="2514600"/>
+            <a:off x="548640" y="2423160"/>
             <a:ext cx="1783080" cy="347472"/>
           </a:xfrm>
           <a:prstGeom prst="rect">
@@ -21639,7 +22796,7 @@
         </p:nvSpPr>
         <p:spPr>
           <a:xfrm>
-            <a:off x="621792" y="2532888"/>
+            <a:off x="621792" y="2441448"/>
             <a:ext cx="1645920" cy="301752"/>
           </a:xfrm>
           <a:prstGeom prst="rect">
@@ -21675,7 +22832,7 @@
         </p:nvSpPr>
         <p:spPr>
           <a:xfrm>
-            <a:off x="2377440" y="2514600"/>
+            <a:off x="2377440" y="2423160"/>
             <a:ext cx="1783080" cy="347472"/>
           </a:xfrm>
           <a:prstGeom prst="rect">
@@ -21718,7 +22875,7 @@
         </p:nvSpPr>
         <p:spPr>
           <a:xfrm>
-            <a:off x="2450592" y="2532888"/>
+            <a:off x="2450592" y="2441448"/>
             <a:ext cx="1645920" cy="301752"/>
           </a:xfrm>
           <a:prstGeom prst="rect">
@@ -21754,7 +22911,7 @@
         </p:nvSpPr>
         <p:spPr>
           <a:xfrm>
-            <a:off x="4206240" y="2514600"/>
+            <a:off x="4206240" y="2423160"/>
             <a:ext cx="1783080" cy="347472"/>
           </a:xfrm>
           <a:prstGeom prst="rect">
@@ -21797,7 +22954,7 @@
         </p:nvSpPr>
         <p:spPr>
           <a:xfrm>
-            <a:off x="4279392" y="2532888"/>
+            <a:off x="4279392" y="2441448"/>
             <a:ext cx="1645920" cy="301752"/>
           </a:xfrm>
           <a:prstGeom prst="rect">
@@ -21833,7 +22990,7 @@
         </p:nvSpPr>
         <p:spPr>
           <a:xfrm>
-            <a:off x="6035040" y="2514600"/>
+            <a:off x="6035040" y="2423160"/>
             <a:ext cx="1783080" cy="347472"/>
           </a:xfrm>
           <a:prstGeom prst="rect">
@@ -21876,7 +23033,7 @@
         </p:nvSpPr>
         <p:spPr>
           <a:xfrm>
-            <a:off x="6108192" y="2532888"/>
+            <a:off x="6108192" y="2441448"/>
             <a:ext cx="1645920" cy="301752"/>
           </a:xfrm>
           <a:prstGeom prst="rect">
@@ -21912,7 +23069,7 @@
         </p:nvSpPr>
         <p:spPr>
           <a:xfrm>
-            <a:off x="7863840" y="2514600"/>
+            <a:off x="7863840" y="2423160"/>
             <a:ext cx="1783080" cy="347472"/>
           </a:xfrm>
           <a:prstGeom prst="rect">
@@ -21955,7 +23112,7 @@
         </p:nvSpPr>
         <p:spPr>
           <a:xfrm>
-            <a:off x="7936992" y="2532888"/>
+            <a:off x="7936992" y="2441448"/>
             <a:ext cx="1645920" cy="301752"/>
           </a:xfrm>
           <a:prstGeom prst="rect">
@@ -21991,7 +23148,7 @@
         </p:nvSpPr>
         <p:spPr>
           <a:xfrm>
-            <a:off x="9692640" y="2514600"/>
+            <a:off x="9692640" y="2423160"/>
             <a:ext cx="1783080" cy="347472"/>
           </a:xfrm>
           <a:prstGeom prst="rect">
@@ -22034,7 +23191,7 @@
         </p:nvSpPr>
         <p:spPr>
           <a:xfrm>
-            <a:off x="9765792" y="2532888"/>
+            <a:off x="9765792" y="2441448"/>
             <a:ext cx="1645920" cy="301752"/>
           </a:xfrm>
           <a:prstGeom prst="rect">
@@ -22070,7 +23227,7 @@
         </p:nvSpPr>
         <p:spPr>
           <a:xfrm>
-            <a:off x="548640" y="2880360"/>
+            <a:off x="548640" y="2788920"/>
             <a:ext cx="1783080" cy="347472"/>
           </a:xfrm>
           <a:prstGeom prst="rect">
@@ -22113,7 +23270,7 @@
         </p:nvSpPr>
         <p:spPr>
           <a:xfrm>
-            <a:off x="621792" y="2898648"/>
+            <a:off x="621792" y="2807208"/>
             <a:ext cx="1645920" cy="301752"/>
           </a:xfrm>
           <a:prstGeom prst="rect">
@@ -22149,7 +23306,7 @@
         </p:nvSpPr>
         <p:spPr>
           <a:xfrm>
-            <a:off x="2377440" y="2880360"/>
+            <a:off x="2377440" y="2788920"/>
             <a:ext cx="1783080" cy="347472"/>
           </a:xfrm>
           <a:prstGeom prst="rect">
@@ -22192,7 +23349,7 @@
         </p:nvSpPr>
         <p:spPr>
           <a:xfrm>
-            <a:off x="2450592" y="2898648"/>
+            <a:off x="2450592" y="2807208"/>
             <a:ext cx="1645920" cy="301752"/>
           </a:xfrm>
           <a:prstGeom prst="rect">
@@ -22228,7 +23385,7 @@
         </p:nvSpPr>
         <p:spPr>
           <a:xfrm>
-            <a:off x="4206240" y="2880360"/>
+            <a:off x="4206240" y="2788920"/>
             <a:ext cx="1783080" cy="347472"/>
           </a:xfrm>
           <a:prstGeom prst="rect">
@@ -22271,7 +23428,7 @@
         </p:nvSpPr>
         <p:spPr>
           <a:xfrm>
-            <a:off x="4279392" y="2898648"/>
+            <a:off x="4279392" y="2807208"/>
             <a:ext cx="1645920" cy="301752"/>
           </a:xfrm>
           <a:prstGeom prst="rect">
@@ -22307,7 +23464,7 @@
         </p:nvSpPr>
         <p:spPr>
           <a:xfrm>
-            <a:off x="6035040" y="2880360"/>
+            <a:off x="6035040" y="2788920"/>
             <a:ext cx="1783080" cy="347472"/>
           </a:xfrm>
           <a:prstGeom prst="rect">
@@ -22350,7 +23507,7 @@
         </p:nvSpPr>
         <p:spPr>
           <a:xfrm>
-            <a:off x="6108192" y="2898648"/>
+            <a:off x="6108192" y="2807208"/>
             <a:ext cx="1645920" cy="301752"/>
           </a:xfrm>
           <a:prstGeom prst="rect">
@@ -22386,7 +23543,7 @@
         </p:nvSpPr>
         <p:spPr>
           <a:xfrm>
-            <a:off x="7863840" y="2880360"/>
+            <a:off x="7863840" y="2788920"/>
             <a:ext cx="1783080" cy="347472"/>
           </a:xfrm>
           <a:prstGeom prst="rect">
@@ -22429,7 +23586,7 @@
         </p:nvSpPr>
         <p:spPr>
           <a:xfrm>
-            <a:off x="7936992" y="2898648"/>
+            <a:off x="7936992" y="2807208"/>
             <a:ext cx="1645920" cy="301752"/>
           </a:xfrm>
           <a:prstGeom prst="rect">
@@ -22465,7 +23622,7 @@
         </p:nvSpPr>
         <p:spPr>
           <a:xfrm>
-            <a:off x="9692640" y="2880360"/>
+            <a:off x="9692640" y="2788920"/>
             <a:ext cx="1783080" cy="347472"/>
           </a:xfrm>
           <a:prstGeom prst="rect">
@@ -22508,7 +23665,7 @@
         </p:nvSpPr>
         <p:spPr>
           <a:xfrm>
-            <a:off x="9765792" y="2898648"/>
+            <a:off x="9765792" y="2807208"/>
             <a:ext cx="1645920" cy="301752"/>
           </a:xfrm>
           <a:prstGeom prst="rect">
@@ -22544,7 +23701,7 @@
         </p:nvSpPr>
         <p:spPr>
           <a:xfrm>
-            <a:off x="548640" y="3246120"/>
+            <a:off x="548640" y="3154680"/>
             <a:ext cx="1783080" cy="347472"/>
           </a:xfrm>
           <a:prstGeom prst="rect">
@@ -22587,7 +23744,7 @@
         </p:nvSpPr>
         <p:spPr>
           <a:xfrm>
-            <a:off x="621792" y="3264408"/>
+            <a:off x="621792" y="3172968"/>
             <a:ext cx="1645920" cy="301752"/>
           </a:xfrm>
           <a:prstGeom prst="rect">
@@ -22623,7 +23780,7 @@
         </p:nvSpPr>
         <p:spPr>
           <a:xfrm>
-            <a:off x="2377440" y="3246120"/>
+            <a:off x="2377440" y="3154680"/>
             <a:ext cx="1783080" cy="347472"/>
           </a:xfrm>
           <a:prstGeom prst="rect">
@@ -22666,7 +23823,7 @@
         </p:nvSpPr>
         <p:spPr>
           <a:xfrm>
-            <a:off x="2450592" y="3264408"/>
+            <a:off x="2450592" y="3172968"/>
             <a:ext cx="1645920" cy="301752"/>
           </a:xfrm>
           <a:prstGeom prst="rect">
@@ -22702,7 +23859,7 @@
         </p:nvSpPr>
         <p:spPr>
           <a:xfrm>
-            <a:off x="4206240" y="3246120"/>
+            <a:off x="4206240" y="3154680"/>
             <a:ext cx="1783080" cy="347472"/>
           </a:xfrm>
           <a:prstGeom prst="rect">
@@ -22745,7 +23902,7 @@
         </p:nvSpPr>
         <p:spPr>
           <a:xfrm>
-            <a:off x="4279392" y="3264408"/>
+            <a:off x="4279392" y="3172968"/>
             <a:ext cx="1645920" cy="301752"/>
           </a:xfrm>
           <a:prstGeom prst="rect">
@@ -22781,7 +23938,7 @@
         </p:nvSpPr>
         <p:spPr>
           <a:xfrm>
-            <a:off x="6035040" y="3246120"/>
+            <a:off x="6035040" y="3154680"/>
             <a:ext cx="1783080" cy="347472"/>
           </a:xfrm>
           <a:prstGeom prst="rect">
@@ -22824,7 +23981,7 @@
         </p:nvSpPr>
         <p:spPr>
           <a:xfrm>
-            <a:off x="6108192" y="3264408"/>
+            <a:off x="6108192" y="3172968"/>
             <a:ext cx="1645920" cy="301752"/>
           </a:xfrm>
           <a:prstGeom prst="rect">
@@ -22860,7 +24017,7 @@
         </p:nvSpPr>
         <p:spPr>
           <a:xfrm>
-            <a:off x="7863840" y="3246120"/>
+            <a:off x="7863840" y="3154680"/>
             <a:ext cx="1783080" cy="347472"/>
           </a:xfrm>
           <a:prstGeom prst="rect">
@@ -22903,7 +24060,7 @@
         </p:nvSpPr>
         <p:spPr>
           <a:xfrm>
-            <a:off x="7936992" y="3264408"/>
+            <a:off x="7936992" y="3172968"/>
             <a:ext cx="1645920" cy="301752"/>
           </a:xfrm>
           <a:prstGeom prst="rect">
@@ -22939,7 +24096,7 @@
         </p:nvSpPr>
         <p:spPr>
           <a:xfrm>
-            <a:off x="9692640" y="3246120"/>
+            <a:off x="9692640" y="3154680"/>
             <a:ext cx="1783080" cy="347472"/>
           </a:xfrm>
           <a:prstGeom prst="rect">
@@ -22982,7 +24139,7 @@
         </p:nvSpPr>
         <p:spPr>
           <a:xfrm>
-            <a:off x="9765792" y="3264408"/>
+            <a:off x="9765792" y="3172968"/>
             <a:ext cx="1645920" cy="301752"/>
           </a:xfrm>
           <a:prstGeom prst="rect">
@@ -23018,7 +24175,7 @@
         </p:nvSpPr>
         <p:spPr>
           <a:xfrm>
-            <a:off x="548640" y="3931920"/>
+            <a:off x="548640" y="3840480"/>
             <a:ext cx="4572000" cy="320040"/>
           </a:xfrm>
           <a:prstGeom prst="rect">
@@ -23054,8 +24211,8 @@
         </p:nvSpPr>
         <p:spPr>
           <a:xfrm>
-            <a:off x="548640" y="4389120"/>
-            <a:ext cx="3520440" cy="1371600"/>
+            <a:off x="548640" y="4297680"/>
+            <a:ext cx="10515600" cy="548640"/>
           </a:xfrm>
           <a:prstGeom prst="rect">
             <a:avLst/>
@@ -23097,8 +24254,8 @@
         </p:nvSpPr>
         <p:spPr>
           <a:xfrm>
-            <a:off x="731520" y="4480560"/>
-            <a:ext cx="3154680" cy="274320"/>
+            <a:off x="731520" y="4315968"/>
+            <a:ext cx="1371600" cy="457200"/>
           </a:xfrm>
           <a:prstGeom prst="rect">
             <a:avLst/>
@@ -23133,22 +24290,22 @@
         </p:nvSpPr>
         <p:spPr>
           <a:xfrm>
-            <a:off x="731520" y="4754880"/>
-            <a:ext cx="3154680" cy="365760"/>
-          </a:xfrm>
-          <a:prstGeom prst="rect">
-            <a:avLst/>
-          </a:prstGeom>
-          <a:noFill/>
-        </p:spPr>
-        <p:txBody>
-          <a:bodyPr wrap="square">
-            <a:spAutoFit/>
-          </a:bodyPr>
-          <a:lstStyle/>
-          <a:p>
-            <a:pPr algn="l">
-              <a:defRPr sz="1800" b="1">
+            <a:off x="2286000" y="4315968"/>
+            <a:ext cx="4114800" cy="457200"/>
+          </a:xfrm>
+          <a:prstGeom prst="rect">
+            <a:avLst/>
+          </a:prstGeom>
+          <a:noFill/>
+        </p:spPr>
+        <p:txBody>
+          <a:bodyPr wrap="square">
+            <a:spAutoFit/>
+          </a:bodyPr>
+          <a:lstStyle/>
+          <a:p>
+            <a:pPr algn="l">
+              <a:defRPr sz="1400" b="1">
                 <a:solidFill>
                   <a:srgbClr val="212121"/>
                 </a:solidFill>
@@ -23169,8 +24326,8 @@
         </p:nvSpPr>
         <p:spPr>
           <a:xfrm>
-            <a:off x="731520" y="5166360"/>
-            <a:ext cx="3154680" cy="274320"/>
+            <a:off x="6858000" y="4343400"/>
+            <a:ext cx="3657600" cy="457200"/>
           </a:xfrm>
           <a:prstGeom prst="rect">
             <a:avLst/>
@@ -23205,8 +24362,8 @@
         </p:nvSpPr>
         <p:spPr>
           <a:xfrm>
-            <a:off x="4251959" y="4389120"/>
-            <a:ext cx="3520440" cy="1371600"/>
+            <a:off x="548640" y="4937760"/>
+            <a:ext cx="7772400" cy="548640"/>
           </a:xfrm>
           <a:prstGeom prst="rect">
             <a:avLst/>
@@ -23248,8 +24405,8 @@
         </p:nvSpPr>
         <p:spPr>
           <a:xfrm>
-            <a:off x="4434840" y="4480560"/>
-            <a:ext cx="3154680" cy="274320"/>
+            <a:off x="731520" y="4956048"/>
+            <a:ext cx="1371600" cy="457200"/>
           </a:xfrm>
           <a:prstGeom prst="rect">
             <a:avLst/>
@@ -23284,22 +24441,22 @@
         </p:nvSpPr>
         <p:spPr>
           <a:xfrm>
-            <a:off x="4434840" y="4754880"/>
-            <a:ext cx="3154680" cy="365760"/>
-          </a:xfrm>
-          <a:prstGeom prst="rect">
-            <a:avLst/>
-          </a:prstGeom>
-          <a:noFill/>
-        </p:spPr>
-        <p:txBody>
-          <a:bodyPr wrap="square">
-            <a:spAutoFit/>
-          </a:bodyPr>
-          <a:lstStyle/>
-          <a:p>
-            <a:pPr algn="l">
-              <a:defRPr sz="1800" b="1">
+            <a:off x="2286000" y="4956048"/>
+            <a:ext cx="4114800" cy="457200"/>
+          </a:xfrm>
+          <a:prstGeom prst="rect">
+            <a:avLst/>
+          </a:prstGeom>
+          <a:noFill/>
+        </p:spPr>
+        <p:txBody>
+          <a:bodyPr wrap="square">
+            <a:spAutoFit/>
+          </a:bodyPr>
+          <a:lstStyle/>
+          <a:p>
+            <a:pPr algn="l">
+              <a:defRPr sz="1400" b="1">
                 <a:solidFill>
                   <a:srgbClr val="212121"/>
                 </a:solidFill>
@@ -23320,8 +24477,8 @@
         </p:nvSpPr>
         <p:spPr>
           <a:xfrm>
-            <a:off x="4434840" y="5166360"/>
-            <a:ext cx="3154680" cy="274320"/>
+            <a:off x="6400800" y="4983480"/>
+            <a:ext cx="1828800" cy="457200"/>
           </a:xfrm>
           <a:prstGeom prst="rect">
             <a:avLst/>
@@ -23343,7 +24500,7 @@
               </a:defRPr>
             </a:pPr>
             <a:r>
-              <a:t>CV / QEC / 教育適合顧客</a:t>
+              <a:t>CV/QEC/教育適合</a:t>
             </a:r>
           </a:p>
         </p:txBody>
@@ -23356,8 +24513,8 @@
         </p:nvSpPr>
         <p:spPr>
           <a:xfrm>
-            <a:off x="7955279" y="4389120"/>
-            <a:ext cx="3520440" cy="1371600"/>
+            <a:off x="548640" y="5577840"/>
+            <a:ext cx="4572000" cy="548640"/>
           </a:xfrm>
           <a:prstGeom prst="rect">
             <a:avLst/>
@@ -23399,8 +24556,8 @@
         </p:nvSpPr>
         <p:spPr>
           <a:xfrm>
-            <a:off x="8138159" y="4480560"/>
-            <a:ext cx="3154680" cy="274320"/>
+            <a:off x="731520" y="5596128"/>
+            <a:ext cx="1371600" cy="457200"/>
           </a:xfrm>
           <a:prstGeom prst="rect">
             <a:avLst/>
@@ -23435,22 +24592,22 @@
         </p:nvSpPr>
         <p:spPr>
           <a:xfrm>
-            <a:off x="8138159" y="4754880"/>
-            <a:ext cx="3154680" cy="365760"/>
-          </a:xfrm>
-          <a:prstGeom prst="rect">
-            <a:avLst/>
-          </a:prstGeom>
-          <a:noFill/>
-        </p:spPr>
-        <p:txBody>
-          <a:bodyPr wrap="square">
-            <a:spAutoFit/>
-          </a:bodyPr>
-          <a:lstStyle/>
-          <a:p>
-            <a:pPr algn="l">
-              <a:defRPr sz="1800" b="1">
+            <a:off x="2286000" y="5596128"/>
+            <a:ext cx="4114800" cy="457200"/>
+          </a:xfrm>
+          <a:prstGeom prst="rect">
+            <a:avLst/>
+          </a:prstGeom>
+          <a:noFill/>
+        </p:spPr>
+        <p:txBody>
+          <a:bodyPr wrap="square">
+            <a:spAutoFit/>
+          </a:bodyPr>
+          <a:lstStyle/>
+          <a:p>
+            <a:pPr algn="l">
+              <a:defRPr sz="1400" b="1">
                 <a:solidFill>
                   <a:srgbClr val="FFFFFF"/>
                 </a:solidFill>
@@ -23459,42 +24616,6 @@
             </a:pPr>
             <a:r>
               <a:t>100機関 · 18億円</a:t>
-            </a:r>
-          </a:p>
-        </p:txBody>
-      </p:sp>
-      <p:sp>
-        <p:nvSpPr>
-          <p:cNvPr id="79" name="TextBox 78"/>
-          <p:cNvSpPr txBox="1"/>
-          <p:nvPr/>
-        </p:nvSpPr>
-        <p:spPr>
-          <a:xfrm>
-            <a:off x="8138159" y="5166360"/>
-            <a:ext cx="3154680" cy="274320"/>
-          </a:xfrm>
-          <a:prstGeom prst="rect">
-            <a:avLst/>
-          </a:prstGeom>
-          <a:noFill/>
-        </p:spPr>
-        <p:txBody>
-          <a:bodyPr wrap="square">
-            <a:spAutoFit/>
-          </a:bodyPr>
-          <a:lstStyle/>
-          <a:p>
-            <a:pPr algn="l">
-              <a:defRPr sz="1000" b="0">
-                <a:solidFill>
-                  <a:srgbClr val="B0BEC5"/>
-                </a:solidFill>
-                <a:latin typeface="Meiryo"/>
-              </a:defRPr>
-            </a:pPr>
-            <a:r>
-              <a:t>3年目シェア 15% 獲得</a:t>
             </a:r>
           </a:p>
         </p:txBody>

--- a/assets/TAROS_Investor_Pitch_Revised.pptx
+++ b/assets/TAROS_Investor_Pitch_Revised.pptx
@@ -10670,7 +10670,7 @@
         <p:spPr>
           <a:xfrm>
             <a:off x="548640" y="1645920"/>
-            <a:ext cx="4114800" cy="1463040"/>
+            <a:ext cx="4114800" cy="1554480"/>
           </a:xfrm>
           <a:prstGeom prst="rect">
             <a:avLst/>
@@ -10778,7 +10778,7 @@
               </a:defRPr>
             </a:pPr>
             <a:r>
-              <a:t>量子脳 (NeuroQ)</a:t>
+              <a:t>量子脳 — NeuroQ</a:t>
             </a:r>
           </a:p>
         </p:txBody>
@@ -10791,22 +10791,22 @@
         </p:nvSpPr>
         <p:spPr>
           <a:xfrm>
-            <a:off x="685800" y="2103120"/>
-            <a:ext cx="3840480" cy="914400"/>
-          </a:xfrm>
-          <a:prstGeom prst="rect">
-            <a:avLst/>
-          </a:prstGeom>
-          <a:noFill/>
-        </p:spPr>
-        <p:txBody>
-          <a:bodyPr wrap="square">
-            <a:spAutoFit/>
-          </a:bodyPr>
-          <a:lstStyle/>
-          <a:p>
-            <a:pPr algn="l">
-              <a:defRPr sz="1000" b="0">
+            <a:off x="685800" y="2148840"/>
+            <a:ext cx="3840480" cy="1005840"/>
+          </a:xfrm>
+          <a:prstGeom prst="rect">
+            <a:avLst/>
+          </a:prstGeom>
+          <a:noFill/>
+        </p:spPr>
+        <p:txBody>
+          <a:bodyPr wrap="square">
+            <a:spAutoFit/>
+          </a:bodyPr>
+          <a:lstStyle/>
+          <a:p>
+            <a:pPr algn="l">
+              <a:defRPr sz="900" b="0">
                 <a:solidFill>
                   <a:srgbClr val="B0BEC5"/>
                 </a:solidFill>
@@ -10814,15 +10814,19 @@
               </a:defRPr>
             </a:pPr>
             <a:r>
-              <a:t>CV量子直接互換フレームワーク</a:t>
+              <a:t>FitzHugh-Nagumo神経モデル→Schrödinger変換</a:t>
             </a:r>
             <a:br/>
             <a:r>
-              <a:t>C.elegans 302ニューロン→ロボット知能</a:t>
+              <a:t>→ CV量子で神経回路を直接シミュレーション</a:t>
             </a:r>
             <a:br/>
             <a:r>
-              <a:t>市場: $20B→$130B (2029)</a:t>
+              <a:t>Phase 1: C.elegans 302ニューロン (600 qumode)</a:t>
+            </a:r>
+            <a:br/>
+            <a:r>
+              <a:t>Phase 2+: ショウジョウバエ 127,400ニューロン</a:t>
             </a:r>
           </a:p>
         </p:txBody>
@@ -10836,7 +10840,7 @@
         <p:spPr>
           <a:xfrm>
             <a:off x="7132320" y="1645920"/>
-            <a:ext cx="4480560" cy="1463040"/>
+            <a:ext cx="4480560" cy="1554480"/>
           </a:xfrm>
           <a:prstGeom prst="rect">
             <a:avLst/>
@@ -10944,7 +10948,7 @@
               </a:defRPr>
             </a:pPr>
             <a:r>
-              <a:t>量子ホログラム (QGH)</a:t>
+              <a:t>量子シミュレーション — 万物の設計者</a:t>
             </a:r>
           </a:p>
         </p:txBody>
@@ -10957,22 +10961,22 @@
         </p:nvSpPr>
         <p:spPr>
           <a:xfrm>
-            <a:off x="7269480" y="2103120"/>
-            <a:ext cx="4206240" cy="914400"/>
-          </a:xfrm>
-          <a:prstGeom prst="rect">
-            <a:avLst/>
-          </a:prstGeom>
-          <a:noFill/>
-        </p:spPr>
-        <p:txBody>
-          <a:bodyPr wrap="square">
-            <a:spAutoFit/>
-          </a:bodyPr>
-          <a:lstStyle/>
-          <a:p>
-            <a:pPr algn="l">
-              <a:defRPr sz="1000" b="0">
+            <a:off x="7269480" y="2148840"/>
+            <a:ext cx="4206240" cy="1005840"/>
+          </a:xfrm>
+          <a:prstGeom prst="rect">
+            <a:avLst/>
+          </a:prstGeom>
+          <a:noFill/>
+        </p:spPr>
+        <p:txBody>
+          <a:bodyPr wrap="square">
+            <a:spAutoFit/>
+          </a:bodyPr>
+          <a:lstStyle/>
+          <a:p>
+            <a:pPr algn="l">
+              <a:defRPr sz="900" b="0">
                 <a:solidFill>
                   <a:srgbClr val="B0BEC5"/>
                 </a:solidFill>
@@ -10980,15 +10984,19 @@
               </a:defRPr>
             </a:pPr>
             <a:r>
-              <a:t>QFTで干渉パターンN≈10⁶倍高速計算</a:t>
+              <a:t>創薬: P450精度 71%→94% / PETase 87×活性</a:t>
             </a:r>
             <a:br/>
             <a:r>
-              <a:t>GKPフーリエ構造=ホログラム構造</a:t>
+              <a:t>不老長寿: プロトントンネリング(DNA変異4×)</a:t>
             </a:r>
             <a:br/>
             <a:r>
-              <a:t>6G要件: 4.32Tbps</a:t>
+              <a:t>マテリアル / 仮想生物 / Bose-Hubbard</a:t>
+            </a:r>
+            <a:br/>
+            <a:r>
+              <a:t>宇宙: 光子m=0 → 量子重力デコヒーレンス免疫</a:t>
             </a:r>
           </a:p>
         </p:txBody>
@@ -11002,7 +11010,7 @@
         <p:spPr>
           <a:xfrm>
             <a:off x="548640" y="4572000"/>
-            <a:ext cx="4114800" cy="1463040"/>
+            <a:ext cx="4114800" cy="1554480"/>
           </a:xfrm>
           <a:prstGeom prst="rect">
             <a:avLst/>
@@ -11110,7 +11118,7 @@
               </a:defRPr>
             </a:pPr>
             <a:r>
-              <a:t>量子創薬・不老長寿</a:t>
+              <a:t>量子ホログラム — QGH</a:t>
             </a:r>
           </a:p>
         </p:txBody>
@@ -11123,22 +11131,22 @@
         </p:nvSpPr>
         <p:spPr>
           <a:xfrm>
-            <a:off x="685800" y="5029200"/>
-            <a:ext cx="3840480" cy="914400"/>
-          </a:xfrm>
-          <a:prstGeom prst="rect">
-            <a:avLst/>
-          </a:prstGeom>
-          <a:noFill/>
-        </p:spPr>
-        <p:txBody>
-          <a:bodyPr wrap="square">
-            <a:spAutoFit/>
-          </a:bodyPr>
-          <a:lstStyle/>
-          <a:p>
-            <a:pPr algn="l">
-              <a:defRPr sz="1000" b="0">
+            <a:off x="685800" y="5074920"/>
+            <a:ext cx="3840480" cy="1005840"/>
+          </a:xfrm>
+          <a:prstGeom prst="rect">
+            <a:avLst/>
+          </a:prstGeom>
+          <a:noFill/>
+        </p:spPr>
+        <p:txBody>
+          <a:bodyPr wrap="square">
+            <a:spAutoFit/>
+          </a:bodyPr>
+          <a:lstStyle/>
+          <a:p>
+            <a:pPr algn="l">
+              <a:defRPr sz="900" b="0">
                 <a:solidFill>
                   <a:srgbClr val="B0BEC5"/>
                 </a:solidFill>
@@ -11146,15 +11154,19 @@
               </a:defRPr>
             </a:pPr>
             <a:r>
-              <a:t>プロトントンネリング(DNA変異の量子起源)</a:t>
+              <a:t>QFT: O(N×d³)→O(d³) 10⁶×高速化</a:t>
             </a:r>
             <a:br/>
             <a:r>
-              <a:t>セノリティクス分子の量子設計</a:t>
+              <a:t>GKPフーリエ構造 = ホログラム構造</a:t>
             </a:r>
             <a:br/>
             <a:r>
-              <a:t>P450精度 71%→94%</a:t>
+              <a:t>医療: 分子→細胞→臓器の量子3D可視化</a:t>
+            </a:r>
+            <a:br/>
+            <a:r>
+              <a:t>エンタメ: 空間没入ホログラムフェス / 6G対応</a:t>
             </a:r>
           </a:p>
         </p:txBody>
@@ -11168,7 +11180,7 @@
         <p:spPr>
           <a:xfrm>
             <a:off x="7132320" y="4572000"/>
-            <a:ext cx="4480560" cy="1463040"/>
+            <a:ext cx="4480560" cy="1554480"/>
           </a:xfrm>
           <a:prstGeom prst="rect">
             <a:avLst/>
@@ -11276,7 +11288,7 @@
               </a:defRPr>
             </a:pPr>
             <a:r>
-              <a:t>ロボット知能</a:t>
+              <a:t>ヒューマノイドロボット</a:t>
             </a:r>
           </a:p>
         </p:txBody>
@@ -11289,22 +11301,22 @@
         </p:nvSpPr>
         <p:spPr>
           <a:xfrm>
-            <a:off x="7269480" y="5029200"/>
-            <a:ext cx="4206240" cy="914400"/>
-          </a:xfrm>
-          <a:prstGeom prst="rect">
-            <a:avLst/>
-          </a:prstGeom>
-          <a:noFill/>
-        </p:spPr>
-        <p:txBody>
-          <a:bodyPr wrap="square">
-            <a:spAutoFit/>
-          </a:bodyPr>
-          <a:lstStyle/>
-          <a:p>
-            <a:pPr algn="l">
-              <a:defRPr sz="1000" b="0">
+            <a:off x="7269480" y="5074920"/>
+            <a:ext cx="4206240" cy="1005840"/>
+          </a:xfrm>
+          <a:prstGeom prst="rect">
+            <a:avLst/>
+          </a:prstGeom>
+          <a:noFill/>
+        </p:spPr>
+        <p:txBody>
+          <a:bodyPr wrap="square">
+            <a:spAutoFit/>
+          </a:bodyPr>
+          <a:lstStyle/>
+          <a:p>
+            <a:pPr algn="l">
+              <a:defRPr sz="900" b="0">
                 <a:solidFill>
                   <a:srgbClr val="B0BEC5"/>
                 </a:solidFill>
@@ -11312,15 +11324,19 @@
               </a:defRPr>
             </a:pPr>
             <a:r>
-              <a:t>CIMで50ms制御壁突破</a:t>
+              <a:t>CIM経路最適化で50ms制御壁を突破</a:t>
             </a:r>
             <a:br/>
             <a:r>
-              <a:t>スクイーズド光でSQL超え力覚</a:t>
+              <a:t>スクイーズド光でSQL超え力覚フィードバック</a:t>
             </a:r>
             <a:br/>
             <a:r>
-              <a:t>量子モジュール供給TAM ~$500M</a:t>
+              <a:t>NeuroQ量子脳→ロボット運動制御を直接駆動</a:t>
+            </a:r>
+            <a:br/>
+            <a:r>
+              <a:t>ロボット市場 $20B→$130B / モジュールTAM $500M</a:t>
             </a:r>
           </a:p>
         </p:txBody>

--- a/assets/TAROS_Investor_Pitch_Revised.pptx
+++ b/assets/TAROS_Investor_Pitch_Revised.pptx
@@ -8591,7 +8591,7 @@
               </a:defRPr>
             </a:pPr>
             <a:r>
-              <a:t>約1,500億円超</a:t>
+              <a:t>約1,050億円超</a:t>
             </a:r>
           </a:p>
         </p:txBody>
@@ -8605,7 +8605,7 @@
         <p:spPr>
           <a:xfrm>
             <a:off x="2286000" y="4892040"/>
-            <a:ext cx="7406640" cy="365760"/>
+            <a:ext cx="7040880" cy="365760"/>
           </a:xfrm>
           <a:prstGeom prst="rect">
             <a:avLst/>
@@ -8683,7 +8683,7 @@
         </p:nvSpPr>
         <p:spPr>
           <a:xfrm>
-            <a:off x="9829800" y="4910327"/>
+            <a:off x="9464040" y="4910327"/>
             <a:ext cx="2286000" cy="320040"/>
           </a:xfrm>
           <a:prstGeom prst="rect">
@@ -8706,7 +8706,7 @@
               </a:defRPr>
             </a:pPr>
             <a:r>
-              <a:t>約1,350億円</a:t>
+              <a:t>約900億円超</a:t>
             </a:r>
           </a:p>
         </p:txBody>
@@ -8720,7 +8720,7 @@
         <p:spPr>
           <a:xfrm>
             <a:off x="2286000" y="5394960"/>
-            <a:ext cx="3108960" cy="365760"/>
+            <a:ext cx="2926080" cy="365760"/>
           </a:xfrm>
           <a:prstGeom prst="rect">
             <a:avLst/>
@@ -8798,7 +8798,7 @@
         </p:nvSpPr>
         <p:spPr>
           <a:xfrm>
-            <a:off x="5532120" y="5413248"/>
+            <a:off x="5349240" y="5413248"/>
             <a:ext cx="2286000" cy="320040"/>
           </a:xfrm>
           <a:prstGeom prst="rect">
@@ -8821,7 +8821,7 @@
               </a:defRPr>
             </a:pPr>
             <a:r>
-              <a:t>約560億円</a:t>
+              <a:t>約375億円超</a:t>
             </a:r>
           </a:p>
         </p:txBody>
@@ -24236,7 +24236,7 @@
         <p:spPr>
           <a:xfrm>
             <a:off x="548640" y="1691640"/>
-            <a:ext cx="1188720" cy="320040"/>
+            <a:ext cx="1783080" cy="320040"/>
           </a:xfrm>
           <a:prstGeom prst="rect">
             <a:avLst/>
@@ -24278,22 +24278,22 @@
         </p:nvSpPr>
         <p:spPr>
           <a:xfrm>
-            <a:off x="594360" y="1709928"/>
-            <a:ext cx="1097280" cy="274320"/>
-          </a:xfrm>
-          <a:prstGeom prst="rect">
-            <a:avLst/>
-          </a:prstGeom>
-          <a:noFill/>
-        </p:spPr>
-        <p:txBody>
-          <a:bodyPr wrap="square">
-            <a:spAutoFit/>
-          </a:bodyPr>
-          <a:lstStyle/>
-          <a:p>
-            <a:pPr algn="l">
-              <a:defRPr sz="800" b="1">
+            <a:off x="621792" y="1709928"/>
+            <a:ext cx="1645920" cy="274320"/>
+          </a:xfrm>
+          <a:prstGeom prst="rect">
+            <a:avLst/>
+          </a:prstGeom>
+          <a:noFill/>
+        </p:spPr>
+        <p:txBody>
+          <a:bodyPr wrap="square">
+            <a:spAutoFit/>
+          </a:bodyPr>
+          <a:lstStyle/>
+          <a:p>
+            <a:pPr algn="l">
+              <a:defRPr sz="900" b="1">
                 <a:solidFill>
                   <a:srgbClr val="FFFFFF"/>
                 </a:solidFill>
@@ -24314,8 +24314,8 @@
         </p:nvSpPr>
         <p:spPr>
           <a:xfrm>
-            <a:off x="1783080" y="1691640"/>
-            <a:ext cx="1188720" cy="320040"/>
+            <a:off x="2377440" y="1691640"/>
+            <a:ext cx="1783080" cy="320040"/>
           </a:xfrm>
           <a:prstGeom prst="rect">
             <a:avLst/>
@@ -24357,22 +24357,22 @@
         </p:nvSpPr>
         <p:spPr>
           <a:xfrm>
-            <a:off x="1828800" y="1709928"/>
-            <a:ext cx="1097280" cy="274320"/>
-          </a:xfrm>
-          <a:prstGeom prst="rect">
-            <a:avLst/>
-          </a:prstGeom>
-          <a:noFill/>
-        </p:spPr>
-        <p:txBody>
-          <a:bodyPr wrap="square">
-            <a:spAutoFit/>
-          </a:bodyPr>
-          <a:lstStyle/>
-          <a:p>
-            <a:pPr algn="l">
-              <a:defRPr sz="800" b="1">
+            <a:off x="2450592" y="1709928"/>
+            <a:ext cx="1645920" cy="274320"/>
+          </a:xfrm>
+          <a:prstGeom prst="rect">
+            <a:avLst/>
+          </a:prstGeom>
+          <a:noFill/>
+        </p:spPr>
+        <p:txBody>
+          <a:bodyPr wrap="square">
+            <a:spAutoFit/>
+          </a:bodyPr>
+          <a:lstStyle/>
+          <a:p>
+            <a:pPr algn="l">
+              <a:defRPr sz="900" b="1">
                 <a:solidFill>
                   <a:srgbClr val="FFFFFF"/>
                 </a:solidFill>
@@ -24393,8 +24393,8 @@
         </p:nvSpPr>
         <p:spPr>
           <a:xfrm>
-            <a:off x="3017520" y="1691640"/>
-            <a:ext cx="1188720" cy="320040"/>
+            <a:off x="4206240" y="1691640"/>
+            <a:ext cx="1783080" cy="320040"/>
           </a:xfrm>
           <a:prstGeom prst="rect">
             <a:avLst/>
@@ -24436,22 +24436,22 @@
         </p:nvSpPr>
         <p:spPr>
           <a:xfrm>
-            <a:off x="3063240" y="1709928"/>
-            <a:ext cx="1097280" cy="274320"/>
-          </a:xfrm>
-          <a:prstGeom prst="rect">
-            <a:avLst/>
-          </a:prstGeom>
-          <a:noFill/>
-        </p:spPr>
-        <p:txBody>
-          <a:bodyPr wrap="square">
-            <a:spAutoFit/>
-          </a:bodyPr>
-          <a:lstStyle/>
-          <a:p>
-            <a:pPr algn="l">
-              <a:defRPr sz="800" b="1">
+            <a:off x="4279392" y="1709928"/>
+            <a:ext cx="1645920" cy="274320"/>
+          </a:xfrm>
+          <a:prstGeom prst="rect">
+            <a:avLst/>
+          </a:prstGeom>
+          <a:noFill/>
+        </p:spPr>
+        <p:txBody>
+          <a:bodyPr wrap="square">
+            <a:spAutoFit/>
+          </a:bodyPr>
+          <a:lstStyle/>
+          <a:p>
+            <a:pPr algn="l">
+              <a:defRPr sz="900" b="1">
                 <a:solidFill>
                   <a:srgbClr val="FFFFFF"/>
                 </a:solidFill>
@@ -24472,8 +24472,8 @@
         </p:nvSpPr>
         <p:spPr>
           <a:xfrm>
-            <a:off x="4251960" y="1691640"/>
-            <a:ext cx="1188720" cy="320040"/>
+            <a:off x="6035040" y="1691640"/>
+            <a:ext cx="1783080" cy="320040"/>
           </a:xfrm>
           <a:prstGeom prst="rect">
             <a:avLst/>
@@ -24515,22 +24515,22 @@
         </p:nvSpPr>
         <p:spPr>
           <a:xfrm>
-            <a:off x="4297680" y="1709928"/>
-            <a:ext cx="1097280" cy="274320"/>
-          </a:xfrm>
-          <a:prstGeom prst="rect">
-            <a:avLst/>
-          </a:prstGeom>
-          <a:noFill/>
-        </p:spPr>
-        <p:txBody>
-          <a:bodyPr wrap="square">
-            <a:spAutoFit/>
-          </a:bodyPr>
-          <a:lstStyle/>
-          <a:p>
-            <a:pPr algn="l">
-              <a:defRPr sz="800" b="1">
+            <a:off x="6108192" y="1709928"/>
+            <a:ext cx="1645920" cy="274320"/>
+          </a:xfrm>
+          <a:prstGeom prst="rect">
+            <a:avLst/>
+          </a:prstGeom>
+          <a:noFill/>
+        </p:spPr>
+        <p:txBody>
+          <a:bodyPr wrap="square">
+            <a:spAutoFit/>
+          </a:bodyPr>
+          <a:lstStyle/>
+          <a:p>
+            <a:pPr algn="l">
+              <a:defRPr sz="900" b="1">
                 <a:solidFill>
                   <a:srgbClr val="FFFFFF"/>
                 </a:solidFill>
@@ -24551,8 +24551,8 @@
         </p:nvSpPr>
         <p:spPr>
           <a:xfrm>
-            <a:off x="5486400" y="1691640"/>
-            <a:ext cx="1188720" cy="320040"/>
+            <a:off x="7863840" y="1691640"/>
+            <a:ext cx="1783080" cy="320040"/>
           </a:xfrm>
           <a:prstGeom prst="rect">
             <a:avLst/>
@@ -24594,22 +24594,22 @@
         </p:nvSpPr>
         <p:spPr>
           <a:xfrm>
-            <a:off x="5532120" y="1709928"/>
-            <a:ext cx="1097280" cy="274320"/>
-          </a:xfrm>
-          <a:prstGeom prst="rect">
-            <a:avLst/>
-          </a:prstGeom>
-          <a:noFill/>
-        </p:spPr>
-        <p:txBody>
-          <a:bodyPr wrap="square">
-            <a:spAutoFit/>
-          </a:bodyPr>
-          <a:lstStyle/>
-          <a:p>
-            <a:pPr algn="l">
-              <a:defRPr sz="800" b="1">
+            <a:off x="7936992" y="1709928"/>
+            <a:ext cx="1645920" cy="274320"/>
+          </a:xfrm>
+          <a:prstGeom prst="rect">
+            <a:avLst/>
+          </a:prstGeom>
+          <a:noFill/>
+        </p:spPr>
+        <p:txBody>
+          <a:bodyPr wrap="square">
+            <a:spAutoFit/>
+          </a:bodyPr>
+          <a:lstStyle/>
+          <a:p>
+            <a:pPr algn="l">
+              <a:defRPr sz="900" b="1">
                 <a:solidFill>
                   <a:srgbClr val="FFFFFF"/>
                 </a:solidFill>
@@ -24630,8 +24630,8 @@
         </p:nvSpPr>
         <p:spPr>
           <a:xfrm>
-            <a:off x="6720840" y="1691640"/>
-            <a:ext cx="1188720" cy="320040"/>
+            <a:off x="9692640" y="1691640"/>
+            <a:ext cx="1783080" cy="320040"/>
           </a:xfrm>
           <a:prstGeom prst="rect">
             <a:avLst/>
@@ -24673,22 +24673,22 @@
         </p:nvSpPr>
         <p:spPr>
           <a:xfrm>
-            <a:off x="6766559" y="1709928"/>
-            <a:ext cx="1097280" cy="274320"/>
-          </a:xfrm>
-          <a:prstGeom prst="rect">
-            <a:avLst/>
-          </a:prstGeom>
-          <a:noFill/>
-        </p:spPr>
-        <p:txBody>
-          <a:bodyPr wrap="square">
-            <a:spAutoFit/>
-          </a:bodyPr>
-          <a:lstStyle/>
-          <a:p>
-            <a:pPr algn="l">
-              <a:defRPr sz="800" b="1">
+            <a:off x="9765792" y="1709928"/>
+            <a:ext cx="1645920" cy="274320"/>
+          </a:xfrm>
+          <a:prstGeom prst="rect">
+            <a:avLst/>
+          </a:prstGeom>
+          <a:noFill/>
+        </p:spPr>
+        <p:txBody>
+          <a:bodyPr wrap="square">
+            <a:spAutoFit/>
+          </a:bodyPr>
+          <a:lstStyle/>
+          <a:p>
+            <a:pPr algn="l">
+              <a:defRPr sz="900" b="1">
                 <a:solidFill>
                   <a:srgbClr val="FFFFFF"/>
                 </a:solidFill>
@@ -24710,7 +24710,7 @@
         <p:spPr>
           <a:xfrm>
             <a:off x="548640" y="2057400"/>
-            <a:ext cx="1188720" cy="329184"/>
+            <a:ext cx="1783080" cy="329184"/>
           </a:xfrm>
           <a:prstGeom prst="rect">
             <a:avLst/>
@@ -24752,22 +24752,22 @@
         </p:nvSpPr>
         <p:spPr>
           <a:xfrm>
-            <a:off x="594360" y="2075688"/>
-            <a:ext cx="1097280" cy="274320"/>
-          </a:xfrm>
-          <a:prstGeom prst="rect">
-            <a:avLst/>
-          </a:prstGeom>
-          <a:noFill/>
-        </p:spPr>
-        <p:txBody>
-          <a:bodyPr wrap="square">
-            <a:spAutoFit/>
-          </a:bodyPr>
-          <a:lstStyle/>
-          <a:p>
-            <a:pPr algn="l">
-              <a:defRPr sz="800" b="0">
+            <a:off x="621792" y="2075688"/>
+            <a:ext cx="1645920" cy="274320"/>
+          </a:xfrm>
+          <a:prstGeom prst="rect">
+            <a:avLst/>
+          </a:prstGeom>
+          <a:noFill/>
+        </p:spPr>
+        <p:txBody>
+          <a:bodyPr wrap="square">
+            <a:spAutoFit/>
+          </a:bodyPr>
+          <a:lstStyle/>
+          <a:p>
+            <a:pPr algn="l">
+              <a:defRPr sz="900" b="0">
                 <a:solidFill>
                   <a:srgbClr val="212121"/>
                 </a:solidFill>
@@ -24788,8 +24788,8 @@
         </p:nvSpPr>
         <p:spPr>
           <a:xfrm>
-            <a:off x="1783080" y="2057400"/>
-            <a:ext cx="1188720" cy="329184"/>
+            <a:off x="2377440" y="2057400"/>
+            <a:ext cx="1783080" cy="329184"/>
           </a:xfrm>
           <a:prstGeom prst="rect">
             <a:avLst/>
@@ -24831,22 +24831,22 @@
         </p:nvSpPr>
         <p:spPr>
           <a:xfrm>
-            <a:off x="1828800" y="2075688"/>
-            <a:ext cx="1097280" cy="274320"/>
-          </a:xfrm>
-          <a:prstGeom prst="rect">
-            <a:avLst/>
-          </a:prstGeom>
-          <a:noFill/>
-        </p:spPr>
-        <p:txBody>
-          <a:bodyPr wrap="square">
-            <a:spAutoFit/>
-          </a:bodyPr>
-          <a:lstStyle/>
-          <a:p>
-            <a:pPr algn="l">
-              <a:defRPr sz="800" b="0">
+            <a:off x="2450592" y="2075688"/>
+            <a:ext cx="1645920" cy="274320"/>
+          </a:xfrm>
+          <a:prstGeom prst="rect">
+            <a:avLst/>
+          </a:prstGeom>
+          <a:noFill/>
+        </p:spPr>
+        <p:txBody>
+          <a:bodyPr wrap="square">
+            <a:spAutoFit/>
+          </a:bodyPr>
+          <a:lstStyle/>
+          <a:p>
+            <a:pPr algn="l">
+              <a:defRPr sz="900" b="0">
                 <a:solidFill>
                   <a:srgbClr val="212121"/>
                 </a:solidFill>
@@ -24867,8 +24867,8 @@
         </p:nvSpPr>
         <p:spPr>
           <a:xfrm>
-            <a:off x="3017520" y="2057400"/>
-            <a:ext cx="1188720" cy="329184"/>
+            <a:off x="4206240" y="2057400"/>
+            <a:ext cx="1783080" cy="329184"/>
           </a:xfrm>
           <a:prstGeom prst="rect">
             <a:avLst/>
@@ -24910,22 +24910,22 @@
         </p:nvSpPr>
         <p:spPr>
           <a:xfrm>
-            <a:off x="3063240" y="2075688"/>
-            <a:ext cx="1097280" cy="274320"/>
-          </a:xfrm>
-          <a:prstGeom prst="rect">
-            <a:avLst/>
-          </a:prstGeom>
-          <a:noFill/>
-        </p:spPr>
-        <p:txBody>
-          <a:bodyPr wrap="square">
-            <a:spAutoFit/>
-          </a:bodyPr>
-          <a:lstStyle/>
-          <a:p>
-            <a:pPr algn="l">
-              <a:defRPr sz="800" b="0">
+            <a:off x="4279392" y="2075688"/>
+            <a:ext cx="1645920" cy="274320"/>
+          </a:xfrm>
+          <a:prstGeom prst="rect">
+            <a:avLst/>
+          </a:prstGeom>
+          <a:noFill/>
+        </p:spPr>
+        <p:txBody>
+          <a:bodyPr wrap="square">
+            <a:spAutoFit/>
+          </a:bodyPr>
+          <a:lstStyle/>
+          <a:p>
+            <a:pPr algn="l">
+              <a:defRPr sz="900" b="0">
                 <a:solidFill>
                   <a:srgbClr val="212121"/>
                 </a:solidFill>
@@ -24946,8 +24946,8 @@
         </p:nvSpPr>
         <p:spPr>
           <a:xfrm>
-            <a:off x="4251960" y="2057400"/>
-            <a:ext cx="1188720" cy="329184"/>
+            <a:off x="6035040" y="2057400"/>
+            <a:ext cx="1783080" cy="329184"/>
           </a:xfrm>
           <a:prstGeom prst="rect">
             <a:avLst/>
@@ -24989,22 +24989,22 @@
         </p:nvSpPr>
         <p:spPr>
           <a:xfrm>
-            <a:off x="4297680" y="2075688"/>
-            <a:ext cx="1097280" cy="274320"/>
-          </a:xfrm>
-          <a:prstGeom prst="rect">
-            <a:avLst/>
-          </a:prstGeom>
-          <a:noFill/>
-        </p:spPr>
-        <p:txBody>
-          <a:bodyPr wrap="square">
-            <a:spAutoFit/>
-          </a:bodyPr>
-          <a:lstStyle/>
-          <a:p>
-            <a:pPr algn="l">
-              <a:defRPr sz="800" b="0">
+            <a:off x="6108192" y="2075688"/>
+            <a:ext cx="1645920" cy="274320"/>
+          </a:xfrm>
+          <a:prstGeom prst="rect">
+            <a:avLst/>
+          </a:prstGeom>
+          <a:noFill/>
+        </p:spPr>
+        <p:txBody>
+          <a:bodyPr wrap="square">
+            <a:spAutoFit/>
+          </a:bodyPr>
+          <a:lstStyle/>
+          <a:p>
+            <a:pPr algn="l">
+              <a:defRPr sz="900" b="0">
                 <a:solidFill>
                   <a:srgbClr val="212121"/>
                 </a:solidFill>
@@ -25025,8 +25025,8 @@
         </p:nvSpPr>
         <p:spPr>
           <a:xfrm>
-            <a:off x="5486400" y="2057400"/>
-            <a:ext cx="1188720" cy="329184"/>
+            <a:off x="7863840" y="2057400"/>
+            <a:ext cx="1783080" cy="329184"/>
           </a:xfrm>
           <a:prstGeom prst="rect">
             <a:avLst/>
@@ -25068,22 +25068,22 @@
         </p:nvSpPr>
         <p:spPr>
           <a:xfrm>
-            <a:off x="5532120" y="2075688"/>
-            <a:ext cx="1097280" cy="274320"/>
-          </a:xfrm>
-          <a:prstGeom prst="rect">
-            <a:avLst/>
-          </a:prstGeom>
-          <a:noFill/>
-        </p:spPr>
-        <p:txBody>
-          <a:bodyPr wrap="square">
-            <a:spAutoFit/>
-          </a:bodyPr>
-          <a:lstStyle/>
-          <a:p>
-            <a:pPr algn="l">
-              <a:defRPr sz="800" b="0">
+            <a:off x="7936992" y="2075688"/>
+            <a:ext cx="1645920" cy="274320"/>
+          </a:xfrm>
+          <a:prstGeom prst="rect">
+            <a:avLst/>
+          </a:prstGeom>
+          <a:noFill/>
+        </p:spPr>
+        <p:txBody>
+          <a:bodyPr wrap="square">
+            <a:spAutoFit/>
+          </a:bodyPr>
+          <a:lstStyle/>
+          <a:p>
+            <a:pPr algn="l">
+              <a:defRPr sz="900" b="0">
                 <a:solidFill>
                   <a:srgbClr val="212121"/>
                 </a:solidFill>
@@ -25104,8 +25104,8 @@
         </p:nvSpPr>
         <p:spPr>
           <a:xfrm>
-            <a:off x="6720840" y="2057400"/>
-            <a:ext cx="1188720" cy="329184"/>
+            <a:off x="9692640" y="2057400"/>
+            <a:ext cx="1783080" cy="329184"/>
           </a:xfrm>
           <a:prstGeom prst="rect">
             <a:avLst/>
@@ -25147,22 +25147,22 @@
         </p:nvSpPr>
         <p:spPr>
           <a:xfrm>
-            <a:off x="6766559" y="2075688"/>
-            <a:ext cx="1097280" cy="274320"/>
-          </a:xfrm>
-          <a:prstGeom prst="rect">
-            <a:avLst/>
-          </a:prstGeom>
-          <a:noFill/>
-        </p:spPr>
-        <p:txBody>
-          <a:bodyPr wrap="square">
-            <a:spAutoFit/>
-          </a:bodyPr>
-          <a:lstStyle/>
-          <a:p>
-            <a:pPr algn="l">
-              <a:defRPr sz="800" b="0">
+            <a:off x="9765792" y="2075688"/>
+            <a:ext cx="1645920" cy="274320"/>
+          </a:xfrm>
+          <a:prstGeom prst="rect">
+            <a:avLst/>
+          </a:prstGeom>
+          <a:noFill/>
+        </p:spPr>
+        <p:txBody>
+          <a:bodyPr wrap="square">
+            <a:spAutoFit/>
+          </a:bodyPr>
+          <a:lstStyle/>
+          <a:p>
+            <a:pPr algn="l">
+              <a:defRPr sz="900" b="0">
                 <a:solidFill>
                   <a:srgbClr val="212121"/>
                 </a:solidFill>
@@ -25184,7 +25184,7 @@
         <p:spPr>
           <a:xfrm>
             <a:off x="548640" y="2404872"/>
-            <a:ext cx="1188720" cy="329184"/>
+            <a:ext cx="1783080" cy="329184"/>
           </a:xfrm>
           <a:prstGeom prst="rect">
             <a:avLst/>
@@ -25226,22 +25226,22 @@
         </p:nvSpPr>
         <p:spPr>
           <a:xfrm>
-            <a:off x="594360" y="2423160"/>
-            <a:ext cx="1097280" cy="274320"/>
-          </a:xfrm>
-          <a:prstGeom prst="rect">
-            <a:avLst/>
-          </a:prstGeom>
-          <a:noFill/>
-        </p:spPr>
-        <p:txBody>
-          <a:bodyPr wrap="square">
-            <a:spAutoFit/>
-          </a:bodyPr>
-          <a:lstStyle/>
-          <a:p>
-            <a:pPr algn="l">
-              <a:defRPr sz="800" b="0">
+            <a:off x="621792" y="2423160"/>
+            <a:ext cx="1645920" cy="274320"/>
+          </a:xfrm>
+          <a:prstGeom prst="rect">
+            <a:avLst/>
+          </a:prstGeom>
+          <a:noFill/>
+        </p:spPr>
+        <p:txBody>
+          <a:bodyPr wrap="square">
+            <a:spAutoFit/>
+          </a:bodyPr>
+          <a:lstStyle/>
+          <a:p>
+            <a:pPr algn="l">
+              <a:defRPr sz="900" b="0">
                 <a:solidFill>
                   <a:srgbClr val="212121"/>
                 </a:solidFill>
@@ -25262,8 +25262,8 @@
         </p:nvSpPr>
         <p:spPr>
           <a:xfrm>
-            <a:off x="1783080" y="2404872"/>
-            <a:ext cx="1188720" cy="329184"/>
+            <a:off x="2377440" y="2404872"/>
+            <a:ext cx="1783080" cy="329184"/>
           </a:xfrm>
           <a:prstGeom prst="rect">
             <a:avLst/>
@@ -25305,22 +25305,22 @@
         </p:nvSpPr>
         <p:spPr>
           <a:xfrm>
-            <a:off x="1828800" y="2423160"/>
-            <a:ext cx="1097280" cy="274320"/>
-          </a:xfrm>
-          <a:prstGeom prst="rect">
-            <a:avLst/>
-          </a:prstGeom>
-          <a:noFill/>
-        </p:spPr>
-        <p:txBody>
-          <a:bodyPr wrap="square">
-            <a:spAutoFit/>
-          </a:bodyPr>
-          <a:lstStyle/>
-          <a:p>
-            <a:pPr algn="l">
-              <a:defRPr sz="800" b="0">
+            <a:off x="2450592" y="2423160"/>
+            <a:ext cx="1645920" cy="274320"/>
+          </a:xfrm>
+          <a:prstGeom prst="rect">
+            <a:avLst/>
+          </a:prstGeom>
+          <a:noFill/>
+        </p:spPr>
+        <p:txBody>
+          <a:bodyPr wrap="square">
+            <a:spAutoFit/>
+          </a:bodyPr>
+          <a:lstStyle/>
+          <a:p>
+            <a:pPr algn="l">
+              <a:defRPr sz="900" b="0">
                 <a:solidFill>
                   <a:srgbClr val="212121"/>
                 </a:solidFill>
@@ -25341,8 +25341,8 @@
         </p:nvSpPr>
         <p:spPr>
           <a:xfrm>
-            <a:off x="3017520" y="2404872"/>
-            <a:ext cx="1188720" cy="329184"/>
+            <a:off x="4206240" y="2404872"/>
+            <a:ext cx="1783080" cy="329184"/>
           </a:xfrm>
           <a:prstGeom prst="rect">
             <a:avLst/>
@@ -25384,22 +25384,22 @@
         </p:nvSpPr>
         <p:spPr>
           <a:xfrm>
-            <a:off x="3063240" y="2423160"/>
-            <a:ext cx="1097280" cy="274320"/>
-          </a:xfrm>
-          <a:prstGeom prst="rect">
-            <a:avLst/>
-          </a:prstGeom>
-          <a:noFill/>
-        </p:spPr>
-        <p:txBody>
-          <a:bodyPr wrap="square">
-            <a:spAutoFit/>
-          </a:bodyPr>
-          <a:lstStyle/>
-          <a:p>
-            <a:pPr algn="l">
-              <a:defRPr sz="800" b="0">
+            <a:off x="4279392" y="2423160"/>
+            <a:ext cx="1645920" cy="274320"/>
+          </a:xfrm>
+          <a:prstGeom prst="rect">
+            <a:avLst/>
+          </a:prstGeom>
+          <a:noFill/>
+        </p:spPr>
+        <p:txBody>
+          <a:bodyPr wrap="square">
+            <a:spAutoFit/>
+          </a:bodyPr>
+          <a:lstStyle/>
+          <a:p>
+            <a:pPr algn="l">
+              <a:defRPr sz="900" b="0">
                 <a:solidFill>
                   <a:srgbClr val="212121"/>
                 </a:solidFill>
@@ -25420,8 +25420,8 @@
         </p:nvSpPr>
         <p:spPr>
           <a:xfrm>
-            <a:off x="4251960" y="2404872"/>
-            <a:ext cx="1188720" cy="329184"/>
+            <a:off x="6035040" y="2404872"/>
+            <a:ext cx="1783080" cy="329184"/>
           </a:xfrm>
           <a:prstGeom prst="rect">
             <a:avLst/>
@@ -25463,22 +25463,22 @@
         </p:nvSpPr>
         <p:spPr>
           <a:xfrm>
-            <a:off x="4297680" y="2423160"/>
-            <a:ext cx="1097280" cy="274320"/>
-          </a:xfrm>
-          <a:prstGeom prst="rect">
-            <a:avLst/>
-          </a:prstGeom>
-          <a:noFill/>
-        </p:spPr>
-        <p:txBody>
-          <a:bodyPr wrap="square">
-            <a:spAutoFit/>
-          </a:bodyPr>
-          <a:lstStyle/>
-          <a:p>
-            <a:pPr algn="l">
-              <a:defRPr sz="800" b="0">
+            <a:off x="6108192" y="2423160"/>
+            <a:ext cx="1645920" cy="274320"/>
+          </a:xfrm>
+          <a:prstGeom prst="rect">
+            <a:avLst/>
+          </a:prstGeom>
+          <a:noFill/>
+        </p:spPr>
+        <p:txBody>
+          <a:bodyPr wrap="square">
+            <a:spAutoFit/>
+          </a:bodyPr>
+          <a:lstStyle/>
+          <a:p>
+            <a:pPr algn="l">
+              <a:defRPr sz="900" b="0">
                 <a:solidFill>
                   <a:srgbClr val="212121"/>
                 </a:solidFill>
@@ -25499,8 +25499,8 @@
         </p:nvSpPr>
         <p:spPr>
           <a:xfrm>
-            <a:off x="5486400" y="2404872"/>
-            <a:ext cx="1188720" cy="329184"/>
+            <a:off x="7863840" y="2404872"/>
+            <a:ext cx="1783080" cy="329184"/>
           </a:xfrm>
           <a:prstGeom prst="rect">
             <a:avLst/>
@@ -25542,22 +25542,22 @@
         </p:nvSpPr>
         <p:spPr>
           <a:xfrm>
-            <a:off x="5532120" y="2423160"/>
-            <a:ext cx="1097280" cy="274320"/>
-          </a:xfrm>
-          <a:prstGeom prst="rect">
-            <a:avLst/>
-          </a:prstGeom>
-          <a:noFill/>
-        </p:spPr>
-        <p:txBody>
-          <a:bodyPr wrap="square">
-            <a:spAutoFit/>
-          </a:bodyPr>
-          <a:lstStyle/>
-          <a:p>
-            <a:pPr algn="l">
-              <a:defRPr sz="800" b="0">
+            <a:off x="7936992" y="2423160"/>
+            <a:ext cx="1645920" cy="274320"/>
+          </a:xfrm>
+          <a:prstGeom prst="rect">
+            <a:avLst/>
+          </a:prstGeom>
+          <a:noFill/>
+        </p:spPr>
+        <p:txBody>
+          <a:bodyPr wrap="square">
+            <a:spAutoFit/>
+          </a:bodyPr>
+          <a:lstStyle/>
+          <a:p>
+            <a:pPr algn="l">
+              <a:defRPr sz="900" b="0">
                 <a:solidFill>
                   <a:srgbClr val="212121"/>
                 </a:solidFill>
@@ -25578,8 +25578,8 @@
         </p:nvSpPr>
         <p:spPr>
           <a:xfrm>
-            <a:off x="6720840" y="2404872"/>
-            <a:ext cx="1188720" cy="329184"/>
+            <a:off x="9692640" y="2404872"/>
+            <a:ext cx="1783080" cy="329184"/>
           </a:xfrm>
           <a:prstGeom prst="rect">
             <a:avLst/>
@@ -25621,22 +25621,22 @@
         </p:nvSpPr>
         <p:spPr>
           <a:xfrm>
-            <a:off x="6766559" y="2423160"/>
-            <a:ext cx="1097280" cy="274320"/>
-          </a:xfrm>
-          <a:prstGeom prst="rect">
-            <a:avLst/>
-          </a:prstGeom>
-          <a:noFill/>
-        </p:spPr>
-        <p:txBody>
-          <a:bodyPr wrap="square">
-            <a:spAutoFit/>
-          </a:bodyPr>
-          <a:lstStyle/>
-          <a:p>
-            <a:pPr algn="l">
-              <a:defRPr sz="800" b="0">
+            <a:off x="9765792" y="2423160"/>
+            <a:ext cx="1645920" cy="274320"/>
+          </a:xfrm>
+          <a:prstGeom prst="rect">
+            <a:avLst/>
+          </a:prstGeom>
+          <a:noFill/>
+        </p:spPr>
+        <p:txBody>
+          <a:bodyPr wrap="square">
+            <a:spAutoFit/>
+          </a:bodyPr>
+          <a:lstStyle/>
+          <a:p>
+            <a:pPr algn="l">
+              <a:defRPr sz="900" b="0">
                 <a:solidFill>
                   <a:srgbClr val="212121"/>
                 </a:solidFill>
@@ -25658,7 +25658,7 @@
         <p:spPr>
           <a:xfrm>
             <a:off x="548640" y="2752344"/>
-            <a:ext cx="1188720" cy="329184"/>
+            <a:ext cx="1783080" cy="329184"/>
           </a:xfrm>
           <a:prstGeom prst="rect">
             <a:avLst/>
@@ -25700,22 +25700,22 @@
         </p:nvSpPr>
         <p:spPr>
           <a:xfrm>
-            <a:off x="594360" y="2770632"/>
-            <a:ext cx="1097280" cy="274320"/>
-          </a:xfrm>
-          <a:prstGeom prst="rect">
-            <a:avLst/>
-          </a:prstGeom>
-          <a:noFill/>
-        </p:spPr>
-        <p:txBody>
-          <a:bodyPr wrap="square">
-            <a:spAutoFit/>
-          </a:bodyPr>
-          <a:lstStyle/>
-          <a:p>
-            <a:pPr algn="l">
-              <a:defRPr sz="800" b="0">
+            <a:off x="621792" y="2770632"/>
+            <a:ext cx="1645920" cy="274320"/>
+          </a:xfrm>
+          <a:prstGeom prst="rect">
+            <a:avLst/>
+          </a:prstGeom>
+          <a:noFill/>
+        </p:spPr>
+        <p:txBody>
+          <a:bodyPr wrap="square">
+            <a:spAutoFit/>
+          </a:bodyPr>
+          <a:lstStyle/>
+          <a:p>
+            <a:pPr algn="l">
+              <a:defRPr sz="900" b="0">
                 <a:solidFill>
                   <a:srgbClr val="212121"/>
                 </a:solidFill>
@@ -25736,8 +25736,8 @@
         </p:nvSpPr>
         <p:spPr>
           <a:xfrm>
-            <a:off x="1783080" y="2752344"/>
-            <a:ext cx="1188720" cy="329184"/>
+            <a:off x="2377440" y="2752344"/>
+            <a:ext cx="1783080" cy="329184"/>
           </a:xfrm>
           <a:prstGeom prst="rect">
             <a:avLst/>
@@ -25779,22 +25779,22 @@
         </p:nvSpPr>
         <p:spPr>
           <a:xfrm>
-            <a:off x="1828800" y="2770632"/>
-            <a:ext cx="1097280" cy="274320"/>
-          </a:xfrm>
-          <a:prstGeom prst="rect">
-            <a:avLst/>
-          </a:prstGeom>
-          <a:noFill/>
-        </p:spPr>
-        <p:txBody>
-          <a:bodyPr wrap="square">
-            <a:spAutoFit/>
-          </a:bodyPr>
-          <a:lstStyle/>
-          <a:p>
-            <a:pPr algn="l">
-              <a:defRPr sz="800" b="0">
+            <a:off x="2450592" y="2770632"/>
+            <a:ext cx="1645920" cy="274320"/>
+          </a:xfrm>
+          <a:prstGeom prst="rect">
+            <a:avLst/>
+          </a:prstGeom>
+          <a:noFill/>
+        </p:spPr>
+        <p:txBody>
+          <a:bodyPr wrap="square">
+            <a:spAutoFit/>
+          </a:bodyPr>
+          <a:lstStyle/>
+          <a:p>
+            <a:pPr algn="l">
+              <a:defRPr sz="900" b="0">
                 <a:solidFill>
                   <a:srgbClr val="212121"/>
                 </a:solidFill>
@@ -25815,8 +25815,8 @@
         </p:nvSpPr>
         <p:spPr>
           <a:xfrm>
-            <a:off x="3017520" y="2752344"/>
-            <a:ext cx="1188720" cy="329184"/>
+            <a:off x="4206240" y="2752344"/>
+            <a:ext cx="1783080" cy="329184"/>
           </a:xfrm>
           <a:prstGeom prst="rect">
             <a:avLst/>
@@ -25858,22 +25858,22 @@
         </p:nvSpPr>
         <p:spPr>
           <a:xfrm>
-            <a:off x="3063240" y="2770632"/>
-            <a:ext cx="1097280" cy="274320"/>
-          </a:xfrm>
-          <a:prstGeom prst="rect">
-            <a:avLst/>
-          </a:prstGeom>
-          <a:noFill/>
-        </p:spPr>
-        <p:txBody>
-          <a:bodyPr wrap="square">
-            <a:spAutoFit/>
-          </a:bodyPr>
-          <a:lstStyle/>
-          <a:p>
-            <a:pPr algn="l">
-              <a:defRPr sz="800" b="0">
+            <a:off x="4279392" y="2770632"/>
+            <a:ext cx="1645920" cy="274320"/>
+          </a:xfrm>
+          <a:prstGeom prst="rect">
+            <a:avLst/>
+          </a:prstGeom>
+          <a:noFill/>
+        </p:spPr>
+        <p:txBody>
+          <a:bodyPr wrap="square">
+            <a:spAutoFit/>
+          </a:bodyPr>
+          <a:lstStyle/>
+          <a:p>
+            <a:pPr algn="l">
+              <a:defRPr sz="900" b="0">
                 <a:solidFill>
                   <a:srgbClr val="212121"/>
                 </a:solidFill>
@@ -25894,8 +25894,8 @@
         </p:nvSpPr>
         <p:spPr>
           <a:xfrm>
-            <a:off x="4251960" y="2752344"/>
-            <a:ext cx="1188720" cy="329184"/>
+            <a:off x="6035040" y="2752344"/>
+            <a:ext cx="1783080" cy="329184"/>
           </a:xfrm>
           <a:prstGeom prst="rect">
             <a:avLst/>
@@ -25937,22 +25937,22 @@
         </p:nvSpPr>
         <p:spPr>
           <a:xfrm>
-            <a:off x="4297680" y="2770632"/>
-            <a:ext cx="1097280" cy="274320"/>
-          </a:xfrm>
-          <a:prstGeom prst="rect">
-            <a:avLst/>
-          </a:prstGeom>
-          <a:noFill/>
-        </p:spPr>
-        <p:txBody>
-          <a:bodyPr wrap="square">
-            <a:spAutoFit/>
-          </a:bodyPr>
-          <a:lstStyle/>
-          <a:p>
-            <a:pPr algn="l">
-              <a:defRPr sz="800" b="0">
+            <a:off x="6108192" y="2770632"/>
+            <a:ext cx="1645920" cy="274320"/>
+          </a:xfrm>
+          <a:prstGeom prst="rect">
+            <a:avLst/>
+          </a:prstGeom>
+          <a:noFill/>
+        </p:spPr>
+        <p:txBody>
+          <a:bodyPr wrap="square">
+            <a:spAutoFit/>
+          </a:bodyPr>
+          <a:lstStyle/>
+          <a:p>
+            <a:pPr algn="l">
+              <a:defRPr sz="900" b="0">
                 <a:solidFill>
                   <a:srgbClr val="212121"/>
                 </a:solidFill>
@@ -25973,8 +25973,8 @@
         </p:nvSpPr>
         <p:spPr>
           <a:xfrm>
-            <a:off x="5486400" y="2752344"/>
-            <a:ext cx="1188720" cy="329184"/>
+            <a:off x="7863840" y="2752344"/>
+            <a:ext cx="1783080" cy="329184"/>
           </a:xfrm>
           <a:prstGeom prst="rect">
             <a:avLst/>
@@ -26016,22 +26016,22 @@
         </p:nvSpPr>
         <p:spPr>
           <a:xfrm>
-            <a:off x="5532120" y="2770632"/>
-            <a:ext cx="1097280" cy="274320"/>
-          </a:xfrm>
-          <a:prstGeom prst="rect">
-            <a:avLst/>
-          </a:prstGeom>
-          <a:noFill/>
-        </p:spPr>
-        <p:txBody>
-          <a:bodyPr wrap="square">
-            <a:spAutoFit/>
-          </a:bodyPr>
-          <a:lstStyle/>
-          <a:p>
-            <a:pPr algn="l">
-              <a:defRPr sz="800" b="0">
+            <a:off x="7936992" y="2770632"/>
+            <a:ext cx="1645920" cy="274320"/>
+          </a:xfrm>
+          <a:prstGeom prst="rect">
+            <a:avLst/>
+          </a:prstGeom>
+          <a:noFill/>
+        </p:spPr>
+        <p:txBody>
+          <a:bodyPr wrap="square">
+            <a:spAutoFit/>
+          </a:bodyPr>
+          <a:lstStyle/>
+          <a:p>
+            <a:pPr algn="l">
+              <a:defRPr sz="900" b="0">
                 <a:solidFill>
                   <a:srgbClr val="212121"/>
                 </a:solidFill>
@@ -26052,8 +26052,8 @@
         </p:nvSpPr>
         <p:spPr>
           <a:xfrm>
-            <a:off x="6720840" y="2752344"/>
-            <a:ext cx="1188720" cy="329184"/>
+            <a:off x="9692640" y="2752344"/>
+            <a:ext cx="1783080" cy="329184"/>
           </a:xfrm>
           <a:prstGeom prst="rect">
             <a:avLst/>
@@ -26095,22 +26095,22 @@
         </p:nvSpPr>
         <p:spPr>
           <a:xfrm>
-            <a:off x="6766559" y="2770632"/>
-            <a:ext cx="1097280" cy="274320"/>
-          </a:xfrm>
-          <a:prstGeom prst="rect">
-            <a:avLst/>
-          </a:prstGeom>
-          <a:noFill/>
-        </p:spPr>
-        <p:txBody>
-          <a:bodyPr wrap="square">
-            <a:spAutoFit/>
-          </a:bodyPr>
-          <a:lstStyle/>
-          <a:p>
-            <a:pPr algn="l">
-              <a:defRPr sz="800" b="0">
+            <a:off x="9765792" y="2770632"/>
+            <a:ext cx="1645920" cy="274320"/>
+          </a:xfrm>
+          <a:prstGeom prst="rect">
+            <a:avLst/>
+          </a:prstGeom>
+          <a:noFill/>
+        </p:spPr>
+        <p:txBody>
+          <a:bodyPr wrap="square">
+            <a:spAutoFit/>
+          </a:bodyPr>
+          <a:lstStyle/>
+          <a:p>
+            <a:pPr algn="l">
+              <a:defRPr sz="900" b="0">
                 <a:solidFill>
                   <a:srgbClr val="212121"/>
                 </a:solidFill>
@@ -26132,7 +26132,7 @@
         <p:spPr>
           <a:xfrm>
             <a:off x="548640" y="3099816"/>
-            <a:ext cx="1188720" cy="329184"/>
+            <a:ext cx="1783080" cy="329184"/>
           </a:xfrm>
           <a:prstGeom prst="rect">
             <a:avLst/>
@@ -26174,22 +26174,22 @@
         </p:nvSpPr>
         <p:spPr>
           <a:xfrm>
-            <a:off x="594360" y="3118104"/>
-            <a:ext cx="1097280" cy="274320"/>
-          </a:xfrm>
-          <a:prstGeom prst="rect">
-            <a:avLst/>
-          </a:prstGeom>
-          <a:noFill/>
-        </p:spPr>
-        <p:txBody>
-          <a:bodyPr wrap="square">
-            <a:spAutoFit/>
-          </a:bodyPr>
-          <a:lstStyle/>
-          <a:p>
-            <a:pPr algn="l">
-              <a:defRPr sz="800" b="1">
+            <a:off x="621792" y="3118104"/>
+            <a:ext cx="1645920" cy="274320"/>
+          </a:xfrm>
+          <a:prstGeom prst="rect">
+            <a:avLst/>
+          </a:prstGeom>
+          <a:noFill/>
+        </p:spPr>
+        <p:txBody>
+          <a:bodyPr wrap="square">
+            <a:spAutoFit/>
+          </a:bodyPr>
+          <a:lstStyle/>
+          <a:p>
+            <a:pPr algn="l">
+              <a:defRPr sz="900" b="1">
                 <a:solidFill>
                   <a:srgbClr val="FFFFFF"/>
                 </a:solidFill>
@@ -26210,8 +26210,8 @@
         </p:nvSpPr>
         <p:spPr>
           <a:xfrm>
-            <a:off x="1783080" y="3099816"/>
-            <a:ext cx="1188720" cy="329184"/>
+            <a:off x="2377440" y="3099816"/>
+            <a:ext cx="1783080" cy="329184"/>
           </a:xfrm>
           <a:prstGeom prst="rect">
             <a:avLst/>
@@ -26253,22 +26253,22 @@
         </p:nvSpPr>
         <p:spPr>
           <a:xfrm>
-            <a:off x="1828800" y="3118104"/>
-            <a:ext cx="1097280" cy="274320"/>
-          </a:xfrm>
-          <a:prstGeom prst="rect">
-            <a:avLst/>
-          </a:prstGeom>
-          <a:noFill/>
-        </p:spPr>
-        <p:txBody>
-          <a:bodyPr wrap="square">
-            <a:spAutoFit/>
-          </a:bodyPr>
-          <a:lstStyle/>
-          <a:p>
-            <a:pPr algn="l">
-              <a:defRPr sz="800" b="1">
+            <a:off x="2450592" y="3118104"/>
+            <a:ext cx="1645920" cy="274320"/>
+          </a:xfrm>
+          <a:prstGeom prst="rect">
+            <a:avLst/>
+          </a:prstGeom>
+          <a:noFill/>
+        </p:spPr>
+        <p:txBody>
+          <a:bodyPr wrap="square">
+            <a:spAutoFit/>
+          </a:bodyPr>
+          <a:lstStyle/>
+          <a:p>
+            <a:pPr algn="l">
+              <a:defRPr sz="900" b="1">
                 <a:solidFill>
                   <a:srgbClr val="FFFFFF"/>
                 </a:solidFill>
@@ -26289,8 +26289,8 @@
         </p:nvSpPr>
         <p:spPr>
           <a:xfrm>
-            <a:off x="3017520" y="3099816"/>
-            <a:ext cx="1188720" cy="329184"/>
+            <a:off x="4206240" y="3099816"/>
+            <a:ext cx="1783080" cy="329184"/>
           </a:xfrm>
           <a:prstGeom prst="rect">
             <a:avLst/>
@@ -26332,22 +26332,22 @@
         </p:nvSpPr>
         <p:spPr>
           <a:xfrm>
-            <a:off x="3063240" y="3118104"/>
-            <a:ext cx="1097280" cy="274320"/>
-          </a:xfrm>
-          <a:prstGeom prst="rect">
-            <a:avLst/>
-          </a:prstGeom>
-          <a:noFill/>
-        </p:spPr>
-        <p:txBody>
-          <a:bodyPr wrap="square">
-            <a:spAutoFit/>
-          </a:bodyPr>
-          <a:lstStyle/>
-          <a:p>
-            <a:pPr algn="l">
-              <a:defRPr sz="800" b="1">
+            <a:off x="4279392" y="3118104"/>
+            <a:ext cx="1645920" cy="274320"/>
+          </a:xfrm>
+          <a:prstGeom prst="rect">
+            <a:avLst/>
+          </a:prstGeom>
+          <a:noFill/>
+        </p:spPr>
+        <p:txBody>
+          <a:bodyPr wrap="square">
+            <a:spAutoFit/>
+          </a:bodyPr>
+          <a:lstStyle/>
+          <a:p>
+            <a:pPr algn="l">
+              <a:defRPr sz="900" b="1">
                 <a:solidFill>
                   <a:srgbClr val="FFFFFF"/>
                 </a:solidFill>
@@ -26368,8 +26368,8 @@
         </p:nvSpPr>
         <p:spPr>
           <a:xfrm>
-            <a:off x="4251960" y="3099816"/>
-            <a:ext cx="1188720" cy="329184"/>
+            <a:off x="6035040" y="3099816"/>
+            <a:ext cx="1783080" cy="329184"/>
           </a:xfrm>
           <a:prstGeom prst="rect">
             <a:avLst/>
@@ -26411,22 +26411,22 @@
         </p:nvSpPr>
         <p:spPr>
           <a:xfrm>
-            <a:off x="4297680" y="3118104"/>
-            <a:ext cx="1097280" cy="274320"/>
-          </a:xfrm>
-          <a:prstGeom prst="rect">
-            <a:avLst/>
-          </a:prstGeom>
-          <a:noFill/>
-        </p:spPr>
-        <p:txBody>
-          <a:bodyPr wrap="square">
-            <a:spAutoFit/>
-          </a:bodyPr>
-          <a:lstStyle/>
-          <a:p>
-            <a:pPr algn="l">
-              <a:defRPr sz="800" b="1">
+            <a:off x="6108192" y="3118104"/>
+            <a:ext cx="1645920" cy="274320"/>
+          </a:xfrm>
+          <a:prstGeom prst="rect">
+            <a:avLst/>
+          </a:prstGeom>
+          <a:noFill/>
+        </p:spPr>
+        <p:txBody>
+          <a:bodyPr wrap="square">
+            <a:spAutoFit/>
+          </a:bodyPr>
+          <a:lstStyle/>
+          <a:p>
+            <a:pPr algn="l">
+              <a:defRPr sz="900" b="1">
                 <a:solidFill>
                   <a:srgbClr val="FFFFFF"/>
                 </a:solidFill>
@@ -26447,8 +26447,8 @@
         </p:nvSpPr>
         <p:spPr>
           <a:xfrm>
-            <a:off x="5486400" y="3099816"/>
-            <a:ext cx="1188720" cy="329184"/>
+            <a:off x="7863840" y="3099816"/>
+            <a:ext cx="1783080" cy="329184"/>
           </a:xfrm>
           <a:prstGeom prst="rect">
             <a:avLst/>
@@ -26490,22 +26490,22 @@
         </p:nvSpPr>
         <p:spPr>
           <a:xfrm>
-            <a:off x="5532120" y="3118104"/>
-            <a:ext cx="1097280" cy="274320"/>
-          </a:xfrm>
-          <a:prstGeom prst="rect">
-            <a:avLst/>
-          </a:prstGeom>
-          <a:noFill/>
-        </p:spPr>
-        <p:txBody>
-          <a:bodyPr wrap="square">
-            <a:spAutoFit/>
-          </a:bodyPr>
-          <a:lstStyle/>
-          <a:p>
-            <a:pPr algn="l">
-              <a:defRPr sz="800" b="1">
+            <a:off x="7936992" y="3118104"/>
+            <a:ext cx="1645920" cy="274320"/>
+          </a:xfrm>
+          <a:prstGeom prst="rect">
+            <a:avLst/>
+          </a:prstGeom>
+          <a:noFill/>
+        </p:spPr>
+        <p:txBody>
+          <a:bodyPr wrap="square">
+            <a:spAutoFit/>
+          </a:bodyPr>
+          <a:lstStyle/>
+          <a:p>
+            <a:pPr algn="l">
+              <a:defRPr sz="900" b="1">
                 <a:solidFill>
                   <a:srgbClr val="FFFFFF"/>
                 </a:solidFill>
@@ -26526,8 +26526,8 @@
         </p:nvSpPr>
         <p:spPr>
           <a:xfrm>
-            <a:off x="6720840" y="3099816"/>
-            <a:ext cx="1188720" cy="329184"/>
+            <a:off x="9692640" y="3099816"/>
+            <a:ext cx="1783080" cy="329184"/>
           </a:xfrm>
           <a:prstGeom prst="rect">
             <a:avLst/>
@@ -26569,22 +26569,22 @@
         </p:nvSpPr>
         <p:spPr>
           <a:xfrm>
-            <a:off x="6766559" y="3118104"/>
-            <a:ext cx="1097280" cy="274320"/>
-          </a:xfrm>
-          <a:prstGeom prst="rect">
-            <a:avLst/>
-          </a:prstGeom>
-          <a:noFill/>
-        </p:spPr>
-        <p:txBody>
-          <a:bodyPr wrap="square">
-            <a:spAutoFit/>
-          </a:bodyPr>
-          <a:lstStyle/>
-          <a:p>
-            <a:pPr algn="l">
-              <a:defRPr sz="800" b="1">
+            <a:off x="9765792" y="3118104"/>
+            <a:ext cx="1645920" cy="274320"/>
+          </a:xfrm>
+          <a:prstGeom prst="rect">
+            <a:avLst/>
+          </a:prstGeom>
+          <a:noFill/>
+        </p:spPr>
+        <p:txBody>
+          <a:bodyPr wrap="square">
+            <a:spAutoFit/>
+          </a:bodyPr>
+          <a:lstStyle/>
+          <a:p>
+            <a:pPr algn="l">
+              <a:defRPr sz="900" b="1">
                 <a:solidFill>
                   <a:srgbClr val="FFFFFF"/>
                 </a:solidFill>
@@ -26605,8 +26605,8 @@
         </p:nvSpPr>
         <p:spPr>
           <a:xfrm>
-            <a:off x="8229600" y="1691640"/>
-            <a:ext cx="3657600" cy="274320"/>
+            <a:off x="548640" y="3749039"/>
+            <a:ext cx="4572000" cy="274320"/>
           </a:xfrm>
           <a:prstGeom prst="rect">
             <a:avLst/>
@@ -26628,7 +26628,7 @@
               </a:defRPr>
             </a:pPr>
             <a:r>
-              <a:t>市場規模</a:t>
+              <a:t>市場規模 — TAM / SAM / SOM</a:t>
             </a:r>
           </a:p>
         </p:txBody>
@@ -26641,8 +26641,8 @@
         </p:nvSpPr>
         <p:spPr>
           <a:xfrm>
-            <a:off x="7498079" y="1920239"/>
-            <a:ext cx="4023360" cy="4023360"/>
+            <a:off x="4023360" y="3840480"/>
+            <a:ext cx="3657600" cy="2743200"/>
           </a:xfrm>
           <a:prstGeom prst="ellipse">
             <a:avLst/>
@@ -26686,8 +26686,8 @@
         </p:nvSpPr>
         <p:spPr>
           <a:xfrm>
-            <a:off x="7589520" y="2103120"/>
-            <a:ext cx="1645920" cy="274320"/>
+            <a:off x="4114800" y="4023360"/>
+            <a:ext cx="1371600" cy="228600"/>
           </a:xfrm>
           <a:prstGeom prst="rect">
             <a:avLst/>
@@ -26722,22 +26722,22 @@
         </p:nvSpPr>
         <p:spPr>
           <a:xfrm>
-            <a:off x="7589520" y="2377439"/>
-            <a:ext cx="2011680" cy="274320"/>
-          </a:xfrm>
-          <a:prstGeom prst="rect">
-            <a:avLst/>
-          </a:prstGeom>
-          <a:noFill/>
-        </p:spPr>
-        <p:txBody>
-          <a:bodyPr wrap="square">
-            <a:spAutoFit/>
-          </a:bodyPr>
-          <a:lstStyle/>
-          <a:p>
-            <a:pPr algn="l">
-              <a:defRPr sz="1000" b="0">
+            <a:off x="4114800" y="4251960"/>
+            <a:ext cx="1828800" cy="228600"/>
+          </a:xfrm>
+          <a:prstGeom prst="rect">
+            <a:avLst/>
+          </a:prstGeom>
+          <a:noFill/>
+        </p:spPr>
+        <p:txBody>
+          <a:bodyPr wrap="square">
+            <a:spAutoFit/>
+          </a:bodyPr>
+          <a:lstStyle/>
+          <a:p>
+            <a:pPr algn="l">
+              <a:defRPr sz="1000" b="1">
                 <a:solidFill>
                   <a:srgbClr val="212121"/>
                 </a:solidFill>
@@ -26745,57 +26745,21 @@
               </a:defRPr>
             </a:pPr>
             <a:r>
-              <a:t>1,250機関</a:t>
-            </a:r>
-          </a:p>
-        </p:txBody>
-      </p:sp>
-      <p:sp>
-        <p:nvSpPr>
-          <p:cNvPr id="71" name="TextBox 70"/>
-          <p:cNvSpPr txBox="1"/>
-          <p:nvPr/>
-        </p:nvSpPr>
-        <p:spPr>
-          <a:xfrm>
-            <a:off x="7589520" y="2651760"/>
-            <a:ext cx="2011680" cy="274320"/>
-          </a:xfrm>
-          <a:prstGeom prst="rect">
-            <a:avLst/>
-          </a:prstGeom>
-          <a:noFill/>
-        </p:spPr>
-        <p:txBody>
-          <a:bodyPr wrap="square">
-            <a:spAutoFit/>
-          </a:bodyPr>
-          <a:lstStyle/>
-          <a:p>
-            <a:pPr algn="l">
-              <a:defRPr sz="1200" b="1">
-                <a:solidFill>
-                  <a:srgbClr val="212121"/>
-                </a:solidFill>
-                <a:latin typeface="Meiryo"/>
-              </a:defRPr>
-            </a:pPr>
-            <a:r>
-              <a:t>225億円</a:t>
-            </a:r>
-          </a:p>
-        </p:txBody>
-      </p:sp>
-      <p:sp>
-        <p:nvSpPr>
-          <p:cNvPr id="72" name="Oval 71"/>
+              <a:t>1,250機関 · 225億円</a:t>
+            </a:r>
+          </a:p>
+        </p:txBody>
+      </p:sp>
+      <p:sp>
+        <p:nvSpPr>
+          <p:cNvPr id="71" name="Oval 70"/>
           <p:cNvSpPr/>
           <p:nvPr/>
         </p:nvSpPr>
         <p:spPr>
           <a:xfrm>
-            <a:off x="8138160" y="2560320"/>
-            <a:ext cx="2743200" cy="2743200"/>
+            <a:off x="4663440" y="4297680"/>
+            <a:ext cx="2377440" cy="1828800"/>
           </a:xfrm>
           <a:prstGeom prst="ellipse">
             <a:avLst/>
@@ -26833,64 +26797,64 @@
       </p:sp>
       <p:sp>
         <p:nvSpPr>
+          <p:cNvPr id="72" name="TextBox 71"/>
+          <p:cNvSpPr txBox="1"/>
+          <p:nvPr/>
+        </p:nvSpPr>
+        <p:spPr>
+          <a:xfrm>
+            <a:off x="6035040" y="4434840"/>
+            <a:ext cx="1371600" cy="228600"/>
+          </a:xfrm>
+          <a:prstGeom prst="rect">
+            <a:avLst/>
+          </a:prstGeom>
+          <a:noFill/>
+        </p:spPr>
+        <p:txBody>
+          <a:bodyPr wrap="square">
+            <a:spAutoFit/>
+          </a:bodyPr>
+          <a:lstStyle/>
+          <a:p>
+            <a:pPr algn="l">
+              <a:defRPr sz="900" b="1">
+                <a:solidFill>
+                  <a:srgbClr val="00BCD4"/>
+                </a:solidFill>
+                <a:latin typeface="Meiryo"/>
+              </a:defRPr>
+            </a:pPr>
+            <a:r>
+              <a:t>S A M</a:t>
+            </a:r>
+          </a:p>
+        </p:txBody>
+      </p:sp>
+      <p:sp>
+        <p:nvSpPr>
           <p:cNvPr id="73" name="TextBox 72"/>
           <p:cNvSpPr txBox="1"/>
           <p:nvPr/>
         </p:nvSpPr>
         <p:spPr>
           <a:xfrm>
-            <a:off x="9784080" y="2743200"/>
-            <a:ext cx="1645920" cy="274320"/>
-          </a:xfrm>
-          <a:prstGeom prst="rect">
-            <a:avLst/>
-          </a:prstGeom>
-          <a:noFill/>
-        </p:spPr>
-        <p:txBody>
-          <a:bodyPr wrap="square">
-            <a:spAutoFit/>
-          </a:bodyPr>
-          <a:lstStyle/>
-          <a:p>
-            <a:pPr algn="l">
-              <a:defRPr sz="900" b="1">
-                <a:solidFill>
-                  <a:srgbClr val="00BCD4"/>
-                </a:solidFill>
-                <a:latin typeface="Meiryo"/>
-              </a:defRPr>
-            </a:pPr>
-            <a:r>
-              <a:t>S A M</a:t>
-            </a:r>
-          </a:p>
-        </p:txBody>
-      </p:sp>
-      <p:sp>
-        <p:nvSpPr>
-          <p:cNvPr id="74" name="TextBox 73"/>
-          <p:cNvSpPr txBox="1"/>
-          <p:nvPr/>
-        </p:nvSpPr>
-        <p:spPr>
-          <a:xfrm>
-            <a:off x="9784080" y="3017520"/>
-            <a:ext cx="1371600" cy="274320"/>
-          </a:xfrm>
-          <a:prstGeom prst="rect">
-            <a:avLst/>
-          </a:prstGeom>
-          <a:noFill/>
-        </p:spPr>
-        <p:txBody>
-          <a:bodyPr wrap="square">
-            <a:spAutoFit/>
-          </a:bodyPr>
-          <a:lstStyle/>
-          <a:p>
-            <a:pPr algn="l">
-              <a:defRPr sz="1000" b="0">
+            <a:off x="6035040" y="4663440"/>
+            <a:ext cx="1371600" cy="228600"/>
+          </a:xfrm>
+          <a:prstGeom prst="rect">
+            <a:avLst/>
+          </a:prstGeom>
+          <a:noFill/>
+        </p:spPr>
+        <p:txBody>
+          <a:bodyPr wrap="square">
+            <a:spAutoFit/>
+          </a:bodyPr>
+          <a:lstStyle/>
+          <a:p>
+            <a:pPr algn="l">
+              <a:defRPr sz="1000" b="1">
                 <a:solidFill>
                   <a:srgbClr val="212121"/>
                 </a:solidFill>
@@ -26898,57 +26862,21 @@
               </a:defRPr>
             </a:pPr>
             <a:r>
-              <a:t>650機関</a:t>
-            </a:r>
-          </a:p>
-        </p:txBody>
-      </p:sp>
-      <p:sp>
-        <p:nvSpPr>
-          <p:cNvPr id="75" name="TextBox 74"/>
-          <p:cNvSpPr txBox="1"/>
-          <p:nvPr/>
-        </p:nvSpPr>
-        <p:spPr>
-          <a:xfrm>
-            <a:off x="9784080" y="3291839"/>
-            <a:ext cx="1371600" cy="274320"/>
-          </a:xfrm>
-          <a:prstGeom prst="rect">
-            <a:avLst/>
-          </a:prstGeom>
-          <a:noFill/>
-        </p:spPr>
-        <p:txBody>
-          <a:bodyPr wrap="square">
-            <a:spAutoFit/>
-          </a:bodyPr>
-          <a:lstStyle/>
-          <a:p>
-            <a:pPr algn="l">
-              <a:defRPr sz="1200" b="1">
-                <a:solidFill>
-                  <a:srgbClr val="212121"/>
-                </a:solidFill>
-                <a:latin typeface="Meiryo"/>
-              </a:defRPr>
-            </a:pPr>
-            <a:r>
-              <a:t>117億円</a:t>
-            </a:r>
-          </a:p>
-        </p:txBody>
-      </p:sp>
-      <p:sp>
-        <p:nvSpPr>
-          <p:cNvPr id="76" name="Oval 75"/>
+              <a:t>650機関 · 117億円</a:t>
+            </a:r>
+          </a:p>
+        </p:txBody>
+      </p:sp>
+      <p:sp>
+        <p:nvSpPr>
+          <p:cNvPr id="74" name="Oval 73"/>
           <p:cNvSpPr/>
           <p:nvPr/>
         </p:nvSpPr>
         <p:spPr>
           <a:xfrm>
-            <a:off x="8869680" y="3291839"/>
-            <a:ext cx="1280160" cy="1280160"/>
+            <a:off x="5166360" y="4709160"/>
+            <a:ext cx="1371600" cy="1005840"/>
           </a:xfrm>
           <a:prstGeom prst="ellipse">
             <a:avLst/>
@@ -26984,14 +26912,14 @@
       </p:sp>
       <p:sp>
         <p:nvSpPr>
-          <p:cNvPr id="77" name="TextBox 76"/>
-          <p:cNvSpPr txBox="1"/>
-          <p:nvPr/>
-        </p:nvSpPr>
-        <p:spPr>
-          <a:xfrm>
-            <a:off x="8961120" y="3611879"/>
-            <a:ext cx="1097280" cy="228600"/>
+          <p:cNvPr id="75" name="TextBox 74"/>
+          <p:cNvSpPr txBox="1"/>
+          <p:nvPr/>
+        </p:nvSpPr>
+        <p:spPr>
+          <a:xfrm>
+            <a:off x="5212080" y="4846320"/>
+            <a:ext cx="1280160" cy="228600"/>
           </a:xfrm>
           <a:prstGeom prst="rect">
             <a:avLst/>
@@ -27020,14 +26948,14 @@
       </p:sp>
       <p:sp>
         <p:nvSpPr>
-          <p:cNvPr id="78" name="TextBox 77"/>
-          <p:cNvSpPr txBox="1"/>
-          <p:nvPr/>
-        </p:nvSpPr>
-        <p:spPr>
-          <a:xfrm>
-            <a:off x="8961120" y="3840480"/>
-            <a:ext cx="1097280" cy="228600"/>
+          <p:cNvPr id="76" name="TextBox 75"/>
+          <p:cNvSpPr txBox="1"/>
+          <p:nvPr/>
+        </p:nvSpPr>
+        <p:spPr>
+          <a:xfrm>
+            <a:off x="5212080" y="5074920"/>
+            <a:ext cx="1280160" cy="228600"/>
           </a:xfrm>
           <a:prstGeom prst="rect">
             <a:avLst/>
@@ -27041,7 +26969,7 @@
           <a:lstStyle/>
           <a:p>
             <a:pPr algn="ctr">
-              <a:defRPr sz="900" b="0">
+              <a:defRPr sz="900" b="1">
                 <a:solidFill>
                   <a:srgbClr val="FFFFFF"/>
                 </a:solidFill>
@@ -27049,43 +26977,7 @@
               </a:defRPr>
             </a:pPr>
             <a:r>
-              <a:t>100機関</a:t>
-            </a:r>
-          </a:p>
-        </p:txBody>
-      </p:sp>
-      <p:sp>
-        <p:nvSpPr>
-          <p:cNvPr id="79" name="TextBox 78"/>
-          <p:cNvSpPr txBox="1"/>
-          <p:nvPr/>
-        </p:nvSpPr>
-        <p:spPr>
-          <a:xfrm>
-            <a:off x="8961120" y="4069080"/>
-            <a:ext cx="1097280" cy="274320"/>
-          </a:xfrm>
-          <a:prstGeom prst="rect">
-            <a:avLst/>
-          </a:prstGeom>
-          <a:noFill/>
-        </p:spPr>
-        <p:txBody>
-          <a:bodyPr wrap="square">
-            <a:spAutoFit/>
-          </a:bodyPr>
-          <a:lstStyle/>
-          <a:p>
-            <a:pPr algn="ctr">
-              <a:defRPr sz="1100" b="1">
-                <a:solidFill>
-                  <a:srgbClr val="FFFFFF"/>
-                </a:solidFill>
-                <a:latin typeface="Meiryo"/>
-              </a:defRPr>
-            </a:pPr>
-            <a:r>
-              <a:t>18億円</a:t>
+              <a:t>100機関 · 18億円</a:t>
             </a:r>
           </a:p>
         </p:txBody>

--- a/assets/TAROS_Investor_Pitch_Revised.pptx
+++ b/assets/TAROS_Investor_Pitch_Revised.pptx
@@ -26803,7 +26803,7 @@
         </p:nvSpPr>
         <p:spPr>
           <a:xfrm>
-            <a:off x="6035040" y="4434840"/>
+            <a:off x="6492240" y="4343400"/>
             <a:ext cx="1371600" cy="228600"/>
           </a:xfrm>
           <a:prstGeom prst="rect">
@@ -26839,8 +26839,8 @@
         </p:nvSpPr>
         <p:spPr>
           <a:xfrm>
-            <a:off x="6035040" y="4663440"/>
-            <a:ext cx="1371600" cy="228600"/>
+            <a:off x="6492240" y="4572000"/>
+            <a:ext cx="1645920" cy="228600"/>
           </a:xfrm>
           <a:prstGeom prst="rect">
             <a:avLst/>

--- a/assets/TAROS_Investor_Pitch_Revised.pptx
+++ b/assets/TAROS_Investor_Pitch_Revised.pptx
@@ -3924,7 +3924,7 @@
               </a:defRPr>
             </a:pPr>
             <a:r>
-              <a:t>p_phys=5×10⁻⁴, d=3/5/7 すべての論理エラー率予測を約1億ショットで再現。</a:t>
+              <a:t>p_err sweep (10⁻⁴~10⁻²), d=3/5/7 全論理エラー率予測を約1億ショットで再現。</a:t>
             </a:r>
           </a:p>
         </p:txBody>
@@ -6443,7 +6443,7 @@
               </a:defRPr>
             </a:pPr>
             <a:r>
-              <a:t>0.8億円</a:t>
+              <a:t>7,500万円</a:t>
             </a:r>
           </a:p>
         </p:txBody>
@@ -7308,8 +7308,8 @@
         </p:nvSpPr>
         <p:spPr>
           <a:xfrm>
-            <a:off x="8549640" y="2697480"/>
-            <a:ext cx="1554480" cy="457200"/>
+            <a:off x="8549640" y="2651760"/>
+            <a:ext cx="1554480" cy="365760"/>
           </a:xfrm>
           <a:prstGeom prst="rect">
             <a:avLst/>
@@ -7344,8 +7344,8 @@
         </p:nvSpPr>
         <p:spPr>
           <a:xfrm>
-            <a:off x="8549640" y="3200400"/>
-            <a:ext cx="1554480" cy="274320"/>
+            <a:off x="8549640" y="3063240"/>
+            <a:ext cx="1554480" cy="228600"/>
           </a:xfrm>
           <a:prstGeom prst="rect">
             <a:avLst/>
@@ -7359,7 +7359,7 @@
           <a:lstStyle/>
           <a:p>
             <a:pPr algn="ctr">
-              <a:defRPr sz="1000" b="0">
+              <a:defRPr sz="900" b="0">
                 <a:solidFill>
                   <a:srgbClr val="757575"/>
                 </a:solidFill>
@@ -7367,7 +7367,7 @@
               </a:defRPr>
             </a:pPr>
             <a:r>
-              <a:t>FTQC</a:t>
+              <a:t>Level B以上</a:t>
             </a:r>
           </a:p>
         </p:txBody>
@@ -7380,8 +7380,8 @@
         </p:nvSpPr>
         <p:spPr>
           <a:xfrm>
-            <a:off x="8549640" y="3429000"/>
-            <a:ext cx="1554480" cy="274320"/>
+            <a:off x="8549640" y="3291840"/>
+            <a:ext cx="1554480" cy="228600"/>
           </a:xfrm>
           <a:prstGeom prst="rect">
             <a:avLst/>
@@ -7395,7 +7395,7 @@
           <a:lstStyle/>
           <a:p>
             <a:pPr algn="ctr">
-              <a:defRPr sz="1000" b="0">
+              <a:defRPr sz="900" b="0">
                 <a:solidFill>
                   <a:srgbClr val="757575"/>
                 </a:solidFill>
@@ -7403,7 +7403,7 @@
               </a:defRPr>
             </a:pPr>
             <a:r>
-              <a:t>実現確率</a:t>
+              <a:t>FTQC実現確率</a:t>
             </a:r>
           </a:p>
         </p:txBody>
@@ -8490,7 +8490,7 @@
         <p:spPr>
           <a:xfrm>
             <a:off x="2286000" y="4389120"/>
-            <a:ext cx="8229600" cy="365760"/>
+            <a:ext cx="6858000" cy="365760"/>
           </a:xfrm>
           <a:prstGeom prst="rect">
             <a:avLst/>
@@ -8568,8 +8568,8 @@
         </p:nvSpPr>
         <p:spPr>
           <a:xfrm>
-            <a:off x="10652760" y="4407407"/>
-            <a:ext cx="2286000" cy="320040"/>
+            <a:off x="9281160" y="4407407"/>
+            <a:ext cx="1645920" cy="320040"/>
           </a:xfrm>
           <a:prstGeom prst="rect">
             <a:avLst/>
@@ -8605,7 +8605,7 @@
         <p:spPr>
           <a:xfrm>
             <a:off x="2286000" y="4892040"/>
-            <a:ext cx="7040880" cy="365760"/>
+            <a:ext cx="5852160" cy="365760"/>
           </a:xfrm>
           <a:prstGeom prst="rect">
             <a:avLst/>
@@ -8683,8 +8683,8 @@
         </p:nvSpPr>
         <p:spPr>
           <a:xfrm>
-            <a:off x="9464040" y="4910327"/>
-            <a:ext cx="2286000" cy="320040"/>
+            <a:off x="8275320" y="4910327"/>
+            <a:ext cx="1645920" cy="320040"/>
           </a:xfrm>
           <a:prstGeom prst="rect">
             <a:avLst/>
@@ -8720,7 +8720,7 @@
         <p:spPr>
           <a:xfrm>
             <a:off x="2286000" y="5394960"/>
-            <a:ext cx="2926080" cy="365760"/>
+            <a:ext cx="2468880" cy="365760"/>
           </a:xfrm>
           <a:prstGeom prst="rect">
             <a:avLst/>
@@ -8798,8 +8798,8 @@
         </p:nvSpPr>
         <p:spPr>
           <a:xfrm>
-            <a:off x="5349240" y="5413248"/>
-            <a:ext cx="2286000" cy="320040"/>
+            <a:off x="4892040" y="5413248"/>
+            <a:ext cx="1645920" cy="320040"/>
           </a:xfrm>
           <a:prstGeom prst="rect">
             <a:avLst/>
@@ -8914,7 +8914,7 @@
         <p:spPr>
           <a:xfrm>
             <a:off x="2788920" y="5916168"/>
-            <a:ext cx="2286000" cy="320040"/>
+            <a:ext cx="1645920" cy="320040"/>
           </a:xfrm>
           <a:prstGeom prst="rect">
             <a:avLst/>
@@ -9469,7 +9469,7 @@
               </a:defRPr>
             </a:pPr>
             <a:r>
-              <a:t>~33%</a:t>
+              <a:t>~32.5%</a:t>
             </a:r>
           </a:p>
         </p:txBody>
@@ -9554,123 +9554,8 @@
         </p:nvSpPr>
         <p:spPr>
           <a:xfrm>
-            <a:off x="4389120" y="4754880"/>
-            <a:ext cx="1463040" cy="274320"/>
-          </a:xfrm>
-          <a:prstGeom prst="rect">
-            <a:avLst/>
-          </a:prstGeom>
-          <a:solidFill>
-            <a:srgbClr val="F5F5F5"/>
-          </a:solidFill>
-          <a:ln>
-            <a:noFill/>
-          </a:ln>
-        </p:spPr>
-        <p:style>
-          <a:lnRef idx="1">
-            <a:schemeClr val="accent1"/>
-          </a:lnRef>
-          <a:fillRef idx="3">
-            <a:schemeClr val="accent1"/>
-          </a:fillRef>
-          <a:effectRef idx="2">
-            <a:schemeClr val="accent1"/>
-          </a:effectRef>
-          <a:fontRef idx="minor">
-            <a:schemeClr val="lt1"/>
-          </a:fontRef>
-        </p:style>
-        <p:txBody>
-          <a:bodyPr rtlCol="0" anchor="ctr"/>
-          <a:lstStyle/>
-          <a:p>
-            <a:pPr algn="ctr"/>
-          </a:p>
-        </p:txBody>
-      </p:sp>
-      <p:sp>
-        <p:nvSpPr>
-          <p:cNvPr id="18" name="TextBox 17"/>
-          <p:cNvSpPr txBox="1"/>
-          <p:nvPr/>
-        </p:nvSpPr>
-        <p:spPr>
-          <a:xfrm>
-            <a:off x="4389120" y="5074920"/>
-            <a:ext cx="1463040" cy="274320"/>
-          </a:xfrm>
-          <a:prstGeom prst="rect">
-            <a:avLst/>
-          </a:prstGeom>
-          <a:noFill/>
-        </p:spPr>
-        <p:txBody>
-          <a:bodyPr wrap="square">
-            <a:spAutoFit/>
-          </a:bodyPr>
-          <a:lstStyle/>
-          <a:p>
-            <a:pPr algn="ctr">
-              <a:defRPr sz="1100" b="1">
-                <a:solidFill>
-                  <a:srgbClr val="212121"/>
-                </a:solidFill>
-                <a:latin typeface="Meiryo"/>
-              </a:defRPr>
-            </a:pPr>
-            <a:r>
-              <a:t>Y1</a:t>
-            </a:r>
-          </a:p>
-        </p:txBody>
-      </p:sp>
-      <p:sp>
-        <p:nvSpPr>
-          <p:cNvPr id="19" name="TextBox 18"/>
-          <p:cNvSpPr txBox="1"/>
-          <p:nvPr/>
-        </p:nvSpPr>
-        <p:spPr>
-          <a:xfrm>
-            <a:off x="4389120" y="5303520"/>
-            <a:ext cx="1463040" cy="228600"/>
-          </a:xfrm>
-          <a:prstGeom prst="rect">
-            <a:avLst/>
-          </a:prstGeom>
-          <a:noFill/>
-        </p:spPr>
-        <p:txBody>
-          <a:bodyPr wrap="square">
-            <a:spAutoFit/>
-          </a:bodyPr>
-          <a:lstStyle/>
-          <a:p>
-            <a:pPr algn="ctr">
-              <a:defRPr sz="900" b="0">
-                <a:solidFill>
-                  <a:srgbClr val="757575"/>
-                </a:solidFill>
-                <a:latin typeface="Meiryo"/>
-              </a:defRPr>
-            </a:pPr>
-            <a:r>
-              <a:t>—</a:t>
-            </a:r>
-          </a:p>
-        </p:txBody>
-      </p:sp>
-      <p:sp>
-        <p:nvSpPr>
-          <p:cNvPr id="20" name="Rectangle 19"/>
-          <p:cNvSpPr/>
-          <p:nvPr/>
-        </p:nvSpPr>
-        <p:spPr>
-          <a:xfrm>
-            <a:off x="6126480" y="4629150"/>
-            <a:ext cx="1463040" cy="400050"/>
+            <a:off x="4389120" y="4709160"/>
+            <a:ext cx="1463040" cy="320040"/>
           </a:xfrm>
           <a:prstGeom prst="rect">
             <a:avLst/>
@@ -9706,13 +9591,13 @@
       </p:sp>
       <p:sp>
         <p:nvSpPr>
-          <p:cNvPr id="21" name="TextBox 20"/>
-          <p:cNvSpPr txBox="1"/>
-          <p:nvPr/>
-        </p:nvSpPr>
-        <p:spPr>
-          <a:xfrm>
-            <a:off x="6126480" y="4720590"/>
+          <p:cNvPr id="18" name="TextBox 17"/>
+          <p:cNvSpPr txBox="1"/>
+          <p:nvPr/>
+        </p:nvSpPr>
+        <p:spPr>
+          <a:xfrm>
+            <a:off x="4389120" y="4800600"/>
             <a:ext cx="1463040" cy="365760"/>
           </a:xfrm>
           <a:prstGeom prst="rect">
@@ -9735,14 +9620,165 @@
               </a:defRPr>
             </a:pPr>
             <a:r>
-              <a:t>4.5億</a:t>
-            </a:r>
+              <a:t>3.6億</a:t>
+            </a:r>
+          </a:p>
+        </p:txBody>
+      </p:sp>
+      <p:sp>
+        <p:nvSpPr>
+          <p:cNvPr id="19" name="TextBox 18"/>
+          <p:cNvSpPr txBox="1"/>
+          <p:nvPr/>
+        </p:nvSpPr>
+        <p:spPr>
+          <a:xfrm>
+            <a:off x="4389120" y="5074920"/>
+            <a:ext cx="1463040" cy="274320"/>
+          </a:xfrm>
+          <a:prstGeom prst="rect">
+            <a:avLst/>
+          </a:prstGeom>
+          <a:noFill/>
+        </p:spPr>
+        <p:txBody>
+          <a:bodyPr wrap="square">
+            <a:spAutoFit/>
+          </a:bodyPr>
+          <a:lstStyle/>
+          <a:p>
+            <a:pPr algn="ctr">
+              <a:defRPr sz="1100" b="1">
+                <a:solidFill>
+                  <a:srgbClr val="212121"/>
+                </a:solidFill>
+                <a:latin typeface="Meiryo"/>
+              </a:defRPr>
+            </a:pPr>
+            <a:r>
+              <a:t>Y1</a:t>
+            </a:r>
+          </a:p>
+        </p:txBody>
+      </p:sp>
+      <p:sp>
+        <p:nvSpPr>
+          <p:cNvPr id="20" name="TextBox 19"/>
+          <p:cNvSpPr txBox="1"/>
+          <p:nvPr/>
+        </p:nvSpPr>
+        <p:spPr>
+          <a:xfrm>
+            <a:off x="4389120" y="5303520"/>
+            <a:ext cx="1463040" cy="228600"/>
+          </a:xfrm>
+          <a:prstGeom prst="rect">
+            <a:avLst/>
+          </a:prstGeom>
+          <a:noFill/>
+        </p:spPr>
+        <p:txBody>
+          <a:bodyPr wrap="square">
+            <a:spAutoFit/>
+          </a:bodyPr>
+          <a:lstStyle/>
+          <a:p>
+            <a:pPr algn="ctr">
+              <a:defRPr sz="900" b="0">
+                <a:solidFill>
+                  <a:srgbClr val="757575"/>
+                </a:solidFill>
+                <a:latin typeface="Meiryo"/>
+              </a:defRPr>
+            </a:pPr>
+            <a:r>
+              <a:t>20台</a:t>
+            </a:r>
+          </a:p>
+        </p:txBody>
+      </p:sp>
+      <p:sp>
+        <p:nvSpPr>
+          <p:cNvPr id="21" name="Rectangle 20"/>
+          <p:cNvSpPr/>
+          <p:nvPr/>
+        </p:nvSpPr>
+        <p:spPr>
+          <a:xfrm>
+            <a:off x="6126480" y="4229100"/>
+            <a:ext cx="1463040" cy="800100"/>
+          </a:xfrm>
+          <a:prstGeom prst="rect">
+            <a:avLst/>
+          </a:prstGeom>
+          <a:solidFill>
+            <a:srgbClr val="B2EBF2"/>
+          </a:solidFill>
+          <a:ln>
+            <a:noFill/>
+          </a:ln>
+        </p:spPr>
+        <p:style>
+          <a:lnRef idx="1">
+            <a:schemeClr val="accent1"/>
+          </a:lnRef>
+          <a:fillRef idx="3">
+            <a:schemeClr val="accent1"/>
+          </a:fillRef>
+          <a:effectRef idx="2">
+            <a:schemeClr val="accent1"/>
+          </a:effectRef>
+          <a:fontRef idx="minor">
+            <a:schemeClr val="lt1"/>
+          </a:fontRef>
+        </p:style>
+        <p:txBody>
+          <a:bodyPr rtlCol="0" anchor="ctr"/>
+          <a:lstStyle/>
+          <a:p>
+            <a:pPr algn="ctr"/>
           </a:p>
         </p:txBody>
       </p:sp>
       <p:sp>
         <p:nvSpPr>
           <p:cNvPr id="22" name="TextBox 21"/>
+          <p:cNvSpPr txBox="1"/>
+          <p:nvPr/>
+        </p:nvSpPr>
+        <p:spPr>
+          <a:xfrm>
+            <a:off x="6126480" y="4320540"/>
+            <a:ext cx="1463040" cy="365760"/>
+          </a:xfrm>
+          <a:prstGeom prst="rect">
+            <a:avLst/>
+          </a:prstGeom>
+          <a:noFill/>
+        </p:spPr>
+        <p:txBody>
+          <a:bodyPr wrap="square">
+            <a:spAutoFit/>
+          </a:bodyPr>
+          <a:lstStyle/>
+          <a:p>
+            <a:pPr algn="ctr">
+              <a:defRPr sz="1600" b="1">
+                <a:solidFill>
+                  <a:srgbClr val="212121"/>
+                </a:solidFill>
+                <a:latin typeface="Meiryo"/>
+              </a:defRPr>
+            </a:pPr>
+            <a:r>
+              <a:t>9億</a:t>
+            </a:r>
+          </a:p>
+        </p:txBody>
+      </p:sp>
+      <p:sp>
+        <p:nvSpPr>
+          <p:cNvPr id="23" name="TextBox 22"/>
           <p:cNvSpPr txBox="1"/>
           <p:nvPr/>
         </p:nvSpPr>
@@ -9778,7 +9814,7 @@
       </p:sp>
       <p:sp>
         <p:nvSpPr>
-          <p:cNvPr id="23" name="TextBox 22"/>
+          <p:cNvPr id="24" name="TextBox 23"/>
           <p:cNvSpPr txBox="1"/>
           <p:nvPr/>
         </p:nvSpPr>
@@ -9807,14 +9843,14 @@
               </a:defRPr>
             </a:pPr>
             <a:r>
-              <a:t>25台</a:t>
-            </a:r>
-          </a:p>
-        </p:txBody>
-      </p:sp>
-      <p:sp>
-        <p:nvSpPr>
-          <p:cNvPr id="24" name="Rectangle 23"/>
+              <a:t>50台</a:t>
+            </a:r>
+          </a:p>
+        </p:txBody>
+      </p:sp>
+      <p:sp>
+        <p:nvSpPr>
+          <p:cNvPr id="25" name="Rectangle 24"/>
           <p:cNvSpPr/>
           <p:nvPr/>
         </p:nvSpPr>
@@ -9857,7 +9893,7 @@
       </p:sp>
       <p:sp>
         <p:nvSpPr>
-          <p:cNvPr id="25" name="TextBox 24"/>
+          <p:cNvPr id="26" name="TextBox 25"/>
           <p:cNvSpPr txBox="1"/>
           <p:nvPr/>
         </p:nvSpPr>
@@ -9893,7 +9929,7 @@
       </p:sp>
       <p:sp>
         <p:nvSpPr>
-          <p:cNvPr id="26" name="TextBox 25"/>
+          <p:cNvPr id="27" name="TextBox 26"/>
           <p:cNvSpPr txBox="1"/>
           <p:nvPr/>
         </p:nvSpPr>
@@ -9929,7 +9965,7 @@
       </p:sp>
       <p:sp>
         <p:nvSpPr>
-          <p:cNvPr id="27" name="TextBox 26"/>
+          <p:cNvPr id="28" name="TextBox 27"/>
           <p:cNvSpPr txBox="1"/>
           <p:nvPr/>
         </p:nvSpPr>
@@ -9965,7 +10001,7 @@
       </p:sp>
       <p:sp>
         <p:nvSpPr>
-          <p:cNvPr id="28" name="Rectangle 27"/>
+          <p:cNvPr id="29" name="Rectangle 28"/>
           <p:cNvSpPr/>
           <p:nvPr/>
         </p:nvSpPr>
@@ -10008,7 +10044,7 @@
       </p:sp>
       <p:sp>
         <p:nvSpPr>
-          <p:cNvPr id="29" name="TextBox 28"/>
+          <p:cNvPr id="30" name="TextBox 29"/>
           <p:cNvSpPr txBox="1"/>
           <p:nvPr/>
         </p:nvSpPr>
@@ -10044,7 +10080,7 @@
       </p:sp>
       <p:sp>
         <p:nvSpPr>
-          <p:cNvPr id="30" name="TextBox 29"/>
+          <p:cNvPr id="31" name="TextBox 30"/>
           <p:cNvSpPr txBox="1"/>
           <p:nvPr/>
         </p:nvSpPr>
@@ -10080,7 +10116,7 @@
       </p:sp>
       <p:sp>
         <p:nvSpPr>
-          <p:cNvPr id="31" name="TextBox 30"/>
+          <p:cNvPr id="32" name="TextBox 31"/>
           <p:cNvSpPr txBox="1"/>
           <p:nvPr/>
         </p:nvSpPr>
@@ -10116,7 +10152,7 @@
       </p:sp>
       <p:sp>
         <p:nvSpPr>
-          <p:cNvPr id="32" name="Rectangle 31"/>
+          <p:cNvPr id="33" name="Rectangle 32"/>
           <p:cNvSpPr/>
           <p:nvPr/>
         </p:nvSpPr>
@@ -10159,7 +10195,7 @@
       </p:sp>
       <p:sp>
         <p:nvSpPr>
-          <p:cNvPr id="33" name="TextBox 32"/>
+          <p:cNvPr id="34" name="TextBox 33"/>
           <p:cNvSpPr txBox="1"/>
           <p:nvPr/>
         </p:nvSpPr>
@@ -12676,7 +12712,7 @@
             </a:r>
             <a:br/>
             <a:r>
-              <a:t>購入初日から7つのモードで価値を届ける。</a:t>
+              <a:t>購入初日から6つのモードで価値を届ける。FTQCはFW更新で段階的に進化。</a:t>
             </a:r>
           </a:p>
         </p:txBody>
@@ -16742,7 +16778,7 @@
               </a:defRPr>
             </a:pPr>
             <a:r>
-              <a:t>USB-PD EPR</a:t>
+              <a:t>USB-PD 140W給電</a:t>
             </a:r>
           </a:p>
         </p:txBody>
@@ -16857,7 +16893,7 @@
               </a:defRPr>
             </a:pPr>
             <a:r>
-              <a:t>0K</a:t>
+              <a:t>不要</a:t>
             </a:r>
           </a:p>
         </p:txBody>
@@ -17856,7 +17892,7 @@
               </a:defRPr>
             </a:pPr>
             <a:r>
-              <a:t>Versal FPGA 27ns FF</a:t>
+              <a:t>Versal FPGA 27ns フィードフォワード</a:t>
             </a:r>
           </a:p>
         </p:txBody>
@@ -21733,7 +21769,11 @@
               </a:defRPr>
             </a:pPr>
             <a:r>
-              <a:t>全競合方式は binary シンドローム。CV方式は14bitアナログ情報をデコーダに供給。MWPM閾値 1.5% は soft-info で達成。同一物理エラー率で論理エラー率を桁違いに低減。</a:t>
+              <a:t>全競合方式はbinaryシンドローム。CV方式は14bitアナログ情報をデコーダに供給。</a:t>
+            </a:r>
+            <a:br/>
+            <a:r>
+              <a:t>閾値1.5%はsoft-infoで達成。同一物理エラー率で論理エラー率を桁違いに低減。</a:t>
             </a:r>
           </a:p>
         </p:txBody>
@@ -22501,7 +22541,7 @@
         <p:spPr>
           <a:xfrm>
             <a:off x="731520" y="3017520"/>
-            <a:ext cx="1554480" cy="320040"/>
+            <a:ext cx="1371600" cy="320040"/>
           </a:xfrm>
           <a:prstGeom prst="rect">
             <a:avLst/>
@@ -22536,8 +22576,8 @@
         </p:nvSpPr>
         <p:spPr>
           <a:xfrm>
-            <a:off x="2286000" y="3017520"/>
-            <a:ext cx="1600200" cy="320040"/>
+            <a:off x="2103120" y="3017520"/>
+            <a:ext cx="1783080" cy="320040"/>
           </a:xfrm>
           <a:prstGeom prst="rect">
             <a:avLst/>
@@ -22573,7 +22613,7 @@
         <p:spPr>
           <a:xfrm>
             <a:off x="731520" y="3383279"/>
-            <a:ext cx="1554480" cy="320040"/>
+            <a:ext cx="1371600" cy="320040"/>
           </a:xfrm>
           <a:prstGeom prst="rect">
             <a:avLst/>
@@ -22608,8 +22648,8 @@
         </p:nvSpPr>
         <p:spPr>
           <a:xfrm>
-            <a:off x="2286000" y="3383279"/>
-            <a:ext cx="1600200" cy="320040"/>
+            <a:off x="2103120" y="3383279"/>
+            <a:ext cx="1783080" cy="320040"/>
           </a:xfrm>
           <a:prstGeom prst="rect">
             <a:avLst/>
@@ -22645,7 +22685,7 @@
         <p:spPr>
           <a:xfrm>
             <a:off x="731520" y="3749039"/>
-            <a:ext cx="1554480" cy="320040"/>
+            <a:ext cx="1371600" cy="320040"/>
           </a:xfrm>
           <a:prstGeom prst="rect">
             <a:avLst/>
@@ -22680,8 +22720,8 @@
         </p:nvSpPr>
         <p:spPr>
           <a:xfrm>
-            <a:off x="2286000" y="3749039"/>
-            <a:ext cx="1600200" cy="320040"/>
+            <a:off x="2103120" y="3749039"/>
+            <a:ext cx="1783080" cy="320040"/>
           </a:xfrm>
           <a:prstGeom prst="rect">
             <a:avLst/>
@@ -22717,7 +22757,7 @@
         <p:spPr>
           <a:xfrm>
             <a:off x="731520" y="4114800"/>
-            <a:ext cx="1554480" cy="320040"/>
+            <a:ext cx="1371600" cy="320040"/>
           </a:xfrm>
           <a:prstGeom prst="rect">
             <a:avLst/>
@@ -22752,8 +22792,8 @@
         </p:nvSpPr>
         <p:spPr>
           <a:xfrm>
-            <a:off x="2286000" y="4114800"/>
-            <a:ext cx="1600200" cy="320040"/>
+            <a:off x="2103120" y="4114800"/>
+            <a:ext cx="1783080" cy="320040"/>
           </a:xfrm>
           <a:prstGeom prst="rect">
             <a:avLst/>
@@ -23100,7 +23140,7 @@
         <p:spPr>
           <a:xfrm>
             <a:off x="4434840" y="3017520"/>
-            <a:ext cx="1554480" cy="320040"/>
+            <a:ext cx="1371600" cy="320040"/>
           </a:xfrm>
           <a:prstGeom prst="rect">
             <a:avLst/>
@@ -23135,8 +23175,8 @@
         </p:nvSpPr>
         <p:spPr>
           <a:xfrm>
-            <a:off x="5989319" y="3017520"/>
-            <a:ext cx="1600200" cy="320040"/>
+            <a:off x="5806440" y="3017520"/>
+            <a:ext cx="1783080" cy="320040"/>
           </a:xfrm>
           <a:prstGeom prst="rect">
             <a:avLst/>
@@ -23172,7 +23212,7 @@
         <p:spPr>
           <a:xfrm>
             <a:off x="4434840" y="3383279"/>
-            <a:ext cx="1554480" cy="320040"/>
+            <a:ext cx="1371600" cy="320040"/>
           </a:xfrm>
           <a:prstGeom prst="rect">
             <a:avLst/>
@@ -23207,8 +23247,8 @@
         </p:nvSpPr>
         <p:spPr>
           <a:xfrm>
-            <a:off x="5989319" y="3383279"/>
-            <a:ext cx="1600200" cy="320040"/>
+            <a:off x="5806440" y="3383279"/>
+            <a:ext cx="1783080" cy="320040"/>
           </a:xfrm>
           <a:prstGeom prst="rect">
             <a:avLst/>
@@ -23244,7 +23284,7 @@
         <p:spPr>
           <a:xfrm>
             <a:off x="4434840" y="3749039"/>
-            <a:ext cx="1554480" cy="320040"/>
+            <a:ext cx="1371600" cy="320040"/>
           </a:xfrm>
           <a:prstGeom prst="rect">
             <a:avLst/>
@@ -23279,8 +23319,8 @@
         </p:nvSpPr>
         <p:spPr>
           <a:xfrm>
-            <a:off x="5989319" y="3749039"/>
-            <a:ext cx="1600200" cy="320040"/>
+            <a:off x="5806440" y="3749039"/>
+            <a:ext cx="1783080" cy="320040"/>
           </a:xfrm>
           <a:prstGeom prst="rect">
             <a:avLst/>
@@ -23316,7 +23356,7 @@
         <p:spPr>
           <a:xfrm>
             <a:off x="4434840" y="4114800"/>
-            <a:ext cx="1554480" cy="320040"/>
+            <a:ext cx="1371600" cy="320040"/>
           </a:xfrm>
           <a:prstGeom prst="rect">
             <a:avLst/>
@@ -23351,8 +23391,8 @@
         </p:nvSpPr>
         <p:spPr>
           <a:xfrm>
-            <a:off x="5989319" y="4114800"/>
-            <a:ext cx="1600200" cy="320040"/>
+            <a:off x="5806440" y="4114800"/>
+            <a:ext cx="1783080" cy="320040"/>
           </a:xfrm>
           <a:prstGeom prst="rect">
             <a:avLst/>
@@ -23374,7 +23414,7 @@
               </a:defRPr>
             </a:pPr>
             <a:r>
-              <a:t>~10⁻⁴ (MWPM)</a:t>
+              <a:t>~10⁻³ (MWPM)</a:t>
             </a:r>
           </a:p>
         </p:txBody>
@@ -23620,7 +23660,7 @@
         <p:spPr>
           <a:xfrm>
             <a:off x="8138159" y="3017520"/>
-            <a:ext cx="1554480" cy="320040"/>
+            <a:ext cx="1371600" cy="320040"/>
           </a:xfrm>
           <a:prstGeom prst="rect">
             <a:avLst/>
@@ -23655,8 +23695,8 @@
         </p:nvSpPr>
         <p:spPr>
           <a:xfrm>
-            <a:off x="9692640" y="3017520"/>
-            <a:ext cx="1600200" cy="320040"/>
+            <a:off x="9509759" y="3017520"/>
+            <a:ext cx="1783080" cy="320040"/>
           </a:xfrm>
           <a:prstGeom prst="rect">
             <a:avLst/>
@@ -23692,7 +23732,7 @@
         <p:spPr>
           <a:xfrm>
             <a:off x="8138159" y="3383279"/>
-            <a:ext cx="1554480" cy="320040"/>
+            <a:ext cx="1371600" cy="320040"/>
           </a:xfrm>
           <a:prstGeom prst="rect">
             <a:avLst/>
@@ -23727,8 +23767,8 @@
         </p:nvSpPr>
         <p:spPr>
           <a:xfrm>
-            <a:off x="9692640" y="3383279"/>
-            <a:ext cx="1600200" cy="320040"/>
+            <a:off x="9509759" y="3383279"/>
+            <a:ext cx="1783080" cy="320040"/>
           </a:xfrm>
           <a:prstGeom prst="rect">
             <a:avLst/>
@@ -23764,7 +23804,7 @@
         <p:spPr>
           <a:xfrm>
             <a:off x="8138159" y="3749039"/>
-            <a:ext cx="1554480" cy="320040"/>
+            <a:ext cx="1371600" cy="320040"/>
           </a:xfrm>
           <a:prstGeom prst="rect">
             <a:avLst/>
@@ -23799,8 +23839,8 @@
         </p:nvSpPr>
         <p:spPr>
           <a:xfrm>
-            <a:off x="9692640" y="3749039"/>
-            <a:ext cx="1600200" cy="320040"/>
+            <a:off x="9509759" y="3749039"/>
+            <a:ext cx="1783080" cy="320040"/>
           </a:xfrm>
           <a:prstGeom prst="rect">
             <a:avLst/>
@@ -23836,7 +23876,7 @@
         <p:spPr>
           <a:xfrm>
             <a:off x="8138159" y="4114800"/>
-            <a:ext cx="1554480" cy="320040"/>
+            <a:ext cx="1371600" cy="320040"/>
           </a:xfrm>
           <a:prstGeom prst="rect">
             <a:avLst/>
@@ -23871,8 +23911,8 @@
         </p:nvSpPr>
         <p:spPr>
           <a:xfrm>
-            <a:off x="9692640" y="4114800"/>
-            <a:ext cx="1600200" cy="320040"/>
+            <a:off x="9509759" y="4114800"/>
+            <a:ext cx="1783080" cy="320040"/>
           </a:xfrm>
           <a:prstGeom prst="rect">
             <a:avLst/>
@@ -26605,7 +26645,7 @@
         </p:nvSpPr>
         <p:spPr>
           <a:xfrm>
-            <a:off x="548640" y="3749039"/>
+            <a:off x="548640" y="3611880"/>
             <a:ext cx="4572000" cy="274320"/>
           </a:xfrm>
           <a:prstGeom prst="rect">

--- a/assets/TAROS_Investor_Pitch_Revised.pptx
+++ b/assets/TAROS_Investor_Pitch_Revised.pptx
@@ -3924,7 +3924,7 @@
               </a:defRPr>
             </a:pPr>
             <a:r>
-              <a:t>p_err sweep (10⁻⁴~10⁻²), d=3/5/7 全論理エラー率予測を約1億ショットで再現。</a:t>
+              <a:t>標準depolarizing noise, d=3/5/7 全論理エラー率スケーリングを約1億ショットで確認。</a:t>
             </a:r>
           </a:p>
         </p:txBody>

--- a/assets/TAROS_Investor_Pitch_Revised.pptx
+++ b/assets/TAROS_Investor_Pitch_Revised.pptx
@@ -18603,7 +18603,7 @@
             <a:pPr algn="ctr">
               <a:defRPr sz="1000" b="0">
                 <a:solidFill>
-                  <a:srgbClr val="B0BEC5"/>
+                  <a:srgbClr val="FFFFFF"/>
                 </a:solidFill>
                 <a:latin typeface="Meiryo"/>
               </a:defRPr>
@@ -21188,7 +21188,7 @@
         </p:nvSpPr>
         <p:spPr>
           <a:xfrm>
-            <a:off x="8412480" y="4315968"/>
+            <a:off x="7498079" y="4315968"/>
             <a:ext cx="1371600" cy="365760"/>
           </a:xfrm>
           <a:prstGeom prst="rect">
@@ -21303,7 +21303,7 @@
         </p:nvSpPr>
         <p:spPr>
           <a:xfrm>
-            <a:off x="6217920" y="4818888"/>
+            <a:off x="5303520" y="4818888"/>
             <a:ext cx="1371600" cy="365760"/>
           </a:xfrm>
           <a:prstGeom prst="rect">

--- a/assets/TAROS_Investor_Pitch_Revised.pptx
+++ b/assets/TAROS_Investor_Pitch_Revised.pptx
@@ -3330,7 +3330,7 @@
               </a:defRPr>
             </a:pPr>
             <a:r>
-              <a:t>7-in-1 Quantum Platform  |  完全室温・109W  |  1,350万〜2,550万円</a:t>
+              <a:t>7-in-1 Quantum Platform  |  完全室温・104-112W  |  1,350万〜2,550万円</a:t>
             </a:r>
           </a:p>
         </p:txBody>
@@ -3714,7 +3714,7 @@
             <a:avLst/>
           </a:prstGeom>
           <a:solidFill>
-            <a:srgbClr val="66BB6A"/>
+            <a:srgbClr val="2E7D32"/>
           </a:solidFill>
           <a:ln>
             <a:noFill/>
@@ -3987,7 +3987,7 @@
             <a:avLst/>
           </a:prstGeom>
           <a:solidFill>
-            <a:srgbClr val="66BB6A"/>
+            <a:srgbClr val="2E7D32"/>
           </a:solidFill>
           <a:ln>
             <a:noFill/>
@@ -4109,7 +4109,7 @@
             <a:avLst/>
           </a:prstGeom>
           <a:solidFill>
-            <a:srgbClr val="66BB6A"/>
+            <a:srgbClr val="2E7D32"/>
           </a:solidFill>
           <a:ln>
             <a:noFill/>
@@ -4382,7 +4382,7 @@
             <a:avLst/>
           </a:prstGeom>
           <a:solidFill>
-            <a:srgbClr val="66BB6A"/>
+            <a:srgbClr val="2E7D32"/>
           </a:solidFill>
           <a:ln>
             <a:noFill/>
@@ -4504,7 +4504,7 @@
             <a:avLst/>
           </a:prstGeom>
           <a:solidFill>
-            <a:srgbClr val="66BB6A"/>
+            <a:srgbClr val="2E7D32"/>
           </a:solidFill>
           <a:ln>
             <a:noFill/>
@@ -4777,7 +4777,7 @@
             <a:avLst/>
           </a:prstGeom>
           <a:solidFill>
-            <a:srgbClr val="66BB6A"/>
+            <a:srgbClr val="2E7D32"/>
           </a:solidFill>
           <a:ln>
             <a:noFill/>
@@ -4899,7 +4899,7 @@
             <a:avLst/>
           </a:prstGeom>
           <a:solidFill>
-            <a:srgbClr val="66BB6A"/>
+            <a:srgbClr val="2E7D32"/>
           </a:solidFill>
           <a:ln>
             <a:noFill/>
@@ -5172,7 +5172,7 @@
             <a:avLst/>
           </a:prstGeom>
           <a:solidFill>
-            <a:srgbClr val="66BB6A"/>
+            <a:srgbClr val="2E7D32"/>
           </a:solidFill>
           <a:ln>
             <a:noFill/>
@@ -7229,7 +7229,7 @@
             <a:avLst/>
           </a:prstGeom>
           <a:solidFill>
-            <a:srgbClr val="66BB6A"/>
+            <a:srgbClr val="2E7D32"/>
           </a:solidFill>
           <a:ln>
             <a:noFill/>
@@ -7323,7 +7323,7 @@
           <a:lstStyle/>
           <a:p>
             <a:pPr algn="ctr">
-              <a:defRPr sz="2200" b="1">
+              <a:defRPr sz="2600" b="1">
                 <a:solidFill>
                   <a:srgbClr val="66BB6A"/>
                 </a:solidFill>
@@ -7331,7 +7331,7 @@
               </a:defRPr>
             </a:pPr>
             <a:r>
-              <a:t>81-90%</a:t>
+              <a:t>81%</a:t>
             </a:r>
           </a:p>
         </p:txBody>
@@ -7475,7 +7475,7 @@
               </a:defRPr>
             </a:pPr>
             <a:r>
-              <a:t>CV pure 81% / CV+QD 90%</a:t>
+              <a:t>Level A 63% / Level B以上 81%</a:t>
             </a:r>
           </a:p>
         </p:txBody>
@@ -7511,7 +7511,7 @@
               </a:defRPr>
             </a:pPr>
             <a:r>
-              <a:t>CV不成立時は DV-FBQC 方式 (28kg / 2.1kW / 約6,480万円)</a:t>
+              <a:t>CV不成立時は DV-FBQC 方式 (本体28kg+冷却23kg / 2.1kW / 約6,480万円)</a:t>
             </a:r>
             <a:br/>
             <a:r>
@@ -8362,7 +8362,7 @@
             <a:pPr algn="ctr">
               <a:defRPr sz="900" b="0">
                 <a:solidFill>
-                  <a:srgbClr val="B0BEC5"/>
+                  <a:srgbClr val="FFFFFF"/>
                 </a:solidFill>
                 <a:latin typeface="Meiryo"/>
               </a:defRPr>
@@ -8434,7 +8434,7 @@
             <a:pPr algn="ctr">
               <a:defRPr sz="900" b="0">
                 <a:solidFill>
-                  <a:srgbClr val="B0BEC5"/>
+                  <a:srgbClr val="FFFFFF"/>
                 </a:solidFill>
                 <a:latin typeface="Meiryo"/>
               </a:defRPr>
@@ -10224,7 +10224,7 @@
               </a:defRPr>
             </a:pPr>
             <a:r>
-              <a:t>投資論理: 失敗時上限 4.6億円 (Phase -1)、成功時 ARR 36億円 (Y4) — リスク調整後リターン ~3.5倍</a:t>
+              <a:t>投資論理: 段階投資で失敗損失を限定 (最大 4.6億円)。成功時 Y4 ARR 36億円 / 総開発費 8.7億円</a:t>
             </a:r>
           </a:p>
         </p:txBody>
@@ -13567,7 +13567,7 @@
             <a:avLst/>
           </a:prstGeom>
           <a:solidFill>
-            <a:srgbClr val="66BB6A"/>
+            <a:srgbClr val="2E7D32"/>
           </a:solidFill>
           <a:ln>
             <a:noFill/>
@@ -13844,7 +13844,7 @@
             <a:avLst/>
           </a:prstGeom>
           <a:solidFill>
-            <a:srgbClr val="66BB6A"/>
+            <a:srgbClr val="2E7D32"/>
           </a:solidFill>
           <a:ln>
             <a:noFill/>
@@ -14121,7 +14121,7 @@
             <a:avLst/>
           </a:prstGeom>
           <a:solidFill>
-            <a:srgbClr val="66BB6A"/>
+            <a:srgbClr val="2E7D32"/>
           </a:solidFill>
           <a:ln>
             <a:noFill/>
@@ -14398,7 +14398,7 @@
             <a:avLst/>
           </a:prstGeom>
           <a:solidFill>
-            <a:srgbClr val="66BB6A"/>
+            <a:srgbClr val="2E7D32"/>
           </a:solidFill>
           <a:ln>
             <a:noFill/>
@@ -14675,7 +14675,7 @@
             <a:avLst/>
           </a:prstGeom>
           <a:solidFill>
-            <a:srgbClr val="66BB6A"/>
+            <a:srgbClr val="2E7D32"/>
           </a:solidFill>
           <a:ln>
             <a:noFill/>
@@ -14948,7 +14948,7 @@
             <a:avLst/>
           </a:prstGeom>
           <a:solidFill>
-            <a:srgbClr val="66BB6A"/>
+            <a:srgbClr val="2E7D32"/>
           </a:solidFill>
           <a:ln>
             <a:noFill/>
@@ -17777,7 +17777,7 @@
               </a:defRPr>
             </a:pPr>
             <a:r>
-              <a:t>Soft-info MWPM 閾値確立</a:t>
+              <a:t>Soft-info MWPM 閾値報告</a:t>
             </a:r>
           </a:p>
         </p:txBody>
@@ -17813,7 +17813,7 @@
               </a:defRPr>
             </a:pPr>
             <a:r>
-              <a:t>Noh-Chamberland 2022 で1.5%確定</a:t>
+              <a:t>Noh-Chamberland 2022 で p_th≈1.5%</a:t>
             </a:r>
           </a:p>
         </p:txBody>
@@ -20428,7 +20428,7 @@
           <a:lstStyle/>
           <a:p>
             <a:pPr algn="ctr">
-              <a:defRPr sz="900" b="0">
+              <a:defRPr sz="1000" b="0">
                 <a:solidFill>
                   <a:srgbClr val="757575"/>
                 </a:solidFill>
@@ -20583,7 +20583,7 @@
           <a:lstStyle/>
           <a:p>
             <a:pPr algn="ctr">
-              <a:defRPr sz="900" b="0">
+              <a:defRPr sz="1000" b="0">
                 <a:solidFill>
                   <a:srgbClr val="757575"/>
                 </a:solidFill>
@@ -20738,7 +20738,7 @@
           <a:lstStyle/>
           <a:p>
             <a:pPr algn="ctr">
-              <a:defRPr sz="900" b="0">
+              <a:defRPr sz="1000" b="0">
                 <a:solidFill>
                   <a:srgbClr val="757575"/>
                 </a:solidFill>
@@ -20893,7 +20893,7 @@
           <a:lstStyle/>
           <a:p>
             <a:pPr algn="ctr">
-              <a:defRPr sz="900" b="0">
+              <a:defRPr sz="1000" b="0">
                 <a:solidFill>
                   <a:srgbClr val="757575"/>
                 </a:solidFill>
@@ -21048,7 +21048,7 @@
           <a:lstStyle/>
           <a:p>
             <a:pPr algn="ctr">
-              <a:defRPr sz="900" b="0">
+              <a:defRPr sz="1000" b="0">
                 <a:solidFill>
                   <a:srgbClr val="FFFFFF"/>
                 </a:solidFill>
@@ -21116,7 +21116,7 @@
             <a:avLst/>
           </a:prstGeom>
           <a:solidFill>
-            <a:srgbClr val="66BB6A"/>
+            <a:srgbClr val="2E7D32"/>
           </a:solidFill>
           <a:ln>
             <a:noFill/>
@@ -23084,7 +23084,7 @@
             <a:pPr algn="ctr">
               <a:defRPr sz="900" b="1">
                 <a:solidFill>
-                  <a:srgbClr val="FFFFFF"/>
+                  <a:srgbClr val="212121"/>
                 </a:solidFill>
                 <a:latin typeface="Meiryo"/>
               </a:defRPr>

--- a/assets/TAROS_Investor_Pitch_Revised.pptx
+++ b/assets/TAROS_Investor_Pitch_Revised.pptx
@@ -3164,7 +3164,7 @@
         <p:spPr>
           <a:xfrm>
             <a:off x="868680" y="731520"/>
-            <a:ext cx="9144000" cy="1371600"/>
+            <a:ext cx="9144000" cy="1645920"/>
           </a:xfrm>
           <a:prstGeom prst="rect">
             <a:avLst/>
@@ -7403,7 +7403,7 @@
               </a:defRPr>
             </a:pPr>
             <a:r>
-              <a:t>FTQC実現確率</a:t>
+              <a:t>成功確率</a:t>
             </a:r>
           </a:p>
         </p:txBody>
@@ -9541,7 +9541,7 @@
               </a:defRPr>
             </a:pPr>
             <a:r>
-              <a:t>A R R   成 長 予 測</a:t>
+              <a:t>A R R   成 長 予 測（計画値）</a:t>
             </a:r>
           </a:p>
         </p:txBody>
@@ -9597,7 +9597,7 @@
         </p:nvSpPr>
         <p:spPr>
           <a:xfrm>
-            <a:off x="4389120" y="4800600"/>
+            <a:off x="4389120" y="4389120"/>
             <a:ext cx="1463040" cy="365760"/>
           </a:xfrm>
           <a:prstGeom prst="rect">
@@ -10152,7 +10152,43 @@
       </p:sp>
       <p:sp>
         <p:nvSpPr>
-          <p:cNvPr id="33" name="Rectangle 32"/>
+          <p:cNvPr id="33" name="TextBox 32"/>
+          <p:cNvSpPr txBox="1"/>
+          <p:nvPr/>
+        </p:nvSpPr>
+        <p:spPr>
+          <a:xfrm>
+            <a:off x="4389120" y="5532120"/>
+            <a:ext cx="7315200" cy="228600"/>
+          </a:xfrm>
+          <a:prstGeom prst="rect">
+            <a:avLst/>
+          </a:prstGeom>
+          <a:noFill/>
+        </p:spPr>
+        <p:txBody>
+          <a:bodyPr wrap="square">
+            <a:spAutoFit/>
+          </a:bodyPr>
+          <a:lstStyle/>
+          <a:p>
+            <a:pPr algn="l">
+              <a:defRPr sz="900" b="0">
+                <a:solidFill>
+                  <a:srgbClr val="757575"/>
+                </a:solidFill>
+                <a:latin typeface="Meiryo"/>
+              </a:defRPr>
+            </a:pPr>
+            <a:r>
+              <a:t>※ Y1-Y4 = 製品出荷開始後1-4年（プロジェクト開始後約4-7年）</a:t>
+            </a:r>
+          </a:p>
+        </p:txBody>
+      </p:sp>
+      <p:sp>
+        <p:nvSpPr>
+          <p:cNvPr id="34" name="Rectangle 33"/>
           <p:cNvSpPr/>
           <p:nvPr/>
         </p:nvSpPr>
@@ -10195,7 +10231,7 @@
       </p:sp>
       <p:sp>
         <p:nvSpPr>
-          <p:cNvPr id="34" name="TextBox 33"/>
+          <p:cNvPr id="35" name="TextBox 34"/>
           <p:cNvSpPr txBox="1"/>
           <p:nvPr/>
         </p:nvSpPr>
@@ -11190,7 +11226,7 @@
               </a:defRPr>
             </a:pPr>
             <a:r>
-              <a:t>QFT: O(N×d³)→O(d³) 10⁶×高速化</a:t>
+              <a:t>QFT: O(N×d³)→O(d³) 理論的高速化</a:t>
             </a:r>
             <a:br/>
             <a:r>
@@ -11678,7 +11714,7 @@
         <p:spPr>
           <a:xfrm>
             <a:off x="731520" y="2286000"/>
-            <a:ext cx="3749039" cy="731520"/>
+            <a:ext cx="3749039" cy="914400"/>
           </a:xfrm>
           <a:prstGeom prst="rect">
             <a:avLst/>
@@ -12574,7 +12610,7 @@
               </a:defRPr>
             </a:pPr>
             <a:r>
-              <a:t>約 8,300万円</a:t>
+              <a:t>約 7,820万円</a:t>
             </a:r>
           </a:p>
         </p:txBody>
@@ -21354,7 +21390,7 @@
           <a:lstStyle/>
           <a:p>
             <a:pPr algn="l">
-              <a:defRPr sz="1200" b="0">
+              <a:defRPr sz="1100" b="0">
                 <a:solidFill>
                   <a:srgbClr val="212121"/>
                 </a:solidFill>
@@ -21362,7 +21398,7 @@
               </a:defRPr>
             </a:pPr>
             <a:r>
-              <a:t>→ Phase 2+ PIC 余裕 +1.8dB — 製品要件 p_L ≈ 3.3×10⁻⁴ を達成</a:t>
+              <a:t>→ Phase 2+ PIC 余裕 +1.8dB — 製品要件 p_L ≈ 3.3×10⁻⁴ を達成 †Δ・RIN込み推定 5-9×10⁻⁴, Phase -1で確定</a:t>
             </a:r>
           </a:p>
         </p:txBody>

--- a/assets/TAROS_Investor_Pitch_Revised.pptx
+++ b/assets/TAROS_Investor_Pitch_Revised.pptx
@@ -9541,14 +9541,50 @@
               </a:defRPr>
             </a:pPr>
             <a:r>
-              <a:t>A R R   成 長 予 測（計画値）</a:t>
-            </a:r>
-          </a:p>
-        </p:txBody>
-      </p:sp>
-      <p:sp>
-        <p:nvSpPr>
-          <p:cNvPr id="17" name="Rectangle 16"/>
+              <a:t>A R R   成 長 予 測（計画値・出荷開始後1〜4年）</a:t>
+            </a:r>
+          </a:p>
+        </p:txBody>
+      </p:sp>
+      <p:sp>
+        <p:nvSpPr>
+          <p:cNvPr id="17" name="TextBox 16"/>
+          <p:cNvSpPr txBox="1"/>
+          <p:nvPr/>
+        </p:nvSpPr>
+        <p:spPr>
+          <a:xfrm>
+            <a:off x="4389120" y="1920240"/>
+            <a:ext cx="7315200" cy="228600"/>
+          </a:xfrm>
+          <a:prstGeom prst="rect">
+            <a:avLst/>
+          </a:prstGeom>
+          <a:noFill/>
+        </p:spPr>
+        <p:txBody>
+          <a:bodyPr wrap="square">
+            <a:spAutoFit/>
+          </a:bodyPr>
+          <a:lstStyle/>
+          <a:p>
+            <a:pPr algn="l">
+              <a:defRPr sz="900" b="0">
+                <a:solidFill>
+                  <a:srgbClr val="757575"/>
+                </a:solidFill>
+                <a:latin typeface="Meiryo"/>
+              </a:defRPr>
+            </a:pPr>
+            <a:r>
+              <a:t>※出荷Y1 = 開始後約4年目（Phase -1〜1 完了後）</a:t>
+            </a:r>
+          </a:p>
+        </p:txBody>
+      </p:sp>
+      <p:sp>
+        <p:nvSpPr>
+          <p:cNvPr id="18" name="Rectangle 17"/>
           <p:cNvSpPr/>
           <p:nvPr/>
         </p:nvSpPr>
@@ -9591,7 +9627,7 @@
       </p:sp>
       <p:sp>
         <p:nvSpPr>
-          <p:cNvPr id="18" name="TextBox 17"/>
+          <p:cNvPr id="19" name="TextBox 18"/>
           <p:cNvSpPr txBox="1"/>
           <p:nvPr/>
         </p:nvSpPr>
@@ -9627,7 +9663,7 @@
       </p:sp>
       <p:sp>
         <p:nvSpPr>
-          <p:cNvPr id="19" name="TextBox 18"/>
+          <p:cNvPr id="20" name="TextBox 19"/>
           <p:cNvSpPr txBox="1"/>
           <p:nvPr/>
         </p:nvSpPr>
@@ -9656,14 +9692,14 @@
               </a:defRPr>
             </a:pPr>
             <a:r>
-              <a:t>Y1</a:t>
-            </a:r>
-          </a:p>
-        </p:txBody>
-      </p:sp>
-      <p:sp>
-        <p:nvSpPr>
-          <p:cNvPr id="20" name="TextBox 19"/>
+              <a:t>出荷Y1</a:t>
+            </a:r>
+          </a:p>
+        </p:txBody>
+      </p:sp>
+      <p:sp>
+        <p:nvSpPr>
+          <p:cNvPr id="21" name="TextBox 20"/>
           <p:cNvSpPr txBox="1"/>
           <p:nvPr/>
         </p:nvSpPr>
@@ -9699,7 +9735,7 @@
       </p:sp>
       <p:sp>
         <p:nvSpPr>
-          <p:cNvPr id="21" name="Rectangle 20"/>
+          <p:cNvPr id="22" name="Rectangle 21"/>
           <p:cNvSpPr/>
           <p:nvPr/>
         </p:nvSpPr>
@@ -9742,7 +9778,7 @@
       </p:sp>
       <p:sp>
         <p:nvSpPr>
-          <p:cNvPr id="22" name="TextBox 21"/>
+          <p:cNvPr id="23" name="TextBox 22"/>
           <p:cNvSpPr txBox="1"/>
           <p:nvPr/>
         </p:nvSpPr>
@@ -9778,7 +9814,7 @@
       </p:sp>
       <p:sp>
         <p:nvSpPr>
-          <p:cNvPr id="23" name="TextBox 22"/>
+          <p:cNvPr id="24" name="TextBox 23"/>
           <p:cNvSpPr txBox="1"/>
           <p:nvPr/>
         </p:nvSpPr>
@@ -9807,14 +9843,14 @@
               </a:defRPr>
             </a:pPr>
             <a:r>
-              <a:t>Y2</a:t>
-            </a:r>
-          </a:p>
-        </p:txBody>
-      </p:sp>
-      <p:sp>
-        <p:nvSpPr>
-          <p:cNvPr id="24" name="TextBox 23"/>
+              <a:t>出荷Y2</a:t>
+            </a:r>
+          </a:p>
+        </p:txBody>
+      </p:sp>
+      <p:sp>
+        <p:nvSpPr>
+          <p:cNvPr id="25" name="TextBox 24"/>
           <p:cNvSpPr txBox="1"/>
           <p:nvPr/>
         </p:nvSpPr>
@@ -9850,7 +9886,7 @@
       </p:sp>
       <p:sp>
         <p:nvSpPr>
-          <p:cNvPr id="25" name="Rectangle 24"/>
+          <p:cNvPr id="26" name="Rectangle 25"/>
           <p:cNvSpPr/>
           <p:nvPr/>
         </p:nvSpPr>
@@ -9893,7 +9929,7 @@
       </p:sp>
       <p:sp>
         <p:nvSpPr>
-          <p:cNvPr id="26" name="TextBox 25"/>
+          <p:cNvPr id="27" name="TextBox 26"/>
           <p:cNvSpPr txBox="1"/>
           <p:nvPr/>
         </p:nvSpPr>
@@ -9929,7 +9965,7 @@
       </p:sp>
       <p:sp>
         <p:nvSpPr>
-          <p:cNvPr id="27" name="TextBox 26"/>
+          <p:cNvPr id="28" name="TextBox 27"/>
           <p:cNvSpPr txBox="1"/>
           <p:nvPr/>
         </p:nvSpPr>
@@ -9958,14 +9994,14 @@
               </a:defRPr>
             </a:pPr>
             <a:r>
-              <a:t>Y3</a:t>
-            </a:r>
-          </a:p>
-        </p:txBody>
-      </p:sp>
-      <p:sp>
-        <p:nvSpPr>
-          <p:cNvPr id="28" name="TextBox 27"/>
+              <a:t>出荷Y3</a:t>
+            </a:r>
+          </a:p>
+        </p:txBody>
+      </p:sp>
+      <p:sp>
+        <p:nvSpPr>
+          <p:cNvPr id="29" name="TextBox 28"/>
           <p:cNvSpPr txBox="1"/>
           <p:nvPr/>
         </p:nvSpPr>
@@ -10001,7 +10037,7 @@
       </p:sp>
       <p:sp>
         <p:nvSpPr>
-          <p:cNvPr id="29" name="Rectangle 28"/>
+          <p:cNvPr id="30" name="Rectangle 29"/>
           <p:cNvSpPr/>
           <p:nvPr/>
         </p:nvSpPr>
@@ -10044,7 +10080,7 @@
       </p:sp>
       <p:sp>
         <p:nvSpPr>
-          <p:cNvPr id="30" name="TextBox 29"/>
+          <p:cNvPr id="31" name="TextBox 30"/>
           <p:cNvSpPr txBox="1"/>
           <p:nvPr/>
         </p:nvSpPr>
@@ -10080,7 +10116,7 @@
       </p:sp>
       <p:sp>
         <p:nvSpPr>
-          <p:cNvPr id="31" name="TextBox 30"/>
+          <p:cNvPr id="32" name="TextBox 31"/>
           <p:cNvSpPr txBox="1"/>
           <p:nvPr/>
         </p:nvSpPr>
@@ -10109,14 +10145,14 @@
               </a:defRPr>
             </a:pPr>
             <a:r>
-              <a:t>Y4</a:t>
-            </a:r>
-          </a:p>
-        </p:txBody>
-      </p:sp>
-      <p:sp>
-        <p:nvSpPr>
-          <p:cNvPr id="32" name="TextBox 31"/>
+              <a:t>出荷Y4</a:t>
+            </a:r>
+          </a:p>
+        </p:txBody>
+      </p:sp>
+      <p:sp>
+        <p:nvSpPr>
+          <p:cNvPr id="33" name="TextBox 32"/>
           <p:cNvSpPr txBox="1"/>
           <p:nvPr/>
         </p:nvSpPr>
@@ -10152,7 +10188,7 @@
       </p:sp>
       <p:sp>
         <p:nvSpPr>
-          <p:cNvPr id="33" name="TextBox 32"/>
+          <p:cNvPr id="34" name="TextBox 33"/>
           <p:cNvSpPr txBox="1"/>
           <p:nvPr/>
         </p:nvSpPr>
@@ -10188,7 +10224,7 @@
       </p:sp>
       <p:sp>
         <p:nvSpPr>
-          <p:cNvPr id="34" name="Rectangle 33"/>
+          <p:cNvPr id="35" name="Rectangle 34"/>
           <p:cNvSpPr/>
           <p:nvPr/>
         </p:nvSpPr>
@@ -10231,7 +10267,7 @@
       </p:sp>
       <p:sp>
         <p:nvSpPr>
-          <p:cNvPr id="35" name="TextBox 34"/>
+          <p:cNvPr id="36" name="TextBox 35"/>
           <p:cNvSpPr txBox="1"/>
           <p:nvPr/>
         </p:nvSpPr>

--- a/assets/TAROS_Investor_Pitch_Revised.pptx
+++ b/assets/TAROS_Investor_Pitch_Revised.pptx
@@ -6522,7 +6522,7 @@
               </a:defRPr>
             </a:pPr>
             <a:r>
-              <a:t>最重要マイルストーン: G-EXP1 (開始後2ヶ月) — 約800万円で Level A 成功確率を 25-35% → 50%超</a:t>
+              <a:t>最重要マイルストーン: G-EXP1 (開始後2ヶ月) — 約800万円で Level A 成功確率を 35%(保守的) → 50%超</a:t>
             </a:r>
           </a:p>
         </p:txBody>
@@ -9548,50 +9548,14 @@
       </p:sp>
       <p:sp>
         <p:nvSpPr>
-          <p:cNvPr id="17" name="TextBox 16"/>
-          <p:cNvSpPr txBox="1"/>
-          <p:nvPr/>
-        </p:nvSpPr>
-        <p:spPr>
-          <a:xfrm>
-            <a:off x="4389120" y="1920240"/>
-            <a:ext cx="7315200" cy="228600"/>
-          </a:xfrm>
-          <a:prstGeom prst="rect">
-            <a:avLst/>
-          </a:prstGeom>
-          <a:noFill/>
-        </p:spPr>
-        <p:txBody>
-          <a:bodyPr wrap="square">
-            <a:spAutoFit/>
-          </a:bodyPr>
-          <a:lstStyle/>
-          <a:p>
-            <a:pPr algn="l">
-              <a:defRPr sz="900" b="0">
-                <a:solidFill>
-                  <a:srgbClr val="757575"/>
-                </a:solidFill>
-                <a:latin typeface="Meiryo"/>
-              </a:defRPr>
-            </a:pPr>
-            <a:r>
-              <a:t>※出荷Y1 = 開始後約4年目（Phase -1〜1 完了後）</a:t>
-            </a:r>
-          </a:p>
-        </p:txBody>
-      </p:sp>
-      <p:sp>
-        <p:nvSpPr>
-          <p:cNvPr id="18" name="Rectangle 17"/>
+          <p:cNvPr id="17" name="Rectangle 16"/>
           <p:cNvSpPr/>
           <p:nvPr/>
         </p:nvSpPr>
         <p:spPr>
           <a:xfrm>
-            <a:off x="4389120" y="4709160"/>
-            <a:ext cx="1463040" cy="320040"/>
+            <a:off x="4389120" y="4754880"/>
+            <a:ext cx="1463040" cy="274320"/>
           </a:xfrm>
           <a:prstGeom prst="rect">
             <a:avLst/>
@@ -9627,13 +9591,13 @@
       </p:sp>
       <p:sp>
         <p:nvSpPr>
-          <p:cNvPr id="19" name="TextBox 18"/>
-          <p:cNvSpPr txBox="1"/>
-          <p:nvPr/>
-        </p:nvSpPr>
-        <p:spPr>
-          <a:xfrm>
-            <a:off x="4389120" y="4389120"/>
+          <p:cNvPr id="18" name="TextBox 17"/>
+          <p:cNvSpPr txBox="1"/>
+          <p:nvPr/>
+        </p:nvSpPr>
+        <p:spPr>
+          <a:xfrm>
+            <a:off x="4389120" y="4434840"/>
             <a:ext cx="1463040" cy="365760"/>
           </a:xfrm>
           <a:prstGeom prst="rect">
@@ -9663,7 +9627,7 @@
       </p:sp>
       <p:sp>
         <p:nvSpPr>
-          <p:cNvPr id="20" name="TextBox 19"/>
+          <p:cNvPr id="19" name="TextBox 18"/>
           <p:cNvSpPr txBox="1"/>
           <p:nvPr/>
         </p:nvSpPr>
@@ -9699,7 +9663,7 @@
       </p:sp>
       <p:sp>
         <p:nvSpPr>
-          <p:cNvPr id="21" name="TextBox 20"/>
+          <p:cNvPr id="20" name="TextBox 19"/>
           <p:cNvSpPr txBox="1"/>
           <p:nvPr/>
         </p:nvSpPr>
@@ -9735,14 +9699,14 @@
       </p:sp>
       <p:sp>
         <p:nvSpPr>
-          <p:cNvPr id="22" name="Rectangle 21"/>
+          <p:cNvPr id="21" name="Rectangle 20"/>
           <p:cNvSpPr/>
           <p:nvPr/>
         </p:nvSpPr>
         <p:spPr>
           <a:xfrm>
-            <a:off x="6126480" y="4229100"/>
-            <a:ext cx="1463040" cy="800100"/>
+            <a:off x="6126480" y="4343400"/>
+            <a:ext cx="1463040" cy="685800"/>
           </a:xfrm>
           <a:prstGeom prst="rect">
             <a:avLst/>
@@ -9778,13 +9742,13 @@
       </p:sp>
       <p:sp>
         <p:nvSpPr>
-          <p:cNvPr id="23" name="TextBox 22"/>
-          <p:cNvSpPr txBox="1"/>
-          <p:nvPr/>
-        </p:nvSpPr>
-        <p:spPr>
-          <a:xfrm>
-            <a:off x="6126480" y="4320540"/>
+          <p:cNvPr id="22" name="TextBox 21"/>
+          <p:cNvSpPr txBox="1"/>
+          <p:nvPr/>
+        </p:nvSpPr>
+        <p:spPr>
+          <a:xfrm>
+            <a:off x="6126480" y="4434840"/>
             <a:ext cx="1463040" cy="365760"/>
           </a:xfrm>
           <a:prstGeom prst="rect">
@@ -9814,7 +9778,7 @@
       </p:sp>
       <p:sp>
         <p:nvSpPr>
-          <p:cNvPr id="24" name="TextBox 23"/>
+          <p:cNvPr id="23" name="TextBox 22"/>
           <p:cNvSpPr txBox="1"/>
           <p:nvPr/>
         </p:nvSpPr>
@@ -9850,7 +9814,7 @@
       </p:sp>
       <p:sp>
         <p:nvSpPr>
-          <p:cNvPr id="25" name="TextBox 24"/>
+          <p:cNvPr id="24" name="TextBox 23"/>
           <p:cNvSpPr txBox="1"/>
           <p:nvPr/>
         </p:nvSpPr>
@@ -9886,14 +9850,14 @@
       </p:sp>
       <p:sp>
         <p:nvSpPr>
-          <p:cNvPr id="26" name="Rectangle 25"/>
+          <p:cNvPr id="25" name="Rectangle 24"/>
           <p:cNvSpPr/>
           <p:nvPr/>
         </p:nvSpPr>
         <p:spPr>
           <a:xfrm>
-            <a:off x="7863840" y="3429000"/>
-            <a:ext cx="1463040" cy="1600200"/>
+            <a:off x="7863840" y="3657600"/>
+            <a:ext cx="1463040" cy="1371600"/>
           </a:xfrm>
           <a:prstGeom prst="rect">
             <a:avLst/>
@@ -9929,13 +9893,13 @@
       </p:sp>
       <p:sp>
         <p:nvSpPr>
-          <p:cNvPr id="27" name="TextBox 26"/>
-          <p:cNvSpPr txBox="1"/>
-          <p:nvPr/>
-        </p:nvSpPr>
-        <p:spPr>
-          <a:xfrm>
-            <a:off x="7863840" y="3520440"/>
+          <p:cNvPr id="26" name="TextBox 25"/>
+          <p:cNvSpPr txBox="1"/>
+          <p:nvPr/>
+        </p:nvSpPr>
+        <p:spPr>
+          <a:xfrm>
+            <a:off x="7863840" y="3749039"/>
             <a:ext cx="1463040" cy="365760"/>
           </a:xfrm>
           <a:prstGeom prst="rect">
@@ -9965,7 +9929,7 @@
       </p:sp>
       <p:sp>
         <p:nvSpPr>
-          <p:cNvPr id="28" name="TextBox 27"/>
+          <p:cNvPr id="27" name="TextBox 26"/>
           <p:cNvSpPr txBox="1"/>
           <p:nvPr/>
         </p:nvSpPr>
@@ -10001,7 +9965,7 @@
       </p:sp>
       <p:sp>
         <p:nvSpPr>
-          <p:cNvPr id="29" name="TextBox 28"/>
+          <p:cNvPr id="28" name="TextBox 27"/>
           <p:cNvSpPr txBox="1"/>
           <p:nvPr/>
         </p:nvSpPr>
@@ -10037,14 +10001,14 @@
       </p:sp>
       <p:sp>
         <p:nvSpPr>
-          <p:cNvPr id="30" name="Rectangle 29"/>
+          <p:cNvPr id="29" name="Rectangle 28"/>
           <p:cNvSpPr/>
           <p:nvPr/>
         </p:nvSpPr>
         <p:spPr>
           <a:xfrm>
-            <a:off x="9601200" y="1828800"/>
-            <a:ext cx="1463040" cy="3200400"/>
+            <a:off x="9601200" y="2286000"/>
+            <a:ext cx="1463040" cy="2743200"/>
           </a:xfrm>
           <a:prstGeom prst="rect">
             <a:avLst/>
@@ -10080,13 +10044,13 @@
       </p:sp>
       <p:sp>
         <p:nvSpPr>
-          <p:cNvPr id="31" name="TextBox 30"/>
-          <p:cNvSpPr txBox="1"/>
-          <p:nvPr/>
-        </p:nvSpPr>
-        <p:spPr>
-          <a:xfrm>
-            <a:off x="9601200" y="1920240"/>
+          <p:cNvPr id="30" name="TextBox 29"/>
+          <p:cNvSpPr txBox="1"/>
+          <p:nvPr/>
+        </p:nvSpPr>
+        <p:spPr>
+          <a:xfrm>
+            <a:off x="9601200" y="2377440"/>
             <a:ext cx="1463040" cy="365760"/>
           </a:xfrm>
           <a:prstGeom prst="rect">
@@ -10116,7 +10080,7 @@
       </p:sp>
       <p:sp>
         <p:nvSpPr>
-          <p:cNvPr id="32" name="TextBox 31"/>
+          <p:cNvPr id="31" name="TextBox 30"/>
           <p:cNvSpPr txBox="1"/>
           <p:nvPr/>
         </p:nvSpPr>
@@ -10152,7 +10116,7 @@
       </p:sp>
       <p:sp>
         <p:nvSpPr>
-          <p:cNvPr id="33" name="TextBox 32"/>
+          <p:cNvPr id="32" name="TextBox 31"/>
           <p:cNvSpPr txBox="1"/>
           <p:nvPr/>
         </p:nvSpPr>
@@ -10188,13 +10152,13 @@
       </p:sp>
       <p:sp>
         <p:nvSpPr>
-          <p:cNvPr id="34" name="TextBox 33"/>
-          <p:cNvSpPr txBox="1"/>
-          <p:nvPr/>
-        </p:nvSpPr>
-        <p:spPr>
-          <a:xfrm>
-            <a:off x="4389120" y="5532120"/>
+          <p:cNvPr id="33" name="TextBox 32"/>
+          <p:cNvSpPr txBox="1"/>
+          <p:nvPr/>
+        </p:nvSpPr>
+        <p:spPr>
+          <a:xfrm>
+            <a:off x="4389120" y="5349240"/>
             <a:ext cx="7315200" cy="228600"/>
           </a:xfrm>
           <a:prstGeom prst="rect">
@@ -10224,7 +10188,7 @@
       </p:sp>
       <p:sp>
         <p:nvSpPr>
-          <p:cNvPr id="35" name="Rectangle 34"/>
+          <p:cNvPr id="34" name="Rectangle 33"/>
           <p:cNvSpPr/>
           <p:nvPr/>
         </p:nvSpPr>
@@ -10267,7 +10231,7 @@
       </p:sp>
       <p:sp>
         <p:nvSpPr>
-          <p:cNvPr id="36" name="TextBox 35"/>
+          <p:cNvPr id="35" name="TextBox 34"/>
           <p:cNvSpPr txBox="1"/>
           <p:nvPr/>
         </p:nvSpPr>
@@ -10296,7 +10260,7 @@
               </a:defRPr>
             </a:pPr>
             <a:r>
-              <a:t>投資論理: 段階投資で失敗損失を限定 (最大 4.6億円)。成功時 Y4 ARR 36億円 / 総開発費 8.7億円</a:t>
+              <a:t>投資論理: 段階投資で失敗損失を限定 (最大 4.6億円)。成功時 Y4 ARR 36億円 (粗利~12億円) / 総開発費 8.7億円</a:t>
             </a:r>
           </a:p>
         </p:txBody>
@@ -12780,7 +12744,7 @@
               </a:defRPr>
             </a:pPr>
             <a:r>
-              <a:t>室温 109W で動く誤り訂正型量子コンピュータを、世界の研究室・教室・企業 R&amp;D に。</a:t>
+              <a:t>室温 104-112W で動く誤り訂正型量子コンピュータを、世界の研究室・教室・企業 R&amp;D に。</a:t>
             </a:r>
             <a:br/>
             <a:r>
@@ -27045,7 +27009,7 @@
           <a:lstStyle/>
           <a:p>
             <a:pPr algn="ctr">
-              <a:defRPr sz="800" b="1">
+              <a:defRPr sz="900" b="1">
                 <a:solidFill>
                   <a:srgbClr val="FFFFFF"/>
                 </a:solidFill>

--- a/assets/TAROS_Investor_Pitch_Revised.pptx
+++ b/assets/TAROS_Investor_Pitch_Revised.pptx
@@ -10152,43 +10152,7 @@
       </p:sp>
       <p:sp>
         <p:nvSpPr>
-          <p:cNvPr id="33" name="TextBox 32"/>
-          <p:cNvSpPr txBox="1"/>
-          <p:nvPr/>
-        </p:nvSpPr>
-        <p:spPr>
-          <a:xfrm>
-            <a:off x="4389120" y="5349240"/>
-            <a:ext cx="7315200" cy="228600"/>
-          </a:xfrm>
-          <a:prstGeom prst="rect">
-            <a:avLst/>
-          </a:prstGeom>
-          <a:noFill/>
-        </p:spPr>
-        <p:txBody>
-          <a:bodyPr wrap="square">
-            <a:spAutoFit/>
-          </a:bodyPr>
-          <a:lstStyle/>
-          <a:p>
-            <a:pPr algn="l">
-              <a:defRPr sz="900" b="0">
-                <a:solidFill>
-                  <a:srgbClr val="757575"/>
-                </a:solidFill>
-                <a:latin typeface="Meiryo"/>
-              </a:defRPr>
-            </a:pPr>
-            <a:r>
-              <a:t>※ Y1-Y4 = 製品出荷開始後1-4年（プロジェクト開始後約4-7年）</a:t>
-            </a:r>
-          </a:p>
-        </p:txBody>
-      </p:sp>
-      <p:sp>
-        <p:nvSpPr>
-          <p:cNvPr id="34" name="Rectangle 33"/>
+          <p:cNvPr id="33" name="Rectangle 32"/>
           <p:cNvSpPr/>
           <p:nvPr/>
         </p:nvSpPr>
@@ -10231,7 +10195,7 @@
       </p:sp>
       <p:sp>
         <p:nvSpPr>
-          <p:cNvPr id="35" name="TextBox 34"/>
+          <p:cNvPr id="34" name="TextBox 33"/>
           <p:cNvSpPr txBox="1"/>
           <p:nvPr/>
         </p:nvSpPr>
